--- a/examples/research-seminar/static.pptx
+++ b/examples/research-seminar/static.pptx
@@ -2,17 +2,17 @@
 <file path=ppt/presentation.xml><?xml version="1.0" encoding="utf-8"?>
 <p:presentation xmlns:p="http://schemas.openxmlformats.org/presentationml/2006/main">
   <p:sldMasterIdLst>
-    <p:sldMasterId xmlns:r="http://schemas.openxmlformats.org/officeDocument/2006/relationships" id="2147483648" r:id="R4590934c0ec149b5"/>
+    <p:sldMasterId xmlns:r="http://schemas.openxmlformats.org/officeDocument/2006/relationships" id="2147483648" r:id="R7a6b9d531ab246a6"/>
   </p:sldMasterIdLst>
   <p:notesMasterIdLst>
-    <p:notesMasterId xmlns:r="http://schemas.openxmlformats.org/officeDocument/2006/relationships" r:id="R1b9b7002c5c046ed"/>
+    <p:notesMasterId xmlns:r="http://schemas.openxmlformats.org/officeDocument/2006/relationships" r:id="R9ab6643869fc4891"/>
   </p:notesMasterIdLst>
   <p:sldIdLst>
-    <p:sldId xmlns:r="http://schemas.openxmlformats.org/officeDocument/2006/relationships" id="256" r:id="R2c7841fadffa44e1"/>
-    <p:sldId xmlns:r="http://schemas.openxmlformats.org/officeDocument/2006/relationships" id="257" r:id="R685afb5cbe414d71"/>
-    <p:sldId xmlns:r="http://schemas.openxmlformats.org/officeDocument/2006/relationships" id="258" r:id="R4dbe39533c7a4017"/>
-    <p:sldId xmlns:r="http://schemas.openxmlformats.org/officeDocument/2006/relationships" id="259" r:id="R454765f936c2430c"/>
-    <p:sldId xmlns:r="http://schemas.openxmlformats.org/officeDocument/2006/relationships" id="260" r:id="Re315235f84774d42"/>
+    <p:sldId xmlns:r="http://schemas.openxmlformats.org/officeDocument/2006/relationships" id="256" r:id="R4d6fd4c1ab624a59"/>
+    <p:sldId xmlns:r="http://schemas.openxmlformats.org/officeDocument/2006/relationships" id="257" r:id="R1bf21b3b9c1e4c39"/>
+    <p:sldId xmlns:r="http://schemas.openxmlformats.org/officeDocument/2006/relationships" id="258" r:id="Rcef7c3c8fcbb4376"/>
+    <p:sldId xmlns:r="http://schemas.openxmlformats.org/officeDocument/2006/relationships" id="259" r:id="R230993b4db544639"/>
+    <p:sldId xmlns:r="http://schemas.openxmlformats.org/officeDocument/2006/relationships" id="260" r:id="Rba0056151366461f"/>
   </p:sldIdLst>
   <p:sldSz cx="12192000" cy="6858000"/>
   <p:notesSz cx="6858000" cy="9144000"/>
@@ -446,7 +446,7 @@
           <a:lstStyle xmlns:a="http://schemas.openxmlformats.org/drawingml/2006/main"/>
           <a:p xmlns:a="http://schemas.openxmlformats.org/drawingml/2006/main">
             <a:r>
-              <a:t>발표 시간 30초. 이 발표의 성능 수치는 모두 사용자가 제공한 가상 예시이다. 실제 실험 결과나 특정 데이터셋의 평가 결과가 아니다. 동일 장치·데이터에서 비교한다는 조건만 주어져 있다.</a:t>
+              <a:t>30 seconds. All performance values in this deck are fictional user-supplied examples. They are not empirical findings. A common device and dataset are assumed, but their identities are unspecified. The cover is AI-generated conceptual artwork, not a model architecture or a measurement.</a:t>
             </a:r>
           </a:p>
         </p:txBody>
@@ -516,7 +516,7 @@
           <a:lstStyle xmlns:a="http://schemas.openxmlformats.org/drawingml/2006/main"/>
           <a:p xmlns:a="http://schemas.openxmlformats.org/drawingml/2006/main">
             <a:r>
-              <a:t>발표 시간 90초. 교사 모델의 예측을 학생 모델의 학습에 활용하는 지식 증류와 수치 표현을 8비트 정수로 바꾸는 양자화를 개념적으로 설명한다. 학습 방법과 양자화 범위는 사용자에게서 제공받지 않았으므로 구체적인 손실함수, 비트 범위, PTQ/QAT를 단정하지 않는다. 첫 클릭에서 증류 단계, 둘째 클릭에서 INT8 단계를 설명한다. 출처: Hinton et al., Distilling the Knowledge in a Neural Network (2015), https://arxiv.org/abs/1503.02531 ; Jacob et al., Quantization and Training of Neural Networks for Efficient Integer-Arithmetic-Only Inference (2017), https://arxiv.org/abs/1712.05877 . 문헌의 결과 수치를 이 예시로 사용하지 않았다.</a:t>
+              <a:t>90 seconds. The teacher provides prediction knowledge for learning a smaller student; INT8 represents student numbers using 8-bit integers. Architecture, loss, quantization scope, and PTQ versus QAT are unspecified. Do not assume preservation of all teacher knowledge or claim a particular implementation. In the animated edition, reveal distillation on click 1 and INT8 on click 2. Concept sources: Hinton et al. (2015), https://arxiv.org/abs/1503.02531 ; Jacob et al. (2017), https://arxiv.org/abs/1712.05877 . No empirical results were taken from those papers.</a:t>
             </a:r>
           </a:p>
         </p:txBody>
@@ -586,7 +586,7 @@
           <a:lstStyle xmlns:a="http://schemas.openxmlformats.org/drawingml/2006/main"/>
           <a:p xmlns:a="http://schemas.openxmlformats.org/drawingml/2006/main">
             <a:r>
-              <a:t>발표 시간 60초. 출처: 사용자 제공 가상 데이터. baseline: 지연 120ms, F1 0.910, 모델 48MB. distilled: 72ms, 0.902, 18MB. int8: 54ms, 0.896, 12MB. 장치·데이터는 동일하다는 조건이다. 표본수·분산·실제 데이터셋명은 미제공. 지연 통계량의 정의, F1 집계 방법, 데이터 분할과 장치 사양도 알려지지 않았다. 단일 가상 요약값의 산술 비교이며 통계적 유의성, 신뢰구간, 일반화 성능을 주장하지 않는다.</a:t>
+              <a:t>60 seconds. Fictional values: baseline 120 ms / F1 0.910 / 48 MB; distilled 72 ms / 0.902 / 18 MB; int8 54 ms / 0.896 / 12 MB. The same device and data are assumed. Sample count, variance, dataset, split, device specifications, latency statistic, and F1 aggregation are unspecified. These are arithmetic comparisons, not evidence of statistical significance or generalization.</a:t>
             </a:r>
           </a:p>
         </p:txBody>
@@ -656,7 +656,7 @@
           <a:lstStyle xmlns:a="http://schemas.openxmlformats.org/drawingml/2006/main"/>
           <a:p xmlns:a="http://schemas.openxmlformats.org/drawingml/2006/main">
             <a:r>
-              <a:t>발표 시간 65초. 모든 수치는 사용자 제공 가상 데이터에서 계산했다. 전체 지연 감소율: (120−54)/120 = 55%. 전체 모델 크기 감소율: (48−12)/48 = 75%. F1 절대 차이: 0.896−0.910 = −0.014. 증류 단계 지연 감소율: (120−72)/120 = 40%, F1 차이 −0.008. 추가 양자화 단계: (72−54)/72 = 25%, F1 차이 −0.006. 단계별 감소율의 분모가 다르므로 40%와 25%를 더하지 않는다. F1 차이는 상대 감소율 또는 퍼센트포인트라는 표현 없이 절대 차이로 제시했다. 표본수와 분산이 없어 통계적 판단은 불가하다.</a:t>
+              <a:t>65 seconds. Overall latency reduction (120−54)/120 = 55%; size reduction (48−12)/48 = 75%; F1 absolute difference 0.896−0.910 = −0.014. Distillation latency reduction (120−72)/120 = 40%, F1 difference −0.008. Additional INT8 latency reduction (72−54)/72 = 25%, F1 difference −0.006. Do not add 40% and 25% because their denominators differ. No statistical inference is possible from the fictional summaries.</a:t>
             </a:r>
           </a:p>
         </p:txBody>
@@ -726,7 +726,7 @@
           <a:lstStyle xmlns:a="http://schemas.openxmlformats.org/drawingml/2006/main"/>
           <a:p xmlns:a="http://schemas.openxmlformats.org/drawingml/2006/main">
             <a:r>
-              <a:t>발표 시간 55초. 어느 모델이 최선이라고 단정하지 않는다. 사용 환경에 맞는 지연 한도와 허용 가능한 F1 저하부터 정해야 한다. 실제 데이터셋에서 반복 측정하여 분산과 실패 사례를 확인해야 한다. 현재 수치는 모두 가상이므로 실제 적용 성능이나 일반화 능력을 예측하지 않는다. 총 발표 시간 300초.</a:t>
+              <a:t>55 seconds. These fictional values illustrate an efficiency–F1 trade-off. They do not select a universally best model. Define the acceptable loss in F1 and the latency budget for the intended environment. Repeat measurements on actual data, estimate variation, and inspect failures by anomaly type. No real dataset or sample count was supplied, so no generalization claim is justified. Total presentation time: 300 seconds.</a:t>
             </a:r>
           </a:p>
         </p:txBody>
@@ -794,7 +794,7 @@
   </p:cSld>
   <p:clrMap bg1="lt1" tx1="dk1" bg2="lt2" tx2="dk2" accent1="accent1" accent2="accent2" accent3="accent3" accent4="accent4" accent5="accent5" accent6="accent6" hlink="hlink" folHlink="folHlink"/>
   <p:sldLayoutIdLst>
-    <p:sldLayoutId xmlns:r="http://schemas.openxmlformats.org/officeDocument/2006/relationships" id="2147483649" r:id="R1bfacca9030a41c9"/>
+    <p:sldLayoutId xmlns:r="http://schemas.openxmlformats.org/officeDocument/2006/relationships" id="2147483649" r:id="R9ea0fa9188ea4ca3"/>
   </p:sldLayoutIdLst>
   <p:txStyles>
     <p:titleStyle>
@@ -1334,11 +1334,11 @@
           <c:idx val="0"/>
           <c:order val="0"/>
           <c:tx>
-            <c:v>지연 (ms)</c:v>
+            <c:v>Latency (ms)</c:v>
           </c:tx>
           <c:spPr>
             <a:solidFill xmlns:a="http://schemas.openxmlformats.org/drawingml/2006/main">
-              <a:srgbClr val="007E80"/>
+              <a:srgbClr val="287D78"/>
             </a:solidFill>
           </c:spPr>
           <c:dPt>
@@ -1346,7 +1346,7 @@
             <c:invertIfNegative val="0"/>
             <c:spPr>
               <a:solidFill xmlns:a="http://schemas.openxmlformats.org/drawingml/2006/main">
-                <a:srgbClr val="7D9192"/>
+                <a:srgbClr val="9EADA5"/>
               </a:solidFill>
             </c:spPr>
           </c:dPt>
@@ -1355,7 +1355,7 @@
             <c:invertIfNegative val="0"/>
             <c:spPr>
               <a:solidFill xmlns:a="http://schemas.openxmlformats.org/drawingml/2006/main">
-                <a:srgbClr val="007E80"/>
+                <a:srgbClr val="639D90"/>
               </a:solidFill>
             </c:spPr>
           </c:dPt>
@@ -1364,7 +1364,7 @@
             <c:invertIfNegative val="0"/>
             <c:spPr>
               <a:solidFill xmlns:a="http://schemas.openxmlformats.org/drawingml/2006/main">
-                <a:srgbClr val="173F40"/>
+                <a:srgbClr val="287D78"/>
               </a:solidFill>
             </c:spPr>
           </c:dPt>
@@ -1410,13 +1410,13 @@
             <a:lstStyle xmlns:a="http://schemas.openxmlformats.org/drawingml/2006/main"/>
             <a:p xmlns:a="http://schemas.openxmlformats.org/drawingml/2006/main">
               <a:pPr>
-                <a:defRPr sz="2175" b="1">
+                <a:defRPr sz="2025">
                   <a:solidFill>
-                    <a:srgbClr val="173F40"/>
+                    <a:srgbClr val="1E302F"/>
                   </a:solidFill>
-                  <a:latin typeface="Malgun Gothic"/>
-                  <a:ea typeface="Malgun Gothic"/>
-                  <a:cs typeface="Malgun Gothic"/>
+                  <a:latin typeface="Segoe UI"/>
+                  <a:ea typeface="Segoe UI"/>
+                  <a:cs typeface="Segoe UI"/>
                 </a:defRPr>
               </a:pPr>
             </a:p>
@@ -1430,7 +1430,7 @@
           <c:showBubbleSize val="0"/>
           <c:showLeaderLines val="0"/>
         </c:dLbls>
-        <c:gapWidth val="90"/>
+        <c:gapWidth val="130"/>
         <c:axId val="48650112"/>
         <c:axId val="48672768"/>
       </c:barChart>
@@ -1447,7 +1447,7 @@
         <c:spPr>
           <a:ln xmlns:a="http://schemas.openxmlformats.org/drawingml/2006/main" w="9525">
             <a:solidFill>
-              <a:srgbClr val="456162"/>
+              <a:srgbClr val="CFD8D1"/>
             </a:solidFill>
           </a:ln>
         </c:spPr>
@@ -1456,13 +1456,13 @@
           <a:lstStyle xmlns:a="http://schemas.openxmlformats.org/drawingml/2006/main"/>
           <a:p xmlns:a="http://schemas.openxmlformats.org/drawingml/2006/main">
             <a:pPr>
-              <a:defRPr sz="1800">
-                <a:solidFill>
-                  <a:srgbClr val="173F40"/>
-                </a:solidFill>
-                <a:latin typeface="Malgun Gothic"/>
-                <a:ea typeface="Malgun Gothic"/>
-                <a:cs typeface="Malgun Gothic"/>
+              <a:defRPr sz="1725">
+                <a:solidFill>
+                  <a:srgbClr val="1E302F"/>
+                </a:solidFill>
+                <a:latin typeface="Segoe UI"/>
+                <a:ea typeface="Segoe UI"/>
+                <a:cs typeface="Segoe UI"/>
               </a:defRPr>
             </a:pPr>
           </a:p>
@@ -1480,9 +1480,9 @@
         <c:axPos val="l"/>
         <c:majorGridlines>
           <c:spPr>
-            <a:ln xmlns:a="http://schemas.openxmlformats.org/drawingml/2006/main" w="9525">
+            <a:ln xmlns:a="http://schemas.openxmlformats.org/drawingml/2006/main" w="6668">
               <a:solidFill>
-                <a:srgbClr val="D8E8E6"/>
+                <a:srgbClr val="CFD8D1"/>
               </a:solidFill>
             </a:ln>
           </c:spPr>
@@ -1503,13 +1503,13 @@
           <a:lstStyle xmlns:a="http://schemas.openxmlformats.org/drawingml/2006/main"/>
           <a:p xmlns:a="http://schemas.openxmlformats.org/drawingml/2006/main">
             <a:pPr>
-              <a:defRPr sz="1575">
-                <a:solidFill>
-                  <a:srgbClr val="456162"/>
-                </a:solidFill>
-                <a:latin typeface="Malgun Gothic"/>
-                <a:ea typeface="Malgun Gothic"/>
-                <a:cs typeface="Malgun Gothic"/>
+              <a:defRPr sz="1425">
+                <a:solidFill>
+                  <a:srgbClr val="586C68"/>
+                </a:solidFill>
+                <a:latin typeface="Segoe UI"/>
+                <a:ea typeface="Segoe UI"/>
+                <a:cs typeface="Segoe UI"/>
               </a:defRPr>
             </a:pPr>
           </a:p>
@@ -1520,7 +1520,7 @@
       </c:valAx>
       <c:spPr>
         <a:solidFill xmlns:a="http://schemas.openxmlformats.org/drawingml/2006/main">
-          <a:srgbClr val="F7FAF9"/>
+          <a:srgbClr val="F6F4EE"/>
         </a:solidFill>
       </c:spPr>
     </c:plotArea>
@@ -1528,7 +1528,7 @@
   </c:chart>
   <c:spPr>
     <a:solidFill xmlns:a="http://schemas.openxmlformats.org/drawingml/2006/main">
-      <a:srgbClr val="F7FAF9"/>
+      <a:srgbClr val="F6F4EE"/>
     </a:solidFill>
   </c:spPr>
   <c:externalData r:id="rIdChartSnapshot1">
@@ -1543,7 +1543,7 @@
     <p:bg>
       <p:bgPr>
         <a:solidFill xmlns:a="http://schemas.openxmlformats.org/drawingml/2006/main">
-          <a:srgbClr val="173F40"/>
+          <a:srgbClr val="F6F4EE"/>
         </a:solidFill>
       </p:bgPr>
     </p:bg>
@@ -1556,12 +1556,37 @@
       <p:grpSpPr>
         <a:xfrm xmlns:a="http://schemas.openxmlformats.org/drawingml/2006/main"/>
       </p:grpSpPr>
-      <p:sp>
-        <p:nvSpPr>
-          <p:cNvPr id="5" name="S01-title">
+      <p:pic>
+        <p:nvPicPr>
+          <p:cNvPr id="7" name=""/>
+          <p:cNvPicPr>
+            <a:picLocks xmlns:a="http://schemas.openxmlformats.org/drawingml/2006/main" noChangeAspect="1"/>
+          </p:cNvPicPr>
+          <p:nvPr/>
+        </p:nvPicPr>
+        <p:blipFill>
+          <a:blip xmlns:r="http://schemas.openxmlformats.org/officeDocument/2006/relationships" xmlns:a="http://schemas.openxmlformats.org/drawingml/2006/main" r:embed="Rff2126a0afdc4de5"/>
+          <a:srcRect xmlns:a="http://schemas.openxmlformats.org/drawingml/2006/main" l="6092" t="0" r="6092" b="0"/>
+          <a:stretch xmlns:a="http://schemas.openxmlformats.org/drawingml/2006/main">
+            <a:fillRect l="0" t="0" r="0" b="0"/>
+          </a:stretch>
+        </p:blipFill>
+        <p:spPr>
+          <a:xfrm xmlns:a="http://schemas.openxmlformats.org/drawingml/2006/main">
+            <a:off x="7372350" y="0"/>
+            <a:ext cx="4819650" cy="6858000"/>
+          </a:xfrm>
+          <a:prstGeom xmlns:a="http://schemas.openxmlformats.org/drawingml/2006/main" prst="rect">
+            <a:avLst/>
+          </a:prstGeom>
+        </p:spPr>
+      </p:pic>
+      <p:sp>
+        <p:nvSpPr>
+          <p:cNvPr id="2" name="S01-section">
             <a:extLst xmlns:a="http://schemas.openxmlformats.org/drawingml/2006/main">
               <a:ext uri="{FF2B5EF4-FFF2-40B4-BE49-F238E27FC236}">
-                <a16:creationId xmlns:a16="http://schemas.microsoft.com/office/drawing/2014/main" id="{7B7AFD70-B979-4E05-BA08-1CE709AB0310}"/>
+                <a16:creationId xmlns:a16="http://schemas.microsoft.com/office/drawing/2014/main" id="{D6E8A9ED-5F1A-40DB-B550-14998D956CD9}"/>
               </a:ext>
             </a:extLst>
           </p:cNvPr>
@@ -1572,8 +1597,8 @@
         </p:nvSpPr>
         <p:spPr>
           <a:xfrm xmlns:a="http://schemas.openxmlformats.org/drawingml/2006/main">
-            <a:off x="609600" y="1571625"/>
-            <a:ext cx="10934700" cy="1714500"/>
+            <a:off x="685800" y="590550"/>
+            <a:ext cx="6191250" cy="285750"/>
           </a:xfrm>
           <a:prstGeom xmlns:a="http://schemas.openxmlformats.org/drawingml/2006/main" prst="rect">
             <a:avLst/>
@@ -1590,58 +1615,35 @@
           <a:lstStyle xmlns:a="http://schemas.openxmlformats.org/drawingml/2006/main"/>
           <a:p xmlns:a="http://schemas.openxmlformats.org/drawingml/2006/main">
             <a:pPr>
-              <a:defRPr sz="4800" b="1">
-                <a:solidFill>
-                  <a:srgbClr val="FFFFFF"/>
-                </a:solidFill>
-                <a:latin typeface="Malgun Gothic"/>
-                <a:ea typeface="Malgun Gothic"/>
-                <a:cs typeface="Malgun Gothic"/>
-              </a:defRPr>
-            </a:pPr>
-            <a:r>
-              <a:rPr sz="4800" b="1">
-                <a:solidFill>
-                  <a:srgbClr val="FFFFFF"/>
-                </a:solidFill>
-                <a:latin typeface="Malgun Gothic"/>
-                <a:ea typeface="Malgun Gothic"/>
-                <a:cs typeface="Malgun Gothic"/>
+              <a:defRPr sz="1425" b="0">
+                <a:solidFill>
+                  <a:srgbClr val="287D78"/>
+                </a:solidFill>
+                <a:latin typeface="Segoe UI"/>
+                <a:ea typeface="Segoe UI"/>
+                <a:cs typeface="Segoe UI"/>
+              </a:defRPr>
+            </a:pPr>
+            <a:r>
+              <a:rPr sz="1425" b="0">
+                <a:solidFill>
+                  <a:srgbClr val="287D78"/>
+                </a:solidFill>
+                <a:latin typeface="Segoe UI"/>
+                <a:ea typeface="Segoe UI"/>
+                <a:cs typeface="Segoe UI"/>
               </a:rPr>
-              <a:t>센서 이상 탐지 모델의</a:t>
-            </a:r>
-          </a:p>
-          <a:p xmlns:a="http://schemas.openxmlformats.org/drawingml/2006/main">
-            <a:pPr>
-              <a:defRPr sz="4800" b="1">
-                <a:solidFill>
-                  <a:srgbClr val="FFFFFF"/>
-                </a:solidFill>
-                <a:latin typeface="Malgun Gothic"/>
-                <a:ea typeface="Malgun Gothic"/>
-                <a:cs typeface="Malgun Gothic"/>
-              </a:defRPr>
-            </a:pPr>
-            <a:r>
-              <a:rPr sz="4800" b="1">
-                <a:solidFill>
-                  <a:srgbClr val="FFFFFF"/>
-                </a:solidFill>
-                <a:latin typeface="Malgun Gothic"/>
-                <a:ea typeface="Malgun Gothic"/>
-                <a:cs typeface="Malgun Gothic"/>
-              </a:rPr>
-              <a:t>경량화</a:t>
-            </a:r>
-          </a:p>
-        </p:txBody>
-      </p:sp>
-      <p:sp>
-        <p:nvSpPr>
-          <p:cNvPr id="2" name="S01-subtitle">
+              <a:t>RESEARCH NOTE / 01</a:t>
+            </a:r>
+          </a:p>
+        </p:txBody>
+      </p:sp>
+      <p:sp>
+        <p:nvSpPr>
+          <p:cNvPr id="3" name="S01-title">
             <a:extLst xmlns:a="http://schemas.openxmlformats.org/drawingml/2006/main">
               <a:ext uri="{FF2B5EF4-FFF2-40B4-BE49-F238E27FC236}">
-                <a16:creationId xmlns:a16="http://schemas.microsoft.com/office/drawing/2014/main" id="{881B07A9-251E-4C37-B7EE-41C04FF575A2}"/>
+                <a16:creationId xmlns:a16="http://schemas.microsoft.com/office/drawing/2014/main" id="{4C2F98CD-761C-4BE1-B0E6-D8D7623A14E2}"/>
               </a:ext>
             </a:extLst>
           </p:cNvPr>
@@ -1652,8 +1654,8 @@
         </p:nvSpPr>
         <p:spPr>
           <a:xfrm xmlns:a="http://schemas.openxmlformats.org/drawingml/2006/main">
-            <a:off x="647700" y="3810000"/>
-            <a:ext cx="10477500" cy="533400"/>
+            <a:off x="685800" y="1895475"/>
+            <a:ext cx="6591300" cy="1600200"/>
           </a:xfrm>
           <a:prstGeom xmlns:a="http://schemas.openxmlformats.org/drawingml/2006/main" prst="rect">
             <a:avLst/>
@@ -1670,35 +1672,58 @@
           <a:lstStyle xmlns:a="http://schemas.openxmlformats.org/drawingml/2006/main"/>
           <a:p xmlns:a="http://schemas.openxmlformats.org/drawingml/2006/main">
             <a:pPr>
-              <a:defRPr sz="2325" b="0">
-                <a:solidFill>
-                  <a:srgbClr val="FFFFFF"/>
-                </a:solidFill>
-                <a:latin typeface="Malgun Gothic"/>
-                <a:ea typeface="Malgun Gothic"/>
-                <a:cs typeface="Malgun Gothic"/>
-              </a:defRPr>
-            </a:pPr>
-            <a:r>
-              <a:rPr sz="2325" b="0">
-                <a:solidFill>
-                  <a:srgbClr val="FFFFFF"/>
-                </a:solidFill>
-                <a:latin typeface="Malgun Gothic"/>
-                <a:ea typeface="Malgun Gothic"/>
-                <a:cs typeface="Malgun Gothic"/>
+              <a:defRPr sz="4200" b="0">
+                <a:solidFill>
+                  <a:srgbClr val="1E302F"/>
+                </a:solidFill>
+                <a:latin typeface="Segoe UI"/>
+                <a:ea typeface="Segoe UI"/>
+                <a:cs typeface="Segoe UI"/>
+              </a:defRPr>
+            </a:pPr>
+            <a:r>
+              <a:rPr sz="4200" b="0">
+                <a:solidFill>
+                  <a:srgbClr val="1E302F"/>
+                </a:solidFill>
+                <a:latin typeface="Segoe UI"/>
+                <a:ea typeface="Segoe UI"/>
+                <a:cs typeface="Segoe UI"/>
               </a:rPr>
-              <a:t>지식 증류와 INT8 양자화의 성능 교환관계</a:t>
-            </a:r>
-          </a:p>
-        </p:txBody>
-      </p:sp>
-      <p:sp>
-        <p:nvSpPr>
-          <p:cNvPr id="3" name="S01-context">
+              <a:t>Smaller models.</a:t>
+            </a:r>
+          </a:p>
+          <a:p xmlns:a="http://schemas.openxmlformats.org/drawingml/2006/main">
+            <a:pPr>
+              <a:defRPr sz="4200" b="0">
+                <a:solidFill>
+                  <a:srgbClr val="1E302F"/>
+                </a:solidFill>
+                <a:latin typeface="Segoe UI"/>
+                <a:ea typeface="Segoe UI"/>
+                <a:cs typeface="Segoe UI"/>
+              </a:defRPr>
+            </a:pPr>
+            <a:r>
+              <a:rPr sz="4200" b="0">
+                <a:solidFill>
+                  <a:srgbClr val="1E302F"/>
+                </a:solidFill>
+                <a:latin typeface="Segoe UI"/>
+                <a:ea typeface="Segoe UI"/>
+                <a:cs typeface="Segoe UI"/>
+              </a:rPr>
+              <a:t>Considered trade-offs.</a:t>
+            </a:r>
+          </a:p>
+        </p:txBody>
+      </p:sp>
+      <p:sp>
+        <p:nvSpPr>
+          <p:cNvPr id="4" name="S01-subtitle">
             <a:extLst xmlns:a="http://schemas.openxmlformats.org/drawingml/2006/main">
               <a:ext uri="{FF2B5EF4-FFF2-40B4-BE49-F238E27FC236}">
-                <a16:creationId xmlns:a16="http://schemas.microsoft.com/office/drawing/2014/main" id="{4EA2CB9D-147A-44A2-8391-9CF930527BF9}"/>
+                <a16:creationId xmlns:a16="http://schemas.microsoft.com/office/drawing/2014/main" id="{26242D5B-C040-47B5-8284-A994E17ED53A}"/>
               </a:ext>
             </a:extLst>
           </p:cNvPr>
@@ -1709,8 +1734,8 @@
         </p:nvSpPr>
         <p:spPr>
           <a:xfrm xmlns:a="http://schemas.openxmlformats.org/drawingml/2006/main">
-            <a:off x="647700" y="4610100"/>
-            <a:ext cx="9525000" cy="419100"/>
+            <a:off x="723900" y="3905250"/>
+            <a:ext cx="6048375" cy="781050"/>
           </a:xfrm>
           <a:prstGeom xmlns:a="http://schemas.openxmlformats.org/drawingml/2006/main" prst="rect">
             <a:avLst/>
@@ -1727,35 +1752,58 @@
           <a:lstStyle xmlns:a="http://schemas.openxmlformats.org/drawingml/2006/main"/>
           <a:p xmlns:a="http://schemas.openxmlformats.org/drawingml/2006/main">
             <a:pPr>
-              <a:defRPr sz="1800" b="0">
-                <a:solidFill>
-                  <a:srgbClr val="C8E2DE"/>
-                </a:solidFill>
-                <a:latin typeface="Malgun Gothic"/>
-                <a:ea typeface="Malgun Gothic"/>
-                <a:cs typeface="Malgun Gothic"/>
-              </a:defRPr>
-            </a:pPr>
-            <a:r>
-              <a:rPr sz="1800" b="0">
-                <a:solidFill>
-                  <a:srgbClr val="C8E2DE"/>
-                </a:solidFill>
-                <a:latin typeface="Malgun Gothic"/>
-                <a:ea typeface="Malgun Gothic"/>
-                <a:cs typeface="Malgun Gothic"/>
+              <a:defRPr sz="2175" b="0">
+                <a:solidFill>
+                  <a:srgbClr val="586C68"/>
+                </a:solidFill>
+                <a:latin typeface="Segoe UI"/>
+                <a:ea typeface="Segoe UI"/>
+                <a:cs typeface="Segoe UI"/>
+              </a:defRPr>
+            </a:pPr>
+            <a:r>
+              <a:rPr sz="2175" b="0">
+                <a:solidFill>
+                  <a:srgbClr val="586C68"/>
+                </a:solidFill>
+                <a:latin typeface="Segoe UI"/>
+                <a:ea typeface="Segoe UI"/>
+                <a:cs typeface="Segoe UI"/>
               </a:rPr>
-              <a:t>연구실 세미나 · 5분</a:t>
-            </a:r>
-          </a:p>
-        </p:txBody>
-      </p:sp>
-      <p:sp>
-        <p:nvSpPr>
-          <p:cNvPr id="4" name="S01-disclosure">
+              <a:t>Sensor anomaly detection with</a:t>
+            </a:r>
+          </a:p>
+          <a:p xmlns:a="http://schemas.openxmlformats.org/drawingml/2006/main">
+            <a:pPr>
+              <a:defRPr sz="2175" b="0">
+                <a:solidFill>
+                  <a:srgbClr val="586C68"/>
+                </a:solidFill>
+                <a:latin typeface="Segoe UI"/>
+                <a:ea typeface="Segoe UI"/>
+                <a:cs typeface="Segoe UI"/>
+              </a:defRPr>
+            </a:pPr>
+            <a:r>
+              <a:rPr sz="2175" b="0">
+                <a:solidFill>
+                  <a:srgbClr val="586C68"/>
+                </a:solidFill>
+                <a:latin typeface="Segoe UI"/>
+                <a:ea typeface="Segoe UI"/>
+                <a:cs typeface="Segoe UI"/>
+              </a:rPr>
+              <a:t>distillation and INT8 quantization</a:t>
+            </a:r>
+          </a:p>
+        </p:txBody>
+      </p:sp>
+      <p:sp>
+        <p:nvSpPr>
+          <p:cNvPr id="5" name="S01-context">
             <a:extLst xmlns:a="http://schemas.openxmlformats.org/drawingml/2006/main">
               <a:ext uri="{FF2B5EF4-FFF2-40B4-BE49-F238E27FC236}">
-                <a16:creationId xmlns:a16="http://schemas.microsoft.com/office/drawing/2014/main" id="{1CDDF37E-E3C1-4A58-88BC-77207933FA12}"/>
+                <a16:creationId xmlns:a16="http://schemas.microsoft.com/office/drawing/2014/main" id="{CE5D0945-2804-42F1-BE98-430B6393548F}"/>
               </a:ext>
             </a:extLst>
           </p:cNvPr>
@@ -1766,8 +1814,8 @@
         </p:nvSpPr>
         <p:spPr>
           <a:xfrm xmlns:a="http://schemas.openxmlformats.org/drawingml/2006/main">
-            <a:off x="647700" y="6191250"/>
-            <a:ext cx="10477500" cy="342900"/>
+            <a:off x="723900" y="5410200"/>
+            <a:ext cx="5905500" cy="333375"/>
           </a:xfrm>
           <a:prstGeom xmlns:a="http://schemas.openxmlformats.org/drawingml/2006/main" prst="rect">
             <a:avLst/>
@@ -1784,25 +1832,82 @@
           <a:lstStyle xmlns:a="http://schemas.openxmlformats.org/drawingml/2006/main"/>
           <a:p xmlns:a="http://schemas.openxmlformats.org/drawingml/2006/main">
             <a:pPr>
-              <a:defRPr sz="1650" b="0">
-                <a:solidFill>
-                  <a:srgbClr val="C8E2DE"/>
-                </a:solidFill>
-                <a:latin typeface="Malgun Gothic"/>
-                <a:ea typeface="Malgun Gothic"/>
-                <a:cs typeface="Malgun Gothic"/>
-              </a:defRPr>
-            </a:pPr>
-            <a:r>
-              <a:rPr sz="1650" b="0">
-                <a:solidFill>
-                  <a:srgbClr val="C8E2DE"/>
-                </a:solidFill>
-                <a:latin typeface="Malgun Gothic"/>
-                <a:ea typeface="Malgun Gothic"/>
-                <a:cs typeface="Malgun Gothic"/>
+              <a:defRPr sz="1725" b="0">
+                <a:solidFill>
+                  <a:srgbClr val="1E302F"/>
+                </a:solidFill>
+                <a:latin typeface="Segoe UI"/>
+                <a:ea typeface="Segoe UI"/>
+                <a:cs typeface="Segoe UI"/>
+              </a:defRPr>
+            </a:pPr>
+            <a:r>
+              <a:rPr sz="1725" b="0">
+                <a:solidFill>
+                  <a:srgbClr val="1E302F"/>
+                </a:solidFill>
+                <a:latin typeface="Segoe UI"/>
+                <a:ea typeface="Segoe UI"/>
+                <a:cs typeface="Segoe UI"/>
               </a:rPr>
-              <a:t>모든 성능 수치는 가상 예시입니다</a:t>
+              <a:t>Lab seminar · 5 minutes</a:t>
+            </a:r>
+          </a:p>
+        </p:txBody>
+      </p:sp>
+      <p:sp>
+        <p:nvSpPr>
+          <p:cNvPr id="6" name="S01-disclosure">
+            <a:extLst xmlns:a="http://schemas.openxmlformats.org/drawingml/2006/main">
+              <a:ext uri="{FF2B5EF4-FFF2-40B4-BE49-F238E27FC236}">
+                <a16:creationId xmlns:a16="http://schemas.microsoft.com/office/drawing/2014/main" id="{A847D8A6-1E81-4416-955C-608099BBDF94}"/>
+              </a:ext>
+            </a:extLst>
+          </p:cNvPr>
+          <p:cNvSpPr>
+            <a:spLocks xmlns:a="http://schemas.openxmlformats.org/drawingml/2006/main" noGrp="1"/>
+          </p:cNvSpPr>
+          <p:nvPr/>
+        </p:nvSpPr>
+        <p:spPr>
+          <a:xfrm xmlns:a="http://schemas.openxmlformats.org/drawingml/2006/main">
+            <a:off x="723900" y="6343650"/>
+            <a:ext cx="6191250" cy="247650"/>
+          </a:xfrm>
+          <a:prstGeom xmlns:a="http://schemas.openxmlformats.org/drawingml/2006/main" prst="rect">
+            <a:avLst/>
+          </a:prstGeom>
+          <a:noFill xmlns:a="http://schemas.openxmlformats.org/drawingml/2006/main"/>
+          <a:ln xmlns:a="http://schemas.openxmlformats.org/drawingml/2006/main" w="0">
+            <a:noFill/>
+          </a:ln>
+        </p:spPr>
+        <p:txBody>
+          <a:bodyPr xmlns:a="http://schemas.openxmlformats.org/drawingml/2006/main" wrap="none" lIns="0" tIns="0" rIns="0" bIns="0" anchor="ctr">
+            <a:noAutofit/>
+          </a:bodyPr>
+          <a:lstStyle xmlns:a="http://schemas.openxmlformats.org/drawingml/2006/main"/>
+          <a:p xmlns:a="http://schemas.openxmlformats.org/drawingml/2006/main">
+            <a:pPr>
+              <a:defRPr sz="1275" b="0">
+                <a:solidFill>
+                  <a:srgbClr val="586C68"/>
+                </a:solidFill>
+                <a:latin typeface="Segoe UI"/>
+                <a:ea typeface="Segoe UI"/>
+                <a:cs typeface="Segoe UI"/>
+              </a:defRPr>
+            </a:pPr>
+            <a:r>
+              <a:rPr sz="1275" b="0">
+                <a:solidFill>
+                  <a:srgbClr val="586C68"/>
+                </a:solidFill>
+                <a:latin typeface="Segoe UI"/>
+                <a:ea typeface="Segoe UI"/>
+                <a:cs typeface="Segoe UI"/>
+              </a:rPr>
+              <a:t>Illustrative data · not experimental results</a:t>
             </a:r>
           </a:p>
         </p:txBody>
@@ -1810,7 +1915,7 @@
     </p:spTree>
     <p:extLst>
       <p:ext uri="{BB962C8B-B14F-4D97-AF65-F5344CB8AC3E}">
-        <p14:creationId xmlns:p14="http://schemas.microsoft.com/office/powerpoint/2010/main" val="1081520876"/>
+        <p14:creationId xmlns:p14="http://schemas.microsoft.com/office/powerpoint/2010/main" val="872901537"/>
       </p:ext>
     </p:extLst>
   </p:cSld>
@@ -1823,7 +1928,7 @@
     <p:bg>
       <p:bgPr>
         <a:solidFill xmlns:a="http://schemas.openxmlformats.org/drawingml/2006/main">
-          <a:srgbClr val="F7FAF9"/>
+          <a:srgbClr val="F6F4EE"/>
         </a:solidFill>
       </p:bgPr>
     </p:bg>
@@ -1838,10 +1943,10 @@
       </p:grpSpPr>
       <p:sp>
         <p:nvSpPr>
-          <p:cNvPr id="18" name="S02-title">
+          <p:cNvPr id="22" name="S02-section">
             <a:extLst xmlns:a="http://schemas.openxmlformats.org/drawingml/2006/main">
               <a:ext uri="{FF2B5EF4-FFF2-40B4-BE49-F238E27FC236}">
-                <a16:creationId xmlns:a16="http://schemas.microsoft.com/office/drawing/2014/main" id="{6315F9F1-0BBD-4A88-92EC-F6EDB12505B0}"/>
+                <a16:creationId xmlns:a16="http://schemas.microsoft.com/office/drawing/2014/main" id="{38AF2B2F-DFDC-44CF-AFD0-A937CEF5A931}"/>
               </a:ext>
             </a:extLst>
           </p:cNvPr>
@@ -1852,8 +1957,8 @@
         </p:nvSpPr>
         <p:spPr>
           <a:xfrm xmlns:a="http://schemas.openxmlformats.org/drawingml/2006/main">
-            <a:off x="609600" y="438150"/>
-            <a:ext cx="10972800" cy="666750"/>
+            <a:off x="685800" y="400050"/>
+            <a:ext cx="10744200" cy="257175"/>
           </a:xfrm>
           <a:prstGeom xmlns:a="http://schemas.openxmlformats.org/drawingml/2006/main" prst="rect">
             <a:avLst/>
@@ -1870,35 +1975,35 @@
           <a:lstStyle xmlns:a="http://schemas.openxmlformats.org/drawingml/2006/main"/>
           <a:p xmlns:a="http://schemas.openxmlformats.org/drawingml/2006/main">
             <a:pPr>
-              <a:defRPr sz="3375" b="1">
-                <a:solidFill>
-                  <a:srgbClr val="173F40"/>
-                </a:solidFill>
-                <a:latin typeface="Malgun Gothic"/>
-                <a:ea typeface="Malgun Gothic"/>
-                <a:cs typeface="Malgun Gothic"/>
-              </a:defRPr>
-            </a:pPr>
-            <a:r>
-              <a:rPr sz="3375" b="1">
-                <a:solidFill>
-                  <a:srgbClr val="173F40"/>
-                </a:solidFill>
-                <a:latin typeface="Malgun Gothic"/>
-                <a:ea typeface="Malgun Gothic"/>
-                <a:cs typeface="Malgun Gothic"/>
+              <a:defRPr sz="1425" b="0">
+                <a:solidFill>
+                  <a:srgbClr val="287D78"/>
+                </a:solidFill>
+                <a:latin typeface="Segoe UI"/>
+                <a:ea typeface="Segoe UI"/>
+                <a:cs typeface="Segoe UI"/>
+              </a:defRPr>
+            </a:pPr>
+            <a:r>
+              <a:rPr sz="1425" b="0">
+                <a:solidFill>
+                  <a:srgbClr val="287D78"/>
+                </a:solidFill>
+                <a:latin typeface="Segoe UI"/>
+                <a:ea typeface="Segoe UI"/>
+                <a:cs typeface="Segoe UI"/>
               </a:rPr>
-              <a:t>원본 모델, 지식 증류, INT8 양자화</a:t>
-            </a:r>
-          </a:p>
-        </p:txBody>
-      </p:sp>
-      <p:sp>
-        <p:nvSpPr>
-          <p:cNvPr id="2" name="S02-disclosure">
+              <a:t>METHOD / TWO COMPRESSION STEPS</a:t>
+            </a:r>
+          </a:p>
+        </p:txBody>
+      </p:sp>
+      <p:sp>
+        <p:nvSpPr>
+          <p:cNvPr id="2" name="S02-title">
             <a:extLst xmlns:a="http://schemas.openxmlformats.org/drawingml/2006/main">
               <a:ext uri="{FF2B5EF4-FFF2-40B4-BE49-F238E27FC236}">
-                <a16:creationId xmlns:a16="http://schemas.microsoft.com/office/drawing/2014/main" id="{338D7C5E-66FA-469C-A9AD-BBBEBE263C2C}"/>
+                <a16:creationId xmlns:a16="http://schemas.microsoft.com/office/drawing/2014/main" id="{B0A18481-3748-46C8-B040-D773482F990F}"/>
               </a:ext>
             </a:extLst>
           </p:cNvPr>
@@ -1909,8 +2014,8 @@
         </p:nvSpPr>
         <p:spPr>
           <a:xfrm xmlns:a="http://schemas.openxmlformats.org/drawingml/2006/main">
-            <a:off x="609600" y="6286500"/>
-            <a:ext cx="9525000" cy="285750"/>
+            <a:off x="685800" y="895350"/>
+            <a:ext cx="10820400" cy="666750"/>
           </a:xfrm>
           <a:prstGeom xmlns:a="http://schemas.openxmlformats.org/drawingml/2006/main" prst="rect">
             <a:avLst/>
@@ -1927,35 +2032,35 @@
           <a:lstStyle xmlns:a="http://schemas.openxmlformats.org/drawingml/2006/main"/>
           <a:p xmlns:a="http://schemas.openxmlformats.org/drawingml/2006/main">
             <a:pPr>
-              <a:defRPr sz="1425" b="0">
-                <a:solidFill>
-                  <a:srgbClr val="456162"/>
-                </a:solidFill>
-                <a:latin typeface="Malgun Gothic"/>
-                <a:ea typeface="Malgun Gothic"/>
-                <a:cs typeface="Malgun Gothic"/>
-              </a:defRPr>
-            </a:pPr>
-            <a:r>
-              <a:rPr sz="1425" b="0">
-                <a:solidFill>
-                  <a:srgbClr val="456162"/>
-                </a:solidFill>
-                <a:latin typeface="Malgun Gothic"/>
-                <a:ea typeface="Malgun Gothic"/>
-                <a:cs typeface="Malgun Gothic"/>
+              <a:defRPr sz="3225" b="0">
+                <a:solidFill>
+                  <a:srgbClr val="1E302F"/>
+                </a:solidFill>
+                <a:latin typeface="Segoe UI"/>
+                <a:ea typeface="Segoe UI"/>
+                <a:cs typeface="Segoe UI"/>
+              </a:defRPr>
+            </a:pPr>
+            <a:r>
+              <a:rPr sz="3225" b="0">
+                <a:solidFill>
+                  <a:srgbClr val="1E302F"/>
+                </a:solidFill>
+                <a:latin typeface="Segoe UI"/>
+                <a:ea typeface="Segoe UI"/>
+                <a:cs typeface="Segoe UI"/>
               </a:rPr>
-              <a:t>모든 성능 수치는 가상 예시입니다</a:t>
-            </a:r>
-          </a:p>
-        </p:txBody>
-      </p:sp>
-      <p:sp>
-        <p:nvSpPr>
-          <p:cNvPr id="3" name="S02-number">
+              <a:t>From a teacher to a compact student</a:t>
+            </a:r>
+          </a:p>
+        </p:txBody>
+      </p:sp>
+      <p:sp>
+        <p:nvSpPr>
+          <p:cNvPr id="3" name="S02-disclosure">
             <a:extLst xmlns:a="http://schemas.openxmlformats.org/drawingml/2006/main">
               <a:ext uri="{FF2B5EF4-FFF2-40B4-BE49-F238E27FC236}">
-                <a16:creationId xmlns:a16="http://schemas.microsoft.com/office/drawing/2014/main" id="{DABE90B2-EE35-41C5-8FF0-811B566FB3CC}"/>
+                <a16:creationId xmlns:a16="http://schemas.microsoft.com/office/drawing/2014/main" id="{0D26C020-E687-43A2-9252-B85FDA2591D6}"/>
               </a:ext>
             </a:extLst>
           </p:cNvPr>
@@ -1966,8 +2071,8 @@
         </p:nvSpPr>
         <p:spPr>
           <a:xfrm xmlns:a="http://schemas.openxmlformats.org/drawingml/2006/main">
-            <a:off x="10953750" y="6286500"/>
-            <a:ext cx="609600" cy="285750"/>
+            <a:off x="685800" y="6372225"/>
+            <a:ext cx="9525000" cy="219075"/>
           </a:xfrm>
           <a:prstGeom xmlns:a="http://schemas.openxmlformats.org/drawingml/2006/main" prst="rect">
             <a:avLst/>
@@ -1984,35 +2089,35 @@
           <a:lstStyle xmlns:a="http://schemas.openxmlformats.org/drawingml/2006/main"/>
           <a:p xmlns:a="http://schemas.openxmlformats.org/drawingml/2006/main">
             <a:pPr>
-              <a:defRPr sz="1425" b="0">
-                <a:solidFill>
-                  <a:srgbClr val="456162"/>
-                </a:solidFill>
-                <a:latin typeface="Malgun Gothic"/>
-                <a:ea typeface="Malgun Gothic"/>
-                <a:cs typeface="Malgun Gothic"/>
-              </a:defRPr>
-            </a:pPr>
-            <a:r>
-              <a:rPr sz="1425" b="0">
-                <a:solidFill>
-                  <a:srgbClr val="456162"/>
-                </a:solidFill>
-                <a:latin typeface="Malgun Gothic"/>
-                <a:ea typeface="Malgun Gothic"/>
-                <a:cs typeface="Malgun Gothic"/>
+              <a:defRPr sz="1275" b="0">
+                <a:solidFill>
+                  <a:srgbClr val="586C68"/>
+                </a:solidFill>
+                <a:latin typeface="Segoe UI"/>
+                <a:ea typeface="Segoe UI"/>
+                <a:cs typeface="Segoe UI"/>
+              </a:defRPr>
+            </a:pPr>
+            <a:r>
+              <a:rPr sz="1275" b="0">
+                <a:solidFill>
+                  <a:srgbClr val="586C68"/>
+                </a:solidFill>
+                <a:latin typeface="Segoe UI"/>
+                <a:ea typeface="Segoe UI"/>
+                <a:cs typeface="Segoe UI"/>
               </a:rPr>
-              <a:t>02</a:t>
-            </a:r>
-          </a:p>
-        </p:txBody>
-      </p:sp>
-      <p:sp>
-        <p:nvSpPr>
-          <p:cNvPr id="4" name="S02-stage-1">
+              <a:t>Illustrative data · not experimental results</a:t>
+            </a:r>
+          </a:p>
+        </p:txBody>
+      </p:sp>
+      <p:sp>
+        <p:nvSpPr>
+          <p:cNvPr id="4" name="S02-number">
             <a:extLst xmlns:a="http://schemas.openxmlformats.org/drawingml/2006/main">
               <a:ext uri="{FF2B5EF4-FFF2-40B4-BE49-F238E27FC236}">
-                <a16:creationId xmlns:a16="http://schemas.microsoft.com/office/drawing/2014/main" id="{4BF2E19D-7875-4BAC-9595-A5E06884DD12}"/>
+                <a16:creationId xmlns:a16="http://schemas.microsoft.com/office/drawing/2014/main" id="{16C78E3E-1CEB-47EA-B53A-2BEE9C7E5285}"/>
               </a:ext>
             </a:extLst>
           </p:cNvPr>
@@ -2023,53 +2128,110 @@
         </p:nvSpPr>
         <p:spPr>
           <a:xfrm xmlns:a="http://schemas.openxmlformats.org/drawingml/2006/main">
-            <a:off x="609600" y="2343150"/>
-            <a:ext cx="3124200" cy="1066800"/>
+            <a:off x="11144250" y="6372225"/>
+            <a:ext cx="361950" cy="219075"/>
           </a:xfrm>
           <a:prstGeom xmlns:a="http://schemas.openxmlformats.org/drawingml/2006/main" prst="rect">
             <a:avLst/>
           </a:prstGeom>
+          <a:noFill xmlns:a="http://schemas.openxmlformats.org/drawingml/2006/main"/>
+          <a:ln xmlns:a="http://schemas.openxmlformats.org/drawingml/2006/main" w="0">
+            <a:noFill/>
+          </a:ln>
+        </p:spPr>
+        <p:txBody>
+          <a:bodyPr xmlns:a="http://schemas.openxmlformats.org/drawingml/2006/main" wrap="none" lIns="0" tIns="0" rIns="0" bIns="0" anchor="ctr">
+            <a:noAutofit/>
+          </a:bodyPr>
+          <a:lstStyle xmlns:a="http://schemas.openxmlformats.org/drawingml/2006/main"/>
+          <a:p xmlns:a="http://schemas.openxmlformats.org/drawingml/2006/main">
+            <a:pPr>
+              <a:defRPr sz="1275" b="0">
+                <a:solidFill>
+                  <a:srgbClr val="586C68"/>
+                </a:solidFill>
+                <a:latin typeface="Segoe UI"/>
+                <a:ea typeface="Segoe UI"/>
+                <a:cs typeface="Segoe UI"/>
+              </a:defRPr>
+            </a:pPr>
+            <a:r>
+              <a:rPr sz="1275" b="0">
+                <a:solidFill>
+                  <a:srgbClr val="586C68"/>
+                </a:solidFill>
+                <a:latin typeface="Segoe UI"/>
+                <a:ea typeface="Segoe UI"/>
+                <a:cs typeface="Segoe UI"/>
+              </a:rPr>
+              <a:t>02</a:t>
+            </a:r>
+          </a:p>
+        </p:txBody>
+      </p:sp>
+      <p:sp>
+        <p:nvSpPr>
+          <p:cNvPr id="5" name="S02-marker-1">
+            <a:extLst xmlns:a="http://schemas.openxmlformats.org/drawingml/2006/main">
+              <a:ext uri="{FF2B5EF4-FFF2-40B4-BE49-F238E27FC236}">
+                <a16:creationId xmlns:a16="http://schemas.microsoft.com/office/drawing/2014/main" id="{A1CCCF3E-D131-4C6A-8EBA-BE7D30BBDCC5}"/>
+              </a:ext>
+            </a:extLst>
+          </p:cNvPr>
+          <p:cNvSpPr>
+            <a:spLocks xmlns:a="http://schemas.openxmlformats.org/drawingml/2006/main" noGrp="1"/>
+          </p:cNvSpPr>
+          <p:nvPr/>
+        </p:nvSpPr>
+        <p:spPr>
+          <a:xfrm xmlns:a="http://schemas.openxmlformats.org/drawingml/2006/main">
+            <a:off x="685800" y="2333625"/>
+            <a:ext cx="533400" cy="533400"/>
+          </a:xfrm>
+          <a:prstGeom xmlns:a="http://schemas.openxmlformats.org/drawingml/2006/main" prst="ellipse">
+            <a:avLst/>
+          </a:prstGeom>
           <a:solidFill xmlns:a="http://schemas.openxmlformats.org/drawingml/2006/main">
-            <a:srgbClr val="7D9192"/>
+            <a:srgbClr val="E8EDE5"/>
           </a:solidFill>
           <a:ln xmlns:a="http://schemas.openxmlformats.org/drawingml/2006/main" w="0">
             <a:noFill/>
           </a:ln>
         </p:spPr>
         <p:txBody>
-          <a:bodyPr xmlns:a="http://schemas.openxmlformats.org/drawingml/2006/main" anchor="ctr"/>
+          <a:bodyPr xmlns:a="http://schemas.openxmlformats.org/drawingml/2006/main" lIns="0" tIns="0" rIns="0" bIns="0" anchor="ctr"/>
           <a:lstStyle xmlns:a="http://schemas.openxmlformats.org/drawingml/2006/main"/>
           <a:p xmlns:a="http://schemas.openxmlformats.org/drawingml/2006/main">
             <a:pPr algn="ctr">
-              <a:defRPr sz="2550" b="1">
-                <a:solidFill>
-                  <a:srgbClr val="FFFFFF"/>
-                </a:solidFill>
-                <a:latin typeface="Malgun Gothic"/>
-                <a:ea typeface="Malgun Gothic"/>
-                <a:cs typeface="Malgun Gothic"/>
-              </a:defRPr>
-            </a:pPr>
-            <a:r>
-              <a:rPr sz="2550" b="1">
-                <a:solidFill>
-                  <a:srgbClr val="FFFFFF"/>
-                </a:solidFill>
-                <a:latin typeface="Malgun Gothic"/>
-                <a:ea typeface="Malgun Gothic"/>
-                <a:cs typeface="Malgun Gothic"/>
+              <a:defRPr sz="1650">
+                <a:solidFill>
+                  <a:srgbClr val="287D78"/>
+                </a:solidFill>
+                <a:latin typeface="Segoe UI"/>
+                <a:ea typeface="Segoe UI"/>
+                <a:cs typeface="Segoe UI"/>
+              </a:defRPr>
+            </a:pPr>
+            <a:r>
+              <a:rPr sz="1650">
+                <a:solidFill>
+                  <a:srgbClr val="287D78"/>
+                </a:solidFill>
+                <a:latin typeface="Segoe UI"/>
+                <a:ea typeface="Segoe UI"/>
+                <a:cs typeface="Segoe UI"/>
               </a:rPr>
-              <a:t>원본 모델</a:t>
-            </a:r>
-          </a:p>
-        </p:txBody>
-      </p:sp>
-      <p:sp>
-        <p:nvSpPr>
-          <p:cNvPr id="5" name="S02-stage-2">
+              <a:t>01</a:t>
+            </a:r>
+          </a:p>
+        </p:txBody>
+      </p:sp>
+      <p:sp>
+        <p:nvSpPr>
+          <p:cNvPr id="6" name="S02-marker-2">
             <a:extLst xmlns:a="http://schemas.openxmlformats.org/drawingml/2006/main">
               <a:ext uri="{FF2B5EF4-FFF2-40B4-BE49-F238E27FC236}">
-                <a16:creationId xmlns:a16="http://schemas.microsoft.com/office/drawing/2014/main" id="{5EFEBC4D-44BC-4EBC-ADA2-7FDD965511FB}"/>
+                <a16:creationId xmlns:a16="http://schemas.microsoft.com/office/drawing/2014/main" id="{E30A7E0B-6A7F-4EB3-B049-ED9215FC7920}"/>
               </a:ext>
             </a:extLst>
           </p:cNvPr>
@@ -2080,53 +2242,53 @@
         </p:nvSpPr>
         <p:spPr>
           <a:xfrm xmlns:a="http://schemas.openxmlformats.org/drawingml/2006/main">
-            <a:off x="4533900" y="2343150"/>
-            <a:ext cx="3124200" cy="1066800"/>
-          </a:xfrm>
-          <a:prstGeom xmlns:a="http://schemas.openxmlformats.org/drawingml/2006/main" prst="rect">
+            <a:off x="4648200" y="2333625"/>
+            <a:ext cx="533400" cy="533400"/>
+          </a:xfrm>
+          <a:prstGeom xmlns:a="http://schemas.openxmlformats.org/drawingml/2006/main" prst="ellipse">
             <a:avLst/>
           </a:prstGeom>
           <a:solidFill xmlns:a="http://schemas.openxmlformats.org/drawingml/2006/main">
-            <a:srgbClr val="007E80"/>
+            <a:srgbClr val="E8EDE5"/>
           </a:solidFill>
           <a:ln xmlns:a="http://schemas.openxmlformats.org/drawingml/2006/main" w="0">
             <a:noFill/>
           </a:ln>
         </p:spPr>
         <p:txBody>
-          <a:bodyPr xmlns:a="http://schemas.openxmlformats.org/drawingml/2006/main" anchor="ctr"/>
+          <a:bodyPr xmlns:a="http://schemas.openxmlformats.org/drawingml/2006/main" lIns="0" tIns="0" rIns="0" bIns="0" anchor="ctr"/>
           <a:lstStyle xmlns:a="http://schemas.openxmlformats.org/drawingml/2006/main"/>
           <a:p xmlns:a="http://schemas.openxmlformats.org/drawingml/2006/main">
             <a:pPr algn="ctr">
-              <a:defRPr sz="2550" b="1">
-                <a:solidFill>
-                  <a:srgbClr val="FFFFFF"/>
-                </a:solidFill>
-                <a:latin typeface="Malgun Gothic"/>
-                <a:ea typeface="Malgun Gothic"/>
-                <a:cs typeface="Malgun Gothic"/>
-              </a:defRPr>
-            </a:pPr>
-            <a:r>
-              <a:rPr sz="2550" b="1">
-                <a:solidFill>
-                  <a:srgbClr val="FFFFFF"/>
-                </a:solidFill>
-                <a:latin typeface="Malgun Gothic"/>
-                <a:ea typeface="Malgun Gothic"/>
-                <a:cs typeface="Malgun Gothic"/>
+              <a:defRPr sz="1650">
+                <a:solidFill>
+                  <a:srgbClr val="287D78"/>
+                </a:solidFill>
+                <a:latin typeface="Segoe UI"/>
+                <a:ea typeface="Segoe UI"/>
+                <a:cs typeface="Segoe UI"/>
+              </a:defRPr>
+            </a:pPr>
+            <a:r>
+              <a:rPr sz="1650">
+                <a:solidFill>
+                  <a:srgbClr val="287D78"/>
+                </a:solidFill>
+                <a:latin typeface="Segoe UI"/>
+                <a:ea typeface="Segoe UI"/>
+                <a:cs typeface="Segoe UI"/>
               </a:rPr>
-              <a:t>지식 증류</a:t>
-            </a:r>
-          </a:p>
-        </p:txBody>
-      </p:sp>
-      <p:sp>
-        <p:nvSpPr>
-          <p:cNvPr id="6" name="S02-stage-3">
+              <a:t>02</a:t>
+            </a:r>
+          </a:p>
+        </p:txBody>
+      </p:sp>
+      <p:sp>
+        <p:nvSpPr>
+          <p:cNvPr id="7" name="S02-marker-3">
             <a:extLst xmlns:a="http://schemas.openxmlformats.org/drawingml/2006/main">
               <a:ext uri="{FF2B5EF4-FFF2-40B4-BE49-F238E27FC236}">
-                <a16:creationId xmlns:a16="http://schemas.microsoft.com/office/drawing/2014/main" id="{9DE3AEFA-1DC3-4FF1-B401-3676139D4389}"/>
+                <a16:creationId xmlns:a16="http://schemas.microsoft.com/office/drawing/2014/main" id="{589A3122-8F0E-4C97-A5B4-3A6FE7F24859}"/>
               </a:ext>
             </a:extLst>
           </p:cNvPr>
@@ -2137,67 +2299,67 @@
         </p:nvSpPr>
         <p:spPr>
           <a:xfrm xmlns:a="http://schemas.openxmlformats.org/drawingml/2006/main">
-            <a:off x="8458200" y="2343150"/>
-            <a:ext cx="3124200" cy="1066800"/>
-          </a:xfrm>
-          <a:prstGeom xmlns:a="http://schemas.openxmlformats.org/drawingml/2006/main" prst="rect">
+            <a:off x="8610600" y="2333625"/>
+            <a:ext cx="533400" cy="533400"/>
+          </a:xfrm>
+          <a:prstGeom xmlns:a="http://schemas.openxmlformats.org/drawingml/2006/main" prst="ellipse">
             <a:avLst/>
           </a:prstGeom>
           <a:solidFill xmlns:a="http://schemas.openxmlformats.org/drawingml/2006/main">
-            <a:srgbClr val="173F40"/>
+            <a:srgbClr val="287D78"/>
           </a:solidFill>
           <a:ln xmlns:a="http://schemas.openxmlformats.org/drawingml/2006/main" w="0">
             <a:noFill/>
           </a:ln>
         </p:spPr>
         <p:txBody>
-          <a:bodyPr xmlns:a="http://schemas.openxmlformats.org/drawingml/2006/main" anchor="ctr"/>
+          <a:bodyPr xmlns:a="http://schemas.openxmlformats.org/drawingml/2006/main" lIns="0" tIns="0" rIns="0" bIns="0" anchor="ctr"/>
           <a:lstStyle xmlns:a="http://schemas.openxmlformats.org/drawingml/2006/main"/>
           <a:p xmlns:a="http://schemas.openxmlformats.org/drawingml/2006/main">
             <a:pPr algn="ctr">
-              <a:defRPr sz="2550" b="1">
+              <a:defRPr sz="1650">
                 <a:solidFill>
                   <a:srgbClr val="FFFFFF"/>
                 </a:solidFill>
-                <a:latin typeface="Malgun Gothic"/>
-                <a:ea typeface="Malgun Gothic"/>
-                <a:cs typeface="Malgun Gothic"/>
-              </a:defRPr>
-            </a:pPr>
-            <a:r>
-              <a:rPr sz="2550" b="1">
+                <a:latin typeface="Segoe UI"/>
+                <a:ea typeface="Segoe UI"/>
+                <a:cs typeface="Segoe UI"/>
+              </a:defRPr>
+            </a:pPr>
+            <a:r>
+              <a:rPr sz="1650">
                 <a:solidFill>
                   <a:srgbClr val="FFFFFF"/>
                 </a:solidFill>
-                <a:latin typeface="Malgun Gothic"/>
-                <a:ea typeface="Malgun Gothic"/>
-                <a:cs typeface="Malgun Gothic"/>
+                <a:latin typeface="Segoe UI"/>
+                <a:ea typeface="Segoe UI"/>
+                <a:cs typeface="Segoe UI"/>
               </a:rPr>
-              <a:t>INT8 양자화</a:t>
+              <a:t>03</a:t>
             </a:r>
           </a:p>
         </p:txBody>
       </p:sp>
       <p:cxnSp>
         <p:nvCxnSpPr>
-          <p:cNvPr id="24" name="S02-link-2"/>
+          <p:cNvPr id="29" name="S02-link-2"/>
           <p:cNvCxnSpPr>
-            <a:stCxn xmlns:a="http://schemas.openxmlformats.org/drawingml/2006/main" id="4" idx="3"/>
-            <a:endCxn xmlns:a="http://schemas.openxmlformats.org/drawingml/2006/main" id="5" idx="1"/>
+            <a:stCxn xmlns:a="http://schemas.openxmlformats.org/drawingml/2006/main" id="5" idx="6"/>
+            <a:endCxn xmlns:a="http://schemas.openxmlformats.org/drawingml/2006/main" id="6" idx="2"/>
           </p:cNvCxnSpPr>
           <p:nvPr/>
         </p:nvCxnSpPr>
         <p:spPr>
           <a:xfrm xmlns:a="http://schemas.openxmlformats.org/drawingml/2006/main">
-            <a:off x="3733800" y="2876550"/>
-            <a:ext cx="800100" cy="0"/>
+            <a:off x="1219200" y="2600325"/>
+            <a:ext cx="3429000" cy="0"/>
           </a:xfrm>
           <a:prstGeom xmlns:a="http://schemas.openxmlformats.org/drawingml/2006/main" prst="straightConnector1">
             <a:avLst/>
           </a:prstGeom>
-          <a:ln xmlns:a="http://schemas.openxmlformats.org/drawingml/2006/main" w="28575">
+          <a:ln xmlns:a="http://schemas.openxmlformats.org/drawingml/2006/main" w="17145">
             <a:solidFill>
-              <a:srgbClr val="456162"/>
+              <a:srgbClr val="9EADA5"/>
             </a:solidFill>
             <a:tailEnd type="triangle" w="sm" len="sm"/>
           </a:ln>
@@ -2205,24 +2367,24 @@
       </p:cxnSp>
       <p:cxnSp>
         <p:nvCxnSpPr>
-          <p:cNvPr id="25" name="S02-link-3"/>
+          <p:cNvPr id="30" name="S02-link-3"/>
           <p:cNvCxnSpPr>
-            <a:stCxn xmlns:a="http://schemas.openxmlformats.org/drawingml/2006/main" id="5" idx="3"/>
-            <a:endCxn xmlns:a="http://schemas.openxmlformats.org/drawingml/2006/main" id="6" idx="1"/>
+            <a:stCxn xmlns:a="http://schemas.openxmlformats.org/drawingml/2006/main" id="6" idx="6"/>
+            <a:endCxn xmlns:a="http://schemas.openxmlformats.org/drawingml/2006/main" id="7" idx="2"/>
           </p:cNvCxnSpPr>
           <p:nvPr/>
         </p:nvCxnSpPr>
         <p:spPr>
           <a:xfrm xmlns:a="http://schemas.openxmlformats.org/drawingml/2006/main">
-            <a:off x="7658100" y="2876550"/>
-            <a:ext cx="800100" cy="0"/>
+            <a:off x="5181600" y="2600325"/>
+            <a:ext cx="3429000" cy="0"/>
           </a:xfrm>
           <a:prstGeom xmlns:a="http://schemas.openxmlformats.org/drawingml/2006/main" prst="straightConnector1">
             <a:avLst/>
           </a:prstGeom>
-          <a:ln xmlns:a="http://schemas.openxmlformats.org/drawingml/2006/main" w="28575">
+          <a:ln xmlns:a="http://schemas.openxmlformats.org/drawingml/2006/main" w="17145">
             <a:solidFill>
-              <a:srgbClr val="456162"/>
+              <a:srgbClr val="9EADA5"/>
             </a:solidFill>
             <a:tailEnd type="triangle" w="sm" len="sm"/>
           </a:ln>
@@ -2230,10 +2392,10 @@
       </p:cxnSp>
       <p:sp>
         <p:nvSpPr>
-          <p:cNvPr id="9" name="S02-flow-2">
+          <p:cNvPr id="10" name="S02-flow-2">
             <a:extLst xmlns:a="http://schemas.openxmlformats.org/drawingml/2006/main">
               <a:ext uri="{FF2B5EF4-FFF2-40B4-BE49-F238E27FC236}">
-                <a16:creationId xmlns:a16="http://schemas.microsoft.com/office/drawing/2014/main" id="{63D8E09F-B10B-4A88-A3F4-8B69AB6D7956}"/>
+                <a16:creationId xmlns:a16="http://schemas.microsoft.com/office/drawing/2014/main" id="{C3FB482B-8C3A-4AF4-9139-6144D2C21705}"/>
               </a:ext>
             </a:extLst>
           </p:cNvPr>
@@ -2244,8 +2406,8 @@
         </p:nvSpPr>
         <p:spPr>
           <a:xfrm xmlns:a="http://schemas.openxmlformats.org/drawingml/2006/main">
-            <a:off x="2800350" y="1781175"/>
-            <a:ext cx="3238500" cy="361950"/>
+            <a:off x="1466850" y="2076450"/>
+            <a:ext cx="2971800" cy="352425"/>
           </a:xfrm>
           <a:prstGeom xmlns:a="http://schemas.openxmlformats.org/drawingml/2006/main" prst="rect">
             <a:avLst/>
@@ -2262,35 +2424,35 @@
           <a:lstStyle xmlns:a="http://schemas.openxmlformats.org/drawingml/2006/main"/>
           <a:p xmlns:a="http://schemas.openxmlformats.org/drawingml/2006/main">
             <a:pPr>
-              <a:defRPr sz="1800" b="0">
-                <a:solidFill>
-                  <a:srgbClr val="456162"/>
-                </a:solidFill>
-                <a:latin typeface="Malgun Gothic"/>
-                <a:ea typeface="Malgun Gothic"/>
-                <a:cs typeface="Malgun Gothic"/>
-              </a:defRPr>
-            </a:pPr>
-            <a:r>
-              <a:rPr sz="1800" b="0">
-                <a:solidFill>
-                  <a:srgbClr val="456162"/>
-                </a:solidFill>
-                <a:latin typeface="Malgun Gothic"/>
-                <a:ea typeface="Malgun Gothic"/>
-                <a:cs typeface="Malgun Gothic"/>
+              <a:defRPr sz="1575" b="0">
+                <a:solidFill>
+                  <a:srgbClr val="586C68"/>
+                </a:solidFill>
+                <a:latin typeface="Segoe UI"/>
+                <a:ea typeface="Segoe UI"/>
+                <a:cs typeface="Segoe UI"/>
+              </a:defRPr>
+            </a:pPr>
+            <a:r>
+              <a:rPr sz="1575" b="0">
+                <a:solidFill>
+                  <a:srgbClr val="586C68"/>
+                </a:solidFill>
+                <a:latin typeface="Segoe UI"/>
+                <a:ea typeface="Segoe UI"/>
+                <a:cs typeface="Segoe UI"/>
               </a:rPr>
-              <a:t>예측 지식 전달</a:t>
-            </a:r>
-          </a:p>
-        </p:txBody>
-      </p:sp>
-      <p:sp>
-        <p:nvSpPr>
-          <p:cNvPr id="10" name="S02-flow-3">
+              <a:t>Prediction transfer</a:t>
+            </a:r>
+          </a:p>
+        </p:txBody>
+      </p:sp>
+      <p:sp>
+        <p:nvSpPr>
+          <p:cNvPr id="11" name="S02-flow-3">
             <a:extLst xmlns:a="http://schemas.openxmlformats.org/drawingml/2006/main">
               <a:ext uri="{FF2B5EF4-FFF2-40B4-BE49-F238E27FC236}">
-                <a16:creationId xmlns:a16="http://schemas.microsoft.com/office/drawing/2014/main" id="{B9C7067B-B2B6-42C2-8AED-705DDC143E66}"/>
+                <a16:creationId xmlns:a16="http://schemas.microsoft.com/office/drawing/2014/main" id="{D6EC3D8F-1037-4D7D-8D4F-6F442121BDBC}"/>
               </a:ext>
             </a:extLst>
           </p:cNvPr>
@@ -2301,8 +2463,8 @@
         </p:nvSpPr>
         <p:spPr>
           <a:xfrm xmlns:a="http://schemas.openxmlformats.org/drawingml/2006/main">
-            <a:off x="6724650" y="1781175"/>
-            <a:ext cx="3238500" cy="361950"/>
+            <a:off x="5429250" y="2076450"/>
+            <a:ext cx="2971800" cy="352425"/>
           </a:xfrm>
           <a:prstGeom xmlns:a="http://schemas.openxmlformats.org/drawingml/2006/main" prst="rect">
             <a:avLst/>
@@ -2319,35 +2481,35 @@
           <a:lstStyle xmlns:a="http://schemas.openxmlformats.org/drawingml/2006/main"/>
           <a:p xmlns:a="http://schemas.openxmlformats.org/drawingml/2006/main">
             <a:pPr>
-              <a:defRPr sz="1800" b="0">
-                <a:solidFill>
-                  <a:srgbClr val="456162"/>
-                </a:solidFill>
-                <a:latin typeface="Malgun Gothic"/>
-                <a:ea typeface="Malgun Gothic"/>
-                <a:cs typeface="Malgun Gothic"/>
-              </a:defRPr>
-            </a:pPr>
-            <a:r>
-              <a:rPr sz="1800" b="0">
-                <a:solidFill>
-                  <a:srgbClr val="456162"/>
-                </a:solidFill>
-                <a:latin typeface="Malgun Gothic"/>
-                <a:ea typeface="Malgun Gothic"/>
-                <a:cs typeface="Malgun Gothic"/>
+              <a:defRPr sz="1575" b="0">
+                <a:solidFill>
+                  <a:srgbClr val="586C68"/>
+                </a:solidFill>
+                <a:latin typeface="Segoe UI"/>
+                <a:ea typeface="Segoe UI"/>
+                <a:cs typeface="Segoe UI"/>
+              </a:defRPr>
+            </a:pPr>
+            <a:r>
+              <a:rPr sz="1575" b="0">
+                <a:solidFill>
+                  <a:srgbClr val="586C68"/>
+                </a:solidFill>
+                <a:latin typeface="Segoe UI"/>
+                <a:ea typeface="Segoe UI"/>
+                <a:cs typeface="Segoe UI"/>
               </a:rPr>
-              <a:t>수치 표현 변환</a:t>
-            </a:r>
-          </a:p>
-        </p:txBody>
-      </p:sp>
-      <p:sp>
-        <p:nvSpPr>
-          <p:cNvPr id="11" name="S02-name-1">
+              <a:t>Numeric conversion</a:t>
+            </a:r>
+          </a:p>
+        </p:txBody>
+      </p:sp>
+      <p:sp>
+        <p:nvSpPr>
+          <p:cNvPr id="12" name="S02-stage-1">
             <a:extLst xmlns:a="http://schemas.openxmlformats.org/drawingml/2006/main">
               <a:ext uri="{FF2B5EF4-FFF2-40B4-BE49-F238E27FC236}">
-                <a16:creationId xmlns:a16="http://schemas.microsoft.com/office/drawing/2014/main" id="{78357F85-2057-4A51-AD28-31EEAB8821D5}"/>
+                <a16:creationId xmlns:a16="http://schemas.microsoft.com/office/drawing/2014/main" id="{8985360B-9721-48F9-B506-A2502A8D348A}"/>
               </a:ext>
             </a:extLst>
           </p:cNvPr>
@@ -2358,8 +2520,8 @@
         </p:nvSpPr>
         <p:spPr>
           <a:xfrm xmlns:a="http://schemas.openxmlformats.org/drawingml/2006/main">
-            <a:off x="609600" y="3619500"/>
-            <a:ext cx="3124200" cy="400050"/>
+            <a:off x="685800" y="3152775"/>
+            <a:ext cx="3181350" cy="457200"/>
           </a:xfrm>
           <a:prstGeom xmlns:a="http://schemas.openxmlformats.org/drawingml/2006/main" prst="rect">
             <a:avLst/>
@@ -2376,35 +2538,35 @@
           <a:lstStyle xmlns:a="http://schemas.openxmlformats.org/drawingml/2006/main"/>
           <a:p xmlns:a="http://schemas.openxmlformats.org/drawingml/2006/main">
             <a:pPr>
-              <a:defRPr sz="2100" b="0">
-                <a:solidFill>
-                  <a:srgbClr val="456162"/>
-                </a:solidFill>
-                <a:latin typeface="Malgun Gothic"/>
-                <a:ea typeface="Malgun Gothic"/>
-                <a:cs typeface="Malgun Gothic"/>
-              </a:defRPr>
-            </a:pPr>
-            <a:r>
-              <a:rPr sz="2100" b="0">
-                <a:solidFill>
-                  <a:srgbClr val="456162"/>
-                </a:solidFill>
-                <a:latin typeface="Malgun Gothic"/>
-                <a:ea typeface="Malgun Gothic"/>
-                <a:cs typeface="Malgun Gothic"/>
+              <a:defRPr sz="2250" b="0">
+                <a:solidFill>
+                  <a:srgbClr val="1E302F"/>
+                </a:solidFill>
+                <a:latin typeface="Segoe UI"/>
+                <a:ea typeface="Segoe UI"/>
+                <a:cs typeface="Segoe UI"/>
+              </a:defRPr>
+            </a:pPr>
+            <a:r>
+              <a:rPr sz="2250" b="0">
+                <a:solidFill>
+                  <a:srgbClr val="1E302F"/>
+                </a:solidFill>
+                <a:latin typeface="Segoe UI"/>
+                <a:ea typeface="Segoe UI"/>
+                <a:cs typeface="Segoe UI"/>
               </a:rPr>
-              <a:t>baseline</a:t>
-            </a:r>
-          </a:p>
-        </p:txBody>
-      </p:sp>
-      <p:sp>
-        <p:nvSpPr>
-          <p:cNvPr id="12" name="S02-name-2">
+              <a:t>Baseline</a:t>
+            </a:r>
+          </a:p>
+        </p:txBody>
+      </p:sp>
+      <p:sp>
+        <p:nvSpPr>
+          <p:cNvPr id="13" name="S02-name-1">
             <a:extLst xmlns:a="http://schemas.openxmlformats.org/drawingml/2006/main">
               <a:ext uri="{FF2B5EF4-FFF2-40B4-BE49-F238E27FC236}">
-                <a16:creationId xmlns:a16="http://schemas.microsoft.com/office/drawing/2014/main" id="{EB0257C9-B14C-458A-93DB-B450017F4AAF}"/>
+                <a16:creationId xmlns:a16="http://schemas.microsoft.com/office/drawing/2014/main" id="{95049510-C349-4929-8584-5DBC90F89AA2}"/>
               </a:ext>
             </a:extLst>
           </p:cNvPr>
@@ -2415,8 +2577,8 @@
         </p:nvSpPr>
         <p:spPr>
           <a:xfrm xmlns:a="http://schemas.openxmlformats.org/drawingml/2006/main">
-            <a:off x="4533900" y="3619500"/>
-            <a:ext cx="3124200" cy="400050"/>
+            <a:off x="685800" y="3724275"/>
+            <a:ext cx="3095625" cy="304800"/>
           </a:xfrm>
           <a:prstGeom xmlns:a="http://schemas.openxmlformats.org/drawingml/2006/main" prst="rect">
             <a:avLst/>
@@ -2433,35 +2595,35 @@
           <a:lstStyle xmlns:a="http://schemas.openxmlformats.org/drawingml/2006/main"/>
           <a:p xmlns:a="http://schemas.openxmlformats.org/drawingml/2006/main">
             <a:pPr>
-              <a:defRPr sz="2100" b="0">
-                <a:solidFill>
-                  <a:srgbClr val="007E80"/>
-                </a:solidFill>
-                <a:latin typeface="Malgun Gothic"/>
-                <a:ea typeface="Malgun Gothic"/>
-                <a:cs typeface="Malgun Gothic"/>
-              </a:defRPr>
-            </a:pPr>
-            <a:r>
-              <a:rPr sz="2100" b="0">
-                <a:solidFill>
-                  <a:srgbClr val="007E80"/>
-                </a:solidFill>
-                <a:latin typeface="Malgun Gothic"/>
-                <a:ea typeface="Malgun Gothic"/>
-                <a:cs typeface="Malgun Gothic"/>
+              <a:defRPr sz="1575" b="0">
+                <a:solidFill>
+                  <a:srgbClr val="287D78"/>
+                </a:solidFill>
+                <a:latin typeface="Segoe UI"/>
+                <a:ea typeface="Segoe UI"/>
+                <a:cs typeface="Segoe UI"/>
+              </a:defRPr>
+            </a:pPr>
+            <a:r>
+              <a:rPr sz="1575" b="0">
+                <a:solidFill>
+                  <a:srgbClr val="287D78"/>
+                </a:solidFill>
+                <a:latin typeface="Segoe UI"/>
+                <a:ea typeface="Segoe UI"/>
+                <a:cs typeface="Segoe UI"/>
               </a:rPr>
-              <a:t>distilled</a:t>
-            </a:r>
-          </a:p>
-        </p:txBody>
-      </p:sp>
-      <p:sp>
-        <p:nvSpPr>
-          <p:cNvPr id="13" name="S02-name-3">
+              <a:t>baseline</a:t>
+            </a:r>
+          </a:p>
+        </p:txBody>
+      </p:sp>
+      <p:sp>
+        <p:nvSpPr>
+          <p:cNvPr id="14" name="S02-detail-1">
             <a:extLst xmlns:a="http://schemas.openxmlformats.org/drawingml/2006/main">
               <a:ext uri="{FF2B5EF4-FFF2-40B4-BE49-F238E27FC236}">
-                <a16:creationId xmlns:a16="http://schemas.microsoft.com/office/drawing/2014/main" id="{9CEF6620-D8D7-4A7C-B9D7-660A1C8C332F}"/>
+                <a16:creationId xmlns:a16="http://schemas.microsoft.com/office/drawing/2014/main" id="{125424C2-44BA-44FE-848B-84FD7909F3D1}"/>
               </a:ext>
             </a:extLst>
           </p:cNvPr>
@@ -2472,8 +2634,8 @@
         </p:nvSpPr>
         <p:spPr>
           <a:xfrm xmlns:a="http://schemas.openxmlformats.org/drawingml/2006/main">
-            <a:off x="8458200" y="3619500"/>
-            <a:ext cx="3124200" cy="400050"/>
+            <a:off x="685800" y="4295775"/>
+            <a:ext cx="3181350" cy="771525"/>
           </a:xfrm>
           <a:prstGeom xmlns:a="http://schemas.openxmlformats.org/drawingml/2006/main" prst="rect">
             <a:avLst/>
@@ -2490,35 +2652,58 @@
           <a:lstStyle xmlns:a="http://schemas.openxmlformats.org/drawingml/2006/main"/>
           <a:p xmlns:a="http://schemas.openxmlformats.org/drawingml/2006/main">
             <a:pPr>
-              <a:defRPr sz="2100" b="0">
-                <a:solidFill>
-                  <a:srgbClr val="173F40"/>
-                </a:solidFill>
-                <a:latin typeface="Malgun Gothic"/>
-                <a:ea typeface="Malgun Gothic"/>
-                <a:cs typeface="Malgun Gothic"/>
-              </a:defRPr>
-            </a:pPr>
-            <a:r>
-              <a:rPr sz="2100" b="0">
-                <a:solidFill>
-                  <a:srgbClr val="173F40"/>
-                </a:solidFill>
-                <a:latin typeface="Malgun Gothic"/>
-                <a:ea typeface="Malgun Gothic"/>
-                <a:cs typeface="Malgun Gothic"/>
+              <a:defRPr sz="1800" b="0">
+                <a:solidFill>
+                  <a:srgbClr val="586C68"/>
+                </a:solidFill>
+                <a:latin typeface="Segoe UI"/>
+                <a:ea typeface="Segoe UI"/>
+                <a:cs typeface="Segoe UI"/>
+              </a:defRPr>
+            </a:pPr>
+            <a:r>
+              <a:rPr sz="1800" b="0">
+                <a:solidFill>
+                  <a:srgbClr val="586C68"/>
+                </a:solidFill>
+                <a:latin typeface="Segoe UI"/>
+                <a:ea typeface="Segoe UI"/>
+                <a:cs typeface="Segoe UI"/>
               </a:rPr>
-              <a:t>int8</a:t>
-            </a:r>
-          </a:p>
-        </p:txBody>
-      </p:sp>
-      <p:sp>
-        <p:nvSpPr>
-          <p:cNvPr id="14" name="S02-detail-1">
+              <a:t>The reference model</a:t>
+            </a:r>
+          </a:p>
+          <a:p xmlns:a="http://schemas.openxmlformats.org/drawingml/2006/main">
+            <a:pPr>
+              <a:defRPr sz="1800" b="0">
+                <a:solidFill>
+                  <a:srgbClr val="586C68"/>
+                </a:solidFill>
+                <a:latin typeface="Segoe UI"/>
+                <a:ea typeface="Segoe UI"/>
+                <a:cs typeface="Segoe UI"/>
+              </a:defRPr>
+            </a:pPr>
+            <a:r>
+              <a:rPr sz="1800" b="0">
+                <a:solidFill>
+                  <a:srgbClr val="586C68"/>
+                </a:solidFill>
+                <a:latin typeface="Segoe UI"/>
+                <a:ea typeface="Segoe UI"/>
+                <a:cs typeface="Segoe UI"/>
+              </a:rPr>
+              <a:t>serves as the teacher.</a:t>
+            </a:r>
+          </a:p>
+        </p:txBody>
+      </p:sp>
+      <p:sp>
+        <p:nvSpPr>
+          <p:cNvPr id="15" name="S02-stage-2">
             <a:extLst xmlns:a="http://schemas.openxmlformats.org/drawingml/2006/main">
               <a:ext uri="{FF2B5EF4-FFF2-40B4-BE49-F238E27FC236}">
-                <a16:creationId xmlns:a16="http://schemas.microsoft.com/office/drawing/2014/main" id="{C6E9E600-9F07-4925-B08A-3A052029B13F}"/>
+                <a16:creationId xmlns:a16="http://schemas.microsoft.com/office/drawing/2014/main" id="{E5F9886C-E7E3-4633-A958-E5212F8E5317}"/>
               </a:ext>
             </a:extLst>
           </p:cNvPr>
@@ -2529,8 +2714,8 @@
         </p:nvSpPr>
         <p:spPr>
           <a:xfrm xmlns:a="http://schemas.openxmlformats.org/drawingml/2006/main">
-            <a:off x="609600" y="4238625"/>
-            <a:ext cx="3124200" cy="857250"/>
+            <a:off x="4648200" y="3152775"/>
+            <a:ext cx="3181350" cy="457200"/>
           </a:xfrm>
           <a:prstGeom xmlns:a="http://schemas.openxmlformats.org/drawingml/2006/main" prst="rect">
             <a:avLst/>
@@ -2547,35 +2732,35 @@
           <a:lstStyle xmlns:a="http://schemas.openxmlformats.org/drawingml/2006/main"/>
           <a:p xmlns:a="http://schemas.openxmlformats.org/drawingml/2006/main">
             <a:pPr>
-              <a:defRPr sz="2025" b="0">
-                <a:solidFill>
-                  <a:srgbClr val="173F40"/>
-                </a:solidFill>
-                <a:latin typeface="Malgun Gothic"/>
-                <a:ea typeface="Malgun Gothic"/>
-                <a:cs typeface="Malgun Gothic"/>
-              </a:defRPr>
-            </a:pPr>
-            <a:r>
-              <a:rPr sz="2025" b="0">
-                <a:solidFill>
-                  <a:srgbClr val="173F40"/>
-                </a:solidFill>
-                <a:latin typeface="Malgun Gothic"/>
-                <a:ea typeface="Malgun Gothic"/>
-                <a:cs typeface="Malgun Gothic"/>
+              <a:defRPr sz="2250" b="0">
+                <a:solidFill>
+                  <a:srgbClr val="1E302F"/>
+                </a:solidFill>
+                <a:latin typeface="Segoe UI"/>
+                <a:ea typeface="Segoe UI"/>
+                <a:cs typeface="Segoe UI"/>
+              </a:defRPr>
+            </a:pPr>
+            <a:r>
+              <a:rPr sz="2250" b="0">
+                <a:solidFill>
+                  <a:srgbClr val="1E302F"/>
+                </a:solidFill>
+                <a:latin typeface="Segoe UI"/>
+                <a:ea typeface="Segoe UI"/>
+                <a:cs typeface="Segoe UI"/>
               </a:rPr>
-              <a:t>기준 모델, 교사 역할</a:t>
-            </a:r>
-          </a:p>
-        </p:txBody>
-      </p:sp>
-      <p:sp>
-        <p:nvSpPr>
-          <p:cNvPr id="15" name="S02-detail-2">
+              <a:t>Distillation</a:t>
+            </a:r>
+          </a:p>
+        </p:txBody>
+      </p:sp>
+      <p:sp>
+        <p:nvSpPr>
+          <p:cNvPr id="16" name="S02-name-2">
             <a:extLst xmlns:a="http://schemas.openxmlformats.org/drawingml/2006/main">
               <a:ext uri="{FF2B5EF4-FFF2-40B4-BE49-F238E27FC236}">
-                <a16:creationId xmlns:a16="http://schemas.microsoft.com/office/drawing/2014/main" id="{0F1A5465-FA6D-4751-A64F-58AACA05A41B}"/>
+                <a16:creationId xmlns:a16="http://schemas.microsoft.com/office/drawing/2014/main" id="{8E293791-745A-4D99-A079-03922D0FDB19}"/>
               </a:ext>
             </a:extLst>
           </p:cNvPr>
@@ -2586,8 +2771,8 @@
         </p:nvSpPr>
         <p:spPr>
           <a:xfrm xmlns:a="http://schemas.openxmlformats.org/drawingml/2006/main">
-            <a:off x="4533900" y="4238625"/>
-            <a:ext cx="3124200" cy="857250"/>
+            <a:off x="4648200" y="3724275"/>
+            <a:ext cx="3095625" cy="304800"/>
           </a:xfrm>
           <a:prstGeom xmlns:a="http://schemas.openxmlformats.org/drawingml/2006/main" prst="rect">
             <a:avLst/>
@@ -2604,58 +2789,35 @@
           <a:lstStyle xmlns:a="http://schemas.openxmlformats.org/drawingml/2006/main"/>
           <a:p xmlns:a="http://schemas.openxmlformats.org/drawingml/2006/main">
             <a:pPr>
-              <a:defRPr sz="2025" b="0">
-                <a:solidFill>
-                  <a:srgbClr val="173F40"/>
-                </a:solidFill>
-                <a:latin typeface="Malgun Gothic"/>
-                <a:ea typeface="Malgun Gothic"/>
-                <a:cs typeface="Malgun Gothic"/>
-              </a:defRPr>
-            </a:pPr>
-            <a:r>
-              <a:rPr sz="2025" b="0">
-                <a:solidFill>
-                  <a:srgbClr val="173F40"/>
-                </a:solidFill>
-                <a:latin typeface="Malgun Gothic"/>
-                <a:ea typeface="Malgun Gothic"/>
-                <a:cs typeface="Malgun Gothic"/>
+              <a:defRPr sz="1575" b="0">
+                <a:solidFill>
+                  <a:srgbClr val="287D78"/>
+                </a:solidFill>
+                <a:latin typeface="Segoe UI"/>
+                <a:ea typeface="Segoe UI"/>
+                <a:cs typeface="Segoe UI"/>
+              </a:defRPr>
+            </a:pPr>
+            <a:r>
+              <a:rPr sz="1575" b="0">
+                <a:solidFill>
+                  <a:srgbClr val="287D78"/>
+                </a:solidFill>
+                <a:latin typeface="Segoe UI"/>
+                <a:ea typeface="Segoe UI"/>
+                <a:cs typeface="Segoe UI"/>
               </a:rPr>
-              <a:t>교사 예측을 활용해</a:t>
-            </a:r>
-          </a:p>
-          <a:p xmlns:a="http://schemas.openxmlformats.org/drawingml/2006/main">
-            <a:pPr>
-              <a:defRPr sz="2025" b="0">
-                <a:solidFill>
-                  <a:srgbClr val="173F40"/>
-                </a:solidFill>
-                <a:latin typeface="Malgun Gothic"/>
-                <a:ea typeface="Malgun Gothic"/>
-                <a:cs typeface="Malgun Gothic"/>
-              </a:defRPr>
-            </a:pPr>
-            <a:r>
-              <a:rPr sz="2025" b="0">
-                <a:solidFill>
-                  <a:srgbClr val="173F40"/>
-                </a:solidFill>
-                <a:latin typeface="Malgun Gothic"/>
-                <a:ea typeface="Malgun Gothic"/>
-                <a:cs typeface="Malgun Gothic"/>
-              </a:rPr>
-              <a:t>작은 학생 모델을 학습</a:t>
-            </a:r>
-          </a:p>
-        </p:txBody>
-      </p:sp>
-      <p:sp>
-        <p:nvSpPr>
-          <p:cNvPr id="16" name="S02-detail-3">
+              <a:t>distilled</a:t>
+            </a:r>
+          </a:p>
+        </p:txBody>
+      </p:sp>
+      <p:sp>
+        <p:nvSpPr>
+          <p:cNvPr id="17" name="S02-detail-2">
             <a:extLst xmlns:a="http://schemas.openxmlformats.org/drawingml/2006/main">
               <a:ext uri="{FF2B5EF4-FFF2-40B4-BE49-F238E27FC236}">
-                <a16:creationId xmlns:a16="http://schemas.microsoft.com/office/drawing/2014/main" id="{7BE96265-20AF-47F5-858C-1B2B58B56435}"/>
+                <a16:creationId xmlns:a16="http://schemas.microsoft.com/office/drawing/2014/main" id="{83CF5FE0-4AD3-4D18-9AFA-7920E8EF220E}"/>
               </a:ext>
             </a:extLst>
           </p:cNvPr>
@@ -2666,8 +2828,8 @@
         </p:nvSpPr>
         <p:spPr>
           <a:xfrm xmlns:a="http://schemas.openxmlformats.org/drawingml/2006/main">
-            <a:off x="8458200" y="4238625"/>
-            <a:ext cx="3124200" cy="857250"/>
+            <a:off x="4648200" y="4295775"/>
+            <a:ext cx="3181350" cy="771525"/>
           </a:xfrm>
           <a:prstGeom xmlns:a="http://schemas.openxmlformats.org/drawingml/2006/main" prst="rect">
             <a:avLst/>
@@ -2684,58 +2846,58 @@
           <a:lstStyle xmlns:a="http://schemas.openxmlformats.org/drawingml/2006/main"/>
           <a:p xmlns:a="http://schemas.openxmlformats.org/drawingml/2006/main">
             <a:pPr>
-              <a:defRPr sz="2025" b="0">
-                <a:solidFill>
-                  <a:srgbClr val="173F40"/>
-                </a:solidFill>
-                <a:latin typeface="Malgun Gothic"/>
-                <a:ea typeface="Malgun Gothic"/>
-                <a:cs typeface="Malgun Gothic"/>
-              </a:defRPr>
-            </a:pPr>
-            <a:r>
-              <a:rPr sz="2025" b="0">
-                <a:solidFill>
-                  <a:srgbClr val="173F40"/>
-                </a:solidFill>
-                <a:latin typeface="Malgun Gothic"/>
-                <a:ea typeface="Malgun Gothic"/>
-                <a:cs typeface="Malgun Gothic"/>
+              <a:defRPr sz="1800" b="0">
+                <a:solidFill>
+                  <a:srgbClr val="586C68"/>
+                </a:solidFill>
+                <a:latin typeface="Segoe UI"/>
+                <a:ea typeface="Segoe UI"/>
+                <a:cs typeface="Segoe UI"/>
+              </a:defRPr>
+            </a:pPr>
+            <a:r>
+              <a:rPr sz="1800" b="0">
+                <a:solidFill>
+                  <a:srgbClr val="586C68"/>
+                </a:solidFill>
+                <a:latin typeface="Segoe UI"/>
+                <a:ea typeface="Segoe UI"/>
+                <a:cs typeface="Segoe UI"/>
               </a:rPr>
-              <a:t>학생 모델의 수치를</a:t>
+              <a:t>A smaller student learns</a:t>
             </a:r>
           </a:p>
           <a:p xmlns:a="http://schemas.openxmlformats.org/drawingml/2006/main">
             <a:pPr>
-              <a:defRPr sz="2025" b="0">
-                <a:solidFill>
-                  <a:srgbClr val="173F40"/>
-                </a:solidFill>
-                <a:latin typeface="Malgun Gothic"/>
-                <a:ea typeface="Malgun Gothic"/>
-                <a:cs typeface="Malgun Gothic"/>
-              </a:defRPr>
-            </a:pPr>
-            <a:r>
-              <a:rPr sz="2025" b="0">
-                <a:solidFill>
-                  <a:srgbClr val="173F40"/>
-                </a:solidFill>
-                <a:latin typeface="Malgun Gothic"/>
-                <a:ea typeface="Malgun Gothic"/>
-                <a:cs typeface="Malgun Gothic"/>
+              <a:defRPr sz="1800" b="0">
+                <a:solidFill>
+                  <a:srgbClr val="586C68"/>
+                </a:solidFill>
+                <a:latin typeface="Segoe UI"/>
+                <a:ea typeface="Segoe UI"/>
+                <a:cs typeface="Segoe UI"/>
+              </a:defRPr>
+            </a:pPr>
+            <a:r>
+              <a:rPr sz="1800" b="0">
+                <a:solidFill>
+                  <a:srgbClr val="586C68"/>
+                </a:solidFill>
+                <a:latin typeface="Segoe UI"/>
+                <a:ea typeface="Segoe UI"/>
+                <a:cs typeface="Segoe UI"/>
               </a:rPr>
-              <a:t>8비트 정수로 표현</a:t>
-            </a:r>
-          </a:p>
-        </p:txBody>
-      </p:sp>
-      <p:sp>
-        <p:nvSpPr>
-          <p:cNvPr id="17" name="S02-caveat">
+              <a:t>from teacher predictions.</a:t>
+            </a:r>
+          </a:p>
+        </p:txBody>
+      </p:sp>
+      <p:sp>
+        <p:nvSpPr>
+          <p:cNvPr id="18" name="S02-stage-3">
             <a:extLst xmlns:a="http://schemas.openxmlformats.org/drawingml/2006/main">
               <a:ext uri="{FF2B5EF4-FFF2-40B4-BE49-F238E27FC236}">
-                <a16:creationId xmlns:a16="http://schemas.microsoft.com/office/drawing/2014/main" id="{7B4DF687-57F2-49B1-943F-AC36FF2C1499}"/>
+                <a16:creationId xmlns:a16="http://schemas.microsoft.com/office/drawing/2014/main" id="{7DF34022-0808-4707-8EB5-EE5830F647D9}"/>
               </a:ext>
             </a:extLst>
           </p:cNvPr>
@@ -2746,8 +2908,8 @@
         </p:nvSpPr>
         <p:spPr>
           <a:xfrm xmlns:a="http://schemas.openxmlformats.org/drawingml/2006/main">
-            <a:off x="609600" y="5572125"/>
-            <a:ext cx="10953750" cy="428625"/>
+            <a:off x="8610600" y="3152775"/>
+            <a:ext cx="3181350" cy="457200"/>
           </a:xfrm>
           <a:prstGeom xmlns:a="http://schemas.openxmlformats.org/drawingml/2006/main" prst="rect">
             <a:avLst/>
@@ -2764,25 +2926,219 @@
           <a:lstStyle xmlns:a="http://schemas.openxmlformats.org/drawingml/2006/main"/>
           <a:p xmlns:a="http://schemas.openxmlformats.org/drawingml/2006/main">
             <a:pPr>
-              <a:defRPr sz="1725" b="0">
-                <a:solidFill>
-                  <a:srgbClr val="456162"/>
-                </a:solidFill>
-                <a:latin typeface="Malgun Gothic"/>
-                <a:ea typeface="Malgun Gothic"/>
-                <a:cs typeface="Malgun Gothic"/>
-              </a:defRPr>
-            </a:pPr>
-            <a:r>
-              <a:rPr sz="1725" b="0">
-                <a:solidFill>
-                  <a:srgbClr val="456162"/>
-                </a:solidFill>
-                <a:latin typeface="Malgun Gothic"/>
-                <a:ea typeface="Malgun Gothic"/>
-                <a:cs typeface="Malgun Gothic"/>
+              <a:defRPr sz="2250" b="0">
+                <a:solidFill>
+                  <a:srgbClr val="1E302F"/>
+                </a:solidFill>
+                <a:latin typeface="Segoe UI"/>
+                <a:ea typeface="Segoe UI"/>
+                <a:cs typeface="Segoe UI"/>
+              </a:defRPr>
+            </a:pPr>
+            <a:r>
+              <a:rPr sz="2250" b="0">
+                <a:solidFill>
+                  <a:srgbClr val="1E302F"/>
+                </a:solidFill>
+                <a:latin typeface="Segoe UI"/>
+                <a:ea typeface="Segoe UI"/>
+                <a:cs typeface="Segoe UI"/>
               </a:rPr>
-              <a:t>개념도이며 모델 구조·학습 설정·양자화 범위는 미제공</a:t>
+              <a:t>INT8 quantization</a:t>
+            </a:r>
+          </a:p>
+        </p:txBody>
+      </p:sp>
+      <p:sp>
+        <p:nvSpPr>
+          <p:cNvPr id="19" name="S02-name-3">
+            <a:extLst xmlns:a="http://schemas.openxmlformats.org/drawingml/2006/main">
+              <a:ext uri="{FF2B5EF4-FFF2-40B4-BE49-F238E27FC236}">
+                <a16:creationId xmlns:a16="http://schemas.microsoft.com/office/drawing/2014/main" id="{636C148B-A2F9-4F48-A1EE-72E6A939F67A}"/>
+              </a:ext>
+            </a:extLst>
+          </p:cNvPr>
+          <p:cNvSpPr>
+            <a:spLocks xmlns:a="http://schemas.openxmlformats.org/drawingml/2006/main" noGrp="1"/>
+          </p:cNvSpPr>
+          <p:nvPr/>
+        </p:nvSpPr>
+        <p:spPr>
+          <a:xfrm xmlns:a="http://schemas.openxmlformats.org/drawingml/2006/main">
+            <a:off x="8610600" y="3724275"/>
+            <a:ext cx="3095625" cy="304800"/>
+          </a:xfrm>
+          <a:prstGeom xmlns:a="http://schemas.openxmlformats.org/drawingml/2006/main" prst="rect">
+            <a:avLst/>
+          </a:prstGeom>
+          <a:noFill xmlns:a="http://schemas.openxmlformats.org/drawingml/2006/main"/>
+          <a:ln xmlns:a="http://schemas.openxmlformats.org/drawingml/2006/main" w="0">
+            <a:noFill/>
+          </a:ln>
+        </p:spPr>
+        <p:txBody>
+          <a:bodyPr xmlns:a="http://schemas.openxmlformats.org/drawingml/2006/main" wrap="none" lIns="0" tIns="0" rIns="0" bIns="0" anchor="ctr">
+            <a:noAutofit/>
+          </a:bodyPr>
+          <a:lstStyle xmlns:a="http://schemas.openxmlformats.org/drawingml/2006/main"/>
+          <a:p xmlns:a="http://schemas.openxmlformats.org/drawingml/2006/main">
+            <a:pPr>
+              <a:defRPr sz="1575" b="0">
+                <a:solidFill>
+                  <a:srgbClr val="287D78"/>
+                </a:solidFill>
+                <a:latin typeface="Segoe UI"/>
+                <a:ea typeface="Segoe UI"/>
+                <a:cs typeface="Segoe UI"/>
+              </a:defRPr>
+            </a:pPr>
+            <a:r>
+              <a:rPr sz="1575" b="0">
+                <a:solidFill>
+                  <a:srgbClr val="287D78"/>
+                </a:solidFill>
+                <a:latin typeface="Segoe UI"/>
+                <a:ea typeface="Segoe UI"/>
+                <a:cs typeface="Segoe UI"/>
+              </a:rPr>
+              <a:t>int8</a:t>
+            </a:r>
+          </a:p>
+        </p:txBody>
+      </p:sp>
+      <p:sp>
+        <p:nvSpPr>
+          <p:cNvPr id="20" name="S02-detail-3">
+            <a:extLst xmlns:a="http://schemas.openxmlformats.org/drawingml/2006/main">
+              <a:ext uri="{FF2B5EF4-FFF2-40B4-BE49-F238E27FC236}">
+                <a16:creationId xmlns:a16="http://schemas.microsoft.com/office/drawing/2014/main" id="{EA4199E6-94C7-46AF-BBBF-B1A92E9459A7}"/>
+              </a:ext>
+            </a:extLst>
+          </p:cNvPr>
+          <p:cNvSpPr>
+            <a:spLocks xmlns:a="http://schemas.openxmlformats.org/drawingml/2006/main" noGrp="1"/>
+          </p:cNvSpPr>
+          <p:nvPr/>
+        </p:nvSpPr>
+        <p:spPr>
+          <a:xfrm xmlns:a="http://schemas.openxmlformats.org/drawingml/2006/main">
+            <a:off x="8610600" y="4295775"/>
+            <a:ext cx="3181350" cy="771525"/>
+          </a:xfrm>
+          <a:prstGeom xmlns:a="http://schemas.openxmlformats.org/drawingml/2006/main" prst="rect">
+            <a:avLst/>
+          </a:prstGeom>
+          <a:noFill xmlns:a="http://schemas.openxmlformats.org/drawingml/2006/main"/>
+          <a:ln xmlns:a="http://schemas.openxmlformats.org/drawingml/2006/main" w="0">
+            <a:noFill/>
+          </a:ln>
+        </p:spPr>
+        <p:txBody>
+          <a:bodyPr xmlns:a="http://schemas.openxmlformats.org/drawingml/2006/main" wrap="none" lIns="0" tIns="0" rIns="0" bIns="0" anchor="ctr">
+            <a:noAutofit/>
+          </a:bodyPr>
+          <a:lstStyle xmlns:a="http://schemas.openxmlformats.org/drawingml/2006/main"/>
+          <a:p xmlns:a="http://schemas.openxmlformats.org/drawingml/2006/main">
+            <a:pPr>
+              <a:defRPr sz="1800" b="0">
+                <a:solidFill>
+                  <a:srgbClr val="586C68"/>
+                </a:solidFill>
+                <a:latin typeface="Segoe UI"/>
+                <a:ea typeface="Segoe UI"/>
+                <a:cs typeface="Segoe UI"/>
+              </a:defRPr>
+            </a:pPr>
+            <a:r>
+              <a:rPr sz="1800" b="0">
+                <a:solidFill>
+                  <a:srgbClr val="586C68"/>
+                </a:solidFill>
+                <a:latin typeface="Segoe UI"/>
+                <a:ea typeface="Segoe UI"/>
+                <a:cs typeface="Segoe UI"/>
+              </a:rPr>
+              <a:t>Represent student numbers</a:t>
+            </a:r>
+          </a:p>
+          <a:p xmlns:a="http://schemas.openxmlformats.org/drawingml/2006/main">
+            <a:pPr>
+              <a:defRPr sz="1800" b="0">
+                <a:solidFill>
+                  <a:srgbClr val="586C68"/>
+                </a:solidFill>
+                <a:latin typeface="Segoe UI"/>
+                <a:ea typeface="Segoe UI"/>
+                <a:cs typeface="Segoe UI"/>
+              </a:defRPr>
+            </a:pPr>
+            <a:r>
+              <a:rPr sz="1800" b="0">
+                <a:solidFill>
+                  <a:srgbClr val="586C68"/>
+                </a:solidFill>
+                <a:latin typeface="Segoe UI"/>
+                <a:ea typeface="Segoe UI"/>
+                <a:cs typeface="Segoe UI"/>
+              </a:rPr>
+              <a:t>as 8-bit integers.</a:t>
+            </a:r>
+          </a:p>
+        </p:txBody>
+      </p:sp>
+      <p:sp>
+        <p:nvSpPr>
+          <p:cNvPr id="21" name="S02-caveat">
+            <a:extLst xmlns:a="http://schemas.openxmlformats.org/drawingml/2006/main">
+              <a:ext uri="{FF2B5EF4-FFF2-40B4-BE49-F238E27FC236}">
+                <a16:creationId xmlns:a16="http://schemas.microsoft.com/office/drawing/2014/main" id="{C57FDE32-D10D-4606-886B-C68F08802B4B}"/>
+              </a:ext>
+            </a:extLst>
+          </p:cNvPr>
+          <p:cNvSpPr>
+            <a:spLocks xmlns:a="http://schemas.openxmlformats.org/drawingml/2006/main" noGrp="1"/>
+          </p:cNvSpPr>
+          <p:nvPr/>
+        </p:nvSpPr>
+        <p:spPr>
+          <a:xfrm xmlns:a="http://schemas.openxmlformats.org/drawingml/2006/main">
+            <a:off x="685800" y="5657850"/>
+            <a:ext cx="10820400" cy="361950"/>
+          </a:xfrm>
+          <a:prstGeom xmlns:a="http://schemas.openxmlformats.org/drawingml/2006/main" prst="rect">
+            <a:avLst/>
+          </a:prstGeom>
+          <a:noFill xmlns:a="http://schemas.openxmlformats.org/drawingml/2006/main"/>
+          <a:ln xmlns:a="http://schemas.openxmlformats.org/drawingml/2006/main" w="0">
+            <a:noFill/>
+          </a:ln>
+        </p:spPr>
+        <p:txBody>
+          <a:bodyPr xmlns:a="http://schemas.openxmlformats.org/drawingml/2006/main" wrap="none" lIns="0" tIns="0" rIns="0" bIns="0" anchor="ctr">
+            <a:noAutofit/>
+          </a:bodyPr>
+          <a:lstStyle xmlns:a="http://schemas.openxmlformats.org/drawingml/2006/main"/>
+          <a:p xmlns:a="http://schemas.openxmlformats.org/drawingml/2006/main">
+            <a:pPr>
+              <a:defRPr sz="1575" b="0">
+                <a:solidFill>
+                  <a:srgbClr val="586C68"/>
+                </a:solidFill>
+                <a:latin typeface="Segoe UI"/>
+                <a:ea typeface="Segoe UI"/>
+                <a:cs typeface="Segoe UI"/>
+              </a:defRPr>
+            </a:pPr>
+            <a:r>
+              <a:rPr sz="1575" b="0">
+                <a:solidFill>
+                  <a:srgbClr val="586C68"/>
+                </a:solidFill>
+                <a:latin typeface="Segoe UI"/>
+                <a:ea typeface="Segoe UI"/>
+                <a:cs typeface="Segoe UI"/>
+              </a:rPr>
+              <a:t>Conceptual workflow. Architecture and quantization scope are unspecified.</a:t>
             </a:r>
           </a:p>
         </p:txBody>
@@ -2790,7 +3146,7 @@
     </p:spTree>
     <p:extLst>
       <p:ext uri="{BB962C8B-B14F-4D97-AF65-F5344CB8AC3E}">
-        <p14:creationId xmlns:p14="http://schemas.microsoft.com/office/powerpoint/2010/main" val="1768447204"/>
+        <p14:creationId xmlns:p14="http://schemas.microsoft.com/office/powerpoint/2010/main" val="1999575251"/>
       </p:ext>
     </p:extLst>
   </p:cSld>
@@ -2803,7 +3159,7 @@
     <p:bg>
       <p:bgPr>
         <a:solidFill xmlns:a="http://schemas.openxmlformats.org/drawingml/2006/main">
-          <a:srgbClr val="F7FAF9"/>
+          <a:srgbClr val="F6F4EE"/>
         </a:solidFill>
       </p:bgPr>
     </p:bg>
@@ -2818,10 +3174,10 @@
       </p:grpSpPr>
       <p:sp>
         <p:nvSpPr>
-          <p:cNvPr id="8" name="S03-title">
+          <p:cNvPr id="9" name="S03-section">
             <a:extLst xmlns:a="http://schemas.openxmlformats.org/drawingml/2006/main">
               <a:ext uri="{FF2B5EF4-FFF2-40B4-BE49-F238E27FC236}">
-                <a16:creationId xmlns:a16="http://schemas.microsoft.com/office/drawing/2014/main" id="{9D8094C0-743D-4103-9048-C9F1F1EFEC0A}"/>
+                <a16:creationId xmlns:a16="http://schemas.microsoft.com/office/drawing/2014/main" id="{533610C8-20CD-4FFE-B28E-BAD1925CE24F}"/>
               </a:ext>
             </a:extLst>
           </p:cNvPr>
@@ -2832,8 +3188,8 @@
         </p:nvSpPr>
         <p:spPr>
           <a:xfrm xmlns:a="http://schemas.openxmlformats.org/drawingml/2006/main">
-            <a:off x="609600" y="438150"/>
-            <a:ext cx="10972800" cy="666750"/>
+            <a:off x="685800" y="400050"/>
+            <a:ext cx="10744200" cy="257175"/>
           </a:xfrm>
           <a:prstGeom xmlns:a="http://schemas.openxmlformats.org/drawingml/2006/main" prst="rect">
             <a:avLst/>
@@ -2850,35 +3206,35 @@
           <a:lstStyle xmlns:a="http://schemas.openxmlformats.org/drawingml/2006/main"/>
           <a:p xmlns:a="http://schemas.openxmlformats.org/drawingml/2006/main">
             <a:pPr>
-              <a:defRPr sz="3375" b="1">
-                <a:solidFill>
-                  <a:srgbClr val="173F40"/>
-                </a:solidFill>
-                <a:latin typeface="Malgun Gothic"/>
-                <a:ea typeface="Malgun Gothic"/>
-                <a:cs typeface="Malgun Gothic"/>
-              </a:defRPr>
-            </a:pPr>
-            <a:r>
-              <a:rPr sz="3375" b="1">
-                <a:solidFill>
-                  <a:srgbClr val="173F40"/>
-                </a:solidFill>
-                <a:latin typeface="Malgun Gothic"/>
-                <a:ea typeface="Malgun Gothic"/>
-                <a:cs typeface="Malgun Gothic"/>
+              <a:defRPr sz="1425" b="0">
+                <a:solidFill>
+                  <a:srgbClr val="287D78"/>
+                </a:solidFill>
+                <a:latin typeface="Segoe UI"/>
+                <a:ea typeface="Segoe UI"/>
+                <a:cs typeface="Segoe UI"/>
+              </a:defRPr>
+            </a:pPr>
+            <a:r>
+              <a:rPr sz="1425" b="0">
+                <a:solidFill>
+                  <a:srgbClr val="287D78"/>
+                </a:solidFill>
+                <a:latin typeface="Segoe UI"/>
+                <a:ea typeface="Segoe UI"/>
+                <a:cs typeface="Segoe UI"/>
               </a:rPr>
-              <a:t>동일 장치·데이터에서 비교한 가상 성능</a:t>
-            </a:r>
-          </a:p>
-        </p:txBody>
-      </p:sp>
-      <p:sp>
-        <p:nvSpPr>
-          <p:cNvPr id="2" name="S03-disclosure">
+              <a:t>EVIDENCE / FICTIONAL COMPARISON</a:t>
+            </a:r>
+          </a:p>
+        </p:txBody>
+      </p:sp>
+      <p:sp>
+        <p:nvSpPr>
+          <p:cNvPr id="2" name="S03-title">
             <a:extLst xmlns:a="http://schemas.openxmlformats.org/drawingml/2006/main">
               <a:ext uri="{FF2B5EF4-FFF2-40B4-BE49-F238E27FC236}">
-                <a16:creationId xmlns:a16="http://schemas.microsoft.com/office/drawing/2014/main" id="{DB2D7A61-BFAE-4FC4-B914-68911C377983}"/>
+                <a16:creationId xmlns:a16="http://schemas.microsoft.com/office/drawing/2014/main" id="{CE70BED3-63C0-4CDA-8B29-D663C34D27C9}"/>
               </a:ext>
             </a:extLst>
           </p:cNvPr>
@@ -2889,8 +3245,8 @@
         </p:nvSpPr>
         <p:spPr>
           <a:xfrm xmlns:a="http://schemas.openxmlformats.org/drawingml/2006/main">
-            <a:off x="609600" y="6286500"/>
-            <a:ext cx="9525000" cy="285750"/>
+            <a:off x="685800" y="895350"/>
+            <a:ext cx="10820400" cy="666750"/>
           </a:xfrm>
           <a:prstGeom xmlns:a="http://schemas.openxmlformats.org/drawingml/2006/main" prst="rect">
             <a:avLst/>
@@ -2907,35 +3263,35 @@
           <a:lstStyle xmlns:a="http://schemas.openxmlformats.org/drawingml/2006/main"/>
           <a:p xmlns:a="http://schemas.openxmlformats.org/drawingml/2006/main">
             <a:pPr>
-              <a:defRPr sz="1425" b="0">
-                <a:solidFill>
-                  <a:srgbClr val="456162"/>
-                </a:solidFill>
-                <a:latin typeface="Malgun Gothic"/>
-                <a:ea typeface="Malgun Gothic"/>
-                <a:cs typeface="Malgun Gothic"/>
-              </a:defRPr>
-            </a:pPr>
-            <a:r>
-              <a:rPr sz="1425" b="0">
-                <a:solidFill>
-                  <a:srgbClr val="456162"/>
-                </a:solidFill>
-                <a:latin typeface="Malgun Gothic"/>
-                <a:ea typeface="Malgun Gothic"/>
-                <a:cs typeface="Malgun Gothic"/>
+              <a:defRPr sz="3225" b="0">
+                <a:solidFill>
+                  <a:srgbClr val="1E302F"/>
+                </a:solidFill>
+                <a:latin typeface="Segoe UI"/>
+                <a:ea typeface="Segoe UI"/>
+                <a:cs typeface="Segoe UI"/>
+              </a:defRPr>
+            </a:pPr>
+            <a:r>
+              <a:rPr sz="3225" b="0">
+                <a:solidFill>
+                  <a:srgbClr val="1E302F"/>
+                </a:solidFill>
+                <a:latin typeface="Segoe UI"/>
+                <a:ea typeface="Segoe UI"/>
+                <a:cs typeface="Segoe UI"/>
               </a:rPr>
-              <a:t>모든 성능 수치는 가상 예시입니다</a:t>
-            </a:r>
-          </a:p>
-        </p:txBody>
-      </p:sp>
-      <p:sp>
-        <p:nvSpPr>
-          <p:cNvPr id="3" name="S03-number">
+              <a:t>Three models. One shared comparison.</a:t>
+            </a:r>
+          </a:p>
+        </p:txBody>
+      </p:sp>
+      <p:sp>
+        <p:nvSpPr>
+          <p:cNvPr id="3" name="S03-disclosure">
             <a:extLst xmlns:a="http://schemas.openxmlformats.org/drawingml/2006/main">
               <a:ext uri="{FF2B5EF4-FFF2-40B4-BE49-F238E27FC236}">
-                <a16:creationId xmlns:a16="http://schemas.microsoft.com/office/drawing/2014/main" id="{D3329BEC-519C-4FC7-84AC-A418E010F3F7}"/>
+                <a16:creationId xmlns:a16="http://schemas.microsoft.com/office/drawing/2014/main" id="{58292DC1-2B05-42C8-A46E-08495A59EBFA}"/>
               </a:ext>
             </a:extLst>
           </p:cNvPr>
@@ -2946,8 +3302,8 @@
         </p:nvSpPr>
         <p:spPr>
           <a:xfrm xmlns:a="http://schemas.openxmlformats.org/drawingml/2006/main">
-            <a:off x="10953750" y="6286500"/>
-            <a:ext cx="609600" cy="285750"/>
+            <a:off x="685800" y="6372225"/>
+            <a:ext cx="9525000" cy="219075"/>
           </a:xfrm>
           <a:prstGeom xmlns:a="http://schemas.openxmlformats.org/drawingml/2006/main" prst="rect">
             <a:avLst/>
@@ -2964,37 +3320,151 @@
           <a:lstStyle xmlns:a="http://schemas.openxmlformats.org/drawingml/2006/main"/>
           <a:p xmlns:a="http://schemas.openxmlformats.org/drawingml/2006/main">
             <a:pPr>
-              <a:defRPr sz="1425" b="0">
-                <a:solidFill>
-                  <a:srgbClr val="456162"/>
-                </a:solidFill>
-                <a:latin typeface="Malgun Gothic"/>
-                <a:ea typeface="Malgun Gothic"/>
-                <a:cs typeface="Malgun Gothic"/>
-              </a:defRPr>
-            </a:pPr>
-            <a:r>
-              <a:rPr sz="1425" b="0">
-                <a:solidFill>
-                  <a:srgbClr val="456162"/>
-                </a:solidFill>
-                <a:latin typeface="Malgun Gothic"/>
-                <a:ea typeface="Malgun Gothic"/>
-                <a:cs typeface="Malgun Gothic"/>
+              <a:defRPr sz="1275" b="0">
+                <a:solidFill>
+                  <a:srgbClr val="586C68"/>
+                </a:solidFill>
+                <a:latin typeface="Segoe UI"/>
+                <a:ea typeface="Segoe UI"/>
+                <a:cs typeface="Segoe UI"/>
+              </a:defRPr>
+            </a:pPr>
+            <a:r>
+              <a:rPr sz="1275" b="0">
+                <a:solidFill>
+                  <a:srgbClr val="586C68"/>
+                </a:solidFill>
+                <a:latin typeface="Segoe UI"/>
+                <a:ea typeface="Segoe UI"/>
+                <a:cs typeface="Segoe UI"/>
+              </a:rPr>
+              <a:t>Illustrative data · not experimental results</a:t>
+            </a:r>
+          </a:p>
+        </p:txBody>
+      </p:sp>
+      <p:sp>
+        <p:nvSpPr>
+          <p:cNvPr id="4" name="S03-number">
+            <a:extLst xmlns:a="http://schemas.openxmlformats.org/drawingml/2006/main">
+              <a:ext uri="{FF2B5EF4-FFF2-40B4-BE49-F238E27FC236}">
+                <a16:creationId xmlns:a16="http://schemas.microsoft.com/office/drawing/2014/main" id="{2A831829-C4C5-4502-AA30-B5947112B1A9}"/>
+              </a:ext>
+            </a:extLst>
+          </p:cNvPr>
+          <p:cNvSpPr>
+            <a:spLocks xmlns:a="http://schemas.openxmlformats.org/drawingml/2006/main" noGrp="1"/>
+          </p:cNvSpPr>
+          <p:nvPr/>
+        </p:nvSpPr>
+        <p:spPr>
+          <a:xfrm xmlns:a="http://schemas.openxmlformats.org/drawingml/2006/main">
+            <a:off x="11144250" y="6372225"/>
+            <a:ext cx="361950" cy="219075"/>
+          </a:xfrm>
+          <a:prstGeom xmlns:a="http://schemas.openxmlformats.org/drawingml/2006/main" prst="rect">
+            <a:avLst/>
+          </a:prstGeom>
+          <a:noFill xmlns:a="http://schemas.openxmlformats.org/drawingml/2006/main"/>
+          <a:ln xmlns:a="http://schemas.openxmlformats.org/drawingml/2006/main" w="0">
+            <a:noFill/>
+          </a:ln>
+        </p:spPr>
+        <p:txBody>
+          <a:bodyPr xmlns:a="http://schemas.openxmlformats.org/drawingml/2006/main" wrap="none" lIns="0" tIns="0" rIns="0" bIns="0" anchor="ctr">
+            <a:noAutofit/>
+          </a:bodyPr>
+          <a:lstStyle xmlns:a="http://schemas.openxmlformats.org/drawingml/2006/main"/>
+          <a:p xmlns:a="http://schemas.openxmlformats.org/drawingml/2006/main">
+            <a:pPr>
+              <a:defRPr sz="1275" b="0">
+                <a:solidFill>
+                  <a:srgbClr val="586C68"/>
+                </a:solidFill>
+                <a:latin typeface="Segoe UI"/>
+                <a:ea typeface="Segoe UI"/>
+                <a:cs typeface="Segoe UI"/>
+              </a:defRPr>
+            </a:pPr>
+            <a:r>
+              <a:rPr sz="1275" b="0">
+                <a:solidFill>
+                  <a:srgbClr val="586C68"/>
+                </a:solidFill>
+                <a:latin typeface="Segoe UI"/>
+                <a:ea typeface="Segoe UI"/>
+                <a:cs typeface="Segoe UI"/>
               </a:rPr>
               <a:t>03</a:t>
             </a:r>
           </a:p>
         </p:txBody>
       </p:sp>
+      <p:sp>
+        <p:nvSpPr>
+          <p:cNvPr id="5" name="S03-direction">
+            <a:extLst xmlns:a="http://schemas.openxmlformats.org/drawingml/2006/main">
+              <a:ext uri="{FF2B5EF4-FFF2-40B4-BE49-F238E27FC236}">
+                <a16:creationId xmlns:a16="http://schemas.microsoft.com/office/drawing/2014/main" id="{5F860A98-9107-4FD4-958D-C1FFF623BA7B}"/>
+              </a:ext>
+            </a:extLst>
+          </p:cNvPr>
+          <p:cNvSpPr>
+            <a:spLocks xmlns:a="http://schemas.openxmlformats.org/drawingml/2006/main" noGrp="1"/>
+          </p:cNvSpPr>
+          <p:nvPr/>
+        </p:nvSpPr>
+        <p:spPr>
+          <a:xfrm xmlns:a="http://schemas.openxmlformats.org/drawingml/2006/main">
+            <a:off x="685800" y="1628775"/>
+            <a:ext cx="10820400" cy="381000"/>
+          </a:xfrm>
+          <a:prstGeom xmlns:a="http://schemas.openxmlformats.org/drawingml/2006/main" prst="rect">
+            <a:avLst/>
+          </a:prstGeom>
+          <a:noFill xmlns:a="http://schemas.openxmlformats.org/drawingml/2006/main"/>
+          <a:ln xmlns:a="http://schemas.openxmlformats.org/drawingml/2006/main" w="0">
+            <a:noFill/>
+          </a:ln>
+        </p:spPr>
+        <p:txBody>
+          <a:bodyPr xmlns:a="http://schemas.openxmlformats.org/drawingml/2006/main" wrap="none" lIns="0" tIns="0" rIns="0" bIns="0" anchor="ctr">
+            <a:noAutofit/>
+          </a:bodyPr>
+          <a:lstStyle xmlns:a="http://schemas.openxmlformats.org/drawingml/2006/main"/>
+          <a:p xmlns:a="http://schemas.openxmlformats.org/drawingml/2006/main">
+            <a:pPr>
+              <a:defRPr sz="1800" b="0">
+                <a:solidFill>
+                  <a:srgbClr val="586C68"/>
+                </a:solidFill>
+                <a:latin typeface="Segoe UI"/>
+                <a:ea typeface="Segoe UI"/>
+                <a:cs typeface="Segoe UI"/>
+              </a:defRPr>
+            </a:pPr>
+            <a:r>
+              <a:rPr sz="1800" b="0">
+                <a:solidFill>
+                  <a:srgbClr val="586C68"/>
+                </a:solidFill>
+                <a:latin typeface="Segoe UI"/>
+                <a:ea typeface="Segoe UI"/>
+                <a:cs typeface="Segoe UI"/>
+              </a:rPr>
+              <a:t>Lower latency and size are better; higher F1 is better.</a:t>
+            </a:r>
+          </a:p>
+        </p:txBody>
+      </p:sp>
       <p:graphicFrame>
         <p:nvGraphicFramePr>
-          <p:cNvPr id="11" name=""/>
+          <p:cNvPr id="14" name=""/>
           <p:cNvGraphicFramePr/>
           <p:nvPr/>
         </p:nvGraphicFramePr>
         <p:xfrm>
-          <a:off xmlns:a="http://schemas.openxmlformats.org/drawingml/2006/main" x="609600" y="2171700"/>
+          <a:off xmlns:a="http://schemas.openxmlformats.org/drawingml/2006/main" x="609600" y="2314575"/>
           <a:ext xmlns:a="http://schemas.openxmlformats.org/drawingml/2006/main" cx="10972800" cy="2857500"/>
         </p:xfrm>
         <a:graphic xmlns:a="http://schemas.openxmlformats.org/drawingml/2006/main">
@@ -3002,10 +3472,10 @@
             <a:tbl>
               <a:tblPr/>
               <a:tblGrid>
-                <a:gridCol w="3200400"/>
-                <a:gridCol w="2476500"/>
-                <a:gridCol w="2190750"/>
-                <a:gridCol w="3105150"/>
+                <a:gridCol w="3429000"/>
+                <a:gridCol w="2667000"/>
+                <a:gridCol w="2209800"/>
+                <a:gridCol w="2667000"/>
               </a:tblGrid>
               <a:tr h="714375">
                 <a:tc>
@@ -3015,21 +3485,39 @@
                     <a:p>
                       <a:pPr algn="l"/>
                       <a:r>
-                        <a:rPr sz="2175" b="1">
+                        <a:rPr sz="1800" b="0">
                           <a:solidFill>
-                            <a:srgbClr val="FFFFFF"/>
+                            <a:srgbClr val="586C68"/>
                           </a:solidFill>
-                          <a:latin typeface="Malgun Gothic"/>
-                          <a:ea typeface="Malgun Gothic"/>
-                          <a:cs typeface="Malgun Gothic"/>
+                          <a:latin typeface="Segoe UI"/>
+                          <a:ea typeface="Segoe UI"/>
+                          <a:cs typeface="Segoe UI"/>
                         </a:rPr>
-                        <a:t>모델</a:t>
+                        <a:t>Model</a:t>
                       </a:r>
                     </a:p>
                   </a:txBody>
-                  <a:tcPr marL="91440" marR="91440" marT="45720" marB="45720" anchor="ctr">
+                  <a:tcPr marL="95250" marR="95250" marT="95250" marB="95250" anchor="ctr">
+                    <a:lnL w="12700">
+                      <a:noFill/>
+                    </a:lnL>
+                    <a:lnR w="12700">
+                      <a:noFill/>
+                    </a:lnR>
+                    <a:lnT w="12700">
+                      <a:noFill/>
+                    </a:lnT>
+                    <a:lnB w="12700">
+                      <a:noFill/>
+                    </a:lnB>
+                    <a:lnTlToBr w="12700">
+                      <a:noFill/>
+                    </a:lnTlToBr>
+                    <a:lnBlToTr w="12700">
+                      <a:noFill/>
+                    </a:lnBlToTr>
                     <a:solidFill>
-                      <a:srgbClr val="173F40"/>
+                      <a:srgbClr val="F6F4EE"/>
                     </a:solidFill>
                   </a:tcPr>
                 </a:tc>
@@ -3040,21 +3528,39 @@
                     <a:p>
                       <a:pPr algn="ctr"/>
                       <a:r>
-                        <a:rPr sz="2175" b="1">
+                        <a:rPr sz="1800" b="0">
                           <a:solidFill>
-                            <a:srgbClr val="FFFFFF"/>
+                            <a:srgbClr val="586C68"/>
                           </a:solidFill>
-                          <a:latin typeface="Malgun Gothic"/>
-                          <a:ea typeface="Malgun Gothic"/>
-                          <a:cs typeface="Malgun Gothic"/>
+                          <a:latin typeface="Segoe UI"/>
+                          <a:ea typeface="Segoe UI"/>
+                          <a:cs typeface="Segoe UI"/>
                         </a:rPr>
-                        <a:t>지연 (ms)</a:t>
+                        <a:t>Latency (ms)</a:t>
                       </a:r>
                     </a:p>
                   </a:txBody>
-                  <a:tcPr marL="91440" marR="91440" marT="45720" marB="45720" anchor="ctr">
+                  <a:tcPr marL="95250" marR="95250" marT="95250" marB="95250" anchor="ctr">
+                    <a:lnL w="12700">
+                      <a:noFill/>
+                    </a:lnL>
+                    <a:lnR w="12700">
+                      <a:noFill/>
+                    </a:lnR>
+                    <a:lnT w="12700">
+                      <a:noFill/>
+                    </a:lnT>
+                    <a:lnB w="12700">
+                      <a:noFill/>
+                    </a:lnB>
+                    <a:lnTlToBr w="12700">
+                      <a:noFill/>
+                    </a:lnTlToBr>
+                    <a:lnBlToTr w="12700">
+                      <a:noFill/>
+                    </a:lnBlToTr>
                     <a:solidFill>
-                      <a:srgbClr val="173F40"/>
+                      <a:srgbClr val="F6F4EE"/>
                     </a:solidFill>
                   </a:tcPr>
                 </a:tc>
@@ -3065,21 +3571,39 @@
                     <a:p>
                       <a:pPr algn="ctr"/>
                       <a:r>
-                        <a:rPr sz="2175" b="1">
+                        <a:rPr sz="1800" b="0">
                           <a:solidFill>
-                            <a:srgbClr val="FFFFFF"/>
+                            <a:srgbClr val="586C68"/>
                           </a:solidFill>
-                          <a:latin typeface="Malgun Gothic"/>
-                          <a:ea typeface="Malgun Gothic"/>
-                          <a:cs typeface="Malgun Gothic"/>
+                          <a:latin typeface="Segoe UI"/>
+                          <a:ea typeface="Segoe UI"/>
+                          <a:cs typeface="Segoe UI"/>
                         </a:rPr>
                         <a:t>F1</a:t>
                       </a:r>
                     </a:p>
                   </a:txBody>
-                  <a:tcPr marL="91440" marR="91440" marT="45720" marB="45720" anchor="ctr">
+                  <a:tcPr marL="95250" marR="95250" marT="95250" marB="95250" anchor="ctr">
+                    <a:lnL w="12700">
+                      <a:noFill/>
+                    </a:lnL>
+                    <a:lnR w="12700">
+                      <a:noFill/>
+                    </a:lnR>
+                    <a:lnT w="12700">
+                      <a:noFill/>
+                    </a:lnT>
+                    <a:lnB w="12700">
+                      <a:noFill/>
+                    </a:lnB>
+                    <a:lnTlToBr w="12700">
+                      <a:noFill/>
+                    </a:lnTlToBr>
+                    <a:lnBlToTr w="12700">
+                      <a:noFill/>
+                    </a:lnBlToTr>
                     <a:solidFill>
-                      <a:srgbClr val="173F40"/>
+                      <a:srgbClr val="F6F4EE"/>
                     </a:solidFill>
                   </a:tcPr>
                 </a:tc>
@@ -3090,21 +3614,39 @@
                     <a:p>
                       <a:pPr algn="ctr"/>
                       <a:r>
-                        <a:rPr sz="2175" b="1">
+                        <a:rPr sz="1800" b="0">
                           <a:solidFill>
-                            <a:srgbClr val="FFFFFF"/>
+                            <a:srgbClr val="586C68"/>
                           </a:solidFill>
-                          <a:latin typeface="Malgun Gothic"/>
-                          <a:ea typeface="Malgun Gothic"/>
-                          <a:cs typeface="Malgun Gothic"/>
+                          <a:latin typeface="Segoe UI"/>
+                          <a:ea typeface="Segoe UI"/>
+                          <a:cs typeface="Segoe UI"/>
                         </a:rPr>
-                        <a:t>모델 크기 (MB)</a:t>
+                        <a:t>Size (MB)</a:t>
                       </a:r>
                     </a:p>
                   </a:txBody>
-                  <a:tcPr marL="91440" marR="91440" marT="45720" marB="45720" anchor="ctr">
+                  <a:tcPr marL="95250" marR="95250" marT="95250" marB="95250" anchor="ctr">
+                    <a:lnL w="12700">
+                      <a:noFill/>
+                    </a:lnL>
+                    <a:lnR w="12700">
+                      <a:noFill/>
+                    </a:lnR>
+                    <a:lnT w="12700">
+                      <a:noFill/>
+                    </a:lnT>
+                    <a:lnB w="12700">
+                      <a:noFill/>
+                    </a:lnB>
+                    <a:lnTlToBr w="12700">
+                      <a:noFill/>
+                    </a:lnTlToBr>
+                    <a:lnBlToTr w="12700">
+                      <a:noFill/>
+                    </a:lnBlToTr>
                     <a:solidFill>
-                      <a:srgbClr val="173F40"/>
+                      <a:srgbClr val="F6F4EE"/>
                     </a:solidFill>
                   </a:tcPr>
                 </a:tc>
@@ -3117,21 +3659,39 @@
                     <a:p>
                       <a:pPr algn="l"/>
                       <a:r>
-                        <a:rPr sz="2175" b="0">
+                        <a:rPr sz="2400" b="0">
                           <a:solidFill>
-                            <a:srgbClr val="173F40"/>
+                            <a:srgbClr val="1E302F"/>
                           </a:solidFill>
-                          <a:latin typeface="Malgun Gothic"/>
-                          <a:ea typeface="Malgun Gothic"/>
-                          <a:cs typeface="Malgun Gothic"/>
+                          <a:latin typeface="Segoe UI"/>
+                          <a:ea typeface="Segoe UI"/>
+                          <a:cs typeface="Segoe UI"/>
                         </a:rPr>
                         <a:t>baseline</a:t>
                       </a:r>
                     </a:p>
                   </a:txBody>
-                  <a:tcPr marL="91440" marR="91440" marT="45720" marB="45720" anchor="ctr">
+                  <a:tcPr marL="95250" marR="95250" marT="95250" marB="95250" anchor="ctr">
+                    <a:lnL w="12700">
+                      <a:noFill/>
+                    </a:lnL>
+                    <a:lnR w="12700">
+                      <a:noFill/>
+                    </a:lnR>
+                    <a:lnT w="12700">
+                      <a:noFill/>
+                    </a:lnT>
+                    <a:lnB w="12700">
+                      <a:noFill/>
+                    </a:lnB>
+                    <a:lnTlToBr w="12700">
+                      <a:noFill/>
+                    </a:lnTlToBr>
+                    <a:lnBlToTr w="12700">
+                      <a:noFill/>
+                    </a:lnBlToTr>
                     <a:solidFill>
-                      <a:srgbClr val="FFFFFF"/>
+                      <a:srgbClr val="F6F4EE"/>
                     </a:solidFill>
                   </a:tcPr>
                 </a:tc>
@@ -3142,21 +3702,39 @@
                     <a:p>
                       <a:pPr algn="ctr"/>
                       <a:r>
-                        <a:rPr sz="2175" b="0">
+                        <a:rPr sz="2400" b="0">
                           <a:solidFill>
-                            <a:srgbClr val="173F40"/>
+                            <a:srgbClr val="1E302F"/>
                           </a:solidFill>
-                          <a:latin typeface="Malgun Gothic"/>
-                          <a:ea typeface="Malgun Gothic"/>
-                          <a:cs typeface="Malgun Gothic"/>
+                          <a:latin typeface="Segoe UI"/>
+                          <a:ea typeface="Segoe UI"/>
+                          <a:cs typeface="Segoe UI"/>
                         </a:rPr>
                         <a:t>120</a:t>
                       </a:r>
                     </a:p>
                   </a:txBody>
-                  <a:tcPr marL="91440" marR="91440" marT="45720" marB="45720" anchor="ctr">
+                  <a:tcPr marL="95250" marR="95250" marT="95250" marB="95250" anchor="ctr">
+                    <a:lnL w="12700">
+                      <a:noFill/>
+                    </a:lnL>
+                    <a:lnR w="12700">
+                      <a:noFill/>
+                    </a:lnR>
+                    <a:lnT w="12700">
+                      <a:noFill/>
+                    </a:lnT>
+                    <a:lnB w="12700">
+                      <a:noFill/>
+                    </a:lnB>
+                    <a:lnTlToBr w="12700">
+                      <a:noFill/>
+                    </a:lnTlToBr>
+                    <a:lnBlToTr w="12700">
+                      <a:noFill/>
+                    </a:lnBlToTr>
                     <a:solidFill>
-                      <a:srgbClr val="FFFFFF"/>
+                      <a:srgbClr val="F6F4EE"/>
                     </a:solidFill>
                   </a:tcPr>
                 </a:tc>
@@ -3167,21 +3745,39 @@
                     <a:p>
                       <a:pPr algn="ctr"/>
                       <a:r>
-                        <a:rPr sz="2175" b="0">
+                        <a:rPr sz="2400" b="0">
                           <a:solidFill>
-                            <a:srgbClr val="173F40"/>
+                            <a:srgbClr val="1E302F"/>
                           </a:solidFill>
-                          <a:latin typeface="Malgun Gothic"/>
-                          <a:ea typeface="Malgun Gothic"/>
-                          <a:cs typeface="Malgun Gothic"/>
+                          <a:latin typeface="Segoe UI"/>
+                          <a:ea typeface="Segoe UI"/>
+                          <a:cs typeface="Segoe UI"/>
                         </a:rPr>
                         <a:t>0.910</a:t>
                       </a:r>
                     </a:p>
                   </a:txBody>
-                  <a:tcPr marL="91440" marR="91440" marT="45720" marB="45720" anchor="ctr">
+                  <a:tcPr marL="95250" marR="95250" marT="95250" marB="95250" anchor="ctr">
+                    <a:lnL w="12700">
+                      <a:noFill/>
+                    </a:lnL>
+                    <a:lnR w="12700">
+                      <a:noFill/>
+                    </a:lnR>
+                    <a:lnT w="12700">
+                      <a:noFill/>
+                    </a:lnT>
+                    <a:lnB w="12700">
+                      <a:noFill/>
+                    </a:lnB>
+                    <a:lnTlToBr w="12700">
+                      <a:noFill/>
+                    </a:lnTlToBr>
+                    <a:lnBlToTr w="12700">
+                      <a:noFill/>
+                    </a:lnBlToTr>
                     <a:solidFill>
-                      <a:srgbClr val="FFFFFF"/>
+                      <a:srgbClr val="F6F4EE"/>
                     </a:solidFill>
                   </a:tcPr>
                 </a:tc>
@@ -3192,21 +3788,39 @@
                     <a:p>
                       <a:pPr algn="ctr"/>
                       <a:r>
-                        <a:rPr sz="2175" b="0">
+                        <a:rPr sz="2400" b="0">
                           <a:solidFill>
-                            <a:srgbClr val="173F40"/>
+                            <a:srgbClr val="1E302F"/>
                           </a:solidFill>
-                          <a:latin typeface="Malgun Gothic"/>
-                          <a:ea typeface="Malgun Gothic"/>
-                          <a:cs typeface="Malgun Gothic"/>
+                          <a:latin typeface="Segoe UI"/>
+                          <a:ea typeface="Segoe UI"/>
+                          <a:cs typeface="Segoe UI"/>
                         </a:rPr>
                         <a:t>48</a:t>
                       </a:r>
                     </a:p>
                   </a:txBody>
-                  <a:tcPr marL="91440" marR="91440" marT="45720" marB="45720" anchor="ctr">
+                  <a:tcPr marL="95250" marR="95250" marT="95250" marB="95250" anchor="ctr">
+                    <a:lnL w="12700">
+                      <a:noFill/>
+                    </a:lnL>
+                    <a:lnR w="12700">
+                      <a:noFill/>
+                    </a:lnR>
+                    <a:lnT w="12700">
+                      <a:noFill/>
+                    </a:lnT>
+                    <a:lnB w="12700">
+                      <a:noFill/>
+                    </a:lnB>
+                    <a:lnTlToBr w="12700">
+                      <a:noFill/>
+                    </a:lnTlToBr>
+                    <a:lnBlToTr w="12700">
+                      <a:noFill/>
+                    </a:lnBlToTr>
                     <a:solidFill>
-                      <a:srgbClr val="FFFFFF"/>
+                      <a:srgbClr val="F6F4EE"/>
                     </a:solidFill>
                   </a:tcPr>
                 </a:tc>
@@ -3219,21 +3833,39 @@
                     <a:p>
                       <a:pPr algn="l"/>
                       <a:r>
-                        <a:rPr sz="2175" b="0">
+                        <a:rPr sz="2400" b="0">
                           <a:solidFill>
-                            <a:srgbClr val="173F40"/>
+                            <a:srgbClr val="1E302F"/>
                           </a:solidFill>
-                          <a:latin typeface="Malgun Gothic"/>
-                          <a:ea typeface="Malgun Gothic"/>
-                          <a:cs typeface="Malgun Gothic"/>
+                          <a:latin typeface="Segoe UI"/>
+                          <a:ea typeface="Segoe UI"/>
+                          <a:cs typeface="Segoe UI"/>
                         </a:rPr>
                         <a:t>distilled</a:t>
                       </a:r>
                     </a:p>
                   </a:txBody>
-                  <a:tcPr marL="91440" marR="91440" marT="45720" marB="45720" anchor="ctr">
+                  <a:tcPr marL="95250" marR="95250" marT="95250" marB="95250" anchor="ctr">
+                    <a:lnL w="12700">
+                      <a:noFill/>
+                    </a:lnL>
+                    <a:lnR w="12700">
+                      <a:noFill/>
+                    </a:lnR>
+                    <a:lnT w="12700">
+                      <a:noFill/>
+                    </a:lnT>
+                    <a:lnB w="12700">
+                      <a:noFill/>
+                    </a:lnB>
+                    <a:lnTlToBr w="12700">
+                      <a:noFill/>
+                    </a:lnTlToBr>
+                    <a:lnBlToTr w="12700">
+                      <a:noFill/>
+                    </a:lnBlToTr>
                     <a:solidFill>
-                      <a:srgbClr val="FFFFFF"/>
+                      <a:srgbClr val="F6F4EE"/>
                     </a:solidFill>
                   </a:tcPr>
                 </a:tc>
@@ -3244,21 +3876,39 @@
                     <a:p>
                       <a:pPr algn="ctr"/>
                       <a:r>
-                        <a:rPr sz="2175" b="0">
+                        <a:rPr sz="2400" b="0">
                           <a:solidFill>
-                            <a:srgbClr val="173F40"/>
+                            <a:srgbClr val="1E302F"/>
                           </a:solidFill>
-                          <a:latin typeface="Malgun Gothic"/>
-                          <a:ea typeface="Malgun Gothic"/>
-                          <a:cs typeface="Malgun Gothic"/>
+                          <a:latin typeface="Segoe UI"/>
+                          <a:ea typeface="Segoe UI"/>
+                          <a:cs typeface="Segoe UI"/>
                         </a:rPr>
                         <a:t>72</a:t>
                       </a:r>
                     </a:p>
                   </a:txBody>
-                  <a:tcPr marL="91440" marR="91440" marT="45720" marB="45720" anchor="ctr">
+                  <a:tcPr marL="95250" marR="95250" marT="95250" marB="95250" anchor="ctr">
+                    <a:lnL w="12700">
+                      <a:noFill/>
+                    </a:lnL>
+                    <a:lnR w="12700">
+                      <a:noFill/>
+                    </a:lnR>
+                    <a:lnT w="12700">
+                      <a:noFill/>
+                    </a:lnT>
+                    <a:lnB w="12700">
+                      <a:noFill/>
+                    </a:lnB>
+                    <a:lnTlToBr w="12700">
+                      <a:noFill/>
+                    </a:lnTlToBr>
+                    <a:lnBlToTr w="12700">
+                      <a:noFill/>
+                    </a:lnBlToTr>
                     <a:solidFill>
-                      <a:srgbClr val="FFFFFF"/>
+                      <a:srgbClr val="F6F4EE"/>
                     </a:solidFill>
                   </a:tcPr>
                 </a:tc>
@@ -3269,21 +3919,39 @@
                     <a:p>
                       <a:pPr algn="ctr"/>
                       <a:r>
-                        <a:rPr sz="2175" b="0">
+                        <a:rPr sz="2400" b="0">
                           <a:solidFill>
-                            <a:srgbClr val="173F40"/>
+                            <a:srgbClr val="1E302F"/>
                           </a:solidFill>
-                          <a:latin typeface="Malgun Gothic"/>
-                          <a:ea typeface="Malgun Gothic"/>
-                          <a:cs typeface="Malgun Gothic"/>
+                          <a:latin typeface="Segoe UI"/>
+                          <a:ea typeface="Segoe UI"/>
+                          <a:cs typeface="Segoe UI"/>
                         </a:rPr>
                         <a:t>0.902</a:t>
                       </a:r>
                     </a:p>
                   </a:txBody>
-                  <a:tcPr marL="91440" marR="91440" marT="45720" marB="45720" anchor="ctr">
+                  <a:tcPr marL="95250" marR="95250" marT="95250" marB="95250" anchor="ctr">
+                    <a:lnL w="12700">
+                      <a:noFill/>
+                    </a:lnL>
+                    <a:lnR w="12700">
+                      <a:noFill/>
+                    </a:lnR>
+                    <a:lnT w="12700">
+                      <a:noFill/>
+                    </a:lnT>
+                    <a:lnB w="12700">
+                      <a:noFill/>
+                    </a:lnB>
+                    <a:lnTlToBr w="12700">
+                      <a:noFill/>
+                    </a:lnTlToBr>
+                    <a:lnBlToTr w="12700">
+                      <a:noFill/>
+                    </a:lnBlToTr>
                     <a:solidFill>
-                      <a:srgbClr val="FFFFFF"/>
+                      <a:srgbClr val="F6F4EE"/>
                     </a:solidFill>
                   </a:tcPr>
                 </a:tc>
@@ -3294,21 +3962,39 @@
                     <a:p>
                       <a:pPr algn="ctr"/>
                       <a:r>
-                        <a:rPr sz="2175" b="0">
+                        <a:rPr sz="2400" b="0">
                           <a:solidFill>
-                            <a:srgbClr val="173F40"/>
+                            <a:srgbClr val="1E302F"/>
                           </a:solidFill>
-                          <a:latin typeface="Malgun Gothic"/>
-                          <a:ea typeface="Malgun Gothic"/>
-                          <a:cs typeface="Malgun Gothic"/>
+                          <a:latin typeface="Segoe UI"/>
+                          <a:ea typeface="Segoe UI"/>
+                          <a:cs typeface="Segoe UI"/>
                         </a:rPr>
                         <a:t>18</a:t>
                       </a:r>
                     </a:p>
                   </a:txBody>
-                  <a:tcPr marL="91440" marR="91440" marT="45720" marB="45720" anchor="ctr">
+                  <a:tcPr marL="95250" marR="95250" marT="95250" marB="95250" anchor="ctr">
+                    <a:lnL w="12700">
+                      <a:noFill/>
+                    </a:lnL>
+                    <a:lnR w="12700">
+                      <a:noFill/>
+                    </a:lnR>
+                    <a:lnT w="12700">
+                      <a:noFill/>
+                    </a:lnT>
+                    <a:lnB w="12700">
+                      <a:noFill/>
+                    </a:lnB>
+                    <a:lnTlToBr w="12700">
+                      <a:noFill/>
+                    </a:lnTlToBr>
+                    <a:lnBlToTr w="12700">
+                      <a:noFill/>
+                    </a:lnBlToTr>
                     <a:solidFill>
-                      <a:srgbClr val="FFFFFF"/>
+                      <a:srgbClr val="F6F4EE"/>
                     </a:solidFill>
                   </a:tcPr>
                 </a:tc>
@@ -3321,21 +4007,39 @@
                     <a:p>
                       <a:pPr algn="l"/>
                       <a:r>
-                        <a:rPr sz="2175" b="1">
+                        <a:rPr sz="2400" b="0">
                           <a:solidFill>
-                            <a:srgbClr val="173F40"/>
+                            <a:srgbClr val="287D78"/>
                           </a:solidFill>
-                          <a:latin typeface="Malgun Gothic"/>
-                          <a:ea typeface="Malgun Gothic"/>
-                          <a:cs typeface="Malgun Gothic"/>
+                          <a:latin typeface="Segoe UI"/>
+                          <a:ea typeface="Segoe UI"/>
+                          <a:cs typeface="Segoe UI"/>
                         </a:rPr>
                         <a:t>int8</a:t>
                       </a:r>
                     </a:p>
                   </a:txBody>
-                  <a:tcPr marL="91440" marR="91440" marT="45720" marB="45720" anchor="ctr">
+                  <a:tcPr marL="95250" marR="95250" marT="95250" marB="95250" anchor="ctr">
+                    <a:lnL w="12700">
+                      <a:noFill/>
+                    </a:lnL>
+                    <a:lnR w="12700">
+                      <a:noFill/>
+                    </a:lnR>
+                    <a:lnT w="12700">
+                      <a:noFill/>
+                    </a:lnT>
+                    <a:lnB w="12700">
+                      <a:noFill/>
+                    </a:lnB>
+                    <a:lnTlToBr w="12700">
+                      <a:noFill/>
+                    </a:lnTlToBr>
+                    <a:lnBlToTr w="12700">
+                      <a:noFill/>
+                    </a:lnBlToTr>
                     <a:solidFill>
-                      <a:srgbClr val="E4F0EE"/>
+                      <a:srgbClr val="E8EDE5"/>
                     </a:solidFill>
                   </a:tcPr>
                 </a:tc>
@@ -3346,21 +4050,39 @@
                     <a:p>
                       <a:pPr algn="ctr"/>
                       <a:r>
-                        <a:rPr sz="2175" b="1">
+                        <a:rPr sz="2400" b="0">
                           <a:solidFill>
-                            <a:srgbClr val="173F40"/>
+                            <a:srgbClr val="287D78"/>
                           </a:solidFill>
-                          <a:latin typeface="Malgun Gothic"/>
-                          <a:ea typeface="Malgun Gothic"/>
-                          <a:cs typeface="Malgun Gothic"/>
+                          <a:latin typeface="Segoe UI"/>
+                          <a:ea typeface="Segoe UI"/>
+                          <a:cs typeface="Segoe UI"/>
                         </a:rPr>
                         <a:t>54</a:t>
                       </a:r>
                     </a:p>
                   </a:txBody>
-                  <a:tcPr marL="91440" marR="91440" marT="45720" marB="45720" anchor="ctr">
+                  <a:tcPr marL="95250" marR="95250" marT="95250" marB="95250" anchor="ctr">
+                    <a:lnL w="12700">
+                      <a:noFill/>
+                    </a:lnL>
+                    <a:lnR w="12700">
+                      <a:noFill/>
+                    </a:lnR>
+                    <a:lnT w="12700">
+                      <a:noFill/>
+                    </a:lnT>
+                    <a:lnB w="12700">
+                      <a:noFill/>
+                    </a:lnB>
+                    <a:lnTlToBr w="12700">
+                      <a:noFill/>
+                    </a:lnTlToBr>
+                    <a:lnBlToTr w="12700">
+                      <a:noFill/>
+                    </a:lnBlToTr>
                     <a:solidFill>
-                      <a:srgbClr val="E4F0EE"/>
+                      <a:srgbClr val="E8EDE5"/>
                     </a:solidFill>
                   </a:tcPr>
                 </a:tc>
@@ -3371,21 +4093,39 @@
                     <a:p>
                       <a:pPr algn="ctr"/>
                       <a:r>
-                        <a:rPr sz="2175" b="1">
+                        <a:rPr sz="2400" b="0">
                           <a:solidFill>
-                            <a:srgbClr val="173F40"/>
+                            <a:srgbClr val="287D78"/>
                           </a:solidFill>
-                          <a:latin typeface="Malgun Gothic"/>
-                          <a:ea typeface="Malgun Gothic"/>
-                          <a:cs typeface="Malgun Gothic"/>
+                          <a:latin typeface="Segoe UI"/>
+                          <a:ea typeface="Segoe UI"/>
+                          <a:cs typeface="Segoe UI"/>
                         </a:rPr>
                         <a:t>0.896</a:t>
                       </a:r>
                     </a:p>
                   </a:txBody>
-                  <a:tcPr marL="91440" marR="91440" marT="45720" marB="45720" anchor="ctr">
+                  <a:tcPr marL="95250" marR="95250" marT="95250" marB="95250" anchor="ctr">
+                    <a:lnL w="12700">
+                      <a:noFill/>
+                    </a:lnL>
+                    <a:lnR w="12700">
+                      <a:noFill/>
+                    </a:lnR>
+                    <a:lnT w="12700">
+                      <a:noFill/>
+                    </a:lnT>
+                    <a:lnB w="12700">
+                      <a:noFill/>
+                    </a:lnB>
+                    <a:lnTlToBr w="12700">
+                      <a:noFill/>
+                    </a:lnTlToBr>
+                    <a:lnBlToTr w="12700">
+                      <a:noFill/>
+                    </a:lnBlToTr>
                     <a:solidFill>
-                      <a:srgbClr val="E4F0EE"/>
+                      <a:srgbClr val="E8EDE5"/>
                     </a:solidFill>
                   </a:tcPr>
                 </a:tc>
@@ -3396,21 +4136,39 @@
                     <a:p>
                       <a:pPr algn="ctr"/>
                       <a:r>
-                        <a:rPr sz="2175" b="1">
+                        <a:rPr sz="2400" b="0">
                           <a:solidFill>
-                            <a:srgbClr val="173F40"/>
+                            <a:srgbClr val="287D78"/>
                           </a:solidFill>
-                          <a:latin typeface="Malgun Gothic"/>
-                          <a:ea typeface="Malgun Gothic"/>
-                          <a:cs typeface="Malgun Gothic"/>
+                          <a:latin typeface="Segoe UI"/>
+                          <a:ea typeface="Segoe UI"/>
+                          <a:cs typeface="Segoe UI"/>
                         </a:rPr>
                         <a:t>12</a:t>
                       </a:r>
                     </a:p>
                   </a:txBody>
-                  <a:tcPr marL="91440" marR="91440" marT="45720" marB="45720" anchor="ctr">
+                  <a:tcPr marL="95250" marR="95250" marT="95250" marB="95250" anchor="ctr">
+                    <a:lnL w="12700">
+                      <a:noFill/>
+                    </a:lnL>
+                    <a:lnR w="12700">
+                      <a:noFill/>
+                    </a:lnR>
+                    <a:lnT w="12700">
+                      <a:noFill/>
+                    </a:lnT>
+                    <a:lnB w="12700">
+                      <a:noFill/>
+                    </a:lnB>
+                    <a:lnTlToBr w="12700">
+                      <a:noFill/>
+                    </a:lnTlToBr>
+                    <a:lnBlToTr w="12700">
+                      <a:noFill/>
+                    </a:lnBlToTr>
                     <a:solidFill>
-                      <a:srgbClr val="E4F0EE"/>
+                      <a:srgbClr val="E8EDE5"/>
                     </a:solidFill>
                   </a:tcPr>
                 </a:tc>
@@ -3421,10 +4179,10 @@
       </p:graphicFrame>
       <p:sp>
         <p:nvSpPr>
-          <p:cNvPr id="5" name="S03-direction">
+          <p:cNvPr id="7" name="S03-header-rule">
             <a:extLst xmlns:a="http://schemas.openxmlformats.org/drawingml/2006/main">
               <a:ext uri="{FF2B5EF4-FFF2-40B4-BE49-F238E27FC236}">
-                <a16:creationId xmlns:a16="http://schemas.microsoft.com/office/drawing/2014/main" id="{5AA9D0A0-C261-4751-A545-A3C4CDEC1635}"/>
+                <a16:creationId xmlns:a16="http://schemas.microsoft.com/office/drawing/2014/main" id="{4F4933A8-7935-4902-85C4-E8CFE5886EB0}"/>
               </a:ext>
             </a:extLst>
           </p:cNvPr>
@@ -3435,8 +4193,37 @@
         </p:nvSpPr>
         <p:spPr>
           <a:xfrm xmlns:a="http://schemas.openxmlformats.org/drawingml/2006/main">
-            <a:off x="609600" y="1562100"/>
-            <a:ext cx="10972800" cy="361950"/>
+            <a:off x="685800" y="3028950"/>
+            <a:ext cx="10820400" cy="0"/>
+          </a:xfrm>
+          <a:prstGeom xmlns:a="http://schemas.openxmlformats.org/drawingml/2006/main" prst="line">
+            <a:avLst/>
+          </a:prstGeom>
+          <a:ln xmlns:a="http://schemas.openxmlformats.org/drawingml/2006/main" w="9525">
+            <a:solidFill>
+              <a:srgbClr val="CFD8D1"/>
+            </a:solidFill>
+          </a:ln>
+        </p:spPr>
+      </p:sp>
+      <p:sp>
+        <p:nvSpPr>
+          <p:cNvPr id="8" name="S03-limit">
+            <a:extLst xmlns:a="http://schemas.openxmlformats.org/drawingml/2006/main">
+              <a:ext uri="{FF2B5EF4-FFF2-40B4-BE49-F238E27FC236}">
+                <a16:creationId xmlns:a16="http://schemas.microsoft.com/office/drawing/2014/main" id="{B6827B90-3AF9-4418-89BF-646D006B2760}"/>
+              </a:ext>
+            </a:extLst>
+          </p:cNvPr>
+          <p:cNvSpPr>
+            <a:spLocks xmlns:a="http://schemas.openxmlformats.org/drawingml/2006/main" noGrp="1"/>
+          </p:cNvSpPr>
+          <p:nvPr/>
+        </p:nvSpPr>
+        <p:spPr>
+          <a:xfrm xmlns:a="http://schemas.openxmlformats.org/drawingml/2006/main">
+            <a:off x="685800" y="5619750"/>
+            <a:ext cx="10820400" cy="400050"/>
           </a:xfrm>
           <a:prstGeom xmlns:a="http://schemas.openxmlformats.org/drawingml/2006/main" prst="rect">
             <a:avLst/>
@@ -3453,139 +4240,25 @@
           <a:lstStyle xmlns:a="http://schemas.openxmlformats.org/drawingml/2006/main"/>
           <a:p xmlns:a="http://schemas.openxmlformats.org/drawingml/2006/main">
             <a:pPr>
-              <a:defRPr sz="1800" b="0">
-                <a:solidFill>
-                  <a:srgbClr val="456162"/>
-                </a:solidFill>
-                <a:latin typeface="Malgun Gothic"/>
-                <a:ea typeface="Malgun Gothic"/>
-                <a:cs typeface="Malgun Gothic"/>
-              </a:defRPr>
-            </a:pPr>
-            <a:r>
-              <a:rPr sz="1800" b="0">
-                <a:solidFill>
-                  <a:srgbClr val="456162"/>
-                </a:solidFill>
-                <a:latin typeface="Malgun Gothic"/>
-                <a:ea typeface="Malgun Gothic"/>
-                <a:cs typeface="Malgun Gothic"/>
+              <a:defRPr sz="1575" b="0">
+                <a:solidFill>
+                  <a:srgbClr val="586C68"/>
+                </a:solidFill>
+                <a:latin typeface="Segoe UI"/>
+                <a:ea typeface="Segoe UI"/>
+                <a:cs typeface="Segoe UI"/>
+              </a:defRPr>
+            </a:pPr>
+            <a:r>
+              <a:rPr sz="1575" b="0">
+                <a:solidFill>
+                  <a:srgbClr val="586C68"/>
+                </a:solidFill>
+                <a:latin typeface="Segoe UI"/>
+                <a:ea typeface="Segoe UI"/>
+                <a:cs typeface="Segoe UI"/>
               </a:rPr>
-              <a:t>지연·모델 크기는 낮을수록, F1은 높을수록 좋음</a:t>
-            </a:r>
-          </a:p>
-        </p:txBody>
-      </p:sp>
-      <p:sp>
-        <p:nvSpPr>
-          <p:cNvPr id="6" name="S03-missing">
-            <a:extLst xmlns:a="http://schemas.openxmlformats.org/drawingml/2006/main">
-              <a:ext uri="{FF2B5EF4-FFF2-40B4-BE49-F238E27FC236}">
-                <a16:creationId xmlns:a16="http://schemas.microsoft.com/office/drawing/2014/main" id="{148DD3D7-4E27-464B-A042-60E267C53DEB}"/>
-              </a:ext>
-            </a:extLst>
-          </p:cNvPr>
-          <p:cNvSpPr>
-            <a:spLocks xmlns:a="http://schemas.openxmlformats.org/drawingml/2006/main" noGrp="1"/>
-          </p:cNvSpPr>
-          <p:nvPr/>
-        </p:nvSpPr>
-        <p:spPr>
-          <a:xfrm xmlns:a="http://schemas.openxmlformats.org/drawingml/2006/main">
-            <a:off x="609600" y="5334000"/>
-            <a:ext cx="10972800" cy="342900"/>
-          </a:xfrm>
-          <a:prstGeom xmlns:a="http://schemas.openxmlformats.org/drawingml/2006/main" prst="rect">
-            <a:avLst/>
-          </a:prstGeom>
-          <a:noFill xmlns:a="http://schemas.openxmlformats.org/drawingml/2006/main"/>
-          <a:ln xmlns:a="http://schemas.openxmlformats.org/drawingml/2006/main" w="0">
-            <a:noFill/>
-          </a:ln>
-        </p:spPr>
-        <p:txBody>
-          <a:bodyPr xmlns:a="http://schemas.openxmlformats.org/drawingml/2006/main" wrap="none" lIns="0" tIns="0" rIns="0" bIns="0" anchor="ctr">
-            <a:noAutofit/>
-          </a:bodyPr>
-          <a:lstStyle xmlns:a="http://schemas.openxmlformats.org/drawingml/2006/main"/>
-          <a:p xmlns:a="http://schemas.openxmlformats.org/drawingml/2006/main">
-            <a:pPr>
-              <a:defRPr sz="2025" b="1">
-                <a:solidFill>
-                  <a:srgbClr val="173F40"/>
-                </a:solidFill>
-                <a:latin typeface="Malgun Gothic"/>
-                <a:ea typeface="Malgun Gothic"/>
-                <a:cs typeface="Malgun Gothic"/>
-              </a:defRPr>
-            </a:pPr>
-            <a:r>
-              <a:rPr sz="2025" b="1">
-                <a:solidFill>
-                  <a:srgbClr val="173F40"/>
-                </a:solidFill>
-                <a:latin typeface="Malgun Gothic"/>
-                <a:ea typeface="Malgun Gothic"/>
-                <a:cs typeface="Malgun Gothic"/>
-              </a:rPr>
-              <a:t>표본수·분산·실제 데이터셋명 미제공</a:t>
-            </a:r>
-          </a:p>
-        </p:txBody>
-      </p:sp>
-      <p:sp>
-        <p:nvSpPr>
-          <p:cNvPr id="7" name="S03-limit">
-            <a:extLst xmlns:a="http://schemas.openxmlformats.org/drawingml/2006/main">
-              <a:ext uri="{FF2B5EF4-FFF2-40B4-BE49-F238E27FC236}">
-                <a16:creationId xmlns:a16="http://schemas.microsoft.com/office/drawing/2014/main" id="{EF3C35A4-45B5-4D51-AB8F-5890D6C53FD2}"/>
-              </a:ext>
-            </a:extLst>
-          </p:cNvPr>
-          <p:cNvSpPr>
-            <a:spLocks xmlns:a="http://schemas.openxmlformats.org/drawingml/2006/main" noGrp="1"/>
-          </p:cNvSpPr>
-          <p:nvPr/>
-        </p:nvSpPr>
-        <p:spPr>
-          <a:xfrm xmlns:a="http://schemas.openxmlformats.org/drawingml/2006/main">
-            <a:off x="609600" y="5724525"/>
-            <a:ext cx="10972800" cy="342900"/>
-          </a:xfrm>
-          <a:prstGeom xmlns:a="http://schemas.openxmlformats.org/drawingml/2006/main" prst="rect">
-            <a:avLst/>
-          </a:prstGeom>
-          <a:noFill xmlns:a="http://schemas.openxmlformats.org/drawingml/2006/main"/>
-          <a:ln xmlns:a="http://schemas.openxmlformats.org/drawingml/2006/main" w="0">
-            <a:noFill/>
-          </a:ln>
-        </p:spPr>
-        <p:txBody>
-          <a:bodyPr xmlns:a="http://schemas.openxmlformats.org/drawingml/2006/main" wrap="none" lIns="0" tIns="0" rIns="0" bIns="0" anchor="ctr">
-            <a:noAutofit/>
-          </a:bodyPr>
-          <a:lstStyle xmlns:a="http://schemas.openxmlformats.org/drawingml/2006/main"/>
-          <a:p xmlns:a="http://schemas.openxmlformats.org/drawingml/2006/main">
-            <a:pPr>
-              <a:defRPr sz="1800" b="0">
-                <a:solidFill>
-                  <a:srgbClr val="456162"/>
-                </a:solidFill>
-                <a:latin typeface="Malgun Gothic"/>
-                <a:ea typeface="Malgun Gothic"/>
-                <a:cs typeface="Malgun Gothic"/>
-              </a:defRPr>
-            </a:pPr>
-            <a:r>
-              <a:rPr sz="1800" b="0">
-                <a:solidFill>
-                  <a:srgbClr val="456162"/>
-                </a:solidFill>
-                <a:latin typeface="Malgun Gothic"/>
-                <a:ea typeface="Malgun Gothic"/>
-                <a:cs typeface="Malgun Gothic"/>
-              </a:rPr>
-              <a:t>통계적 유의성이나 신뢰구간을 계산할 수 없음</a:t>
+              <a:t>Same device and data assumed. Sample count, variance and dataset are unspecified.</a:t>
             </a:r>
           </a:p>
         </p:txBody>
@@ -3593,7 +4266,7 @@
     </p:spTree>
     <p:extLst>
       <p:ext uri="{BB962C8B-B14F-4D97-AF65-F5344CB8AC3E}">
-        <p14:creationId xmlns:p14="http://schemas.microsoft.com/office/powerpoint/2010/main" val="159994177"/>
+        <p14:creationId xmlns:p14="http://schemas.microsoft.com/office/powerpoint/2010/main" val="1011031294"/>
       </p:ext>
     </p:extLst>
   </p:cSld>
@@ -3606,7 +4279,7 @@
     <p:bg>
       <p:bgPr>
         <a:solidFill xmlns:a="http://schemas.openxmlformats.org/drawingml/2006/main">
-          <a:srgbClr val="F7FAF9"/>
+          <a:srgbClr val="F6F4EE"/>
         </a:solidFill>
       </p:bgPr>
     </p:bg>
@@ -3621,10 +4294,10 @@
       </p:grpSpPr>
       <p:sp>
         <p:nvSpPr>
-          <p:cNvPr id="13" name="S04-title">
+          <p:cNvPr id="17" name="S04-section">
             <a:extLst xmlns:a="http://schemas.openxmlformats.org/drawingml/2006/main">
               <a:ext uri="{FF2B5EF4-FFF2-40B4-BE49-F238E27FC236}">
-                <a16:creationId xmlns:a16="http://schemas.microsoft.com/office/drawing/2014/main" id="{45CE6C9E-03EA-4E61-9492-3EF2E0A6070B}"/>
+                <a16:creationId xmlns:a16="http://schemas.microsoft.com/office/drawing/2014/main" id="{BC636639-B28F-4A01-9CE4-2ADE76FFCFCA}"/>
               </a:ext>
             </a:extLst>
           </p:cNvPr>
@@ -3635,8 +4308,8 @@
         </p:nvSpPr>
         <p:spPr>
           <a:xfrm xmlns:a="http://schemas.openxmlformats.org/drawingml/2006/main">
-            <a:off x="609600" y="438150"/>
-            <a:ext cx="10972800" cy="666750"/>
+            <a:off x="685800" y="400050"/>
+            <a:ext cx="10744200" cy="257175"/>
           </a:xfrm>
           <a:prstGeom xmlns:a="http://schemas.openxmlformats.org/drawingml/2006/main" prst="rect">
             <a:avLst/>
@@ -3653,35 +4326,35 @@
           <a:lstStyle xmlns:a="http://schemas.openxmlformats.org/drawingml/2006/main"/>
           <a:p xmlns:a="http://schemas.openxmlformats.org/drawingml/2006/main">
             <a:pPr>
-              <a:defRPr sz="3375" b="1">
-                <a:solidFill>
-                  <a:srgbClr val="173F40"/>
-                </a:solidFill>
-                <a:latin typeface="Malgun Gothic"/>
-                <a:ea typeface="Malgun Gothic"/>
-                <a:cs typeface="Malgun Gothic"/>
-              </a:defRPr>
-            </a:pPr>
-            <a:r>
-              <a:rPr sz="3375" b="1">
-                <a:solidFill>
-                  <a:srgbClr val="173F40"/>
-                </a:solidFill>
-                <a:latin typeface="Malgun Gothic"/>
-                <a:ea typeface="Malgun Gothic"/>
-                <a:cs typeface="Malgun Gothic"/>
+              <a:defRPr sz="1425" b="0">
+                <a:solidFill>
+                  <a:srgbClr val="287D78"/>
+                </a:solidFill>
+                <a:latin typeface="Segoe UI"/>
+                <a:ea typeface="Segoe UI"/>
+                <a:cs typeface="Segoe UI"/>
+              </a:defRPr>
+            </a:pPr>
+            <a:r>
+              <a:rPr sz="1425" b="0">
+                <a:solidFill>
+                  <a:srgbClr val="287D78"/>
+                </a:solidFill>
+                <a:latin typeface="Segoe UI"/>
+                <a:ea typeface="Segoe UI"/>
+                <a:cs typeface="Segoe UI"/>
               </a:rPr>
-              <a:t>지연 55% 감소와 F1 0.014 하락</a:t>
-            </a:r>
-          </a:p>
-        </p:txBody>
-      </p:sp>
-      <p:sp>
-        <p:nvSpPr>
-          <p:cNvPr id="2" name="S04-disclosure">
+              <a:t>RESULT / BASELINE TO INT8</a:t>
+            </a:r>
+          </a:p>
+        </p:txBody>
+      </p:sp>
+      <p:sp>
+        <p:nvSpPr>
+          <p:cNvPr id="2" name="S04-title">
             <a:extLst xmlns:a="http://schemas.openxmlformats.org/drawingml/2006/main">
               <a:ext uri="{FF2B5EF4-FFF2-40B4-BE49-F238E27FC236}">
-                <a16:creationId xmlns:a16="http://schemas.microsoft.com/office/drawing/2014/main" id="{C8AC3A78-949B-41F9-AD9A-77F2925D5AF3}"/>
+                <a16:creationId xmlns:a16="http://schemas.microsoft.com/office/drawing/2014/main" id="{F2711B63-5182-4F65-BEE2-70658FD0BC1E}"/>
               </a:ext>
             </a:extLst>
           </p:cNvPr>
@@ -3692,8 +4365,8 @@
         </p:nvSpPr>
         <p:spPr>
           <a:xfrm xmlns:a="http://schemas.openxmlformats.org/drawingml/2006/main">
-            <a:off x="609600" y="6286500"/>
-            <a:ext cx="9525000" cy="285750"/>
+            <a:off x="685800" y="895350"/>
+            <a:ext cx="10820400" cy="666750"/>
           </a:xfrm>
           <a:prstGeom xmlns:a="http://schemas.openxmlformats.org/drawingml/2006/main" prst="rect">
             <a:avLst/>
@@ -3710,35 +4383,35 @@
           <a:lstStyle xmlns:a="http://schemas.openxmlformats.org/drawingml/2006/main"/>
           <a:p xmlns:a="http://schemas.openxmlformats.org/drawingml/2006/main">
             <a:pPr>
-              <a:defRPr sz="1425" b="0">
-                <a:solidFill>
-                  <a:srgbClr val="456162"/>
-                </a:solidFill>
-                <a:latin typeface="Malgun Gothic"/>
-                <a:ea typeface="Malgun Gothic"/>
-                <a:cs typeface="Malgun Gothic"/>
-              </a:defRPr>
-            </a:pPr>
-            <a:r>
-              <a:rPr sz="1425" b="0">
-                <a:solidFill>
-                  <a:srgbClr val="456162"/>
-                </a:solidFill>
-                <a:latin typeface="Malgun Gothic"/>
-                <a:ea typeface="Malgun Gothic"/>
-                <a:cs typeface="Malgun Gothic"/>
+              <a:defRPr sz="3225" b="0">
+                <a:solidFill>
+                  <a:srgbClr val="1E302F"/>
+                </a:solidFill>
+                <a:latin typeface="Segoe UI"/>
+                <a:ea typeface="Segoe UI"/>
+                <a:cs typeface="Segoe UI"/>
+              </a:defRPr>
+            </a:pPr>
+            <a:r>
+              <a:rPr sz="3225" b="0">
+                <a:solidFill>
+                  <a:srgbClr val="1E302F"/>
+                </a:solidFill>
+                <a:latin typeface="Segoe UI"/>
+                <a:ea typeface="Segoe UI"/>
+                <a:cs typeface="Segoe UI"/>
               </a:rPr>
-              <a:t>모든 성능 수치는 가상 예시입니다</a:t>
-            </a:r>
-          </a:p>
-        </p:txBody>
-      </p:sp>
-      <p:sp>
-        <p:nvSpPr>
-          <p:cNvPr id="3" name="S04-number">
+              <a:t>Lower latency, lower F1</a:t>
+            </a:r>
+          </a:p>
+        </p:txBody>
+      </p:sp>
+      <p:sp>
+        <p:nvSpPr>
+          <p:cNvPr id="3" name="S04-disclosure">
             <a:extLst xmlns:a="http://schemas.openxmlformats.org/drawingml/2006/main">
               <a:ext uri="{FF2B5EF4-FFF2-40B4-BE49-F238E27FC236}">
-                <a16:creationId xmlns:a16="http://schemas.microsoft.com/office/drawing/2014/main" id="{26C6A625-8088-4565-9944-0F41CE84CACC}"/>
+                <a16:creationId xmlns:a16="http://schemas.microsoft.com/office/drawing/2014/main" id="{1169E09D-882C-428B-B46C-44A8F3BC6EE5}"/>
               </a:ext>
             </a:extLst>
           </p:cNvPr>
@@ -3749,8 +4422,8 @@
         </p:nvSpPr>
         <p:spPr>
           <a:xfrm xmlns:a="http://schemas.openxmlformats.org/drawingml/2006/main">
-            <a:off x="10953750" y="6286500"/>
-            <a:ext cx="609600" cy="285750"/>
+            <a:off x="685800" y="6372225"/>
+            <a:ext cx="9525000" cy="219075"/>
           </a:xfrm>
           <a:prstGeom xmlns:a="http://schemas.openxmlformats.org/drawingml/2006/main" prst="rect">
             <a:avLst/>
@@ -3767,35 +4440,35 @@
           <a:lstStyle xmlns:a="http://schemas.openxmlformats.org/drawingml/2006/main"/>
           <a:p xmlns:a="http://schemas.openxmlformats.org/drawingml/2006/main">
             <a:pPr>
-              <a:defRPr sz="1425" b="0">
-                <a:solidFill>
-                  <a:srgbClr val="456162"/>
-                </a:solidFill>
-                <a:latin typeface="Malgun Gothic"/>
-                <a:ea typeface="Malgun Gothic"/>
-                <a:cs typeface="Malgun Gothic"/>
-              </a:defRPr>
-            </a:pPr>
-            <a:r>
-              <a:rPr sz="1425" b="0">
-                <a:solidFill>
-                  <a:srgbClr val="456162"/>
-                </a:solidFill>
-                <a:latin typeface="Malgun Gothic"/>
-                <a:ea typeface="Malgun Gothic"/>
-                <a:cs typeface="Malgun Gothic"/>
+              <a:defRPr sz="1275" b="0">
+                <a:solidFill>
+                  <a:srgbClr val="586C68"/>
+                </a:solidFill>
+                <a:latin typeface="Segoe UI"/>
+                <a:ea typeface="Segoe UI"/>
+                <a:cs typeface="Segoe UI"/>
+              </a:defRPr>
+            </a:pPr>
+            <a:r>
+              <a:rPr sz="1275" b="0">
+                <a:solidFill>
+                  <a:srgbClr val="586C68"/>
+                </a:solidFill>
+                <a:latin typeface="Segoe UI"/>
+                <a:ea typeface="Segoe UI"/>
+                <a:cs typeface="Segoe UI"/>
               </a:rPr>
-              <a:t>04</a:t>
-            </a:r>
-          </a:p>
-        </p:txBody>
-      </p:sp>
-      <p:sp>
-        <p:nvSpPr>
-          <p:cNvPr id="4" name="S04-chart-unit">
+              <a:t>Illustrative data · not experimental results</a:t>
+            </a:r>
+          </a:p>
+        </p:txBody>
+      </p:sp>
+      <p:sp>
+        <p:nvSpPr>
+          <p:cNvPr id="4" name="S04-number">
             <a:extLst xmlns:a="http://schemas.openxmlformats.org/drawingml/2006/main">
               <a:ext uri="{FF2B5EF4-FFF2-40B4-BE49-F238E27FC236}">
-                <a16:creationId xmlns:a16="http://schemas.microsoft.com/office/drawing/2014/main" id="{302C4B0E-EAE5-4E5E-B13A-2E945741B099}"/>
+                <a16:creationId xmlns:a16="http://schemas.microsoft.com/office/drawing/2014/main" id="{20447F9E-9B5C-4ACF-8067-BE987339E42F}"/>
               </a:ext>
             </a:extLst>
           </p:cNvPr>
@@ -3806,8 +4479,8 @@
         </p:nvSpPr>
         <p:spPr>
           <a:xfrm xmlns:a="http://schemas.openxmlformats.org/drawingml/2006/main">
-            <a:off x="609600" y="1495425"/>
-            <a:ext cx="5715000" cy="381000"/>
+            <a:off x="11144250" y="6372225"/>
+            <a:ext cx="361950" cy="219075"/>
           </a:xfrm>
           <a:prstGeom xmlns:a="http://schemas.openxmlformats.org/drawingml/2006/main" prst="rect">
             <a:avLst/>
@@ -3824,51 +4497,108 @@
           <a:lstStyle xmlns:a="http://schemas.openxmlformats.org/drawingml/2006/main"/>
           <a:p xmlns:a="http://schemas.openxmlformats.org/drawingml/2006/main">
             <a:pPr>
-              <a:defRPr sz="2025" b="1">
-                <a:solidFill>
-                  <a:srgbClr val="173F40"/>
-                </a:solidFill>
-                <a:latin typeface="Malgun Gothic"/>
-                <a:ea typeface="Malgun Gothic"/>
-                <a:cs typeface="Malgun Gothic"/>
-              </a:defRPr>
-            </a:pPr>
-            <a:r>
-              <a:rPr sz="2025" b="1">
-                <a:solidFill>
-                  <a:srgbClr val="173F40"/>
-                </a:solidFill>
-                <a:latin typeface="Malgun Gothic"/>
-                <a:ea typeface="Malgun Gothic"/>
-                <a:cs typeface="Malgun Gothic"/>
+              <a:defRPr sz="1275" b="0">
+                <a:solidFill>
+                  <a:srgbClr val="586C68"/>
+                </a:solidFill>
+                <a:latin typeface="Segoe UI"/>
+                <a:ea typeface="Segoe UI"/>
+                <a:cs typeface="Segoe UI"/>
+              </a:defRPr>
+            </a:pPr>
+            <a:r>
+              <a:rPr sz="1275" b="0">
+                <a:solidFill>
+                  <a:srgbClr val="586C68"/>
+                </a:solidFill>
+                <a:latin typeface="Segoe UI"/>
+                <a:ea typeface="Segoe UI"/>
+                <a:cs typeface="Segoe UI"/>
               </a:rPr>
-              <a:t>지연 (ms)</a:t>
+              <a:t>04</a:t>
+            </a:r>
+          </a:p>
+        </p:txBody>
+      </p:sp>
+      <p:sp>
+        <p:nvSpPr>
+          <p:cNvPr id="5" name="S04-chart-unit">
+            <a:extLst xmlns:a="http://schemas.openxmlformats.org/drawingml/2006/main">
+              <a:ext uri="{FF2B5EF4-FFF2-40B4-BE49-F238E27FC236}">
+                <a16:creationId xmlns:a16="http://schemas.microsoft.com/office/drawing/2014/main" id="{E36052B5-A6F9-4623-8165-C8AFF2552BD9}"/>
+              </a:ext>
+            </a:extLst>
+          </p:cNvPr>
+          <p:cNvSpPr>
+            <a:spLocks xmlns:a="http://schemas.openxmlformats.org/drawingml/2006/main" noGrp="1"/>
+          </p:cNvSpPr>
+          <p:nvPr/>
+        </p:nvSpPr>
+        <p:spPr>
+          <a:xfrm xmlns:a="http://schemas.openxmlformats.org/drawingml/2006/main">
+            <a:off x="685800" y="1828800"/>
+            <a:ext cx="6000750" cy="352425"/>
+          </a:xfrm>
+          <a:prstGeom xmlns:a="http://schemas.openxmlformats.org/drawingml/2006/main" prst="rect">
+            <a:avLst/>
+          </a:prstGeom>
+          <a:noFill xmlns:a="http://schemas.openxmlformats.org/drawingml/2006/main"/>
+          <a:ln xmlns:a="http://schemas.openxmlformats.org/drawingml/2006/main" w="0">
+            <a:noFill/>
+          </a:ln>
+        </p:spPr>
+        <p:txBody>
+          <a:bodyPr xmlns:a="http://schemas.openxmlformats.org/drawingml/2006/main" wrap="none" lIns="0" tIns="0" rIns="0" bIns="0" anchor="ctr">
+            <a:noAutofit/>
+          </a:bodyPr>
+          <a:lstStyle xmlns:a="http://schemas.openxmlformats.org/drawingml/2006/main"/>
+          <a:p xmlns:a="http://schemas.openxmlformats.org/drawingml/2006/main">
+            <a:pPr>
+              <a:defRPr sz="1800" b="0">
+                <a:solidFill>
+                  <a:srgbClr val="586C68"/>
+                </a:solidFill>
+                <a:latin typeface="Segoe UI"/>
+                <a:ea typeface="Segoe UI"/>
+                <a:cs typeface="Segoe UI"/>
+              </a:defRPr>
+            </a:pPr>
+            <a:r>
+              <a:rPr sz="1800" b="0">
+                <a:solidFill>
+                  <a:srgbClr val="586C68"/>
+                </a:solidFill>
+                <a:latin typeface="Segoe UI"/>
+                <a:ea typeface="Segoe UI"/>
+                <a:cs typeface="Segoe UI"/>
+              </a:rPr>
+              <a:t>Latency (ms)</a:t>
             </a:r>
           </a:p>
         </p:txBody>
       </p:sp>
       <p:graphicFrame>
         <p:nvGraphicFramePr>
-          <p:cNvPr id="17" name="Chart"/>
+          <p:cNvPr id="22" name="Chart"/>
           <p:cNvGraphicFramePr/>
           <p:nvPr/>
         </p:nvGraphicFramePr>
         <p:xfrm>
-          <a:off xmlns:a="http://schemas.openxmlformats.org/drawingml/2006/main" x="514350" y="2076450"/>
-          <a:ext xmlns:a="http://schemas.openxmlformats.org/drawingml/2006/main" cx="6810375" cy="3000375"/>
+          <a:off xmlns:a="http://schemas.openxmlformats.org/drawingml/2006/main" x="552450" y="2343150"/>
+          <a:ext xmlns:a="http://schemas.openxmlformats.org/drawingml/2006/main" cx="6810375" cy="2857500"/>
         </p:xfrm>
         <a:graphic xmlns:a="http://schemas.openxmlformats.org/drawingml/2006/main">
           <a:graphicData uri="http://schemas.openxmlformats.org/drawingml/2006/chart">
-            <c:chart xmlns:r="http://schemas.openxmlformats.org/officeDocument/2006/relationships" xmlns:c="http://schemas.openxmlformats.org/drawingml/2006/chart" r:id="Rc3ff4e829b6c45cc"/>
+            <c:chart xmlns:r="http://schemas.openxmlformats.org/officeDocument/2006/relationships" xmlns:c="http://schemas.openxmlformats.org/drawingml/2006/chart" r:id="Rcb00e91b374c40c1"/>
           </a:graphicData>
         </a:graphic>
       </p:graphicFrame>
       <p:sp>
         <p:nvSpPr>
-          <p:cNvPr id="6" name="S04-frame">
+          <p:cNvPr id="7" name="S04-latency">
             <a:extLst xmlns:a="http://schemas.openxmlformats.org/drawingml/2006/main">
               <a:ext uri="{FF2B5EF4-FFF2-40B4-BE49-F238E27FC236}">
-                <a16:creationId xmlns:a16="http://schemas.microsoft.com/office/drawing/2014/main" id="{58211554-628A-464E-A9A4-A4B317904E97}"/>
+                <a16:creationId xmlns:a16="http://schemas.microsoft.com/office/drawing/2014/main" id="{D51546B4-1D7A-4253-87A8-B3272307B943}"/>
               </a:ext>
             </a:extLst>
           </p:cNvPr>
@@ -3879,8 +4609,8 @@
         </p:nvSpPr>
         <p:spPr>
           <a:xfrm xmlns:a="http://schemas.openxmlformats.org/drawingml/2006/main">
-            <a:off x="7981950" y="1524000"/>
-            <a:ext cx="3600450" cy="381000"/>
+            <a:off x="8058150" y="1885950"/>
+            <a:ext cx="3276600" cy="809625"/>
           </a:xfrm>
           <a:prstGeom xmlns:a="http://schemas.openxmlformats.org/drawingml/2006/main" prst="rect">
             <a:avLst/>
@@ -3897,35 +4627,35 @@
           <a:lstStyle xmlns:a="http://schemas.openxmlformats.org/drawingml/2006/main"/>
           <a:p xmlns:a="http://schemas.openxmlformats.org/drawingml/2006/main">
             <a:pPr>
-              <a:defRPr sz="1875" b="0">
-                <a:solidFill>
-                  <a:srgbClr val="456162"/>
-                </a:solidFill>
-                <a:latin typeface="Malgun Gothic"/>
-                <a:ea typeface="Malgun Gothic"/>
-                <a:cs typeface="Malgun Gothic"/>
-              </a:defRPr>
-            </a:pPr>
-            <a:r>
-              <a:rPr sz="1875" b="0">
-                <a:solidFill>
-                  <a:srgbClr val="456162"/>
-                </a:solidFill>
-                <a:latin typeface="Malgun Gothic"/>
-                <a:ea typeface="Malgun Gothic"/>
-                <a:cs typeface="Malgun Gothic"/>
+              <a:defRPr sz="5325" b="0">
+                <a:solidFill>
+                  <a:srgbClr val="287D78"/>
+                </a:solidFill>
+                <a:latin typeface="Segoe UI"/>
+                <a:ea typeface="Segoe UI"/>
+                <a:cs typeface="Segoe UI"/>
+              </a:defRPr>
+            </a:pPr>
+            <a:r>
+              <a:rPr sz="5325" b="0">
+                <a:solidFill>
+                  <a:srgbClr val="287D78"/>
+                </a:solidFill>
+                <a:latin typeface="Segoe UI"/>
+                <a:ea typeface="Segoe UI"/>
+                <a:cs typeface="Segoe UI"/>
               </a:rPr>
-              <a:t>baseline 대비 INT8</a:t>
-            </a:r>
-          </a:p>
-        </p:txBody>
-      </p:sp>
-      <p:sp>
-        <p:nvSpPr>
-          <p:cNvPr id="7" name="S04-size">
+              <a:t>55%</a:t>
+            </a:r>
+          </a:p>
+        </p:txBody>
+      </p:sp>
+      <p:sp>
+        <p:nvSpPr>
+          <p:cNvPr id="8" name="S04-latency-label">
             <a:extLst xmlns:a="http://schemas.openxmlformats.org/drawingml/2006/main">
               <a:ext uri="{FF2B5EF4-FFF2-40B4-BE49-F238E27FC236}">
-                <a16:creationId xmlns:a16="http://schemas.microsoft.com/office/drawing/2014/main" id="{BF8E7648-6A8E-4018-8147-B4024D61CF8D}"/>
+                <a16:creationId xmlns:a16="http://schemas.microsoft.com/office/drawing/2014/main" id="{7AF19377-FAD8-4B0E-84D6-C88DC070BAA3}"/>
               </a:ext>
             </a:extLst>
           </p:cNvPr>
@@ -3936,8 +4666,8 @@
         </p:nvSpPr>
         <p:spPr>
           <a:xfrm xmlns:a="http://schemas.openxmlformats.org/drawingml/2006/main">
-            <a:off x="7981950" y="2190750"/>
-            <a:ext cx="3600450" cy="523875"/>
+            <a:off x="8058150" y="2714625"/>
+            <a:ext cx="3448050" cy="342900"/>
           </a:xfrm>
           <a:prstGeom xmlns:a="http://schemas.openxmlformats.org/drawingml/2006/main" prst="rect">
             <a:avLst/>
@@ -3954,35 +4684,35 @@
           <a:lstStyle xmlns:a="http://schemas.openxmlformats.org/drawingml/2006/main"/>
           <a:p xmlns:a="http://schemas.openxmlformats.org/drawingml/2006/main">
             <a:pPr>
-              <a:defRPr sz="2400" b="1">
-                <a:solidFill>
-                  <a:srgbClr val="007E80"/>
-                </a:solidFill>
-                <a:latin typeface="Malgun Gothic"/>
-                <a:ea typeface="Malgun Gothic"/>
-                <a:cs typeface="Malgun Gothic"/>
-              </a:defRPr>
-            </a:pPr>
-            <a:r>
-              <a:rPr sz="2400" b="1">
-                <a:solidFill>
-                  <a:srgbClr val="007E80"/>
-                </a:solidFill>
-                <a:latin typeface="Malgun Gothic"/>
-                <a:ea typeface="Malgun Gothic"/>
-                <a:cs typeface="Malgun Gothic"/>
+              <a:defRPr sz="1725" b="0">
+                <a:solidFill>
+                  <a:srgbClr val="586C68"/>
+                </a:solidFill>
+                <a:latin typeface="Segoe UI"/>
+                <a:ea typeface="Segoe UI"/>
+                <a:cs typeface="Segoe UI"/>
+              </a:defRPr>
+            </a:pPr>
+            <a:r>
+              <a:rPr sz="1725" b="0">
+                <a:solidFill>
+                  <a:srgbClr val="586C68"/>
+                </a:solidFill>
+                <a:latin typeface="Segoe UI"/>
+                <a:ea typeface="Segoe UI"/>
+                <a:cs typeface="Segoe UI"/>
               </a:rPr>
-              <a:t>모델 크기 75% 감소</a:t>
-            </a:r>
-          </a:p>
-        </p:txBody>
-      </p:sp>
-      <p:sp>
-        <p:nvSpPr>
-          <p:cNvPr id="8" name="S04-size-values">
+              <a:t>lower latency · 120 → 54 ms</a:t>
+            </a:r>
+          </a:p>
+        </p:txBody>
+      </p:sp>
+      <p:sp>
+        <p:nvSpPr>
+          <p:cNvPr id="9" name="S04-size">
             <a:extLst xmlns:a="http://schemas.openxmlformats.org/drawingml/2006/main">
               <a:ext uri="{FF2B5EF4-FFF2-40B4-BE49-F238E27FC236}">
-                <a16:creationId xmlns:a16="http://schemas.microsoft.com/office/drawing/2014/main" id="{D85D80CB-1927-456A-93EC-7A03BE76C26E}"/>
+                <a16:creationId xmlns:a16="http://schemas.microsoft.com/office/drawing/2014/main" id="{E86F22F7-99DC-49C0-8EA3-1C600B671779}"/>
               </a:ext>
             </a:extLst>
           </p:cNvPr>
@@ -3993,8 +4723,8 @@
         </p:nvSpPr>
         <p:spPr>
           <a:xfrm xmlns:a="http://schemas.openxmlformats.org/drawingml/2006/main">
-            <a:off x="7981950" y="2743200"/>
-            <a:ext cx="3600450" cy="400050"/>
+            <a:off x="8058150" y="3352800"/>
+            <a:ext cx="1524000" cy="647700"/>
           </a:xfrm>
           <a:prstGeom xmlns:a="http://schemas.openxmlformats.org/drawingml/2006/main" prst="rect">
             <a:avLst/>
@@ -4011,35 +4741,35 @@
           <a:lstStyle xmlns:a="http://schemas.openxmlformats.org/drawingml/2006/main"/>
           <a:p xmlns:a="http://schemas.openxmlformats.org/drawingml/2006/main">
             <a:pPr>
-              <a:defRPr sz="2025" b="0">
-                <a:solidFill>
-                  <a:srgbClr val="456162"/>
-                </a:solidFill>
-                <a:latin typeface="Malgun Gothic"/>
-                <a:ea typeface="Malgun Gothic"/>
-                <a:cs typeface="Malgun Gothic"/>
-              </a:defRPr>
-            </a:pPr>
-            <a:r>
-              <a:rPr sz="2025" b="0">
-                <a:solidFill>
-                  <a:srgbClr val="456162"/>
-                </a:solidFill>
-                <a:latin typeface="Malgun Gothic"/>
-                <a:ea typeface="Malgun Gothic"/>
-                <a:cs typeface="Malgun Gothic"/>
+              <a:defRPr sz="3975" b="0">
+                <a:solidFill>
+                  <a:srgbClr val="1E302F"/>
+                </a:solidFill>
+                <a:latin typeface="Segoe UI"/>
+                <a:ea typeface="Segoe UI"/>
+                <a:cs typeface="Segoe UI"/>
+              </a:defRPr>
+            </a:pPr>
+            <a:r>
+              <a:rPr sz="3975" b="0">
+                <a:solidFill>
+                  <a:srgbClr val="1E302F"/>
+                </a:solidFill>
+                <a:latin typeface="Segoe UI"/>
+                <a:ea typeface="Segoe UI"/>
+                <a:cs typeface="Segoe UI"/>
               </a:rPr>
-              <a:t>48MB에서 12MB</a:t>
-            </a:r>
-          </a:p>
-        </p:txBody>
-      </p:sp>
-      <p:sp>
-        <p:nvSpPr>
-          <p:cNvPr id="9" name="S04-f1">
+              <a:t>75%</a:t>
+            </a:r>
+          </a:p>
+        </p:txBody>
+      </p:sp>
+      <p:sp>
+        <p:nvSpPr>
+          <p:cNvPr id="10" name="S04-f1">
             <a:extLst xmlns:a="http://schemas.openxmlformats.org/drawingml/2006/main">
               <a:ext uri="{FF2B5EF4-FFF2-40B4-BE49-F238E27FC236}">
-                <a16:creationId xmlns:a16="http://schemas.microsoft.com/office/drawing/2014/main" id="{4376FA26-13A3-43EC-89C1-42E80DFB369B}"/>
+                <a16:creationId xmlns:a16="http://schemas.microsoft.com/office/drawing/2014/main" id="{0FCD41A2-3991-4C2D-B5EF-51FDD86D8E73}"/>
               </a:ext>
             </a:extLst>
           </p:cNvPr>
@@ -4050,8 +4780,8 @@
         </p:nvSpPr>
         <p:spPr>
           <a:xfrm xmlns:a="http://schemas.openxmlformats.org/drawingml/2006/main">
-            <a:off x="7981950" y="3590925"/>
-            <a:ext cx="3600450" cy="523875"/>
+            <a:off x="9906000" y="3352800"/>
+            <a:ext cx="1657350" cy="647700"/>
           </a:xfrm>
           <a:prstGeom xmlns:a="http://schemas.openxmlformats.org/drawingml/2006/main" prst="rect">
             <a:avLst/>
@@ -4068,35 +4798,35 @@
           <a:lstStyle xmlns:a="http://schemas.openxmlformats.org/drawingml/2006/main"/>
           <a:p xmlns:a="http://schemas.openxmlformats.org/drawingml/2006/main">
             <a:pPr>
-              <a:defRPr sz="2400" b="1">
-                <a:solidFill>
-                  <a:srgbClr val="173F40"/>
-                </a:solidFill>
-                <a:latin typeface="Malgun Gothic"/>
-                <a:ea typeface="Malgun Gothic"/>
-                <a:cs typeface="Malgun Gothic"/>
-              </a:defRPr>
-            </a:pPr>
-            <a:r>
-              <a:rPr sz="2400" b="1">
-                <a:solidFill>
-                  <a:srgbClr val="173F40"/>
-                </a:solidFill>
-                <a:latin typeface="Malgun Gothic"/>
-                <a:ea typeface="Malgun Gothic"/>
-                <a:cs typeface="Malgun Gothic"/>
+              <a:defRPr sz="3525" b="0">
+                <a:solidFill>
+                  <a:srgbClr val="A3563E"/>
+                </a:solidFill>
+                <a:latin typeface="Segoe UI"/>
+                <a:ea typeface="Segoe UI"/>
+                <a:cs typeface="Segoe UI"/>
+              </a:defRPr>
+            </a:pPr>
+            <a:r>
+              <a:rPr sz="3525" b="0">
+                <a:solidFill>
+                  <a:srgbClr val="A3563E"/>
+                </a:solidFill>
+                <a:latin typeface="Segoe UI"/>
+                <a:ea typeface="Segoe UI"/>
+                <a:cs typeface="Segoe UI"/>
               </a:rPr>
-              <a:t>F1 0.014 하락</a:t>
-            </a:r>
-          </a:p>
-        </p:txBody>
-      </p:sp>
-      <p:sp>
-        <p:nvSpPr>
-          <p:cNvPr id="10" name="S04-f1-values">
+              <a:t>−0.014</a:t>
+            </a:r>
+          </a:p>
+        </p:txBody>
+      </p:sp>
+      <p:sp>
+        <p:nvSpPr>
+          <p:cNvPr id="11" name="S04-size-label">
             <a:extLst xmlns:a="http://schemas.openxmlformats.org/drawingml/2006/main">
               <a:ext uri="{FF2B5EF4-FFF2-40B4-BE49-F238E27FC236}">
-                <a16:creationId xmlns:a16="http://schemas.microsoft.com/office/drawing/2014/main" id="{551D06A7-F77C-41B5-BB2A-B5E8BEFEF372}"/>
+                <a16:creationId xmlns:a16="http://schemas.microsoft.com/office/drawing/2014/main" id="{C6FCB46E-3BC3-4326-8492-B1CF566E6F91}"/>
               </a:ext>
             </a:extLst>
           </p:cNvPr>
@@ -4107,8 +4837,8 @@
         </p:nvSpPr>
         <p:spPr>
           <a:xfrm xmlns:a="http://schemas.openxmlformats.org/drawingml/2006/main">
-            <a:off x="7981950" y="4143375"/>
-            <a:ext cx="3600450" cy="400050"/>
+            <a:off x="8058150" y="4076700"/>
+            <a:ext cx="1752600" cy="314325"/>
           </a:xfrm>
           <a:prstGeom xmlns:a="http://schemas.openxmlformats.org/drawingml/2006/main" prst="rect">
             <a:avLst/>
@@ -4125,35 +4855,35 @@
           <a:lstStyle xmlns:a="http://schemas.openxmlformats.org/drawingml/2006/main"/>
           <a:p xmlns:a="http://schemas.openxmlformats.org/drawingml/2006/main">
             <a:pPr>
-              <a:defRPr sz="2025" b="0">
-                <a:solidFill>
-                  <a:srgbClr val="456162"/>
-                </a:solidFill>
-                <a:latin typeface="Malgun Gothic"/>
-                <a:ea typeface="Malgun Gothic"/>
-                <a:cs typeface="Malgun Gothic"/>
-              </a:defRPr>
-            </a:pPr>
-            <a:r>
-              <a:rPr sz="2025" b="0">
-                <a:solidFill>
-                  <a:srgbClr val="456162"/>
-                </a:solidFill>
-                <a:latin typeface="Malgun Gothic"/>
-                <a:ea typeface="Malgun Gothic"/>
-                <a:cs typeface="Malgun Gothic"/>
+              <a:defRPr sz="1575" b="0">
+                <a:solidFill>
+                  <a:srgbClr val="586C68"/>
+                </a:solidFill>
+                <a:latin typeface="Segoe UI"/>
+                <a:ea typeface="Segoe UI"/>
+                <a:cs typeface="Segoe UI"/>
+              </a:defRPr>
+            </a:pPr>
+            <a:r>
+              <a:rPr sz="1575" b="0">
+                <a:solidFill>
+                  <a:srgbClr val="586C68"/>
+                </a:solidFill>
+                <a:latin typeface="Segoe UI"/>
+                <a:ea typeface="Segoe UI"/>
+                <a:cs typeface="Segoe UI"/>
               </a:rPr>
-              <a:t>0.910에서 0.896</a:t>
-            </a:r>
-          </a:p>
-        </p:txBody>
-      </p:sp>
-      <p:sp>
-        <p:nvSpPr>
-          <p:cNvPr id="11" name="S04-stage1">
+              <a:t>smaller model</a:t>
+            </a:r>
+          </a:p>
+        </p:txBody>
+      </p:sp>
+      <p:sp>
+        <p:nvSpPr>
+          <p:cNvPr id="12" name="S04-f1-label">
             <a:extLst xmlns:a="http://schemas.openxmlformats.org/drawingml/2006/main">
               <a:ext uri="{FF2B5EF4-FFF2-40B4-BE49-F238E27FC236}">
-                <a16:creationId xmlns:a16="http://schemas.microsoft.com/office/drawing/2014/main" id="{9676950D-6679-4B2E-8247-8724338616F9}"/>
+                <a16:creationId xmlns:a16="http://schemas.microsoft.com/office/drawing/2014/main" id="{DF2DAA3B-0B09-48FF-8978-997403DABA6D}"/>
               </a:ext>
             </a:extLst>
           </p:cNvPr>
@@ -4164,8 +4894,8 @@
         </p:nvSpPr>
         <p:spPr>
           <a:xfrm xmlns:a="http://schemas.openxmlformats.org/drawingml/2006/main">
-            <a:off x="609600" y="5343525"/>
-            <a:ext cx="10972800" cy="371475"/>
+            <a:off x="9906000" y="4076700"/>
+            <a:ext cx="1657350" cy="314325"/>
           </a:xfrm>
           <a:prstGeom xmlns:a="http://schemas.openxmlformats.org/drawingml/2006/main" prst="rect">
             <a:avLst/>
@@ -4182,35 +4912,35 @@
           <a:lstStyle xmlns:a="http://schemas.openxmlformats.org/drawingml/2006/main"/>
           <a:p xmlns:a="http://schemas.openxmlformats.org/drawingml/2006/main">
             <a:pPr>
-              <a:defRPr sz="1875" b="0">
-                <a:solidFill>
-                  <a:srgbClr val="173F40"/>
-                </a:solidFill>
-                <a:latin typeface="Malgun Gothic"/>
-                <a:ea typeface="Malgun Gothic"/>
-                <a:cs typeface="Malgun Gothic"/>
-              </a:defRPr>
-            </a:pPr>
-            <a:r>
-              <a:rPr sz="1875" b="0">
-                <a:solidFill>
-                  <a:srgbClr val="173F40"/>
-                </a:solidFill>
-                <a:latin typeface="Malgun Gothic"/>
-                <a:ea typeface="Malgun Gothic"/>
-                <a:cs typeface="Malgun Gothic"/>
+              <a:defRPr sz="1575" b="0">
+                <a:solidFill>
+                  <a:srgbClr val="586C68"/>
+                </a:solidFill>
+                <a:latin typeface="Segoe UI"/>
+                <a:ea typeface="Segoe UI"/>
+                <a:cs typeface="Segoe UI"/>
+              </a:defRPr>
+            </a:pPr>
+            <a:r>
+              <a:rPr sz="1575" b="0">
+                <a:solidFill>
+                  <a:srgbClr val="586C68"/>
+                </a:solidFill>
+                <a:latin typeface="Segoe UI"/>
+                <a:ea typeface="Segoe UI"/>
+                <a:cs typeface="Segoe UI"/>
               </a:rPr>
-              <a:t>증류 단계: 지연 40% 감소, F1 0.008 하락</a:t>
-            </a:r>
-          </a:p>
-        </p:txBody>
-      </p:sp>
-      <p:sp>
-        <p:nvSpPr>
-          <p:cNvPr id="12" name="S04-stage2">
+              <a:t>F1 difference</a:t>
+            </a:r>
+          </a:p>
+        </p:txBody>
+      </p:sp>
+      <p:sp>
+        <p:nvSpPr>
+          <p:cNvPr id="13" name="S04-size-values">
             <a:extLst xmlns:a="http://schemas.openxmlformats.org/drawingml/2006/main">
               <a:ext uri="{FF2B5EF4-FFF2-40B4-BE49-F238E27FC236}">
-                <a16:creationId xmlns:a16="http://schemas.microsoft.com/office/drawing/2014/main" id="{205EE3CA-0AC9-48BB-BE6B-159C6BE53E73}"/>
+                <a16:creationId xmlns:a16="http://schemas.microsoft.com/office/drawing/2014/main" id="{DEB4987F-D5F1-4E13-9ECD-BF1E86019B54}"/>
               </a:ext>
             </a:extLst>
           </p:cNvPr>
@@ -4221,8 +4951,8 @@
         </p:nvSpPr>
         <p:spPr>
           <a:xfrm xmlns:a="http://schemas.openxmlformats.org/drawingml/2006/main">
-            <a:off x="609600" y="5743575"/>
-            <a:ext cx="10972800" cy="371475"/>
+            <a:off x="8058150" y="4524375"/>
+            <a:ext cx="1762125" cy="323850"/>
           </a:xfrm>
           <a:prstGeom xmlns:a="http://schemas.openxmlformats.org/drawingml/2006/main" prst="rect">
             <a:avLst/>
@@ -4239,25 +4969,196 @@
           <a:lstStyle xmlns:a="http://schemas.openxmlformats.org/drawingml/2006/main"/>
           <a:p xmlns:a="http://schemas.openxmlformats.org/drawingml/2006/main">
             <a:pPr>
-              <a:defRPr sz="1875" b="0">
-                <a:solidFill>
-                  <a:srgbClr val="173F40"/>
-                </a:solidFill>
-                <a:latin typeface="Malgun Gothic"/>
-                <a:ea typeface="Malgun Gothic"/>
-                <a:cs typeface="Malgun Gothic"/>
-              </a:defRPr>
-            </a:pPr>
-            <a:r>
-              <a:rPr sz="1875" b="0">
-                <a:solidFill>
-                  <a:srgbClr val="173F40"/>
-                </a:solidFill>
-                <a:latin typeface="Malgun Gothic"/>
-                <a:ea typeface="Malgun Gothic"/>
-                <a:cs typeface="Malgun Gothic"/>
+              <a:defRPr sz="1650" b="0">
+                <a:solidFill>
+                  <a:srgbClr val="1E302F"/>
+                </a:solidFill>
+                <a:latin typeface="Segoe UI"/>
+                <a:ea typeface="Segoe UI"/>
+                <a:cs typeface="Segoe UI"/>
+              </a:defRPr>
+            </a:pPr>
+            <a:r>
+              <a:rPr sz="1650" b="0">
+                <a:solidFill>
+                  <a:srgbClr val="1E302F"/>
+                </a:solidFill>
+                <a:latin typeface="Segoe UI"/>
+                <a:ea typeface="Segoe UI"/>
+                <a:cs typeface="Segoe UI"/>
               </a:rPr>
-              <a:t>추가 INT8 단계: 지연 25% 감소, F1 0.006 하락</a:t>
+              <a:t>48 → 12 MB</a:t>
+            </a:r>
+          </a:p>
+        </p:txBody>
+      </p:sp>
+      <p:sp>
+        <p:nvSpPr>
+          <p:cNvPr id="14" name="S04-f1-values">
+            <a:extLst xmlns:a="http://schemas.openxmlformats.org/drawingml/2006/main">
+              <a:ext uri="{FF2B5EF4-FFF2-40B4-BE49-F238E27FC236}">
+                <a16:creationId xmlns:a16="http://schemas.microsoft.com/office/drawing/2014/main" id="{E5AFD2F2-0A46-4796-985A-BB72239C16CC}"/>
+              </a:ext>
+            </a:extLst>
+          </p:cNvPr>
+          <p:cNvSpPr>
+            <a:spLocks xmlns:a="http://schemas.openxmlformats.org/drawingml/2006/main" noGrp="1"/>
+          </p:cNvSpPr>
+          <p:nvPr/>
+        </p:nvSpPr>
+        <p:spPr>
+          <a:xfrm xmlns:a="http://schemas.openxmlformats.org/drawingml/2006/main">
+            <a:off x="9906000" y="4524375"/>
+            <a:ext cx="1657350" cy="323850"/>
+          </a:xfrm>
+          <a:prstGeom xmlns:a="http://schemas.openxmlformats.org/drawingml/2006/main" prst="rect">
+            <a:avLst/>
+          </a:prstGeom>
+          <a:noFill xmlns:a="http://schemas.openxmlformats.org/drawingml/2006/main"/>
+          <a:ln xmlns:a="http://schemas.openxmlformats.org/drawingml/2006/main" w="0">
+            <a:noFill/>
+          </a:ln>
+        </p:spPr>
+        <p:txBody>
+          <a:bodyPr xmlns:a="http://schemas.openxmlformats.org/drawingml/2006/main" wrap="none" lIns="0" tIns="0" rIns="0" bIns="0" anchor="ctr">
+            <a:noAutofit/>
+          </a:bodyPr>
+          <a:lstStyle xmlns:a="http://schemas.openxmlformats.org/drawingml/2006/main"/>
+          <a:p xmlns:a="http://schemas.openxmlformats.org/drawingml/2006/main">
+            <a:pPr>
+              <a:defRPr sz="1575" b="0">
+                <a:solidFill>
+                  <a:srgbClr val="1E302F"/>
+                </a:solidFill>
+                <a:latin typeface="Segoe UI"/>
+                <a:ea typeface="Segoe UI"/>
+                <a:cs typeface="Segoe UI"/>
+              </a:defRPr>
+            </a:pPr>
+            <a:r>
+              <a:rPr sz="1575" b="0">
+                <a:solidFill>
+                  <a:srgbClr val="1E302F"/>
+                </a:solidFill>
+                <a:latin typeface="Segoe UI"/>
+                <a:ea typeface="Segoe UI"/>
+                <a:cs typeface="Segoe UI"/>
+              </a:rPr>
+              <a:t>0.910 → 0.896</a:t>
+            </a:r>
+          </a:p>
+        </p:txBody>
+      </p:sp>
+      <p:sp>
+        <p:nvSpPr>
+          <p:cNvPr id="15" name="S04-stage1">
+            <a:extLst xmlns:a="http://schemas.openxmlformats.org/drawingml/2006/main">
+              <a:ext uri="{FF2B5EF4-FFF2-40B4-BE49-F238E27FC236}">
+                <a16:creationId xmlns:a16="http://schemas.microsoft.com/office/drawing/2014/main" id="{6A9C1FD7-A266-4FB7-8965-BC9BE4EC65F6}"/>
+              </a:ext>
+            </a:extLst>
+          </p:cNvPr>
+          <p:cNvSpPr>
+            <a:spLocks xmlns:a="http://schemas.openxmlformats.org/drawingml/2006/main" noGrp="1"/>
+          </p:cNvSpPr>
+          <p:nvPr/>
+        </p:nvSpPr>
+        <p:spPr>
+          <a:xfrm xmlns:a="http://schemas.openxmlformats.org/drawingml/2006/main">
+            <a:off x="685800" y="5467350"/>
+            <a:ext cx="10820400" cy="304800"/>
+          </a:xfrm>
+          <a:prstGeom xmlns:a="http://schemas.openxmlformats.org/drawingml/2006/main" prst="rect">
+            <a:avLst/>
+          </a:prstGeom>
+          <a:noFill xmlns:a="http://schemas.openxmlformats.org/drawingml/2006/main"/>
+          <a:ln xmlns:a="http://schemas.openxmlformats.org/drawingml/2006/main" w="0">
+            <a:noFill/>
+          </a:ln>
+        </p:spPr>
+        <p:txBody>
+          <a:bodyPr xmlns:a="http://schemas.openxmlformats.org/drawingml/2006/main" wrap="none" lIns="0" tIns="0" rIns="0" bIns="0" anchor="ctr">
+            <a:noAutofit/>
+          </a:bodyPr>
+          <a:lstStyle xmlns:a="http://schemas.openxmlformats.org/drawingml/2006/main"/>
+          <a:p xmlns:a="http://schemas.openxmlformats.org/drawingml/2006/main">
+            <a:pPr>
+              <a:defRPr sz="1650" b="0">
+                <a:solidFill>
+                  <a:srgbClr val="586C68"/>
+                </a:solidFill>
+                <a:latin typeface="Segoe UI"/>
+                <a:ea typeface="Segoe UI"/>
+                <a:cs typeface="Segoe UI"/>
+              </a:defRPr>
+            </a:pPr>
+            <a:r>
+              <a:rPr sz="1650" b="0">
+                <a:solidFill>
+                  <a:srgbClr val="586C68"/>
+                </a:solidFill>
+                <a:latin typeface="Segoe UI"/>
+                <a:ea typeface="Segoe UI"/>
+                <a:cs typeface="Segoe UI"/>
+              </a:rPr>
+              <a:t>Distillation: latency −40%; F1 −0.008</a:t>
+            </a:r>
+          </a:p>
+        </p:txBody>
+      </p:sp>
+      <p:sp>
+        <p:nvSpPr>
+          <p:cNvPr id="16" name="S04-stage2">
+            <a:extLst xmlns:a="http://schemas.openxmlformats.org/drawingml/2006/main">
+              <a:ext uri="{FF2B5EF4-FFF2-40B4-BE49-F238E27FC236}">
+                <a16:creationId xmlns:a16="http://schemas.microsoft.com/office/drawing/2014/main" id="{C8BF7D9E-B914-41F4-9848-53C09B8400B1}"/>
+              </a:ext>
+            </a:extLst>
+          </p:cNvPr>
+          <p:cNvSpPr>
+            <a:spLocks xmlns:a="http://schemas.openxmlformats.org/drawingml/2006/main" noGrp="1"/>
+          </p:cNvSpPr>
+          <p:nvPr/>
+        </p:nvSpPr>
+        <p:spPr>
+          <a:xfrm xmlns:a="http://schemas.openxmlformats.org/drawingml/2006/main">
+            <a:off x="685800" y="5810250"/>
+            <a:ext cx="10820400" cy="304800"/>
+          </a:xfrm>
+          <a:prstGeom xmlns:a="http://schemas.openxmlformats.org/drawingml/2006/main" prst="rect">
+            <a:avLst/>
+          </a:prstGeom>
+          <a:noFill xmlns:a="http://schemas.openxmlformats.org/drawingml/2006/main"/>
+          <a:ln xmlns:a="http://schemas.openxmlformats.org/drawingml/2006/main" w="0">
+            <a:noFill/>
+          </a:ln>
+        </p:spPr>
+        <p:txBody>
+          <a:bodyPr xmlns:a="http://schemas.openxmlformats.org/drawingml/2006/main" wrap="none" lIns="0" tIns="0" rIns="0" bIns="0" anchor="ctr">
+            <a:noAutofit/>
+          </a:bodyPr>
+          <a:lstStyle xmlns:a="http://schemas.openxmlformats.org/drawingml/2006/main"/>
+          <a:p xmlns:a="http://schemas.openxmlformats.org/drawingml/2006/main">
+            <a:pPr>
+              <a:defRPr sz="1650" b="0">
+                <a:solidFill>
+                  <a:srgbClr val="586C68"/>
+                </a:solidFill>
+                <a:latin typeface="Segoe UI"/>
+                <a:ea typeface="Segoe UI"/>
+                <a:cs typeface="Segoe UI"/>
+              </a:defRPr>
+            </a:pPr>
+            <a:r>
+              <a:rPr sz="1650" b="0">
+                <a:solidFill>
+                  <a:srgbClr val="586C68"/>
+                </a:solidFill>
+                <a:latin typeface="Segoe UI"/>
+                <a:ea typeface="Segoe UI"/>
+                <a:cs typeface="Segoe UI"/>
+              </a:rPr>
+              <a:t>Additional INT8 step: latency −25%; F1 −0.006</a:t>
             </a:r>
           </a:p>
         </p:txBody>
@@ -4265,7 +5166,7 @@
     </p:spTree>
     <p:extLst>
       <p:ext uri="{BB962C8B-B14F-4D97-AF65-F5344CB8AC3E}">
-        <p14:creationId xmlns:p14="http://schemas.microsoft.com/office/powerpoint/2010/main" val="1646886148"/>
+        <p14:creationId xmlns:p14="http://schemas.microsoft.com/office/powerpoint/2010/main" val="1633204563"/>
       </p:ext>
     </p:extLst>
   </p:cSld>
@@ -4278,7 +5179,7 @@
     <p:bg>
       <p:bgPr>
         <a:solidFill xmlns:a="http://schemas.openxmlformats.org/drawingml/2006/main">
-          <a:srgbClr val="F7FAF9"/>
+          <a:srgbClr val="F6F4EE"/>
         </a:solidFill>
       </p:bgPr>
     </p:bg>
@@ -4293,10 +5194,10 @@
       </p:grpSpPr>
       <p:sp>
         <p:nvSpPr>
-          <p:cNvPr id="11" name="S05-title">
+          <p:cNvPr id="15" name="S05-section">
             <a:extLst xmlns:a="http://schemas.openxmlformats.org/drawingml/2006/main">
               <a:ext uri="{FF2B5EF4-FFF2-40B4-BE49-F238E27FC236}">
-                <a16:creationId xmlns:a16="http://schemas.microsoft.com/office/drawing/2014/main" id="{97241E12-D374-4609-A1D5-A0F06B37E48A}"/>
+                <a16:creationId xmlns:a16="http://schemas.microsoft.com/office/drawing/2014/main" id="{4C19C853-E6B9-461C-9EC7-7EE3FA1203C8}"/>
               </a:ext>
             </a:extLst>
           </p:cNvPr>
@@ -4307,8 +5208,8 @@
         </p:nvSpPr>
         <p:spPr>
           <a:xfrm xmlns:a="http://schemas.openxmlformats.org/drawingml/2006/main">
-            <a:off x="609600" y="438150"/>
-            <a:ext cx="10972800" cy="666750"/>
+            <a:off x="685800" y="400050"/>
+            <a:ext cx="10744200" cy="257175"/>
           </a:xfrm>
           <a:prstGeom xmlns:a="http://schemas.openxmlformats.org/drawingml/2006/main" prst="rect">
             <a:avLst/>
@@ -4325,35 +5226,35 @@
           <a:lstStyle xmlns:a="http://schemas.openxmlformats.org/drawingml/2006/main"/>
           <a:p xmlns:a="http://schemas.openxmlformats.org/drawingml/2006/main">
             <a:pPr>
-              <a:defRPr sz="3375" b="1">
-                <a:solidFill>
-                  <a:srgbClr val="173F40"/>
-                </a:solidFill>
-                <a:latin typeface="Malgun Gothic"/>
-                <a:ea typeface="Malgun Gothic"/>
-                <a:cs typeface="Malgun Gothic"/>
-              </a:defRPr>
-            </a:pPr>
-            <a:r>
-              <a:rPr sz="3375" b="1">
-                <a:solidFill>
-                  <a:srgbClr val="173F40"/>
-                </a:solidFill>
-                <a:latin typeface="Malgun Gothic"/>
-                <a:ea typeface="Malgun Gothic"/>
-                <a:cs typeface="Malgun Gothic"/>
+              <a:defRPr sz="1425" b="0">
+                <a:solidFill>
+                  <a:srgbClr val="287D78"/>
+                </a:solidFill>
+                <a:latin typeface="Segoe UI"/>
+                <a:ea typeface="Segoe UI"/>
+                <a:cs typeface="Segoe UI"/>
+              </a:defRPr>
+            </a:pPr>
+            <a:r>
+              <a:rPr sz="1425" b="0">
+                <a:solidFill>
+                  <a:srgbClr val="287D78"/>
+                </a:solidFill>
+                <a:latin typeface="Segoe UI"/>
+                <a:ea typeface="Segoe UI"/>
+                <a:cs typeface="Segoe UI"/>
               </a:rPr>
-              <a:t>배포 판단에 필요한 추가 근거</a:t>
-            </a:r>
-          </a:p>
-        </p:txBody>
-      </p:sp>
-      <p:sp>
-        <p:nvSpPr>
-          <p:cNvPr id="2" name="S05-disclosure">
+              <a:t>NEXT / DEFINE THE ACCEPTABLE TRADE-OFF</a:t>
+            </a:r>
+          </a:p>
+        </p:txBody>
+      </p:sp>
+      <p:sp>
+        <p:nvSpPr>
+          <p:cNvPr id="2" name="S05-title">
             <a:extLst xmlns:a="http://schemas.openxmlformats.org/drawingml/2006/main">
               <a:ext uri="{FF2B5EF4-FFF2-40B4-BE49-F238E27FC236}">
-                <a16:creationId xmlns:a16="http://schemas.microsoft.com/office/drawing/2014/main" id="{616B4BA6-73F0-4A0F-904F-FD5BC39C737C}"/>
+                <a16:creationId xmlns:a16="http://schemas.microsoft.com/office/drawing/2014/main" id="{F2634974-6713-4142-9EA7-CE889EB9FAE3}"/>
               </a:ext>
             </a:extLst>
           </p:cNvPr>
@@ -4364,8 +5265,8 @@
         </p:nvSpPr>
         <p:spPr>
           <a:xfrm xmlns:a="http://schemas.openxmlformats.org/drawingml/2006/main">
-            <a:off x="609600" y="6286500"/>
-            <a:ext cx="9525000" cy="285750"/>
+            <a:off x="685800" y="895350"/>
+            <a:ext cx="10820400" cy="666750"/>
           </a:xfrm>
           <a:prstGeom xmlns:a="http://schemas.openxmlformats.org/drawingml/2006/main" prst="rect">
             <a:avLst/>
@@ -4382,35 +5283,35 @@
           <a:lstStyle xmlns:a="http://schemas.openxmlformats.org/drawingml/2006/main"/>
           <a:p xmlns:a="http://schemas.openxmlformats.org/drawingml/2006/main">
             <a:pPr>
-              <a:defRPr sz="1425" b="0">
-                <a:solidFill>
-                  <a:srgbClr val="456162"/>
-                </a:solidFill>
-                <a:latin typeface="Malgun Gothic"/>
-                <a:ea typeface="Malgun Gothic"/>
-                <a:cs typeface="Malgun Gothic"/>
-              </a:defRPr>
-            </a:pPr>
-            <a:r>
-              <a:rPr sz="1425" b="0">
-                <a:solidFill>
-                  <a:srgbClr val="456162"/>
-                </a:solidFill>
-                <a:latin typeface="Malgun Gothic"/>
-                <a:ea typeface="Malgun Gothic"/>
-                <a:cs typeface="Malgun Gothic"/>
+              <a:defRPr sz="3225" b="0">
+                <a:solidFill>
+                  <a:srgbClr val="1E302F"/>
+                </a:solidFill>
+                <a:latin typeface="Segoe UI"/>
+                <a:ea typeface="Segoe UI"/>
+                <a:cs typeface="Segoe UI"/>
+              </a:defRPr>
+            </a:pPr>
+            <a:r>
+              <a:rPr sz="3225" b="0">
+                <a:solidFill>
+                  <a:srgbClr val="1E302F"/>
+                </a:solidFill>
+                <a:latin typeface="Segoe UI"/>
+                <a:ea typeface="Segoe UI"/>
+                <a:cs typeface="Segoe UI"/>
               </a:rPr>
-              <a:t>모든 성능 수치는 가상 예시입니다</a:t>
-            </a:r>
-          </a:p>
-        </p:txBody>
-      </p:sp>
-      <p:sp>
-        <p:nvSpPr>
-          <p:cNvPr id="3" name="S05-number">
+              <a:t>Decide what the trade-off is worth</a:t>
+            </a:r>
+          </a:p>
+        </p:txBody>
+      </p:sp>
+      <p:sp>
+        <p:nvSpPr>
+          <p:cNvPr id="3" name="S05-disclosure">
             <a:extLst xmlns:a="http://schemas.openxmlformats.org/drawingml/2006/main">
               <a:ext uri="{FF2B5EF4-FFF2-40B4-BE49-F238E27FC236}">
-                <a16:creationId xmlns:a16="http://schemas.microsoft.com/office/drawing/2014/main" id="{888C7DBF-F9E7-4D8E-81BA-8BEECFD4C5D3}"/>
+                <a16:creationId xmlns:a16="http://schemas.microsoft.com/office/drawing/2014/main" id="{BFC2A32B-D2F4-4DD0-AD21-BD9C3F67C5DE}"/>
               </a:ext>
             </a:extLst>
           </p:cNvPr>
@@ -4421,8 +5322,8 @@
         </p:nvSpPr>
         <p:spPr>
           <a:xfrm xmlns:a="http://schemas.openxmlformats.org/drawingml/2006/main">
-            <a:off x="10953750" y="6286500"/>
-            <a:ext cx="609600" cy="285750"/>
+            <a:off x="685800" y="6372225"/>
+            <a:ext cx="9525000" cy="219075"/>
           </a:xfrm>
           <a:prstGeom xmlns:a="http://schemas.openxmlformats.org/drawingml/2006/main" prst="rect">
             <a:avLst/>
@@ -4439,35 +5340,35 @@
           <a:lstStyle xmlns:a="http://schemas.openxmlformats.org/drawingml/2006/main"/>
           <a:p xmlns:a="http://schemas.openxmlformats.org/drawingml/2006/main">
             <a:pPr>
-              <a:defRPr sz="1425" b="0">
-                <a:solidFill>
-                  <a:srgbClr val="456162"/>
-                </a:solidFill>
-                <a:latin typeface="Malgun Gothic"/>
-                <a:ea typeface="Malgun Gothic"/>
-                <a:cs typeface="Malgun Gothic"/>
-              </a:defRPr>
-            </a:pPr>
-            <a:r>
-              <a:rPr sz="1425" b="0">
-                <a:solidFill>
-                  <a:srgbClr val="456162"/>
-                </a:solidFill>
-                <a:latin typeface="Malgun Gothic"/>
-                <a:ea typeface="Malgun Gothic"/>
-                <a:cs typeface="Malgun Gothic"/>
+              <a:defRPr sz="1275" b="0">
+                <a:solidFill>
+                  <a:srgbClr val="586C68"/>
+                </a:solidFill>
+                <a:latin typeface="Segoe UI"/>
+                <a:ea typeface="Segoe UI"/>
+                <a:cs typeface="Segoe UI"/>
+              </a:defRPr>
+            </a:pPr>
+            <a:r>
+              <a:rPr sz="1275" b="0">
+                <a:solidFill>
+                  <a:srgbClr val="586C68"/>
+                </a:solidFill>
+                <a:latin typeface="Segoe UI"/>
+                <a:ea typeface="Segoe UI"/>
+                <a:cs typeface="Segoe UI"/>
               </a:rPr>
-              <a:t>05</a:t>
-            </a:r>
-          </a:p>
-        </p:txBody>
-      </p:sp>
-      <p:sp>
-        <p:nvSpPr>
-          <p:cNvPr id="4" name="S05-main">
+              <a:t>Illustrative data · not experimental results</a:t>
+            </a:r>
+          </a:p>
+        </p:txBody>
+      </p:sp>
+      <p:sp>
+        <p:nvSpPr>
+          <p:cNvPr id="4" name="S05-number">
             <a:extLst xmlns:a="http://schemas.openxmlformats.org/drawingml/2006/main">
               <a:ext uri="{FF2B5EF4-FFF2-40B4-BE49-F238E27FC236}">
-                <a16:creationId xmlns:a16="http://schemas.microsoft.com/office/drawing/2014/main" id="{AE9119FC-5889-4105-9317-FCD7088CEDA9}"/>
+                <a16:creationId xmlns:a16="http://schemas.microsoft.com/office/drawing/2014/main" id="{E378D239-3D97-45CC-8321-8823A487088C}"/>
               </a:ext>
             </a:extLst>
           </p:cNvPr>
@@ -4478,8 +5379,8 @@
         </p:nvSpPr>
         <p:spPr>
           <a:xfrm xmlns:a="http://schemas.openxmlformats.org/drawingml/2006/main">
-            <a:off x="609600" y="1600200"/>
-            <a:ext cx="10972800" cy="1143000"/>
+            <a:off x="11144250" y="6372225"/>
+            <a:ext cx="361950" cy="219075"/>
           </a:xfrm>
           <a:prstGeom xmlns:a="http://schemas.openxmlformats.org/drawingml/2006/main" prst="rect">
             <a:avLst/>
@@ -4496,58 +5397,35 @@
           <a:lstStyle xmlns:a="http://schemas.openxmlformats.org/drawingml/2006/main"/>
           <a:p xmlns:a="http://schemas.openxmlformats.org/drawingml/2006/main">
             <a:pPr>
-              <a:defRPr sz="3000" b="1">
-                <a:solidFill>
-                  <a:srgbClr val="007E80"/>
-                </a:solidFill>
-                <a:latin typeface="Malgun Gothic"/>
-                <a:ea typeface="Malgun Gothic"/>
-                <a:cs typeface="Malgun Gothic"/>
-              </a:defRPr>
-            </a:pPr>
-            <a:r>
-              <a:rPr sz="3000" b="1">
-                <a:solidFill>
-                  <a:srgbClr val="007E80"/>
-                </a:solidFill>
-                <a:latin typeface="Malgun Gothic"/>
-                <a:ea typeface="Malgun Gothic"/>
-                <a:cs typeface="Malgun Gothic"/>
+              <a:defRPr sz="1275" b="0">
+                <a:solidFill>
+                  <a:srgbClr val="586C68"/>
+                </a:solidFill>
+                <a:latin typeface="Segoe UI"/>
+                <a:ea typeface="Segoe UI"/>
+                <a:cs typeface="Segoe UI"/>
+              </a:defRPr>
+            </a:pPr>
+            <a:r>
+              <a:rPr sz="1275" b="0">
+                <a:solidFill>
+                  <a:srgbClr val="586C68"/>
+                </a:solidFill>
+                <a:latin typeface="Segoe UI"/>
+                <a:ea typeface="Segoe UI"/>
+                <a:cs typeface="Segoe UI"/>
               </a:rPr>
-              <a:t>이 가상 예시는 효율과 F1의</a:t>
-            </a:r>
-          </a:p>
-          <a:p xmlns:a="http://schemas.openxmlformats.org/drawingml/2006/main">
-            <a:pPr>
-              <a:defRPr sz="3000" b="1">
-                <a:solidFill>
-                  <a:srgbClr val="007E80"/>
-                </a:solidFill>
-                <a:latin typeface="Malgun Gothic"/>
-                <a:ea typeface="Malgun Gothic"/>
-                <a:cs typeface="Malgun Gothic"/>
-              </a:defRPr>
-            </a:pPr>
-            <a:r>
-              <a:rPr sz="3000" b="1">
-                <a:solidFill>
-                  <a:srgbClr val="007E80"/>
-                </a:solidFill>
-                <a:latin typeface="Malgun Gothic"/>
-                <a:ea typeface="Malgun Gothic"/>
-                <a:cs typeface="Malgun Gothic"/>
-              </a:rPr>
-              <a:t>교환관계를 보여줍니다</a:t>
-            </a:r>
-          </a:p>
-        </p:txBody>
-      </p:sp>
-      <p:sp>
-        <p:nvSpPr>
-          <p:cNvPr id="5" name="S05-label1">
+              <a:t>05</a:t>
+            </a:r>
+          </a:p>
+        </p:txBody>
+      </p:sp>
+      <p:sp>
+        <p:nvSpPr>
+          <p:cNvPr id="5" name="S05-main">
             <a:extLst xmlns:a="http://schemas.openxmlformats.org/drawingml/2006/main">
               <a:ext uri="{FF2B5EF4-FFF2-40B4-BE49-F238E27FC236}">
-                <a16:creationId xmlns:a16="http://schemas.microsoft.com/office/drawing/2014/main" id="{19CB339F-7AEC-4446-AF7D-400E8D1E571F}"/>
+                <a16:creationId xmlns:a16="http://schemas.microsoft.com/office/drawing/2014/main" id="{27DA5E0A-96B5-4B69-874C-DD0381FCFD63}"/>
               </a:ext>
             </a:extLst>
           </p:cNvPr>
@@ -4558,8 +5436,8 @@
         </p:nvSpPr>
         <p:spPr>
           <a:xfrm xmlns:a="http://schemas.openxmlformats.org/drawingml/2006/main">
-            <a:off x="609600" y="3209925"/>
-            <a:ext cx="2952750" cy="419100"/>
+            <a:off x="685800" y="1990725"/>
+            <a:ext cx="10820400" cy="723900"/>
           </a:xfrm>
           <a:prstGeom xmlns:a="http://schemas.openxmlformats.org/drawingml/2006/main" prst="rect">
             <a:avLst/>
@@ -4576,35 +5454,35 @@
           <a:lstStyle xmlns:a="http://schemas.openxmlformats.org/drawingml/2006/main"/>
           <a:p xmlns:a="http://schemas.openxmlformats.org/drawingml/2006/main">
             <a:pPr>
-              <a:defRPr sz="2100" b="1">
-                <a:solidFill>
-                  <a:srgbClr val="173F40"/>
-                </a:solidFill>
-                <a:latin typeface="Malgun Gothic"/>
-                <a:ea typeface="Malgun Gothic"/>
-                <a:cs typeface="Malgun Gothic"/>
-              </a:defRPr>
-            </a:pPr>
-            <a:r>
-              <a:rPr sz="2100" b="1">
-                <a:solidFill>
-                  <a:srgbClr val="173F40"/>
-                </a:solidFill>
-                <a:latin typeface="Malgun Gothic"/>
-                <a:ea typeface="Malgun Gothic"/>
-                <a:cs typeface="Malgun Gothic"/>
+              <a:defRPr sz="3675" b="0">
+                <a:solidFill>
+                  <a:srgbClr val="287D78"/>
+                </a:solidFill>
+                <a:latin typeface="Segoe UI"/>
+                <a:ea typeface="Segoe UI"/>
+                <a:cs typeface="Segoe UI"/>
+              </a:defRPr>
+            </a:pPr>
+            <a:r>
+              <a:rPr sz="3675" b="0">
+                <a:solidFill>
+                  <a:srgbClr val="287D78"/>
+                </a:solidFill>
+                <a:latin typeface="Segoe UI"/>
+                <a:ea typeface="Segoe UI"/>
+                <a:cs typeface="Segoe UI"/>
               </a:rPr>
-              <a:t>먼저 정할 기준</a:t>
-            </a:r>
-          </a:p>
-        </p:txBody>
-      </p:sp>
-      <p:sp>
-        <p:nvSpPr>
-          <p:cNvPr id="6" name="S05-body1">
+              <a:t>Efficiency gains come with lower F1</a:t>
+            </a:r>
+          </a:p>
+        </p:txBody>
+      </p:sp>
+      <p:sp>
+        <p:nvSpPr>
+          <p:cNvPr id="6" name="S05-rule-1">
             <a:extLst xmlns:a="http://schemas.openxmlformats.org/drawingml/2006/main">
               <a:ext uri="{FF2B5EF4-FFF2-40B4-BE49-F238E27FC236}">
-                <a16:creationId xmlns:a16="http://schemas.microsoft.com/office/drawing/2014/main" id="{993E1567-B944-4B33-95C7-6B1DD9C309E1}"/>
+                <a16:creationId xmlns:a16="http://schemas.microsoft.com/office/drawing/2014/main" id="{9CB55CD0-84B1-438B-8667-050BCC257CC1}"/>
               </a:ext>
             </a:extLst>
           </p:cNvPr>
@@ -4615,8 +5493,37 @@
         </p:nvSpPr>
         <p:spPr>
           <a:xfrm xmlns:a="http://schemas.openxmlformats.org/drawingml/2006/main">
-            <a:off x="3714750" y="3209925"/>
-            <a:ext cx="7867650" cy="419100"/>
+            <a:off x="685800" y="3124200"/>
+            <a:ext cx="10820400" cy="0"/>
+          </a:xfrm>
+          <a:prstGeom xmlns:a="http://schemas.openxmlformats.org/drawingml/2006/main" prst="line">
+            <a:avLst/>
+          </a:prstGeom>
+          <a:ln xmlns:a="http://schemas.openxmlformats.org/drawingml/2006/main" w="9525">
+            <a:solidFill>
+              <a:srgbClr val="CFD8D1"/>
+            </a:solidFill>
+          </a:ln>
+        </p:spPr>
+      </p:sp>
+      <p:sp>
+        <p:nvSpPr>
+          <p:cNvPr id="7" name="S05-label1">
+            <a:extLst xmlns:a="http://schemas.openxmlformats.org/drawingml/2006/main">
+              <a:ext uri="{FF2B5EF4-FFF2-40B4-BE49-F238E27FC236}">
+                <a16:creationId xmlns:a16="http://schemas.microsoft.com/office/drawing/2014/main" id="{19CB2F7F-7D59-40B3-A705-65074EECCE48}"/>
+              </a:ext>
+            </a:extLst>
+          </p:cNvPr>
+          <p:cNvSpPr>
+            <a:spLocks xmlns:a="http://schemas.openxmlformats.org/drawingml/2006/main" noGrp="1"/>
+          </p:cNvSpPr>
+          <p:nvPr/>
+        </p:nvSpPr>
+        <p:spPr>
+          <a:xfrm xmlns:a="http://schemas.openxmlformats.org/drawingml/2006/main">
+            <a:off x="685800" y="3257550"/>
+            <a:ext cx="2914650" cy="495300"/>
           </a:xfrm>
           <a:prstGeom xmlns:a="http://schemas.openxmlformats.org/drawingml/2006/main" prst="rect">
             <a:avLst/>
@@ -4633,35 +5540,35 @@
           <a:lstStyle xmlns:a="http://schemas.openxmlformats.org/drawingml/2006/main"/>
           <a:p xmlns:a="http://schemas.openxmlformats.org/drawingml/2006/main">
             <a:pPr>
-              <a:defRPr sz="2100" b="0">
-                <a:solidFill>
-                  <a:srgbClr val="173F40"/>
-                </a:solidFill>
-                <a:latin typeface="Malgun Gothic"/>
-                <a:ea typeface="Malgun Gothic"/>
-                <a:cs typeface="Malgun Gothic"/>
-              </a:defRPr>
-            </a:pPr>
-            <a:r>
-              <a:rPr sz="2100" b="0">
-                <a:solidFill>
-                  <a:srgbClr val="173F40"/>
-                </a:solidFill>
-                <a:latin typeface="Malgun Gothic"/>
-                <a:ea typeface="Malgun Gothic"/>
-                <a:cs typeface="Malgun Gothic"/>
+              <a:defRPr sz="1875" b="0">
+                <a:solidFill>
+                  <a:srgbClr val="1E302F"/>
+                </a:solidFill>
+                <a:latin typeface="Segoe UI"/>
+                <a:ea typeface="Segoe UI"/>
+                <a:cs typeface="Segoe UI"/>
+              </a:defRPr>
+            </a:pPr>
+            <a:r>
+              <a:rPr sz="1875" b="0">
+                <a:solidFill>
+                  <a:srgbClr val="1E302F"/>
+                </a:solidFill>
+                <a:latin typeface="Segoe UI"/>
+                <a:ea typeface="Segoe UI"/>
+                <a:cs typeface="Segoe UI"/>
               </a:rPr>
-              <a:t>허용 가능한 F1 저하와 지연 한도</a:t>
-            </a:r>
-          </a:p>
-        </p:txBody>
-      </p:sp>
-      <p:sp>
-        <p:nvSpPr>
-          <p:cNvPr id="7" name="S05-label2">
+              <a:t>Set the threshold</a:t>
+            </a:r>
+          </a:p>
+        </p:txBody>
+      </p:sp>
+      <p:sp>
+        <p:nvSpPr>
+          <p:cNvPr id="8" name="S05-body1">
             <a:extLst xmlns:a="http://schemas.openxmlformats.org/drawingml/2006/main">
               <a:ext uri="{FF2B5EF4-FFF2-40B4-BE49-F238E27FC236}">
-                <a16:creationId xmlns:a16="http://schemas.microsoft.com/office/drawing/2014/main" id="{A02F50EE-787A-4C8C-A12A-AA2687B3338E}"/>
+                <a16:creationId xmlns:a16="http://schemas.microsoft.com/office/drawing/2014/main" id="{F8D4A716-829E-445A-8D85-F1F389B2925B}"/>
               </a:ext>
             </a:extLst>
           </p:cNvPr>
@@ -4672,8 +5579,8 @@
         </p:nvSpPr>
         <p:spPr>
           <a:xfrm xmlns:a="http://schemas.openxmlformats.org/drawingml/2006/main">
-            <a:off x="609600" y="4019550"/>
-            <a:ext cx="2952750" cy="419100"/>
+            <a:off x="3829050" y="3257550"/>
+            <a:ext cx="7677150" cy="495300"/>
           </a:xfrm>
           <a:prstGeom xmlns:a="http://schemas.openxmlformats.org/drawingml/2006/main" prst="rect">
             <a:avLst/>
@@ -4690,35 +5597,35 @@
           <a:lstStyle xmlns:a="http://schemas.openxmlformats.org/drawingml/2006/main"/>
           <a:p xmlns:a="http://schemas.openxmlformats.org/drawingml/2006/main">
             <a:pPr>
-              <a:defRPr sz="2100" b="1">
-                <a:solidFill>
-                  <a:srgbClr val="173F40"/>
-                </a:solidFill>
-                <a:latin typeface="Malgun Gothic"/>
-                <a:ea typeface="Malgun Gothic"/>
-                <a:cs typeface="Malgun Gothic"/>
-              </a:defRPr>
-            </a:pPr>
-            <a:r>
-              <a:rPr sz="2100" b="1">
-                <a:solidFill>
-                  <a:srgbClr val="173F40"/>
-                </a:solidFill>
-                <a:latin typeface="Malgun Gothic"/>
-                <a:ea typeface="Malgun Gothic"/>
-                <a:cs typeface="Malgun Gothic"/>
+              <a:defRPr sz="1800" b="0">
+                <a:solidFill>
+                  <a:srgbClr val="586C68"/>
+                </a:solidFill>
+                <a:latin typeface="Segoe UI"/>
+                <a:ea typeface="Segoe UI"/>
+                <a:cs typeface="Segoe UI"/>
+              </a:defRPr>
+            </a:pPr>
+            <a:r>
+              <a:rPr sz="1800" b="0">
+                <a:solidFill>
+                  <a:srgbClr val="586C68"/>
+                </a:solidFill>
+                <a:latin typeface="Segoe UI"/>
+                <a:ea typeface="Segoe UI"/>
+                <a:cs typeface="Segoe UI"/>
               </a:rPr>
-              <a:t>다음 검증</a:t>
-            </a:r>
-          </a:p>
-        </p:txBody>
-      </p:sp>
-      <p:sp>
-        <p:nvSpPr>
-          <p:cNvPr id="8" name="S05-body2">
+              <a:t>Acceptable F1 loss and latency budget.</a:t>
+            </a:r>
+          </a:p>
+        </p:txBody>
+      </p:sp>
+      <p:sp>
+        <p:nvSpPr>
+          <p:cNvPr id="9" name="S05-rule-2">
             <a:extLst xmlns:a="http://schemas.openxmlformats.org/drawingml/2006/main">
               <a:ext uri="{FF2B5EF4-FFF2-40B4-BE49-F238E27FC236}">
-                <a16:creationId xmlns:a16="http://schemas.microsoft.com/office/drawing/2014/main" id="{2296F06B-7A65-410C-A998-8E8885A752F5}"/>
+                <a16:creationId xmlns:a16="http://schemas.microsoft.com/office/drawing/2014/main" id="{4E24EA9A-26E7-41E2-B062-7FEBDD63D46C}"/>
               </a:ext>
             </a:extLst>
           </p:cNvPr>
@@ -4729,8 +5636,37 @@
         </p:nvSpPr>
         <p:spPr>
           <a:xfrm xmlns:a="http://schemas.openxmlformats.org/drawingml/2006/main">
-            <a:off x="3714750" y="4019550"/>
-            <a:ext cx="7867650" cy="419100"/>
+            <a:off x="685800" y="3962400"/>
+            <a:ext cx="10820400" cy="0"/>
+          </a:xfrm>
+          <a:prstGeom xmlns:a="http://schemas.openxmlformats.org/drawingml/2006/main" prst="line">
+            <a:avLst/>
+          </a:prstGeom>
+          <a:ln xmlns:a="http://schemas.openxmlformats.org/drawingml/2006/main" w="9525">
+            <a:solidFill>
+              <a:srgbClr val="CFD8D1"/>
+            </a:solidFill>
+          </a:ln>
+        </p:spPr>
+      </p:sp>
+      <p:sp>
+        <p:nvSpPr>
+          <p:cNvPr id="10" name="S05-label2">
+            <a:extLst xmlns:a="http://schemas.openxmlformats.org/drawingml/2006/main">
+              <a:ext uri="{FF2B5EF4-FFF2-40B4-BE49-F238E27FC236}">
+                <a16:creationId xmlns:a16="http://schemas.microsoft.com/office/drawing/2014/main" id="{BF8C2591-9A1E-4116-AF1A-A960257A7944}"/>
+              </a:ext>
+            </a:extLst>
+          </p:cNvPr>
+          <p:cNvSpPr>
+            <a:spLocks xmlns:a="http://schemas.openxmlformats.org/drawingml/2006/main" noGrp="1"/>
+          </p:cNvSpPr>
+          <p:nvPr/>
+        </p:nvSpPr>
+        <p:spPr>
+          <a:xfrm xmlns:a="http://schemas.openxmlformats.org/drawingml/2006/main">
+            <a:off x="685800" y="4095750"/>
+            <a:ext cx="2914650" cy="495300"/>
           </a:xfrm>
           <a:prstGeom xmlns:a="http://schemas.openxmlformats.org/drawingml/2006/main" prst="rect">
             <a:avLst/>
@@ -4747,35 +5683,35 @@
           <a:lstStyle xmlns:a="http://schemas.openxmlformats.org/drawingml/2006/main"/>
           <a:p xmlns:a="http://schemas.openxmlformats.org/drawingml/2006/main">
             <a:pPr>
-              <a:defRPr sz="2100" b="0">
-                <a:solidFill>
-                  <a:srgbClr val="173F40"/>
-                </a:solidFill>
-                <a:latin typeface="Malgun Gothic"/>
-                <a:ea typeface="Malgun Gothic"/>
-                <a:cs typeface="Malgun Gothic"/>
-              </a:defRPr>
-            </a:pPr>
-            <a:r>
-              <a:rPr sz="2100" b="0">
-                <a:solidFill>
-                  <a:srgbClr val="173F40"/>
-                </a:solidFill>
-                <a:latin typeface="Malgun Gothic"/>
-                <a:ea typeface="Malgun Gothic"/>
-                <a:cs typeface="Malgun Gothic"/>
+              <a:defRPr sz="1875" b="0">
+                <a:solidFill>
+                  <a:srgbClr val="1E302F"/>
+                </a:solidFill>
+                <a:latin typeface="Segoe UI"/>
+                <a:ea typeface="Segoe UI"/>
+                <a:cs typeface="Segoe UI"/>
+              </a:defRPr>
+            </a:pPr>
+            <a:r>
+              <a:rPr sz="1875" b="0">
+                <a:solidFill>
+                  <a:srgbClr val="1E302F"/>
+                </a:solidFill>
+                <a:latin typeface="Segoe UI"/>
+                <a:ea typeface="Segoe UI"/>
+                <a:cs typeface="Segoe UI"/>
               </a:rPr>
-              <a:t>반복 측정의 분산, 이상 유형별 실패 사례</a:t>
-            </a:r>
-          </a:p>
-        </p:txBody>
-      </p:sp>
-      <p:sp>
-        <p:nvSpPr>
-          <p:cNvPr id="9" name="S05-label3">
+              <a:t>Test the behavior</a:t>
+            </a:r>
+          </a:p>
+        </p:txBody>
+      </p:sp>
+      <p:sp>
+        <p:nvSpPr>
+          <p:cNvPr id="11" name="S05-body2">
             <a:extLst xmlns:a="http://schemas.openxmlformats.org/drawingml/2006/main">
               <a:ext uri="{FF2B5EF4-FFF2-40B4-BE49-F238E27FC236}">
-                <a16:creationId xmlns:a16="http://schemas.microsoft.com/office/drawing/2014/main" id="{26FD1C54-C2BC-4896-8978-D9069F0E1372}"/>
+                <a16:creationId xmlns:a16="http://schemas.microsoft.com/office/drawing/2014/main" id="{9C0232FA-8F00-40F2-8497-E1B643158554}"/>
               </a:ext>
             </a:extLst>
           </p:cNvPr>
@@ -4786,8 +5722,8 @@
         </p:nvSpPr>
         <p:spPr>
           <a:xfrm xmlns:a="http://schemas.openxmlformats.org/drawingml/2006/main">
-            <a:off x="609600" y="4829175"/>
-            <a:ext cx="2952750" cy="419100"/>
+            <a:off x="3829050" y="4095750"/>
+            <a:ext cx="7677150" cy="495300"/>
           </a:xfrm>
           <a:prstGeom xmlns:a="http://schemas.openxmlformats.org/drawingml/2006/main" prst="rect">
             <a:avLst/>
@@ -4804,35 +5740,35 @@
           <a:lstStyle xmlns:a="http://schemas.openxmlformats.org/drawingml/2006/main"/>
           <a:p xmlns:a="http://schemas.openxmlformats.org/drawingml/2006/main">
             <a:pPr>
-              <a:defRPr sz="2100" b="1">
-                <a:solidFill>
-                  <a:srgbClr val="173F40"/>
-                </a:solidFill>
-                <a:latin typeface="Malgun Gothic"/>
-                <a:ea typeface="Malgun Gothic"/>
-                <a:cs typeface="Malgun Gothic"/>
-              </a:defRPr>
-            </a:pPr>
-            <a:r>
-              <a:rPr sz="2100" b="1">
-                <a:solidFill>
-                  <a:srgbClr val="173F40"/>
-                </a:solidFill>
-                <a:latin typeface="Malgun Gothic"/>
-                <a:ea typeface="Malgun Gothic"/>
-                <a:cs typeface="Malgun Gothic"/>
+              <a:defRPr sz="1800" b="0">
+                <a:solidFill>
+                  <a:srgbClr val="586C68"/>
+                </a:solidFill>
+                <a:latin typeface="Segoe UI"/>
+                <a:ea typeface="Segoe UI"/>
+                <a:cs typeface="Segoe UI"/>
+              </a:defRPr>
+            </a:pPr>
+            <a:r>
+              <a:rPr sz="1800" b="0">
+                <a:solidFill>
+                  <a:srgbClr val="586C68"/>
+                </a:solidFill>
+                <a:latin typeface="Segoe UI"/>
+                <a:ea typeface="Segoe UI"/>
+                <a:cs typeface="Segoe UI"/>
               </a:rPr>
-              <a:t>현재의 한계</a:t>
-            </a:r>
-          </a:p>
-        </p:txBody>
-      </p:sp>
-      <p:sp>
-        <p:nvSpPr>
-          <p:cNvPr id="10" name="S05-body3">
+              <a:t>Repeat measurements; inspect failures by anomaly type.</a:t>
+            </a:r>
+          </a:p>
+        </p:txBody>
+      </p:sp>
+      <p:sp>
+        <p:nvSpPr>
+          <p:cNvPr id="12" name="S05-rule-3">
             <a:extLst xmlns:a="http://schemas.openxmlformats.org/drawingml/2006/main">
               <a:ext uri="{FF2B5EF4-FFF2-40B4-BE49-F238E27FC236}">
-                <a16:creationId xmlns:a16="http://schemas.microsoft.com/office/drawing/2014/main" id="{707D3BC3-06DF-43DA-9123-D3A600D75989}"/>
+                <a16:creationId xmlns:a16="http://schemas.microsoft.com/office/drawing/2014/main" id="{13263353-6662-4892-8755-BB00AE96FC9F}"/>
               </a:ext>
             </a:extLst>
           </p:cNvPr>
@@ -4843,8 +5779,37 @@
         </p:nvSpPr>
         <p:spPr>
           <a:xfrm xmlns:a="http://schemas.openxmlformats.org/drawingml/2006/main">
-            <a:off x="3714750" y="4772025"/>
-            <a:ext cx="7867650" cy="857250"/>
+            <a:off x="685800" y="4800600"/>
+            <a:ext cx="10820400" cy="0"/>
+          </a:xfrm>
+          <a:prstGeom xmlns:a="http://schemas.openxmlformats.org/drawingml/2006/main" prst="line">
+            <a:avLst/>
+          </a:prstGeom>
+          <a:ln xmlns:a="http://schemas.openxmlformats.org/drawingml/2006/main" w="9525">
+            <a:solidFill>
+              <a:srgbClr val="CFD8D1"/>
+            </a:solidFill>
+          </a:ln>
+        </p:spPr>
+      </p:sp>
+      <p:sp>
+        <p:nvSpPr>
+          <p:cNvPr id="13" name="S05-label3">
+            <a:extLst xmlns:a="http://schemas.openxmlformats.org/drawingml/2006/main">
+              <a:ext uri="{FF2B5EF4-FFF2-40B4-BE49-F238E27FC236}">
+                <a16:creationId xmlns:a16="http://schemas.microsoft.com/office/drawing/2014/main" id="{48C5EE6A-6070-41C2-A5A8-A34B86D65264}"/>
+              </a:ext>
+            </a:extLst>
+          </p:cNvPr>
+          <p:cNvSpPr>
+            <a:spLocks xmlns:a="http://schemas.openxmlformats.org/drawingml/2006/main" noGrp="1"/>
+          </p:cNvSpPr>
+          <p:nvPr/>
+        </p:nvSpPr>
+        <p:spPr>
+          <a:xfrm xmlns:a="http://schemas.openxmlformats.org/drawingml/2006/main">
+            <a:off x="685800" y="4933950"/>
+            <a:ext cx="2914650" cy="495300"/>
           </a:xfrm>
           <a:prstGeom xmlns:a="http://schemas.openxmlformats.org/drawingml/2006/main" prst="rect">
             <a:avLst/>
@@ -4861,48 +5826,82 @@
           <a:lstStyle xmlns:a="http://schemas.openxmlformats.org/drawingml/2006/main"/>
           <a:p xmlns:a="http://schemas.openxmlformats.org/drawingml/2006/main">
             <a:pPr>
-              <a:defRPr sz="2100" b="0">
-                <a:solidFill>
-                  <a:srgbClr val="173F40"/>
-                </a:solidFill>
-                <a:latin typeface="Malgun Gothic"/>
-                <a:ea typeface="Malgun Gothic"/>
-                <a:cs typeface="Malgun Gothic"/>
-              </a:defRPr>
-            </a:pPr>
-            <a:r>
-              <a:rPr sz="2100" b="0">
-                <a:solidFill>
-                  <a:srgbClr val="173F40"/>
-                </a:solidFill>
-                <a:latin typeface="Malgun Gothic"/>
-                <a:ea typeface="Malgun Gothic"/>
-                <a:cs typeface="Malgun Gothic"/>
+              <a:defRPr sz="1875" b="0">
+                <a:solidFill>
+                  <a:srgbClr val="1E302F"/>
+                </a:solidFill>
+                <a:latin typeface="Segoe UI"/>
+                <a:ea typeface="Segoe UI"/>
+                <a:cs typeface="Segoe UI"/>
+              </a:defRPr>
+            </a:pPr>
+            <a:r>
+              <a:rPr sz="1875" b="0">
+                <a:solidFill>
+                  <a:srgbClr val="1E302F"/>
+                </a:solidFill>
+                <a:latin typeface="Segoe UI"/>
+                <a:ea typeface="Segoe UI"/>
+                <a:cs typeface="Segoe UI"/>
               </a:rPr>
-              <a:t>표본수·실제 데이터셋명이 없어</a:t>
-            </a:r>
-          </a:p>
+              <a:t>Keep the limit visible</a:t>
+            </a:r>
+          </a:p>
+        </p:txBody>
+      </p:sp>
+      <p:sp>
+        <p:nvSpPr>
+          <p:cNvPr id="14" name="S05-body3">
+            <a:extLst xmlns:a="http://schemas.openxmlformats.org/drawingml/2006/main">
+              <a:ext uri="{FF2B5EF4-FFF2-40B4-BE49-F238E27FC236}">
+                <a16:creationId xmlns:a16="http://schemas.microsoft.com/office/drawing/2014/main" id="{CFB01367-3082-43F8-8DD6-04D660FEE560}"/>
+              </a:ext>
+            </a:extLst>
+          </p:cNvPr>
+          <p:cNvSpPr>
+            <a:spLocks xmlns:a="http://schemas.openxmlformats.org/drawingml/2006/main" noGrp="1"/>
+          </p:cNvSpPr>
+          <p:nvPr/>
+        </p:nvSpPr>
+        <p:spPr>
+          <a:xfrm xmlns:a="http://schemas.openxmlformats.org/drawingml/2006/main">
+            <a:off x="3829050" y="4933950"/>
+            <a:ext cx="7677150" cy="495300"/>
+          </a:xfrm>
+          <a:prstGeom xmlns:a="http://schemas.openxmlformats.org/drawingml/2006/main" prst="rect">
+            <a:avLst/>
+          </a:prstGeom>
+          <a:noFill xmlns:a="http://schemas.openxmlformats.org/drawingml/2006/main"/>
+          <a:ln xmlns:a="http://schemas.openxmlformats.org/drawingml/2006/main" w="0">
+            <a:noFill/>
+          </a:ln>
+        </p:spPr>
+        <p:txBody>
+          <a:bodyPr xmlns:a="http://schemas.openxmlformats.org/drawingml/2006/main" wrap="none" lIns="0" tIns="0" rIns="0" bIns="0" anchor="ctr">
+            <a:noAutofit/>
+          </a:bodyPr>
+          <a:lstStyle xmlns:a="http://schemas.openxmlformats.org/drawingml/2006/main"/>
           <a:p xmlns:a="http://schemas.openxmlformats.org/drawingml/2006/main">
             <a:pPr>
-              <a:defRPr sz="2100" b="0">
-                <a:solidFill>
-                  <a:srgbClr val="173F40"/>
-                </a:solidFill>
-                <a:latin typeface="Malgun Gothic"/>
-                <a:ea typeface="Malgun Gothic"/>
-                <a:cs typeface="Malgun Gothic"/>
-              </a:defRPr>
-            </a:pPr>
-            <a:r>
-              <a:rPr sz="2100" b="0">
-                <a:solidFill>
-                  <a:srgbClr val="173F40"/>
-                </a:solidFill>
-                <a:latin typeface="Malgun Gothic"/>
-                <a:ea typeface="Malgun Gothic"/>
-                <a:cs typeface="Malgun Gothic"/>
+              <a:defRPr sz="1800" b="0">
+                <a:solidFill>
+                  <a:srgbClr val="586C68"/>
+                </a:solidFill>
+                <a:latin typeface="Segoe UI"/>
+                <a:ea typeface="Segoe UI"/>
+                <a:cs typeface="Segoe UI"/>
+              </a:defRPr>
+            </a:pPr>
+            <a:r>
+              <a:rPr sz="1800" b="0">
+                <a:solidFill>
+                  <a:srgbClr val="586C68"/>
+                </a:solidFill>
+                <a:latin typeface="Segoe UI"/>
+                <a:ea typeface="Segoe UI"/>
+                <a:cs typeface="Segoe UI"/>
               </a:rPr>
-              <a:t>일반화 판단 불가</a:t>
+              <a:t>No real dataset or sample count: no generalization claim.</a:t>
             </a:r>
           </a:p>
         </p:txBody>
@@ -4910,7 +5909,7 @@
     </p:spTree>
     <p:extLst>
       <p:ext uri="{BB962C8B-B14F-4D97-AF65-F5344CB8AC3E}">
-        <p14:creationId xmlns:p14="http://schemas.microsoft.com/office/powerpoint/2010/main" val="2107399723"/>
+        <p14:creationId xmlns:p14="http://schemas.microsoft.com/office/powerpoint/2010/main" val="1359324439"/>
       </p:ext>
     </p:extLst>
   </p:cSld>

--- a/examples/research-seminar/static.pptx
+++ b/examples/research-seminar/static.pptx
@@ -2,17 +2,17 @@
 <file path=ppt/presentation.xml><?xml version="1.0" encoding="utf-8"?>
 <p:presentation xmlns:p="http://schemas.openxmlformats.org/presentationml/2006/main">
   <p:sldMasterIdLst>
-    <p:sldMasterId xmlns:r="http://schemas.openxmlformats.org/officeDocument/2006/relationships" id="2147483648" r:id="R7a6b9d531ab246a6"/>
+    <p:sldMasterId xmlns:r="http://schemas.openxmlformats.org/officeDocument/2006/relationships" id="2147483648" r:id="R38038fa453f54fbe"/>
   </p:sldMasterIdLst>
   <p:notesMasterIdLst>
-    <p:notesMasterId xmlns:r="http://schemas.openxmlformats.org/officeDocument/2006/relationships" r:id="R9ab6643869fc4891"/>
+    <p:notesMasterId xmlns:r="http://schemas.openxmlformats.org/officeDocument/2006/relationships" r:id="R137bb51b62144812"/>
   </p:notesMasterIdLst>
   <p:sldIdLst>
-    <p:sldId xmlns:r="http://schemas.openxmlformats.org/officeDocument/2006/relationships" id="256" r:id="R4d6fd4c1ab624a59"/>
-    <p:sldId xmlns:r="http://schemas.openxmlformats.org/officeDocument/2006/relationships" id="257" r:id="R1bf21b3b9c1e4c39"/>
-    <p:sldId xmlns:r="http://schemas.openxmlformats.org/officeDocument/2006/relationships" id="258" r:id="Rcef7c3c8fcbb4376"/>
-    <p:sldId xmlns:r="http://schemas.openxmlformats.org/officeDocument/2006/relationships" id="259" r:id="R230993b4db544639"/>
-    <p:sldId xmlns:r="http://schemas.openxmlformats.org/officeDocument/2006/relationships" id="260" r:id="Rba0056151366461f"/>
+    <p:sldId xmlns:r="http://schemas.openxmlformats.org/officeDocument/2006/relationships" id="256" r:id="R0f28616ac9674696"/>
+    <p:sldId xmlns:r="http://schemas.openxmlformats.org/officeDocument/2006/relationships" id="257" r:id="R8ac286362dbf4719"/>
+    <p:sldId xmlns:r="http://schemas.openxmlformats.org/officeDocument/2006/relationships" id="258" r:id="R2d61b8ad2e3e48e5"/>
+    <p:sldId xmlns:r="http://schemas.openxmlformats.org/officeDocument/2006/relationships" id="259" r:id="Rdd5d4d5e501847d7"/>
+    <p:sldId xmlns:r="http://schemas.openxmlformats.org/officeDocument/2006/relationships" id="260" r:id="Ra2b9b5b4f82a41ab"/>
   </p:sldIdLst>
   <p:sldSz cx="12192000" cy="6858000"/>
   <p:notesSz cx="6858000" cy="9144000"/>
@@ -446,7 +446,7 @@
           <a:lstStyle xmlns:a="http://schemas.openxmlformats.org/drawingml/2006/main"/>
           <a:p xmlns:a="http://schemas.openxmlformats.org/drawingml/2006/main">
             <a:r>
-              <a:t>30 seconds. All performance values in this deck are fictional user-supplied examples. They are not empirical findings. A common device and dataset are assumed, but their identities are unspecified. The cover is AI-generated conceptual artwork, not a model architecture or a measurement.</a:t>
+              <a:t>30 seconds. This seminar examines model compression for sensor anomaly detection. The overview compares baseline with INT8 using equally prominent latency, F1 and size values. All values are fictional user-supplied examples, not empirical findings. A common device and dataset are assumed but unspecified. No acceptable accuracy-loss threshold is supplied.</a:t>
             </a:r>
           </a:p>
         </p:txBody>
@@ -794,7 +794,7 @@
   </p:cSld>
   <p:clrMap bg1="lt1" tx1="dk1" bg2="lt2" tx2="dk2" accent1="accent1" accent2="accent2" accent3="accent3" accent4="accent4" accent5="accent5" accent6="accent6" hlink="hlink" folHlink="folHlink"/>
   <p:sldLayoutIdLst>
-    <p:sldLayoutId xmlns:r="http://schemas.openxmlformats.org/officeDocument/2006/relationships" id="2147483649" r:id="R9ea0fa9188ea4ca3"/>
+    <p:sldLayoutId xmlns:r="http://schemas.openxmlformats.org/officeDocument/2006/relationships" id="2147483649" r:id="Rf4a3965482194350"/>
   </p:sldLayoutIdLst>
   <p:txStyles>
     <p:titleStyle>
@@ -1326,70 +1326,173 @@
   <c:lang val="en-US"/>
   <c:chart>
     <c:plotArea>
-      <c:barChart>
-        <c:barDir val="col"/>
-        <c:grouping val="clustered"/>
-        <c:varyColors val="0"/>
+      <c:scatterChart>
+        <c:scatterStyle val="marker"/>
         <c:ser>
           <c:idx val="0"/>
           <c:order val="0"/>
           <c:tx>
-            <c:v>Latency (ms)</c:v>
+            <c:v>Models</c:v>
           </c:tx>
           <c:spPr>
             <a:solidFill xmlns:a="http://schemas.openxmlformats.org/drawingml/2006/main">
               <a:srgbClr val="287D78"/>
             </a:solidFill>
+            <a:ln xmlns:a="http://schemas.openxmlformats.org/drawingml/2006/main" w="0">
+              <a:noFill/>
+            </a:ln>
           </c:spPr>
-          <c:dPt>
-            <c:idx val="0"/>
-            <c:invertIfNegative val="0"/>
+          <c:marker>
+            <c:symbol val="circle"/>
+            <c:size val="10"/>
             <c:spPr>
-              <a:solidFill xmlns:a="http://schemas.openxmlformats.org/drawingml/2006/main">
-                <a:srgbClr val="9EADA5"/>
-              </a:solidFill>
+              <ns0:solidFill xmlns:ns0="http://schemas.openxmlformats.org/drawingml/2006/main">
+                <ns0:srgbClr val="287D78"/>
+              </ns0:solidFill>
+              <ns1:ln xmlns:ns1="http://schemas.openxmlformats.org/drawingml/2006/main">
+                <ns1:noFill/>
+              </ns1:ln>
             </c:spPr>
-          </c:dPt>
-          <c:dPt>
-            <c:idx val="1"/>
-            <c:invertIfNegative val="0"/>
-            <c:spPr>
-              <a:solidFill xmlns:a="http://schemas.openxmlformats.org/drawingml/2006/main">
-                <a:srgbClr val="639D90"/>
-              </a:solidFill>
-            </c:spPr>
-          </c:dPt>
-          <c:dPt>
-            <c:idx val="2"/>
-            <c:invertIfNegative val="0"/>
-            <c:spPr>
-              <a:solidFill xmlns:a="http://schemas.openxmlformats.org/drawingml/2006/main">
-                <a:srgbClr val="287D78"/>
-              </a:solidFill>
-            </c:spPr>
-          </c:dPt>
-          <c:cat>
-            <c:strRef>
+          </c:marker>
+          <c:dLbls>
+            <c:dLbl>
+              <c:idx val="0"/>
+              <c:tx>
+                <c:rich>
+                  <a:bodyPr xmlns:a="http://schemas.openxmlformats.org/drawingml/2006/main"/>
+                  <a:lstStyle xmlns:a="http://schemas.openxmlformats.org/drawingml/2006/main"/>
+                  <a:p xmlns:a="http://schemas.openxmlformats.org/drawingml/2006/main">
+                    <a:r>
+                      <a:rPr sz="1800">
+                        <a:solidFill>
+                          <a:srgbClr val="1E302F"/>
+                        </a:solidFill>
+                        <a:latin typeface="Segoe UI"/>
+                        <a:ea typeface="Segoe UI"/>
+                        <a:cs typeface="Segoe UI"/>
+                      </a:rPr>
+                      <a:t>baseline</a:t>
+                    </a:r>
+                  </a:p>
+                </c:rich>
+              </c:tx>
+              <c:txPr>
+                <a:bodyPr xmlns:a="http://schemas.openxmlformats.org/drawingml/2006/main" anchorCtr="1"/>
+                <a:lstStyle xmlns:a="http://schemas.openxmlformats.org/drawingml/2006/main"/>
+                <a:p xmlns:a="http://schemas.openxmlformats.org/drawingml/2006/main">
+                  <a:pPr>
+                    <a:defRPr sz="1800">
+                      <a:solidFill>
+                        <a:srgbClr val="1E302F"/>
+                      </a:solidFill>
+                      <a:latin typeface="Segoe UI"/>
+                      <a:ea typeface="Segoe UI"/>
+                      <a:cs typeface="Segoe UI"/>
+                    </a:defRPr>
+                  </a:pPr>
+                </a:p>
+              </c:txPr>
+              <c:showLegendKey val="0"/>
+              <c:showVal val="0"/>
+              <c:showCatName val="0"/>
+              <c:showSerName val="0"/>
+              <c:showPercent val="0"/>
+              <c:showBubbleSize val="0"/>
+            </c:dLbl>
+            <c:dLbl>
+              <c:idx val="1"/>
+              <c:tx>
+                <c:rich>
+                  <a:bodyPr xmlns:a="http://schemas.openxmlformats.org/drawingml/2006/main"/>
+                  <a:lstStyle xmlns:a="http://schemas.openxmlformats.org/drawingml/2006/main"/>
+                  <a:p xmlns:a="http://schemas.openxmlformats.org/drawingml/2006/main">
+                    <a:r>
+                      <a:rPr sz="1800">
+                        <a:solidFill>
+                          <a:srgbClr val="1E302F"/>
+                        </a:solidFill>
+                        <a:latin typeface="Segoe UI"/>
+                        <a:ea typeface="Segoe UI"/>
+                        <a:cs typeface="Segoe UI"/>
+                      </a:rPr>
+                      <a:t>distilled</a:t>
+                    </a:r>
+                  </a:p>
+                </c:rich>
+              </c:tx>
+              <c:txPr>
+                <a:bodyPr xmlns:a="http://schemas.openxmlformats.org/drawingml/2006/main" anchorCtr="1"/>
+                <a:lstStyle xmlns:a="http://schemas.openxmlformats.org/drawingml/2006/main"/>
+                <a:p xmlns:a="http://schemas.openxmlformats.org/drawingml/2006/main">
+                  <a:pPr>
+                    <a:defRPr sz="1800">
+                      <a:solidFill>
+                        <a:srgbClr val="1E302F"/>
+                      </a:solidFill>
+                      <a:latin typeface="Segoe UI"/>
+                      <a:ea typeface="Segoe UI"/>
+                      <a:cs typeface="Segoe UI"/>
+                    </a:defRPr>
+                  </a:pPr>
+                </a:p>
+              </c:txPr>
+              <c:showLegendKey val="0"/>
+              <c:showVal val="0"/>
+              <c:showCatName val="0"/>
+              <c:showSerName val="0"/>
+              <c:showPercent val="0"/>
+              <c:showBubbleSize val="0"/>
+            </c:dLbl>
+            <c:dLbl>
+              <c:idx val="2"/>
+              <c:tx>
+                <c:rich>
+                  <a:bodyPr xmlns:a="http://schemas.openxmlformats.org/drawingml/2006/main"/>
+                  <a:lstStyle xmlns:a="http://schemas.openxmlformats.org/drawingml/2006/main"/>
+                  <a:p xmlns:a="http://schemas.openxmlformats.org/drawingml/2006/main">
+                    <a:r>
+                      <a:rPr sz="1800">
+                        <a:solidFill>
+                          <a:srgbClr val="1E302F"/>
+                        </a:solidFill>
+                        <a:latin typeface="Segoe UI"/>
+                        <a:ea typeface="Segoe UI"/>
+                        <a:cs typeface="Segoe UI"/>
+                      </a:rPr>
+                      <a:t>int8</a:t>
+                    </a:r>
+                  </a:p>
+                </c:rich>
+              </c:tx>
+              <c:txPr>
+                <a:bodyPr xmlns:a="http://schemas.openxmlformats.org/drawingml/2006/main" anchorCtr="1"/>
+                <a:lstStyle xmlns:a="http://schemas.openxmlformats.org/drawingml/2006/main"/>
+                <a:p xmlns:a="http://schemas.openxmlformats.org/drawingml/2006/main">
+                  <a:pPr>
+                    <a:defRPr sz="1800">
+                      <a:solidFill>
+                        <a:srgbClr val="1E302F"/>
+                      </a:solidFill>
+                      <a:latin typeface="Segoe UI"/>
+                      <a:ea typeface="Segoe UI"/>
+                      <a:cs typeface="Segoe UI"/>
+                    </a:defRPr>
+                  </a:pPr>
+                </a:p>
+              </c:txPr>
+              <c:showLegendKey val="0"/>
+              <c:showVal val="0"/>
+              <c:showCatName val="0"/>
+              <c:showSerName val="0"/>
+              <c:showPercent val="0"/>
+              <c:showBubbleSize val="0"/>
+            </c:dLbl>
+          </c:dLbls>
+          <c:xVal>
+            <c:numRef>
               <c:f>'Chart Data'!$A$2:$A$4</c:f>
-              <c:strCache>
-                <c:ptCount val="3"/>
-                <c:pt idx="0">
-                  <c:v>baseline</c:v>
-                </c:pt>
-                <c:pt idx="1">
-                  <c:v>distilled</c:v>
-                </c:pt>
-                <c:pt idx="2">
-                  <c:v>int8</c:v>
-                </c:pt>
-              </c:strCache>
-            </c:strRef>
-          </c:cat>
-          <c:val>
-            <c:numRef>
-              <c:f>'Chart Data'!$B$2:$B$4</c:f>
               <c:numCache>
-                <c:formatCode>0</c:formatCode>
+                <c:formatCode>General</c:formatCode>
                 <c:ptCount val="3"/>
                 <c:pt idx="0">
                   <c:v>120</c:v>
@@ -1402,7 +1505,25 @@
                 </c:pt>
               </c:numCache>
             </c:numRef>
-          </c:val>
+          </c:xVal>
+          <c:yVal>
+            <c:numRef>
+              <c:f>'Chart Data'!$B$2:$B$4</c:f>
+              <c:numCache>
+                <c:formatCode>0.000</c:formatCode>
+                <c:ptCount val="3"/>
+                <c:pt idx="0">
+                  <c:v>0.91</c:v>
+                </c:pt>
+                <c:pt idx="1">
+                  <c:v>0.902</c:v>
+                </c:pt>
+                <c:pt idx="2">
+                  <c:v>0.896</c:v>
+                </c:pt>
+              </c:numCache>
+            </c:numRef>
+          </c:yVal>
         </c:ser>
         <c:dLbls>
           <c:txPr>
@@ -1410,7 +1531,7 @@
             <a:lstStyle xmlns:a="http://schemas.openxmlformats.org/drawingml/2006/main"/>
             <a:p xmlns:a="http://schemas.openxmlformats.org/drawingml/2006/main">
               <a:pPr>
-                <a:defRPr sz="2025">
+                <a:defRPr sz="1800">
                   <a:solidFill>
                     <a:srgbClr val="1E302F"/>
                   </a:solidFill>
@@ -1421,60 +1542,23 @@
               </a:pPr>
             </a:p>
           </c:txPr>
-          <c:dLblPos val="outEnd"/>
           <c:showLegendKey val="0"/>
-          <c:showVal val="1"/>
+          <c:showVal val="0"/>
           <c:showCatName val="0"/>
           <c:showSerName val="0"/>
           <c:showPercent val="0"/>
           <c:showBubbleSize val="0"/>
           <c:showLeaderLines val="0"/>
         </c:dLbls>
-        <c:gapWidth val="130"/>
         <c:axId val="48650112"/>
         <c:axId val="48672768"/>
-      </c:barChart>
-      <c:catAx>
-        <c:axId val="48650112"/>
-        <c:scaling>
-          <c:orientation val="minMax"/>
-        </c:scaling>
-        <c:delete val="0"/>
-        <c:axPos val="b"/>
-        <c:numFmt formatCode="General"/>
-        <c:majorTickMark val="none"/>
-        <c:minorTickMark val="none"/>
-        <c:spPr>
-          <a:ln xmlns:a="http://schemas.openxmlformats.org/drawingml/2006/main" w="9525">
-            <a:solidFill>
-              <a:srgbClr val="CFD8D1"/>
-            </a:solidFill>
-          </a:ln>
-        </c:spPr>
-        <c:txPr>
-          <a:bodyPr xmlns:a="http://schemas.openxmlformats.org/drawingml/2006/main" anchorCtr="1"/>
-          <a:lstStyle xmlns:a="http://schemas.openxmlformats.org/drawingml/2006/main"/>
-          <a:p xmlns:a="http://schemas.openxmlformats.org/drawingml/2006/main">
-            <a:pPr>
-              <a:defRPr sz="1725">
-                <a:solidFill>
-                  <a:srgbClr val="1E302F"/>
-                </a:solidFill>
-                <a:latin typeface="Segoe UI"/>
-                <a:ea typeface="Segoe UI"/>
-                <a:cs typeface="Segoe UI"/>
-              </a:defRPr>
-            </a:pPr>
-          </a:p>
-        </c:txPr>
-        <c:crossAx val="48672768"/>
-      </c:catAx>
+      </c:scatterChart>
       <c:valAx>
         <c:axId val="48672768"/>
         <c:scaling>
           <c:orientation val="minMax"/>
-          <c:max val="140"/>
-          <c:min val="0"/>
+          <c:max val="0.915"/>
+          <c:min val="0.89"/>
         </c:scaling>
         <c:delete val="0"/>
         <c:axPos val="l"/>
@@ -1487,15 +1571,52 @@
             </a:ln>
           </c:spPr>
         </c:majorGridlines>
+        <c:numFmt formatCode="0.000"/>
+        <c:majorTickMark val="none"/>
+        <c:minorTickMark val="none"/>
+        <c:spPr>
+          <a:ln xmlns:a="http://schemas.openxmlformats.org/drawingml/2006/main" w="9525">
+            <a:solidFill>
+              <a:srgbClr val="CFD8D1"/>
+            </a:solidFill>
+          </a:ln>
+        </c:spPr>
+        <c:txPr>
+          <a:bodyPr xmlns:a="http://schemas.openxmlformats.org/drawingml/2006/main" anchorCtr="1"/>
+          <a:lstStyle xmlns:a="http://schemas.openxmlformats.org/drawingml/2006/main"/>
+          <a:p xmlns:a="http://schemas.openxmlformats.org/drawingml/2006/main">
+            <a:pPr>
+              <a:defRPr sz="1725">
+                <a:solidFill>
+                  <a:srgbClr val="1E302F"/>
+                </a:solidFill>
+                <a:latin typeface="Segoe UI"/>
+                <a:ea typeface="Segoe UI"/>
+                <a:cs typeface="Segoe UI"/>
+              </a:defRPr>
+            </a:pPr>
+          </a:p>
+        </c:txPr>
+        <c:crossAx val="48650112"/>
+        <c:majorUnit val="0.005"/>
+      </c:valAx>
+      <c:valAx>
+        <c:axId val="48650112"/>
+        <c:scaling>
+          <c:orientation val="minMax"/>
+          <c:max val="140"/>
+          <c:min val="40"/>
+        </c:scaling>
+        <c:delete val="0"/>
+        <c:axPos val="b"/>
         <c:numFmt formatCode="0"/>
         <c:majorTickMark val="none"/>
         <c:minorTickMark val="none"/>
         <c:spPr>
           <a:ln xmlns:a="http://schemas.openxmlformats.org/drawingml/2006/main" w="9525">
             <a:solidFill>
-              <a:srgbClr val="D4D4D4"/>
+              <a:srgbClr val="CFD8D1"/>
             </a:solidFill>
-            <a:prstDash val="solid"/>
           </a:ln>
         </c:spPr>
         <c:txPr>
@@ -1503,9 +1624,9 @@
           <a:lstStyle xmlns:a="http://schemas.openxmlformats.org/drawingml/2006/main"/>
           <a:p xmlns:a="http://schemas.openxmlformats.org/drawingml/2006/main">
             <a:pPr>
-              <a:defRPr sz="1425">
-                <a:solidFill>
-                  <a:srgbClr val="586C68"/>
+              <a:defRPr sz="1725">
+                <a:solidFill>
+                  <a:srgbClr val="1E302F"/>
                 </a:solidFill>
                 <a:latin typeface="Segoe UI"/>
                 <a:ea typeface="Segoe UI"/>
@@ -1514,9 +1635,8 @@
             </a:pPr>
           </a:p>
         </c:txPr>
-        <c:crossAx val="48650112"/>
-        <c:crossBetween val="between"/>
-        <c:majorUnit val="40"/>
+        <c:crossAx val="48672768"/>
+        <c:majorUnit val="20"/>
       </c:valAx>
       <c:spPr>
         <a:solidFill xmlns:a="http://schemas.openxmlformats.org/drawingml/2006/main">
@@ -1556,37 +1676,12 @@
       <p:grpSpPr>
         <a:xfrm xmlns:a="http://schemas.openxmlformats.org/drawingml/2006/main"/>
       </p:grpSpPr>
-      <p:pic>
-        <p:nvPicPr>
-          <p:cNvPr id="7" name=""/>
-          <p:cNvPicPr>
-            <a:picLocks xmlns:a="http://schemas.openxmlformats.org/drawingml/2006/main" noChangeAspect="1"/>
-          </p:cNvPicPr>
-          <p:nvPr/>
-        </p:nvPicPr>
-        <p:blipFill>
-          <a:blip xmlns:r="http://schemas.openxmlformats.org/officeDocument/2006/relationships" xmlns:a="http://schemas.openxmlformats.org/drawingml/2006/main" r:embed="Rff2126a0afdc4de5"/>
-          <a:srcRect xmlns:a="http://schemas.openxmlformats.org/drawingml/2006/main" l="6092" t="0" r="6092" b="0"/>
-          <a:stretch xmlns:a="http://schemas.openxmlformats.org/drawingml/2006/main">
-            <a:fillRect l="0" t="0" r="0" b="0"/>
-          </a:stretch>
-        </p:blipFill>
-        <p:spPr>
-          <a:xfrm xmlns:a="http://schemas.openxmlformats.org/drawingml/2006/main">
-            <a:off x="7372350" y="0"/>
-            <a:ext cx="4819650" cy="6858000"/>
-          </a:xfrm>
-          <a:prstGeom xmlns:a="http://schemas.openxmlformats.org/drawingml/2006/main" prst="rect">
-            <a:avLst/>
-          </a:prstGeom>
-        </p:spPr>
-      </p:pic>
-      <p:sp>
-        <p:nvSpPr>
-          <p:cNvPr id="2" name="S01-section">
+      <p:sp>
+        <p:nvSpPr>
+          <p:cNvPr id="13" name="S01-section">
             <a:extLst xmlns:a="http://schemas.openxmlformats.org/drawingml/2006/main">
               <a:ext uri="{FF2B5EF4-FFF2-40B4-BE49-F238E27FC236}">
-                <a16:creationId xmlns:a16="http://schemas.microsoft.com/office/drawing/2014/main" id="{D6E8A9ED-5F1A-40DB-B550-14998D956CD9}"/>
+                <a16:creationId xmlns:a16="http://schemas.microsoft.com/office/drawing/2014/main" id="{23FDFD73-9A5B-4C0A-B98C-31B94BE5255E}"/>
               </a:ext>
             </a:extLst>
           </p:cNvPr>
@@ -1597,8 +1692,8 @@
         </p:nvSpPr>
         <p:spPr>
           <a:xfrm xmlns:a="http://schemas.openxmlformats.org/drawingml/2006/main">
-            <a:off x="685800" y="590550"/>
-            <a:ext cx="6191250" cy="285750"/>
+            <a:off x="685800" y="609600"/>
+            <a:ext cx="10820400" cy="333375"/>
           </a:xfrm>
           <a:prstGeom xmlns:a="http://schemas.openxmlformats.org/drawingml/2006/main" prst="rect">
             <a:avLst/>
@@ -1615,9 +1710,9 @@
           <a:lstStyle xmlns:a="http://schemas.openxmlformats.org/drawingml/2006/main"/>
           <a:p xmlns:a="http://schemas.openxmlformats.org/drawingml/2006/main">
             <a:pPr>
-              <a:defRPr sz="1425" b="0">
-                <a:solidFill>
-                  <a:srgbClr val="287D78"/>
+              <a:defRPr sz="1650" b="0">
+                <a:solidFill>
+                  <a:srgbClr val="586C68"/>
                 </a:solidFill>
                 <a:latin typeface="Segoe UI"/>
                 <a:ea typeface="Segoe UI"/>
@@ -1625,25 +1720,25 @@
               </a:defRPr>
             </a:pPr>
             <a:r>
-              <a:rPr sz="1425" b="0">
-                <a:solidFill>
-                  <a:srgbClr val="287D78"/>
+              <a:rPr sz="1650" b="0">
+                <a:solidFill>
+                  <a:srgbClr val="586C68"/>
                 </a:solidFill>
                 <a:latin typeface="Segoe UI"/>
                 <a:ea typeface="Segoe UI"/>
                 <a:cs typeface="Segoe UI"/>
               </a:rPr>
-              <a:t>RESEARCH NOTE / 01</a:t>
-            </a:r>
-          </a:p>
-        </p:txBody>
-      </p:sp>
-      <p:sp>
-        <p:nvSpPr>
-          <p:cNvPr id="3" name="S01-title">
+              <a:t>Lab seminar · 5 minutes</a:t>
+            </a:r>
+          </a:p>
+        </p:txBody>
+      </p:sp>
+      <p:sp>
+        <p:nvSpPr>
+          <p:cNvPr id="2" name="S01-title">
             <a:extLst xmlns:a="http://schemas.openxmlformats.org/drawingml/2006/main">
               <a:ext uri="{FF2B5EF4-FFF2-40B4-BE49-F238E27FC236}">
-                <a16:creationId xmlns:a16="http://schemas.microsoft.com/office/drawing/2014/main" id="{4C2F98CD-761C-4BE1-B0E6-D8D7623A14E2}"/>
+                <a16:creationId xmlns:a16="http://schemas.microsoft.com/office/drawing/2014/main" id="{34A5D45D-6C44-4AE8-9AC4-0C1512BB90E8}"/>
               </a:ext>
             </a:extLst>
           </p:cNvPr>
@@ -1654,8 +1749,8 @@
         </p:nvSpPr>
         <p:spPr>
           <a:xfrm xmlns:a="http://schemas.openxmlformats.org/drawingml/2006/main">
-            <a:off x="685800" y="1895475"/>
-            <a:ext cx="6591300" cy="1600200"/>
+            <a:off x="685800" y="1438275"/>
+            <a:ext cx="10820400" cy="1476375"/>
           </a:xfrm>
           <a:prstGeom xmlns:a="http://schemas.openxmlformats.org/drawingml/2006/main" prst="rect">
             <a:avLst/>
@@ -1672,7 +1767,7 @@
           <a:lstStyle xmlns:a="http://schemas.openxmlformats.org/drawingml/2006/main"/>
           <a:p xmlns:a="http://schemas.openxmlformats.org/drawingml/2006/main">
             <a:pPr>
-              <a:defRPr sz="4200" b="0">
+              <a:defRPr sz="4275" b="0">
                 <a:solidFill>
                   <a:srgbClr val="1E302F"/>
                 </a:solidFill>
@@ -1682,7 +1777,7 @@
               </a:defRPr>
             </a:pPr>
             <a:r>
-              <a:rPr sz="4200" b="0">
+              <a:rPr sz="4275" b="0">
                 <a:solidFill>
                   <a:srgbClr val="1E302F"/>
                 </a:solidFill>
@@ -1690,12 +1785,12 @@
                 <a:ea typeface="Segoe UI"/>
                 <a:cs typeface="Segoe UI"/>
               </a:rPr>
-              <a:t>Smaller models.</a:t>
+              <a:t>Sensor anomaly detection</a:t>
             </a:r>
           </a:p>
           <a:p xmlns:a="http://schemas.openxmlformats.org/drawingml/2006/main">
             <a:pPr>
-              <a:defRPr sz="4200" b="0">
+              <a:defRPr sz="4275" b="0">
                 <a:solidFill>
                   <a:srgbClr val="1E302F"/>
                 </a:solidFill>
@@ -1705,7 +1800,7 @@
               </a:defRPr>
             </a:pPr>
             <a:r>
-              <a:rPr sz="4200" b="0">
+              <a:rPr sz="4275" b="0">
                 <a:solidFill>
                   <a:srgbClr val="1E302F"/>
                 </a:solidFill>
@@ -1713,17 +1808,17 @@
                 <a:ea typeface="Segoe UI"/>
                 <a:cs typeface="Segoe UI"/>
               </a:rPr>
-              <a:t>Considered trade-offs.</a:t>
-            </a:r>
-          </a:p>
-        </p:txBody>
-      </p:sp>
-      <p:sp>
-        <p:nvSpPr>
-          <p:cNvPr id="4" name="S01-subtitle">
+              <a:t>with smaller models</a:t>
+            </a:r>
+          </a:p>
+        </p:txBody>
+      </p:sp>
+      <p:sp>
+        <p:nvSpPr>
+          <p:cNvPr id="3" name="S01-subtitle">
             <a:extLst xmlns:a="http://schemas.openxmlformats.org/drawingml/2006/main">
               <a:ext uri="{FF2B5EF4-FFF2-40B4-BE49-F238E27FC236}">
-                <a16:creationId xmlns:a16="http://schemas.microsoft.com/office/drawing/2014/main" id="{26242D5B-C040-47B5-8284-A994E17ED53A}"/>
+                <a16:creationId xmlns:a16="http://schemas.microsoft.com/office/drawing/2014/main" id="{7A4B8756-23EB-40E8-91F0-371575F490E6}"/>
               </a:ext>
             </a:extLst>
           </p:cNvPr>
@@ -1734,8 +1829,8 @@
         </p:nvSpPr>
         <p:spPr>
           <a:xfrm xmlns:a="http://schemas.openxmlformats.org/drawingml/2006/main">
-            <a:off x="723900" y="3905250"/>
-            <a:ext cx="6048375" cy="781050"/>
+            <a:off x="685800" y="3133725"/>
+            <a:ext cx="10820400" cy="495300"/>
           </a:xfrm>
           <a:prstGeom xmlns:a="http://schemas.openxmlformats.org/drawingml/2006/main" prst="rect">
             <a:avLst/>
@@ -1770,40 +1865,17 @@
                 <a:ea typeface="Segoe UI"/>
                 <a:cs typeface="Segoe UI"/>
               </a:rPr>
-              <a:t>Sensor anomaly detection with</a:t>
-            </a:r>
-          </a:p>
-          <a:p xmlns:a="http://schemas.openxmlformats.org/drawingml/2006/main">
-            <a:pPr>
-              <a:defRPr sz="2175" b="0">
-                <a:solidFill>
-                  <a:srgbClr val="586C68"/>
-                </a:solidFill>
-                <a:latin typeface="Segoe UI"/>
-                <a:ea typeface="Segoe UI"/>
-                <a:cs typeface="Segoe UI"/>
-              </a:defRPr>
-            </a:pPr>
-            <a:r>
-              <a:rPr sz="2175" b="0">
-                <a:solidFill>
-                  <a:srgbClr val="586C68"/>
-                </a:solidFill>
-                <a:latin typeface="Segoe UI"/>
-                <a:ea typeface="Segoe UI"/>
-                <a:cs typeface="Segoe UI"/>
-              </a:rPr>
-              <a:t>distillation and INT8 quantization</a:t>
-            </a:r>
-          </a:p>
-        </p:txBody>
-      </p:sp>
-      <p:sp>
-        <p:nvSpPr>
-          <p:cNvPr id="5" name="S01-context">
+              <a:t>Knowledge distillation and INT8 quantization</a:t>
+            </a:r>
+          </a:p>
+        </p:txBody>
+      </p:sp>
+      <p:sp>
+        <p:nvSpPr>
+          <p:cNvPr id="4" name="S01-basis">
             <a:extLst xmlns:a="http://schemas.openxmlformats.org/drawingml/2006/main">
               <a:ext uri="{FF2B5EF4-FFF2-40B4-BE49-F238E27FC236}">
-                <a16:creationId xmlns:a16="http://schemas.microsoft.com/office/drawing/2014/main" id="{CE5D0945-2804-42F1-BE98-430B6393548F}"/>
+                <a16:creationId xmlns:a16="http://schemas.microsoft.com/office/drawing/2014/main" id="{2873CBBE-1F0F-4820-96BC-7E6C00C02996}"/>
               </a:ext>
             </a:extLst>
           </p:cNvPr>
@@ -1814,8 +1886,8 @@
         </p:nvSpPr>
         <p:spPr>
           <a:xfrm xmlns:a="http://schemas.openxmlformats.org/drawingml/2006/main">
-            <a:off x="723900" y="5410200"/>
-            <a:ext cx="5905500" cy="333375"/>
+            <a:off x="685800" y="4105275"/>
+            <a:ext cx="10820400" cy="342900"/>
           </a:xfrm>
           <a:prstGeom xmlns:a="http://schemas.openxmlformats.org/drawingml/2006/main" prst="rect">
             <a:avLst/>
@@ -1834,7 +1906,7 @@
             <a:pPr>
               <a:defRPr sz="1725" b="0">
                 <a:solidFill>
-                  <a:srgbClr val="1E302F"/>
+                  <a:srgbClr val="586C68"/>
                 </a:solidFill>
                 <a:latin typeface="Segoe UI"/>
                 <a:ea typeface="Segoe UI"/>
@@ -1844,23 +1916,23 @@
             <a:r>
               <a:rPr sz="1725" b="0">
                 <a:solidFill>
-                  <a:srgbClr val="1E302F"/>
+                  <a:srgbClr val="586C68"/>
                 </a:solidFill>
                 <a:latin typeface="Segoe UI"/>
                 <a:ea typeface="Segoe UI"/>
                 <a:cs typeface="Segoe UI"/>
               </a:rPr>
-              <a:t>Lab seminar · 5 minutes</a:t>
-            </a:r>
-          </a:p>
-        </p:txBody>
-      </p:sp>
-      <p:sp>
-        <p:nvSpPr>
-          <p:cNvPr id="6" name="S01-disclosure">
+              <a:t>Baseline compared with INT8</a:t>
+            </a:r>
+          </a:p>
+        </p:txBody>
+      </p:sp>
+      <p:sp>
+        <p:nvSpPr>
+          <p:cNvPr id="5" name="S01-value-1">
             <a:extLst xmlns:a="http://schemas.openxmlformats.org/drawingml/2006/main">
               <a:ext uri="{FF2B5EF4-FFF2-40B4-BE49-F238E27FC236}">
-                <a16:creationId xmlns:a16="http://schemas.microsoft.com/office/drawing/2014/main" id="{A847D8A6-1E81-4416-955C-608099BBDF94}"/>
+                <a16:creationId xmlns:a16="http://schemas.microsoft.com/office/drawing/2014/main" id="{295A3C64-3346-4FA6-A502-45C5C3C59CC8}"/>
               </a:ext>
             </a:extLst>
           </p:cNvPr>
@@ -1871,8 +1943,8 @@
         </p:nvSpPr>
         <p:spPr>
           <a:xfrm xmlns:a="http://schemas.openxmlformats.org/drawingml/2006/main">
-            <a:off x="723900" y="6343650"/>
-            <a:ext cx="6191250" cy="247650"/>
+            <a:off x="685800" y="4619625"/>
+            <a:ext cx="2952750" cy="628650"/>
           </a:xfrm>
           <a:prstGeom xmlns:a="http://schemas.openxmlformats.org/drawingml/2006/main" prst="rect">
             <a:avLst/>
@@ -1889,9 +1961,9 @@
           <a:lstStyle xmlns:a="http://schemas.openxmlformats.org/drawingml/2006/main"/>
           <a:p xmlns:a="http://schemas.openxmlformats.org/drawingml/2006/main">
             <a:pPr>
-              <a:defRPr sz="1275" b="0">
-                <a:solidFill>
-                  <a:srgbClr val="586C68"/>
+              <a:defRPr sz="3225" b="0">
+                <a:solidFill>
+                  <a:srgbClr val="1E302F"/>
                 </a:solidFill>
                 <a:latin typeface="Segoe UI"/>
                 <a:ea typeface="Segoe UI"/>
@@ -1899,6 +1971,348 @@
               </a:defRPr>
             </a:pPr>
             <a:r>
+              <a:rPr sz="3225" b="0">
+                <a:solidFill>
+                  <a:srgbClr val="1E302F"/>
+                </a:solidFill>
+                <a:latin typeface="Segoe UI"/>
+                <a:ea typeface="Segoe UI"/>
+                <a:cs typeface="Segoe UI"/>
+              </a:rPr>
+              <a:t>120 → 54</a:t>
+            </a:r>
+          </a:p>
+        </p:txBody>
+      </p:sp>
+      <p:sp>
+        <p:nvSpPr>
+          <p:cNvPr id="6" name="S01-label-1">
+            <a:extLst xmlns:a="http://schemas.openxmlformats.org/drawingml/2006/main">
+              <a:ext uri="{FF2B5EF4-FFF2-40B4-BE49-F238E27FC236}">
+                <a16:creationId xmlns:a16="http://schemas.microsoft.com/office/drawing/2014/main" id="{EBFBEFFB-C1D3-4DEE-B7B8-7EC8A0FC27BD}"/>
+              </a:ext>
+            </a:extLst>
+          </p:cNvPr>
+          <p:cNvSpPr>
+            <a:spLocks xmlns:a="http://schemas.openxmlformats.org/drawingml/2006/main" noGrp="1"/>
+          </p:cNvSpPr>
+          <p:nvPr/>
+        </p:nvSpPr>
+        <p:spPr>
+          <a:xfrm xmlns:a="http://schemas.openxmlformats.org/drawingml/2006/main">
+            <a:off x="685800" y="5314950"/>
+            <a:ext cx="3143250" cy="361950"/>
+          </a:xfrm>
+          <a:prstGeom xmlns:a="http://schemas.openxmlformats.org/drawingml/2006/main" prst="rect">
+            <a:avLst/>
+          </a:prstGeom>
+          <a:noFill xmlns:a="http://schemas.openxmlformats.org/drawingml/2006/main"/>
+          <a:ln xmlns:a="http://schemas.openxmlformats.org/drawingml/2006/main" w="0">
+            <a:noFill/>
+          </a:ln>
+        </p:spPr>
+        <p:txBody>
+          <a:bodyPr xmlns:a="http://schemas.openxmlformats.org/drawingml/2006/main" wrap="none" lIns="0" tIns="0" rIns="0" bIns="0" anchor="ctr">
+            <a:noAutofit/>
+          </a:bodyPr>
+          <a:lstStyle xmlns:a="http://schemas.openxmlformats.org/drawingml/2006/main"/>
+          <a:p xmlns:a="http://schemas.openxmlformats.org/drawingml/2006/main">
+            <a:pPr>
+              <a:defRPr sz="1800" b="0">
+                <a:solidFill>
+                  <a:srgbClr val="586C68"/>
+                </a:solidFill>
+                <a:latin typeface="Segoe UI"/>
+                <a:ea typeface="Segoe UI"/>
+                <a:cs typeface="Segoe UI"/>
+              </a:defRPr>
+            </a:pPr>
+            <a:r>
+              <a:rPr sz="1800" b="0">
+                <a:solidFill>
+                  <a:srgbClr val="586C68"/>
+                </a:solidFill>
+                <a:latin typeface="Segoe UI"/>
+                <a:ea typeface="Segoe UI"/>
+                <a:cs typeface="Segoe UI"/>
+              </a:rPr>
+              <a:t>Latency (ms)</a:t>
+            </a:r>
+          </a:p>
+        </p:txBody>
+      </p:sp>
+      <p:sp>
+        <p:nvSpPr>
+          <p:cNvPr id="7" name="S01-value-2">
+            <a:extLst xmlns:a="http://schemas.openxmlformats.org/drawingml/2006/main">
+              <a:ext uri="{FF2B5EF4-FFF2-40B4-BE49-F238E27FC236}">
+                <a16:creationId xmlns:a16="http://schemas.microsoft.com/office/drawing/2014/main" id="{16A73283-4CC7-4F48-87F3-803DBD5C4C7F}"/>
+              </a:ext>
+            </a:extLst>
+          </p:cNvPr>
+          <p:cNvSpPr>
+            <a:spLocks xmlns:a="http://schemas.openxmlformats.org/drawingml/2006/main" noGrp="1"/>
+          </p:cNvSpPr>
+          <p:nvPr/>
+        </p:nvSpPr>
+        <p:spPr>
+          <a:xfrm xmlns:a="http://schemas.openxmlformats.org/drawingml/2006/main">
+            <a:off x="4419600" y="4619625"/>
+            <a:ext cx="3810000" cy="628650"/>
+          </a:xfrm>
+          <a:prstGeom xmlns:a="http://schemas.openxmlformats.org/drawingml/2006/main" prst="rect">
+            <a:avLst/>
+          </a:prstGeom>
+          <a:noFill xmlns:a="http://schemas.openxmlformats.org/drawingml/2006/main"/>
+          <a:ln xmlns:a="http://schemas.openxmlformats.org/drawingml/2006/main" w="0">
+            <a:noFill/>
+          </a:ln>
+        </p:spPr>
+        <p:txBody>
+          <a:bodyPr xmlns:a="http://schemas.openxmlformats.org/drawingml/2006/main" wrap="none" lIns="0" tIns="0" rIns="0" bIns="0" anchor="ctr">
+            <a:noAutofit/>
+          </a:bodyPr>
+          <a:lstStyle xmlns:a="http://schemas.openxmlformats.org/drawingml/2006/main"/>
+          <a:p xmlns:a="http://schemas.openxmlformats.org/drawingml/2006/main">
+            <a:pPr>
+              <a:defRPr sz="3225" b="0">
+                <a:solidFill>
+                  <a:srgbClr val="1E302F"/>
+                </a:solidFill>
+                <a:latin typeface="Segoe UI"/>
+                <a:ea typeface="Segoe UI"/>
+                <a:cs typeface="Segoe UI"/>
+              </a:defRPr>
+            </a:pPr>
+            <a:r>
+              <a:rPr sz="3225" b="0">
+                <a:solidFill>
+                  <a:srgbClr val="1E302F"/>
+                </a:solidFill>
+                <a:latin typeface="Segoe UI"/>
+                <a:ea typeface="Segoe UI"/>
+                <a:cs typeface="Segoe UI"/>
+              </a:rPr>
+              <a:t>0.910 → 0.896</a:t>
+            </a:r>
+          </a:p>
+        </p:txBody>
+      </p:sp>
+      <p:sp>
+        <p:nvSpPr>
+          <p:cNvPr id="8" name="S01-label-2">
+            <a:extLst xmlns:a="http://schemas.openxmlformats.org/drawingml/2006/main">
+              <a:ext uri="{FF2B5EF4-FFF2-40B4-BE49-F238E27FC236}">
+                <a16:creationId xmlns:a16="http://schemas.microsoft.com/office/drawing/2014/main" id="{729CC653-091B-44A5-A028-48A585C0C178}"/>
+              </a:ext>
+            </a:extLst>
+          </p:cNvPr>
+          <p:cNvSpPr>
+            <a:spLocks xmlns:a="http://schemas.openxmlformats.org/drawingml/2006/main" noGrp="1"/>
+          </p:cNvSpPr>
+          <p:nvPr/>
+        </p:nvSpPr>
+        <p:spPr>
+          <a:xfrm xmlns:a="http://schemas.openxmlformats.org/drawingml/2006/main">
+            <a:off x="4419600" y="5314950"/>
+            <a:ext cx="3143250" cy="361950"/>
+          </a:xfrm>
+          <a:prstGeom xmlns:a="http://schemas.openxmlformats.org/drawingml/2006/main" prst="rect">
+            <a:avLst/>
+          </a:prstGeom>
+          <a:noFill xmlns:a="http://schemas.openxmlformats.org/drawingml/2006/main"/>
+          <a:ln xmlns:a="http://schemas.openxmlformats.org/drawingml/2006/main" w="0">
+            <a:noFill/>
+          </a:ln>
+        </p:spPr>
+        <p:txBody>
+          <a:bodyPr xmlns:a="http://schemas.openxmlformats.org/drawingml/2006/main" wrap="none" lIns="0" tIns="0" rIns="0" bIns="0" anchor="ctr">
+            <a:noAutofit/>
+          </a:bodyPr>
+          <a:lstStyle xmlns:a="http://schemas.openxmlformats.org/drawingml/2006/main"/>
+          <a:p xmlns:a="http://schemas.openxmlformats.org/drawingml/2006/main">
+            <a:pPr>
+              <a:defRPr sz="1800" b="0">
+                <a:solidFill>
+                  <a:srgbClr val="586C68"/>
+                </a:solidFill>
+                <a:latin typeface="Segoe UI"/>
+                <a:ea typeface="Segoe UI"/>
+                <a:cs typeface="Segoe UI"/>
+              </a:defRPr>
+            </a:pPr>
+            <a:r>
+              <a:rPr sz="1800" b="0">
+                <a:solidFill>
+                  <a:srgbClr val="586C68"/>
+                </a:solidFill>
+                <a:latin typeface="Segoe UI"/>
+                <a:ea typeface="Segoe UI"/>
+                <a:cs typeface="Segoe UI"/>
+              </a:rPr>
+              <a:t>F1</a:t>
+            </a:r>
+          </a:p>
+        </p:txBody>
+      </p:sp>
+      <p:sp>
+        <p:nvSpPr>
+          <p:cNvPr id="9" name="S01-value-3">
+            <a:extLst xmlns:a="http://schemas.openxmlformats.org/drawingml/2006/main">
+              <a:ext uri="{FF2B5EF4-FFF2-40B4-BE49-F238E27FC236}">
+                <a16:creationId xmlns:a16="http://schemas.microsoft.com/office/drawing/2014/main" id="{F592BA26-D889-4153-99C9-91B55DF1C412}"/>
+              </a:ext>
+            </a:extLst>
+          </p:cNvPr>
+          <p:cNvSpPr>
+            <a:spLocks xmlns:a="http://schemas.openxmlformats.org/drawingml/2006/main" noGrp="1"/>
+          </p:cNvSpPr>
+          <p:nvPr/>
+        </p:nvSpPr>
+        <p:spPr>
+          <a:xfrm xmlns:a="http://schemas.openxmlformats.org/drawingml/2006/main">
+            <a:off x="8572500" y="4619625"/>
+            <a:ext cx="2952750" cy="628650"/>
+          </a:xfrm>
+          <a:prstGeom xmlns:a="http://schemas.openxmlformats.org/drawingml/2006/main" prst="rect">
+            <a:avLst/>
+          </a:prstGeom>
+          <a:noFill xmlns:a="http://schemas.openxmlformats.org/drawingml/2006/main"/>
+          <a:ln xmlns:a="http://schemas.openxmlformats.org/drawingml/2006/main" w="0">
+            <a:noFill/>
+          </a:ln>
+        </p:spPr>
+        <p:txBody>
+          <a:bodyPr xmlns:a="http://schemas.openxmlformats.org/drawingml/2006/main" wrap="none" lIns="0" tIns="0" rIns="0" bIns="0" anchor="ctr">
+            <a:noAutofit/>
+          </a:bodyPr>
+          <a:lstStyle xmlns:a="http://schemas.openxmlformats.org/drawingml/2006/main"/>
+          <a:p xmlns:a="http://schemas.openxmlformats.org/drawingml/2006/main">
+            <a:pPr>
+              <a:defRPr sz="3225" b="0">
+                <a:solidFill>
+                  <a:srgbClr val="1E302F"/>
+                </a:solidFill>
+                <a:latin typeface="Segoe UI"/>
+                <a:ea typeface="Segoe UI"/>
+                <a:cs typeface="Segoe UI"/>
+              </a:defRPr>
+            </a:pPr>
+            <a:r>
+              <a:rPr sz="3225" b="0">
+                <a:solidFill>
+                  <a:srgbClr val="1E302F"/>
+                </a:solidFill>
+                <a:latin typeface="Segoe UI"/>
+                <a:ea typeface="Segoe UI"/>
+                <a:cs typeface="Segoe UI"/>
+              </a:rPr>
+              <a:t>48 → 12</a:t>
+            </a:r>
+          </a:p>
+        </p:txBody>
+      </p:sp>
+      <p:sp>
+        <p:nvSpPr>
+          <p:cNvPr id="10" name="S01-label-3">
+            <a:extLst xmlns:a="http://schemas.openxmlformats.org/drawingml/2006/main">
+              <a:ext uri="{FF2B5EF4-FFF2-40B4-BE49-F238E27FC236}">
+                <a16:creationId xmlns:a16="http://schemas.microsoft.com/office/drawing/2014/main" id="{95A599DF-353D-42E0-9D56-5245DC7B8391}"/>
+              </a:ext>
+            </a:extLst>
+          </p:cNvPr>
+          <p:cNvSpPr>
+            <a:spLocks xmlns:a="http://schemas.openxmlformats.org/drawingml/2006/main" noGrp="1"/>
+          </p:cNvSpPr>
+          <p:nvPr/>
+        </p:nvSpPr>
+        <p:spPr>
+          <a:xfrm xmlns:a="http://schemas.openxmlformats.org/drawingml/2006/main">
+            <a:off x="8572500" y="5314950"/>
+            <a:ext cx="3143250" cy="361950"/>
+          </a:xfrm>
+          <a:prstGeom xmlns:a="http://schemas.openxmlformats.org/drawingml/2006/main" prst="rect">
+            <a:avLst/>
+          </a:prstGeom>
+          <a:noFill xmlns:a="http://schemas.openxmlformats.org/drawingml/2006/main"/>
+          <a:ln xmlns:a="http://schemas.openxmlformats.org/drawingml/2006/main" w="0">
+            <a:noFill/>
+          </a:ln>
+        </p:spPr>
+        <p:txBody>
+          <a:bodyPr xmlns:a="http://schemas.openxmlformats.org/drawingml/2006/main" wrap="none" lIns="0" tIns="0" rIns="0" bIns="0" anchor="ctr">
+            <a:noAutofit/>
+          </a:bodyPr>
+          <a:lstStyle xmlns:a="http://schemas.openxmlformats.org/drawingml/2006/main"/>
+          <a:p xmlns:a="http://schemas.openxmlformats.org/drawingml/2006/main">
+            <a:pPr>
+              <a:defRPr sz="1800" b="0">
+                <a:solidFill>
+                  <a:srgbClr val="586C68"/>
+                </a:solidFill>
+                <a:latin typeface="Segoe UI"/>
+                <a:ea typeface="Segoe UI"/>
+                <a:cs typeface="Segoe UI"/>
+              </a:defRPr>
+            </a:pPr>
+            <a:r>
+              <a:rPr sz="1800" b="0">
+                <a:solidFill>
+                  <a:srgbClr val="586C68"/>
+                </a:solidFill>
+                <a:latin typeface="Segoe UI"/>
+                <a:ea typeface="Segoe UI"/>
+                <a:cs typeface="Segoe UI"/>
+              </a:rPr>
+              <a:t>Model size (MB)</a:t>
+            </a:r>
+          </a:p>
+        </p:txBody>
+      </p:sp>
+      <p:sp>
+        <p:nvSpPr>
+          <p:cNvPr id="11" name="S01-disclosure">
+            <a:extLst xmlns:a="http://schemas.openxmlformats.org/drawingml/2006/main">
+              <a:ext uri="{FF2B5EF4-FFF2-40B4-BE49-F238E27FC236}">
+                <a16:creationId xmlns:a16="http://schemas.microsoft.com/office/drawing/2014/main" id="{DFF9007E-EFA7-42DB-BE04-E78D98B57CC9}"/>
+              </a:ext>
+            </a:extLst>
+          </p:cNvPr>
+          <p:cNvSpPr>
+            <a:spLocks xmlns:a="http://schemas.openxmlformats.org/drawingml/2006/main" noGrp="1"/>
+          </p:cNvSpPr>
+          <p:nvPr/>
+        </p:nvSpPr>
+        <p:spPr>
+          <a:xfrm xmlns:a="http://schemas.openxmlformats.org/drawingml/2006/main">
+            <a:off x="685800" y="6372225"/>
+            <a:ext cx="9525000" cy="219075"/>
+          </a:xfrm>
+          <a:prstGeom xmlns:a="http://schemas.openxmlformats.org/drawingml/2006/main" prst="rect">
+            <a:avLst/>
+          </a:prstGeom>
+          <a:noFill xmlns:a="http://schemas.openxmlformats.org/drawingml/2006/main"/>
+          <a:ln xmlns:a="http://schemas.openxmlformats.org/drawingml/2006/main" w="0">
+            <a:noFill/>
+          </a:ln>
+        </p:spPr>
+        <p:txBody>
+          <a:bodyPr xmlns:a="http://schemas.openxmlformats.org/drawingml/2006/main" wrap="none" lIns="0" tIns="0" rIns="0" bIns="0" anchor="ctr">
+            <a:noAutofit/>
+          </a:bodyPr>
+          <a:lstStyle xmlns:a="http://schemas.openxmlformats.org/drawingml/2006/main"/>
+          <a:p xmlns:a="http://schemas.openxmlformats.org/drawingml/2006/main">
+            <a:pPr>
+              <a:defRPr sz="1275" b="0">
+                <a:solidFill>
+                  <a:srgbClr val="586C68"/>
+                </a:solidFill>
+                <a:latin typeface="Segoe UI"/>
+                <a:ea typeface="Segoe UI"/>
+                <a:cs typeface="Segoe UI"/>
+              </a:defRPr>
+            </a:pPr>
+            <a:r>
               <a:rPr sz="1275" b="0">
                 <a:solidFill>
                   <a:srgbClr val="586C68"/>
@@ -1908,6 +2322,63 @@
                 <a:cs typeface="Segoe UI"/>
               </a:rPr>
               <a:t>Illustrative data · not experimental results</a:t>
+            </a:r>
+          </a:p>
+        </p:txBody>
+      </p:sp>
+      <p:sp>
+        <p:nvSpPr>
+          <p:cNvPr id="12" name="S01-number">
+            <a:extLst xmlns:a="http://schemas.openxmlformats.org/drawingml/2006/main">
+              <a:ext uri="{FF2B5EF4-FFF2-40B4-BE49-F238E27FC236}">
+                <a16:creationId xmlns:a16="http://schemas.microsoft.com/office/drawing/2014/main" id="{EEC9B55A-5E3F-4C8F-BEF1-115C002FB54B}"/>
+              </a:ext>
+            </a:extLst>
+          </p:cNvPr>
+          <p:cNvSpPr>
+            <a:spLocks xmlns:a="http://schemas.openxmlformats.org/drawingml/2006/main" noGrp="1"/>
+          </p:cNvSpPr>
+          <p:nvPr/>
+        </p:nvSpPr>
+        <p:spPr>
+          <a:xfrm xmlns:a="http://schemas.openxmlformats.org/drawingml/2006/main">
+            <a:off x="11144250" y="6372225"/>
+            <a:ext cx="361950" cy="219075"/>
+          </a:xfrm>
+          <a:prstGeom xmlns:a="http://schemas.openxmlformats.org/drawingml/2006/main" prst="rect">
+            <a:avLst/>
+          </a:prstGeom>
+          <a:noFill xmlns:a="http://schemas.openxmlformats.org/drawingml/2006/main"/>
+          <a:ln xmlns:a="http://schemas.openxmlformats.org/drawingml/2006/main" w="0">
+            <a:noFill/>
+          </a:ln>
+        </p:spPr>
+        <p:txBody>
+          <a:bodyPr xmlns:a="http://schemas.openxmlformats.org/drawingml/2006/main" wrap="none" lIns="0" tIns="0" rIns="0" bIns="0" anchor="ctr">
+            <a:noAutofit/>
+          </a:bodyPr>
+          <a:lstStyle xmlns:a="http://schemas.openxmlformats.org/drawingml/2006/main"/>
+          <a:p xmlns:a="http://schemas.openxmlformats.org/drawingml/2006/main">
+            <a:pPr>
+              <a:defRPr sz="1275" b="0">
+                <a:solidFill>
+                  <a:srgbClr val="586C68"/>
+                </a:solidFill>
+                <a:latin typeface="Segoe UI"/>
+                <a:ea typeface="Segoe UI"/>
+                <a:cs typeface="Segoe UI"/>
+              </a:defRPr>
+            </a:pPr>
+            <a:r>
+              <a:rPr sz="1275" b="0">
+                <a:solidFill>
+                  <a:srgbClr val="586C68"/>
+                </a:solidFill>
+                <a:latin typeface="Segoe UI"/>
+                <a:ea typeface="Segoe UI"/>
+                <a:cs typeface="Segoe UI"/>
+              </a:rPr>
+              <a:t>01</a:t>
             </a:r>
           </a:p>
         </p:txBody>
@@ -1915,7 +2386,7 @@
     </p:spTree>
     <p:extLst>
       <p:ext uri="{BB962C8B-B14F-4D97-AF65-F5344CB8AC3E}">
-        <p14:creationId xmlns:p14="http://schemas.microsoft.com/office/powerpoint/2010/main" val="872901537"/>
+        <p14:creationId xmlns:p14="http://schemas.microsoft.com/office/powerpoint/2010/main" val="612005508"/>
       </p:ext>
     </p:extLst>
   </p:cSld>
@@ -1943,67 +2414,10 @@
       </p:grpSpPr>
       <p:sp>
         <p:nvSpPr>
-          <p:cNvPr id="22" name="S02-section">
+          <p:cNvPr id="21" name="S02-title">
             <a:extLst xmlns:a="http://schemas.openxmlformats.org/drawingml/2006/main">
               <a:ext uri="{FF2B5EF4-FFF2-40B4-BE49-F238E27FC236}">
-                <a16:creationId xmlns:a16="http://schemas.microsoft.com/office/drawing/2014/main" id="{38AF2B2F-DFDC-44CF-AFD0-A937CEF5A931}"/>
-              </a:ext>
-            </a:extLst>
-          </p:cNvPr>
-          <p:cNvSpPr>
-            <a:spLocks xmlns:a="http://schemas.openxmlformats.org/drawingml/2006/main" noGrp="1"/>
-          </p:cNvSpPr>
-          <p:nvPr/>
-        </p:nvSpPr>
-        <p:spPr>
-          <a:xfrm xmlns:a="http://schemas.openxmlformats.org/drawingml/2006/main">
-            <a:off x="685800" y="400050"/>
-            <a:ext cx="10744200" cy="257175"/>
-          </a:xfrm>
-          <a:prstGeom xmlns:a="http://schemas.openxmlformats.org/drawingml/2006/main" prst="rect">
-            <a:avLst/>
-          </a:prstGeom>
-          <a:noFill xmlns:a="http://schemas.openxmlformats.org/drawingml/2006/main"/>
-          <a:ln xmlns:a="http://schemas.openxmlformats.org/drawingml/2006/main" w="0">
-            <a:noFill/>
-          </a:ln>
-        </p:spPr>
-        <p:txBody>
-          <a:bodyPr xmlns:a="http://schemas.openxmlformats.org/drawingml/2006/main" wrap="none" lIns="0" tIns="0" rIns="0" bIns="0" anchor="ctr">
-            <a:noAutofit/>
-          </a:bodyPr>
-          <a:lstStyle xmlns:a="http://schemas.openxmlformats.org/drawingml/2006/main"/>
-          <a:p xmlns:a="http://schemas.openxmlformats.org/drawingml/2006/main">
-            <a:pPr>
-              <a:defRPr sz="1425" b="0">
-                <a:solidFill>
-                  <a:srgbClr val="287D78"/>
-                </a:solidFill>
-                <a:latin typeface="Segoe UI"/>
-                <a:ea typeface="Segoe UI"/>
-                <a:cs typeface="Segoe UI"/>
-              </a:defRPr>
-            </a:pPr>
-            <a:r>
-              <a:rPr sz="1425" b="0">
-                <a:solidFill>
-                  <a:srgbClr val="287D78"/>
-                </a:solidFill>
-                <a:latin typeface="Segoe UI"/>
-                <a:ea typeface="Segoe UI"/>
-                <a:cs typeface="Segoe UI"/>
-              </a:rPr>
-              <a:t>METHOD / TWO COMPRESSION STEPS</a:t>
-            </a:r>
-          </a:p>
-        </p:txBody>
-      </p:sp>
-      <p:sp>
-        <p:nvSpPr>
-          <p:cNvPr id="2" name="S02-title">
-            <a:extLst xmlns:a="http://schemas.openxmlformats.org/drawingml/2006/main">
-              <a:ext uri="{FF2B5EF4-FFF2-40B4-BE49-F238E27FC236}">
-                <a16:creationId xmlns:a16="http://schemas.microsoft.com/office/drawing/2014/main" id="{B0A18481-3748-46C8-B040-D773482F990F}"/>
+                <a16:creationId xmlns:a16="http://schemas.microsoft.com/office/drawing/2014/main" id="{CF9B9C6A-E02D-4CA3-AEF1-A426334290F4}"/>
               </a:ext>
             </a:extLst>
           </p:cNvPr>
@@ -2050,17 +2464,17 @@
                 <a:ea typeface="Segoe UI"/>
                 <a:cs typeface="Segoe UI"/>
               </a:rPr>
-              <a:t>From a teacher to a compact student</a:t>
-            </a:r>
-          </a:p>
-        </p:txBody>
-      </p:sp>
-      <p:sp>
-        <p:nvSpPr>
-          <p:cNvPr id="3" name="S02-disclosure">
+              <a:t>Model states and compression steps</a:t>
+            </a:r>
+          </a:p>
+        </p:txBody>
+      </p:sp>
+      <p:sp>
+        <p:nvSpPr>
+          <p:cNvPr id="2" name="S02-disclosure">
             <a:extLst xmlns:a="http://schemas.openxmlformats.org/drawingml/2006/main">
               <a:ext uri="{FF2B5EF4-FFF2-40B4-BE49-F238E27FC236}">
-                <a16:creationId xmlns:a16="http://schemas.microsoft.com/office/drawing/2014/main" id="{0D26C020-E687-43A2-9252-B85FDA2591D6}"/>
+                <a16:creationId xmlns:a16="http://schemas.microsoft.com/office/drawing/2014/main" id="{8044D044-51B9-422C-ADC4-E290AFFF6F6B}"/>
               </a:ext>
             </a:extLst>
           </p:cNvPr>
@@ -2114,10 +2528,10 @@
       </p:sp>
       <p:sp>
         <p:nvSpPr>
-          <p:cNvPr id="4" name="S02-number">
+          <p:cNvPr id="3" name="S02-number">
             <a:extLst xmlns:a="http://schemas.openxmlformats.org/drawingml/2006/main">
               <a:ext uri="{FF2B5EF4-FFF2-40B4-BE49-F238E27FC236}">
-                <a16:creationId xmlns:a16="http://schemas.microsoft.com/office/drawing/2014/main" id="{16C78E3E-1CEB-47EA-B53A-2BEE9C7E5285}"/>
+                <a16:creationId xmlns:a16="http://schemas.microsoft.com/office/drawing/2014/main" id="{A928C312-CE69-49D3-9B5A-B53A5B76A4E4}"/>
               </a:ext>
             </a:extLst>
           </p:cNvPr>
@@ -2171,10 +2585,10 @@
       </p:sp>
       <p:sp>
         <p:nvSpPr>
-          <p:cNvPr id="5" name="S02-marker-1">
+          <p:cNvPr id="4" name="S02-marker-1">
             <a:extLst xmlns:a="http://schemas.openxmlformats.org/drawingml/2006/main">
               <a:ext uri="{FF2B5EF4-FFF2-40B4-BE49-F238E27FC236}">
-                <a16:creationId xmlns:a16="http://schemas.microsoft.com/office/drawing/2014/main" id="{A1CCCF3E-D131-4C6A-8EBA-BE7D30BBDCC5}"/>
+                <a16:creationId xmlns:a16="http://schemas.microsoft.com/office/drawing/2014/main" id="{10E9B863-F42B-43DC-84F3-52620772A672}"/>
               </a:ext>
             </a:extLst>
           </p:cNvPr>
@@ -2228,10 +2642,10 @@
       </p:sp>
       <p:sp>
         <p:nvSpPr>
-          <p:cNvPr id="6" name="S02-marker-2">
+          <p:cNvPr id="5" name="S02-marker-2">
             <a:extLst xmlns:a="http://schemas.openxmlformats.org/drawingml/2006/main">
               <a:ext uri="{FF2B5EF4-FFF2-40B4-BE49-F238E27FC236}">
-                <a16:creationId xmlns:a16="http://schemas.microsoft.com/office/drawing/2014/main" id="{E30A7E0B-6A7F-4EB3-B049-ED9215FC7920}"/>
+                <a16:creationId xmlns:a16="http://schemas.microsoft.com/office/drawing/2014/main" id="{8AD87FB6-4FB9-439B-9564-F455B4A48EAB}"/>
               </a:ext>
             </a:extLst>
           </p:cNvPr>
@@ -2285,10 +2699,10 @@
       </p:sp>
       <p:sp>
         <p:nvSpPr>
-          <p:cNvPr id="7" name="S02-marker-3">
+          <p:cNvPr id="6" name="S02-marker-3">
             <a:extLst xmlns:a="http://schemas.openxmlformats.org/drawingml/2006/main">
               <a:ext uri="{FF2B5EF4-FFF2-40B4-BE49-F238E27FC236}">
-                <a16:creationId xmlns:a16="http://schemas.microsoft.com/office/drawing/2014/main" id="{589A3122-8F0E-4C97-A5B4-3A6FE7F24859}"/>
+                <a16:creationId xmlns:a16="http://schemas.microsoft.com/office/drawing/2014/main" id="{C001C507-8BD2-49F8-8146-F4911000A5A0}"/>
               </a:ext>
             </a:extLst>
           </p:cNvPr>
@@ -2342,10 +2756,10 @@
       </p:sp>
       <p:cxnSp>
         <p:nvCxnSpPr>
-          <p:cNvPr id="29" name="S02-link-2"/>
+          <p:cNvPr id="27" name="S02-link-2"/>
           <p:cNvCxnSpPr>
-            <a:stCxn xmlns:a="http://schemas.openxmlformats.org/drawingml/2006/main" id="5" idx="6"/>
-            <a:endCxn xmlns:a="http://schemas.openxmlformats.org/drawingml/2006/main" id="6" idx="2"/>
+            <a:stCxn xmlns:a="http://schemas.openxmlformats.org/drawingml/2006/main" id="4" idx="6"/>
+            <a:endCxn xmlns:a="http://schemas.openxmlformats.org/drawingml/2006/main" id="5" idx="2"/>
           </p:cNvCxnSpPr>
           <p:nvPr/>
         </p:nvCxnSpPr>
@@ -2367,10 +2781,10 @@
       </p:cxnSp>
       <p:cxnSp>
         <p:nvCxnSpPr>
-          <p:cNvPr id="30" name="S02-link-3"/>
+          <p:cNvPr id="28" name="S02-link-3"/>
           <p:cNvCxnSpPr>
-            <a:stCxn xmlns:a="http://schemas.openxmlformats.org/drawingml/2006/main" id="6" idx="6"/>
-            <a:endCxn xmlns:a="http://schemas.openxmlformats.org/drawingml/2006/main" id="7" idx="2"/>
+            <a:stCxn xmlns:a="http://schemas.openxmlformats.org/drawingml/2006/main" id="5" idx="6"/>
+            <a:endCxn xmlns:a="http://schemas.openxmlformats.org/drawingml/2006/main" id="6" idx="2"/>
           </p:cNvCxnSpPr>
           <p:nvPr/>
         </p:nvCxnSpPr>
@@ -2392,10 +2806,10 @@
       </p:cxnSp>
       <p:sp>
         <p:nvSpPr>
-          <p:cNvPr id="10" name="S02-flow-2">
+          <p:cNvPr id="9" name="S02-flow-2">
             <a:extLst xmlns:a="http://schemas.openxmlformats.org/drawingml/2006/main">
               <a:ext uri="{FF2B5EF4-FFF2-40B4-BE49-F238E27FC236}">
-                <a16:creationId xmlns:a16="http://schemas.microsoft.com/office/drawing/2014/main" id="{C3FB482B-8C3A-4AF4-9139-6144D2C21705}"/>
+                <a16:creationId xmlns:a16="http://schemas.microsoft.com/office/drawing/2014/main" id="{3704B231-8F02-49A2-8FE9-040F3058EF8C}"/>
               </a:ext>
             </a:extLst>
           </p:cNvPr>
@@ -2442,17 +2856,17 @@
                 <a:ea typeface="Segoe UI"/>
                 <a:cs typeface="Segoe UI"/>
               </a:rPr>
-              <a:t>Prediction transfer</a:t>
-            </a:r>
-          </a:p>
-        </p:txBody>
-      </p:sp>
-      <p:sp>
-        <p:nvSpPr>
-          <p:cNvPr id="11" name="S02-flow-3">
+              <a:t>Knowledge distillation</a:t>
+            </a:r>
+          </a:p>
+        </p:txBody>
+      </p:sp>
+      <p:sp>
+        <p:nvSpPr>
+          <p:cNvPr id="10" name="S02-flow-3">
             <a:extLst xmlns:a="http://schemas.openxmlformats.org/drawingml/2006/main">
               <a:ext uri="{FF2B5EF4-FFF2-40B4-BE49-F238E27FC236}">
-                <a16:creationId xmlns:a16="http://schemas.microsoft.com/office/drawing/2014/main" id="{D6EC3D8F-1037-4D7D-8D4F-6F442121BDBC}"/>
+                <a16:creationId xmlns:a16="http://schemas.microsoft.com/office/drawing/2014/main" id="{CF9684AC-1473-4EA1-B9F5-3627FA976239}"/>
               </a:ext>
             </a:extLst>
           </p:cNvPr>
@@ -2499,17 +2913,17 @@
                 <a:ea typeface="Segoe UI"/>
                 <a:cs typeface="Segoe UI"/>
               </a:rPr>
-              <a:t>Numeric conversion</a:t>
-            </a:r>
-          </a:p>
-        </p:txBody>
-      </p:sp>
-      <p:sp>
-        <p:nvSpPr>
-          <p:cNvPr id="12" name="S02-stage-1">
+              <a:t>INT8 quantization</a:t>
+            </a:r>
+          </a:p>
+        </p:txBody>
+      </p:sp>
+      <p:sp>
+        <p:nvSpPr>
+          <p:cNvPr id="11" name="S02-stage-1">
             <a:extLst xmlns:a="http://schemas.openxmlformats.org/drawingml/2006/main">
               <a:ext uri="{FF2B5EF4-FFF2-40B4-BE49-F238E27FC236}">
-                <a16:creationId xmlns:a16="http://schemas.microsoft.com/office/drawing/2014/main" id="{8985360B-9721-48F9-B506-A2502A8D348A}"/>
+                <a16:creationId xmlns:a16="http://schemas.microsoft.com/office/drawing/2014/main" id="{574D80A0-4E2E-413A-B157-8A93FDA0FB3D}"/>
               </a:ext>
             </a:extLst>
           </p:cNvPr>
@@ -2556,17 +2970,17 @@
                 <a:ea typeface="Segoe UI"/>
                 <a:cs typeface="Segoe UI"/>
               </a:rPr>
-              <a:t>Baseline</a:t>
-            </a:r>
-          </a:p>
-        </p:txBody>
-      </p:sp>
-      <p:sp>
-        <p:nvSpPr>
-          <p:cNvPr id="13" name="S02-name-1">
+              <a:t>Teacher model</a:t>
+            </a:r>
+          </a:p>
+        </p:txBody>
+      </p:sp>
+      <p:sp>
+        <p:nvSpPr>
+          <p:cNvPr id="12" name="S02-name-1">
             <a:extLst xmlns:a="http://schemas.openxmlformats.org/drawingml/2006/main">
               <a:ext uri="{FF2B5EF4-FFF2-40B4-BE49-F238E27FC236}">
-                <a16:creationId xmlns:a16="http://schemas.microsoft.com/office/drawing/2014/main" id="{95049510-C349-4929-8584-5DBC90F89AA2}"/>
+                <a16:creationId xmlns:a16="http://schemas.microsoft.com/office/drawing/2014/main" id="{57A2D65F-AFD6-4FE7-9345-862BCC2D3B35}"/>
               </a:ext>
             </a:extLst>
           </p:cNvPr>
@@ -2620,10 +3034,10 @@
       </p:sp>
       <p:sp>
         <p:nvSpPr>
-          <p:cNvPr id="14" name="S02-detail-1">
+          <p:cNvPr id="13" name="S02-detail-1">
             <a:extLst xmlns:a="http://schemas.openxmlformats.org/drawingml/2006/main">
               <a:ext uri="{FF2B5EF4-FFF2-40B4-BE49-F238E27FC236}">
-                <a16:creationId xmlns:a16="http://schemas.microsoft.com/office/drawing/2014/main" id="{125424C2-44BA-44FE-848B-84FD7909F3D1}"/>
+                <a16:creationId xmlns:a16="http://schemas.microsoft.com/office/drawing/2014/main" id="{0FA1038E-FF2B-4C5E-A76C-80AE52B2910A}"/>
               </a:ext>
             </a:extLst>
           </p:cNvPr>
@@ -2700,10 +3114,10 @@
       </p:sp>
       <p:sp>
         <p:nvSpPr>
-          <p:cNvPr id="15" name="S02-stage-2">
+          <p:cNvPr id="14" name="S02-stage-2">
             <a:extLst xmlns:a="http://schemas.openxmlformats.org/drawingml/2006/main">
               <a:ext uri="{FF2B5EF4-FFF2-40B4-BE49-F238E27FC236}">
-                <a16:creationId xmlns:a16="http://schemas.microsoft.com/office/drawing/2014/main" id="{E5F9886C-E7E3-4633-A958-E5212F8E5317}"/>
+                <a16:creationId xmlns:a16="http://schemas.microsoft.com/office/drawing/2014/main" id="{83B69A53-8C5F-4DF5-8FBC-D802B0AE4A0F}"/>
               </a:ext>
             </a:extLst>
           </p:cNvPr>
@@ -2750,17 +3164,17 @@
                 <a:ea typeface="Segoe UI"/>
                 <a:cs typeface="Segoe UI"/>
               </a:rPr>
-              <a:t>Distillation</a:t>
-            </a:r>
-          </a:p>
-        </p:txBody>
-      </p:sp>
-      <p:sp>
-        <p:nvSpPr>
-          <p:cNvPr id="16" name="S02-name-2">
+              <a:t>Student model</a:t>
+            </a:r>
+          </a:p>
+        </p:txBody>
+      </p:sp>
+      <p:sp>
+        <p:nvSpPr>
+          <p:cNvPr id="15" name="S02-name-2">
             <a:extLst xmlns:a="http://schemas.openxmlformats.org/drawingml/2006/main">
               <a:ext uri="{FF2B5EF4-FFF2-40B4-BE49-F238E27FC236}">
-                <a16:creationId xmlns:a16="http://schemas.microsoft.com/office/drawing/2014/main" id="{8E293791-745A-4D99-A079-03922D0FDB19}"/>
+                <a16:creationId xmlns:a16="http://schemas.microsoft.com/office/drawing/2014/main" id="{633B045A-B0D5-418B-B662-03C4B84871B7}"/>
               </a:ext>
             </a:extLst>
           </p:cNvPr>
@@ -2814,10 +3228,10 @@
       </p:sp>
       <p:sp>
         <p:nvSpPr>
-          <p:cNvPr id="17" name="S02-detail-2">
+          <p:cNvPr id="16" name="S02-detail-2">
             <a:extLst xmlns:a="http://schemas.openxmlformats.org/drawingml/2006/main">
               <a:ext uri="{FF2B5EF4-FFF2-40B4-BE49-F238E27FC236}">
-                <a16:creationId xmlns:a16="http://schemas.microsoft.com/office/drawing/2014/main" id="{83CF5FE0-4AD3-4D18-9AFA-7920E8EF220E}"/>
+                <a16:creationId xmlns:a16="http://schemas.microsoft.com/office/drawing/2014/main" id="{45E8AC73-47E3-48FE-B12E-A99216CA0A79}"/>
               </a:ext>
             </a:extLst>
           </p:cNvPr>
@@ -2894,10 +3308,10 @@
       </p:sp>
       <p:sp>
         <p:nvSpPr>
-          <p:cNvPr id="18" name="S02-stage-3">
+          <p:cNvPr id="17" name="S02-stage-3">
             <a:extLst xmlns:a="http://schemas.openxmlformats.org/drawingml/2006/main">
               <a:ext uri="{FF2B5EF4-FFF2-40B4-BE49-F238E27FC236}">
-                <a16:creationId xmlns:a16="http://schemas.microsoft.com/office/drawing/2014/main" id="{7DF34022-0808-4707-8EB5-EE5830F647D9}"/>
+                <a16:creationId xmlns:a16="http://schemas.microsoft.com/office/drawing/2014/main" id="{85311D4C-D613-4589-BE43-CB1DF321C346}"/>
               </a:ext>
             </a:extLst>
           </p:cNvPr>
@@ -2944,17 +3358,17 @@
                 <a:ea typeface="Segoe UI"/>
                 <a:cs typeface="Segoe UI"/>
               </a:rPr>
-              <a:t>INT8 quantization</a:t>
-            </a:r>
-          </a:p>
-        </p:txBody>
-      </p:sp>
-      <p:sp>
-        <p:nvSpPr>
-          <p:cNvPr id="19" name="S02-name-3">
+              <a:t>INT8 student</a:t>
+            </a:r>
+          </a:p>
+        </p:txBody>
+      </p:sp>
+      <p:sp>
+        <p:nvSpPr>
+          <p:cNvPr id="18" name="S02-name-3">
             <a:extLst xmlns:a="http://schemas.openxmlformats.org/drawingml/2006/main">
               <a:ext uri="{FF2B5EF4-FFF2-40B4-BE49-F238E27FC236}">
-                <a16:creationId xmlns:a16="http://schemas.microsoft.com/office/drawing/2014/main" id="{636C148B-A2F9-4F48-A1EE-72E6A939F67A}"/>
+                <a16:creationId xmlns:a16="http://schemas.microsoft.com/office/drawing/2014/main" id="{93C3164F-A989-44D9-8207-95A53AED8BB2}"/>
               </a:ext>
             </a:extLst>
           </p:cNvPr>
@@ -3008,10 +3422,10 @@
       </p:sp>
       <p:sp>
         <p:nvSpPr>
-          <p:cNvPr id="20" name="S02-detail-3">
+          <p:cNvPr id="19" name="S02-detail-3">
             <a:extLst xmlns:a="http://schemas.openxmlformats.org/drawingml/2006/main">
               <a:ext uri="{FF2B5EF4-FFF2-40B4-BE49-F238E27FC236}">
-                <a16:creationId xmlns:a16="http://schemas.microsoft.com/office/drawing/2014/main" id="{EA4199E6-94C7-46AF-BBBF-B1A92E9459A7}"/>
+                <a16:creationId xmlns:a16="http://schemas.microsoft.com/office/drawing/2014/main" id="{6B8938CF-FBFD-433E-AE3D-984C8CFA21CB}"/>
               </a:ext>
             </a:extLst>
           </p:cNvPr>
@@ -3058,7 +3472,7 @@
                 <a:ea typeface="Segoe UI"/>
                 <a:cs typeface="Segoe UI"/>
               </a:rPr>
-              <a:t>Represent student numbers</a:t>
+              <a:t>Use 8-bit integers for</a:t>
             </a:r>
           </a:p>
           <a:p xmlns:a="http://schemas.openxmlformats.org/drawingml/2006/main">
@@ -3081,17 +3495,17 @@
                 <a:ea typeface="Segoe UI"/>
                 <a:cs typeface="Segoe UI"/>
               </a:rPr>
-              <a:t>as 8-bit integers.</a:t>
-            </a:r>
-          </a:p>
-        </p:txBody>
-      </p:sp>
-      <p:sp>
-        <p:nvSpPr>
-          <p:cNvPr id="21" name="S02-caveat">
+              <a:t>selected model quantities.</a:t>
+            </a:r>
+          </a:p>
+        </p:txBody>
+      </p:sp>
+      <p:sp>
+        <p:nvSpPr>
+          <p:cNvPr id="20" name="S02-caveat">
             <a:extLst xmlns:a="http://schemas.openxmlformats.org/drawingml/2006/main">
               <a:ext uri="{FF2B5EF4-FFF2-40B4-BE49-F238E27FC236}">
-                <a16:creationId xmlns:a16="http://schemas.microsoft.com/office/drawing/2014/main" id="{C57FDE32-D10D-4606-886B-C68F08802B4B}"/>
+                <a16:creationId xmlns:a16="http://schemas.microsoft.com/office/drawing/2014/main" id="{51464756-4A43-4402-BF13-D16988103052}"/>
               </a:ext>
             </a:extLst>
           </p:cNvPr>
@@ -3146,7 +3560,7 @@
     </p:spTree>
     <p:extLst>
       <p:ext uri="{BB962C8B-B14F-4D97-AF65-F5344CB8AC3E}">
-        <p14:creationId xmlns:p14="http://schemas.microsoft.com/office/powerpoint/2010/main" val="1999575251"/>
+        <p14:creationId xmlns:p14="http://schemas.microsoft.com/office/powerpoint/2010/main" val="275575726"/>
       </p:ext>
     </p:extLst>
   </p:cSld>
@@ -3174,67 +3588,10 @@
       </p:grpSpPr>
       <p:sp>
         <p:nvSpPr>
-          <p:cNvPr id="9" name="S03-section">
+          <p:cNvPr id="8" name="S03-title">
             <a:extLst xmlns:a="http://schemas.openxmlformats.org/drawingml/2006/main">
               <a:ext uri="{FF2B5EF4-FFF2-40B4-BE49-F238E27FC236}">
-                <a16:creationId xmlns:a16="http://schemas.microsoft.com/office/drawing/2014/main" id="{533610C8-20CD-4FFE-B28E-BAD1925CE24F}"/>
-              </a:ext>
-            </a:extLst>
-          </p:cNvPr>
-          <p:cNvSpPr>
-            <a:spLocks xmlns:a="http://schemas.openxmlformats.org/drawingml/2006/main" noGrp="1"/>
-          </p:cNvSpPr>
-          <p:nvPr/>
-        </p:nvSpPr>
-        <p:spPr>
-          <a:xfrm xmlns:a="http://schemas.openxmlformats.org/drawingml/2006/main">
-            <a:off x="685800" y="400050"/>
-            <a:ext cx="10744200" cy="257175"/>
-          </a:xfrm>
-          <a:prstGeom xmlns:a="http://schemas.openxmlformats.org/drawingml/2006/main" prst="rect">
-            <a:avLst/>
-          </a:prstGeom>
-          <a:noFill xmlns:a="http://schemas.openxmlformats.org/drawingml/2006/main"/>
-          <a:ln xmlns:a="http://schemas.openxmlformats.org/drawingml/2006/main" w="0">
-            <a:noFill/>
-          </a:ln>
-        </p:spPr>
-        <p:txBody>
-          <a:bodyPr xmlns:a="http://schemas.openxmlformats.org/drawingml/2006/main" wrap="none" lIns="0" tIns="0" rIns="0" bIns="0" anchor="ctr">
-            <a:noAutofit/>
-          </a:bodyPr>
-          <a:lstStyle xmlns:a="http://schemas.openxmlformats.org/drawingml/2006/main"/>
-          <a:p xmlns:a="http://schemas.openxmlformats.org/drawingml/2006/main">
-            <a:pPr>
-              <a:defRPr sz="1425" b="0">
-                <a:solidFill>
-                  <a:srgbClr val="287D78"/>
-                </a:solidFill>
-                <a:latin typeface="Segoe UI"/>
-                <a:ea typeface="Segoe UI"/>
-                <a:cs typeface="Segoe UI"/>
-              </a:defRPr>
-            </a:pPr>
-            <a:r>
-              <a:rPr sz="1425" b="0">
-                <a:solidFill>
-                  <a:srgbClr val="287D78"/>
-                </a:solidFill>
-                <a:latin typeface="Segoe UI"/>
-                <a:ea typeface="Segoe UI"/>
-                <a:cs typeface="Segoe UI"/>
-              </a:rPr>
-              <a:t>EVIDENCE / FICTIONAL COMPARISON</a:t>
-            </a:r>
-          </a:p>
-        </p:txBody>
-      </p:sp>
-      <p:sp>
-        <p:nvSpPr>
-          <p:cNvPr id="2" name="S03-title">
-            <a:extLst xmlns:a="http://schemas.openxmlformats.org/drawingml/2006/main">
-              <a:ext uri="{FF2B5EF4-FFF2-40B4-BE49-F238E27FC236}">
-                <a16:creationId xmlns:a16="http://schemas.microsoft.com/office/drawing/2014/main" id="{CE70BED3-63C0-4CDA-8B29-D663C34D27C9}"/>
+                <a16:creationId xmlns:a16="http://schemas.microsoft.com/office/drawing/2014/main" id="{CA0C6520-1051-4AA0-8098-A9EBEC2A03E8}"/>
               </a:ext>
             </a:extLst>
           </p:cNvPr>
@@ -3281,17 +3638,17 @@
                 <a:ea typeface="Segoe UI"/>
                 <a:cs typeface="Segoe UI"/>
               </a:rPr>
-              <a:t>Three models. One shared comparison.</a:t>
-            </a:r>
-          </a:p>
-        </p:txBody>
-      </p:sp>
-      <p:sp>
-        <p:nvSpPr>
-          <p:cNvPr id="3" name="S03-disclosure">
+              <a:t>Latency, F1 and model size</a:t>
+            </a:r>
+          </a:p>
+        </p:txBody>
+      </p:sp>
+      <p:sp>
+        <p:nvSpPr>
+          <p:cNvPr id="2" name="S03-disclosure">
             <a:extLst xmlns:a="http://schemas.openxmlformats.org/drawingml/2006/main">
               <a:ext uri="{FF2B5EF4-FFF2-40B4-BE49-F238E27FC236}">
-                <a16:creationId xmlns:a16="http://schemas.microsoft.com/office/drawing/2014/main" id="{58292DC1-2B05-42C8-A46E-08495A59EBFA}"/>
+                <a16:creationId xmlns:a16="http://schemas.microsoft.com/office/drawing/2014/main" id="{409FF452-2A3F-4AFF-9C01-23A352274B0A}"/>
               </a:ext>
             </a:extLst>
           </p:cNvPr>
@@ -3345,10 +3702,10 @@
       </p:sp>
       <p:sp>
         <p:nvSpPr>
-          <p:cNvPr id="4" name="S03-number">
+          <p:cNvPr id="3" name="S03-number">
             <a:extLst xmlns:a="http://schemas.openxmlformats.org/drawingml/2006/main">
               <a:ext uri="{FF2B5EF4-FFF2-40B4-BE49-F238E27FC236}">
-                <a16:creationId xmlns:a16="http://schemas.microsoft.com/office/drawing/2014/main" id="{2A831829-C4C5-4502-AA30-B5947112B1A9}"/>
+                <a16:creationId xmlns:a16="http://schemas.microsoft.com/office/drawing/2014/main" id="{F8B9AE3B-FFAC-470A-A925-2F6D2168D6BC}"/>
               </a:ext>
             </a:extLst>
           </p:cNvPr>
@@ -3402,10 +3759,10 @@
       </p:sp>
       <p:sp>
         <p:nvSpPr>
-          <p:cNvPr id="5" name="S03-direction">
+          <p:cNvPr id="4" name="S03-direction">
             <a:extLst xmlns:a="http://schemas.openxmlformats.org/drawingml/2006/main">
               <a:ext uri="{FF2B5EF4-FFF2-40B4-BE49-F238E27FC236}">
-                <a16:creationId xmlns:a16="http://schemas.microsoft.com/office/drawing/2014/main" id="{5F860A98-9107-4FD4-958D-C1FFF623BA7B}"/>
+                <a16:creationId xmlns:a16="http://schemas.microsoft.com/office/drawing/2014/main" id="{28228544-2890-45EB-B8D8-226835515F16}"/>
               </a:ext>
             </a:extLst>
           </p:cNvPr>
@@ -3459,7 +3816,7 @@
       </p:sp>
       <p:graphicFrame>
         <p:nvGraphicFramePr>
-          <p:cNvPr id="14" name=""/>
+          <p:cNvPr id="12" name=""/>
           <p:cNvGraphicFramePr/>
           <p:nvPr/>
         </p:nvGraphicFramePr>
@@ -4009,7 +4366,7 @@
                       <a:r>
                         <a:rPr sz="2400" b="0">
                           <a:solidFill>
-                            <a:srgbClr val="287D78"/>
+                            <a:srgbClr val="1E302F"/>
                           </a:solidFill>
                           <a:latin typeface="Segoe UI"/>
                           <a:ea typeface="Segoe UI"/>
@@ -4039,7 +4396,7 @@
                       <a:noFill/>
                     </a:lnBlToTr>
                     <a:solidFill>
-                      <a:srgbClr val="E8EDE5"/>
+                      <a:srgbClr val="F6F4EE"/>
                     </a:solidFill>
                   </a:tcPr>
                 </a:tc>
@@ -4052,7 +4409,7 @@
                       <a:r>
                         <a:rPr sz="2400" b="0">
                           <a:solidFill>
-                            <a:srgbClr val="287D78"/>
+                            <a:srgbClr val="1E302F"/>
                           </a:solidFill>
                           <a:latin typeface="Segoe UI"/>
                           <a:ea typeface="Segoe UI"/>
@@ -4082,7 +4439,7 @@
                       <a:noFill/>
                     </a:lnBlToTr>
                     <a:solidFill>
-                      <a:srgbClr val="E8EDE5"/>
+                      <a:srgbClr val="F6F4EE"/>
                     </a:solidFill>
                   </a:tcPr>
                 </a:tc>
@@ -4095,7 +4452,7 @@
                       <a:r>
                         <a:rPr sz="2400" b="0">
                           <a:solidFill>
-                            <a:srgbClr val="287D78"/>
+                            <a:srgbClr val="1E302F"/>
                           </a:solidFill>
                           <a:latin typeface="Segoe UI"/>
                           <a:ea typeface="Segoe UI"/>
@@ -4125,7 +4482,7 @@
                       <a:noFill/>
                     </a:lnBlToTr>
                     <a:solidFill>
-                      <a:srgbClr val="E8EDE5"/>
+                      <a:srgbClr val="F6F4EE"/>
                     </a:solidFill>
                   </a:tcPr>
                 </a:tc>
@@ -4138,7 +4495,7 @@
                       <a:r>
                         <a:rPr sz="2400" b="0">
                           <a:solidFill>
-                            <a:srgbClr val="287D78"/>
+                            <a:srgbClr val="1E302F"/>
                           </a:solidFill>
                           <a:latin typeface="Segoe UI"/>
                           <a:ea typeface="Segoe UI"/>
@@ -4168,7 +4525,7 @@
                       <a:noFill/>
                     </a:lnBlToTr>
                     <a:solidFill>
-                      <a:srgbClr val="E8EDE5"/>
+                      <a:srgbClr val="F6F4EE"/>
                     </a:solidFill>
                   </a:tcPr>
                 </a:tc>
@@ -4179,10 +4536,10 @@
       </p:graphicFrame>
       <p:sp>
         <p:nvSpPr>
-          <p:cNvPr id="7" name="S03-header-rule">
+          <p:cNvPr id="6" name="S03-header-rule">
             <a:extLst xmlns:a="http://schemas.openxmlformats.org/drawingml/2006/main">
               <a:ext uri="{FF2B5EF4-FFF2-40B4-BE49-F238E27FC236}">
-                <a16:creationId xmlns:a16="http://schemas.microsoft.com/office/drawing/2014/main" id="{4F4933A8-7935-4902-85C4-E8CFE5886EB0}"/>
+                <a16:creationId xmlns:a16="http://schemas.microsoft.com/office/drawing/2014/main" id="{2A2AAF51-46A5-463E-A7F5-84E1C43F04C6}"/>
               </a:ext>
             </a:extLst>
           </p:cNvPr>
@@ -4208,10 +4565,10 @@
       </p:sp>
       <p:sp>
         <p:nvSpPr>
-          <p:cNvPr id="8" name="S03-limit">
+          <p:cNvPr id="7" name="S03-limit">
             <a:extLst xmlns:a="http://schemas.openxmlformats.org/drawingml/2006/main">
               <a:ext uri="{FF2B5EF4-FFF2-40B4-BE49-F238E27FC236}">
-                <a16:creationId xmlns:a16="http://schemas.microsoft.com/office/drawing/2014/main" id="{B6827B90-3AF9-4418-89BF-646D006B2760}"/>
+                <a16:creationId xmlns:a16="http://schemas.microsoft.com/office/drawing/2014/main" id="{C76E3D28-D525-484C-A6B4-EAEAC9D4C8F1}"/>
               </a:ext>
             </a:extLst>
           </p:cNvPr>
@@ -4266,7 +4623,7 @@
     </p:spTree>
     <p:extLst>
       <p:ext uri="{BB962C8B-B14F-4D97-AF65-F5344CB8AC3E}">
-        <p14:creationId xmlns:p14="http://schemas.microsoft.com/office/powerpoint/2010/main" val="1011031294"/>
+        <p14:creationId xmlns:p14="http://schemas.microsoft.com/office/powerpoint/2010/main" val="988851997"/>
       </p:ext>
     </p:extLst>
   </p:cSld>
@@ -4294,67 +4651,10 @@
       </p:grpSpPr>
       <p:sp>
         <p:nvSpPr>
-          <p:cNvPr id="17" name="S04-section">
+          <p:cNvPr id="15" name="S04-title">
             <a:extLst xmlns:a="http://schemas.openxmlformats.org/drawingml/2006/main">
               <a:ext uri="{FF2B5EF4-FFF2-40B4-BE49-F238E27FC236}">
-                <a16:creationId xmlns:a16="http://schemas.microsoft.com/office/drawing/2014/main" id="{BC636639-B28F-4A01-9CE4-2ADE76FFCFCA}"/>
-              </a:ext>
-            </a:extLst>
-          </p:cNvPr>
-          <p:cNvSpPr>
-            <a:spLocks xmlns:a="http://schemas.openxmlformats.org/drawingml/2006/main" noGrp="1"/>
-          </p:cNvSpPr>
-          <p:nvPr/>
-        </p:nvSpPr>
-        <p:spPr>
-          <a:xfrm xmlns:a="http://schemas.openxmlformats.org/drawingml/2006/main">
-            <a:off x="685800" y="400050"/>
-            <a:ext cx="10744200" cy="257175"/>
-          </a:xfrm>
-          <a:prstGeom xmlns:a="http://schemas.openxmlformats.org/drawingml/2006/main" prst="rect">
-            <a:avLst/>
-          </a:prstGeom>
-          <a:noFill xmlns:a="http://schemas.openxmlformats.org/drawingml/2006/main"/>
-          <a:ln xmlns:a="http://schemas.openxmlformats.org/drawingml/2006/main" w="0">
-            <a:noFill/>
-          </a:ln>
-        </p:spPr>
-        <p:txBody>
-          <a:bodyPr xmlns:a="http://schemas.openxmlformats.org/drawingml/2006/main" wrap="none" lIns="0" tIns="0" rIns="0" bIns="0" anchor="ctr">
-            <a:noAutofit/>
-          </a:bodyPr>
-          <a:lstStyle xmlns:a="http://schemas.openxmlformats.org/drawingml/2006/main"/>
-          <a:p xmlns:a="http://schemas.openxmlformats.org/drawingml/2006/main">
-            <a:pPr>
-              <a:defRPr sz="1425" b="0">
-                <a:solidFill>
-                  <a:srgbClr val="287D78"/>
-                </a:solidFill>
-                <a:latin typeface="Segoe UI"/>
-                <a:ea typeface="Segoe UI"/>
-                <a:cs typeface="Segoe UI"/>
-              </a:defRPr>
-            </a:pPr>
-            <a:r>
-              <a:rPr sz="1425" b="0">
-                <a:solidFill>
-                  <a:srgbClr val="287D78"/>
-                </a:solidFill>
-                <a:latin typeface="Segoe UI"/>
-                <a:ea typeface="Segoe UI"/>
-                <a:cs typeface="Segoe UI"/>
-              </a:rPr>
-              <a:t>RESULT / BASELINE TO INT8</a:t>
-            </a:r>
-          </a:p>
-        </p:txBody>
-      </p:sp>
-      <p:sp>
-        <p:nvSpPr>
-          <p:cNvPr id="2" name="S04-title">
-            <a:extLst xmlns:a="http://schemas.openxmlformats.org/drawingml/2006/main">
-              <a:ext uri="{FF2B5EF4-FFF2-40B4-BE49-F238E27FC236}">
-                <a16:creationId xmlns:a16="http://schemas.microsoft.com/office/drawing/2014/main" id="{F2711B63-5182-4F65-BEE2-70658FD0BC1E}"/>
+                <a16:creationId xmlns:a16="http://schemas.microsoft.com/office/drawing/2014/main" id="{F9D51027-223B-41BC-AC17-197B3DBF7543}"/>
               </a:ext>
             </a:extLst>
           </p:cNvPr>
@@ -4408,10 +4708,10 @@
       </p:sp>
       <p:sp>
         <p:nvSpPr>
-          <p:cNvPr id="3" name="S04-disclosure">
+          <p:cNvPr id="2" name="S04-disclosure">
             <a:extLst xmlns:a="http://schemas.openxmlformats.org/drawingml/2006/main">
               <a:ext uri="{FF2B5EF4-FFF2-40B4-BE49-F238E27FC236}">
-                <a16:creationId xmlns:a16="http://schemas.microsoft.com/office/drawing/2014/main" id="{1169E09D-882C-428B-B46C-44A8F3BC6EE5}"/>
+                <a16:creationId xmlns:a16="http://schemas.microsoft.com/office/drawing/2014/main" id="{1EB260BA-4F27-4BA6-8D38-37B44F32EEC2}"/>
               </a:ext>
             </a:extLst>
           </p:cNvPr>
@@ -4465,10 +4765,10 @@
       </p:sp>
       <p:sp>
         <p:nvSpPr>
-          <p:cNvPr id="4" name="S04-number">
+          <p:cNvPr id="3" name="S04-number">
             <a:extLst xmlns:a="http://schemas.openxmlformats.org/drawingml/2006/main">
               <a:ext uri="{FF2B5EF4-FFF2-40B4-BE49-F238E27FC236}">
-                <a16:creationId xmlns:a16="http://schemas.microsoft.com/office/drawing/2014/main" id="{20447F9E-9B5C-4ACF-8067-BE987339E42F}"/>
+                <a16:creationId xmlns:a16="http://schemas.microsoft.com/office/drawing/2014/main" id="{5DA3B840-52E2-4CFB-9E71-57EF81AC896D}"/>
               </a:ext>
             </a:extLst>
           </p:cNvPr>
@@ -4522,10 +4822,10 @@
       </p:sp>
       <p:sp>
         <p:nvSpPr>
-          <p:cNvPr id="5" name="S04-chart-unit">
+          <p:cNvPr id="4" name="S04-chart-unit">
             <a:extLst xmlns:a="http://schemas.openxmlformats.org/drawingml/2006/main">
               <a:ext uri="{FF2B5EF4-FFF2-40B4-BE49-F238E27FC236}">
-                <a16:creationId xmlns:a16="http://schemas.microsoft.com/office/drawing/2014/main" id="{E36052B5-A6F9-4623-8165-C8AFF2552BD9}"/>
+                <a16:creationId xmlns:a16="http://schemas.microsoft.com/office/drawing/2014/main" id="{7DFB2E3B-7E59-49D9-9E9F-766AAD1A3147}"/>
               </a:ext>
             </a:extLst>
           </p:cNvPr>
@@ -4536,8 +4836,8 @@
         </p:nvSpPr>
         <p:spPr>
           <a:xfrm xmlns:a="http://schemas.openxmlformats.org/drawingml/2006/main">
-            <a:off x="685800" y="1828800"/>
-            <a:ext cx="6000750" cy="352425"/>
+            <a:off x="685800" y="1647825"/>
+            <a:ext cx="6762750" cy="361950"/>
           </a:xfrm>
           <a:prstGeom xmlns:a="http://schemas.openxmlformats.org/drawingml/2006/main" prst="rect">
             <a:avLst/>
@@ -4572,33 +4872,33 @@
                 <a:ea typeface="Segoe UI"/>
                 <a:cs typeface="Segoe UI"/>
               </a:rPr>
-              <a:t>Latency (ms)</a:t>
+              <a:t>F1 · higher is better</a:t>
             </a:r>
           </a:p>
         </p:txBody>
       </p:sp>
       <p:graphicFrame>
         <p:nvGraphicFramePr>
-          <p:cNvPr id="22" name="Chart"/>
+          <p:cNvPr id="19" name="Chart"/>
           <p:cNvGraphicFramePr/>
           <p:nvPr/>
         </p:nvGraphicFramePr>
         <p:xfrm>
-          <a:off xmlns:a="http://schemas.openxmlformats.org/drawingml/2006/main" x="552450" y="2343150"/>
-          <a:ext xmlns:a="http://schemas.openxmlformats.org/drawingml/2006/main" cx="6810375" cy="2857500"/>
+          <a:off xmlns:a="http://schemas.openxmlformats.org/drawingml/2006/main" x="619125" y="2095500"/>
+          <a:ext xmlns:a="http://schemas.openxmlformats.org/drawingml/2006/main" cx="7191375" cy="3219450"/>
         </p:xfrm>
         <a:graphic xmlns:a="http://schemas.openxmlformats.org/drawingml/2006/main">
           <a:graphicData uri="http://schemas.openxmlformats.org/drawingml/2006/chart">
-            <c:chart xmlns:r="http://schemas.openxmlformats.org/officeDocument/2006/relationships" xmlns:c="http://schemas.openxmlformats.org/drawingml/2006/chart" r:id="Rcb00e91b374c40c1"/>
+            <c:chart xmlns:r="http://schemas.openxmlformats.org/officeDocument/2006/relationships" xmlns:c="http://schemas.openxmlformats.org/drawingml/2006/chart" r:id="R51787a67033b493d"/>
           </a:graphicData>
         </a:graphic>
       </p:graphicFrame>
       <p:sp>
         <p:nvSpPr>
-          <p:cNvPr id="7" name="S04-latency">
+          <p:cNvPr id="6" name="S04-x-unit">
             <a:extLst xmlns:a="http://schemas.openxmlformats.org/drawingml/2006/main">
               <a:ext uri="{FF2B5EF4-FFF2-40B4-BE49-F238E27FC236}">
-                <a16:creationId xmlns:a16="http://schemas.microsoft.com/office/drawing/2014/main" id="{D51546B4-1D7A-4253-87A8-B3272307B943}"/>
+                <a16:creationId xmlns:a16="http://schemas.microsoft.com/office/drawing/2014/main" id="{A3024077-E05A-49AE-8D99-6588D9426546}"/>
               </a:ext>
             </a:extLst>
           </p:cNvPr>
@@ -4609,8 +4909,8 @@
         </p:nvSpPr>
         <p:spPr>
           <a:xfrm xmlns:a="http://schemas.openxmlformats.org/drawingml/2006/main">
-            <a:off x="8058150" y="1885950"/>
-            <a:ext cx="3276600" cy="809625"/>
+            <a:off x="1428750" y="5181600"/>
+            <a:ext cx="6191250" cy="333375"/>
           </a:xfrm>
           <a:prstGeom xmlns:a="http://schemas.openxmlformats.org/drawingml/2006/main" prst="rect">
             <a:avLst/>
@@ -4627,9 +4927,9 @@
           <a:lstStyle xmlns:a="http://schemas.openxmlformats.org/drawingml/2006/main"/>
           <a:p xmlns:a="http://schemas.openxmlformats.org/drawingml/2006/main">
             <a:pPr>
-              <a:defRPr sz="5325" b="0">
-                <a:solidFill>
-                  <a:srgbClr val="287D78"/>
+              <a:defRPr sz="1725" b="0">
+                <a:solidFill>
+                  <a:srgbClr val="586C68"/>
                 </a:solidFill>
                 <a:latin typeface="Segoe UI"/>
                 <a:ea typeface="Segoe UI"/>
@@ -4637,25 +4937,25 @@
               </a:defRPr>
             </a:pPr>
             <a:r>
-              <a:rPr sz="5325" b="0">
-                <a:solidFill>
-                  <a:srgbClr val="287D78"/>
+              <a:rPr sz="1725" b="0">
+                <a:solidFill>
+                  <a:srgbClr val="586C68"/>
                 </a:solidFill>
                 <a:latin typeface="Segoe UI"/>
                 <a:ea typeface="Segoe UI"/>
                 <a:cs typeface="Segoe UI"/>
               </a:rPr>
-              <a:t>55%</a:t>
-            </a:r>
-          </a:p>
-        </p:txBody>
-      </p:sp>
-      <p:sp>
-        <p:nvSpPr>
-          <p:cNvPr id="8" name="S04-latency-label">
+              <a:t>Latency (ms) · lower is better</a:t>
+            </a:r>
+          </a:p>
+        </p:txBody>
+      </p:sp>
+      <p:sp>
+        <p:nvSpPr>
+          <p:cNvPr id="7" name="S04-basis">
             <a:extLst xmlns:a="http://schemas.openxmlformats.org/drawingml/2006/main">
               <a:ext uri="{FF2B5EF4-FFF2-40B4-BE49-F238E27FC236}">
-                <a16:creationId xmlns:a16="http://schemas.microsoft.com/office/drawing/2014/main" id="{7AF19377-FAD8-4B0E-84D6-C88DC070BAA3}"/>
+                <a16:creationId xmlns:a16="http://schemas.microsoft.com/office/drawing/2014/main" id="{7E3D2D07-C993-4C7A-B953-E86CF8ABB4AF}"/>
               </a:ext>
             </a:extLst>
           </p:cNvPr>
@@ -4666,8 +4966,8 @@
         </p:nvSpPr>
         <p:spPr>
           <a:xfrm xmlns:a="http://schemas.openxmlformats.org/drawingml/2006/main">
-            <a:off x="8058150" y="2714625"/>
-            <a:ext cx="3448050" cy="342900"/>
+            <a:off x="8382000" y="1714500"/>
+            <a:ext cx="3124200" cy="333375"/>
           </a:xfrm>
           <a:prstGeom xmlns:a="http://schemas.openxmlformats.org/drawingml/2006/main" prst="rect">
             <a:avLst/>
@@ -4684,7 +4984,7 @@
           <a:lstStyle xmlns:a="http://schemas.openxmlformats.org/drawingml/2006/main"/>
           <a:p xmlns:a="http://schemas.openxmlformats.org/drawingml/2006/main">
             <a:pPr>
-              <a:defRPr sz="1725" b="0">
+              <a:defRPr sz="1800" b="0">
                 <a:solidFill>
                   <a:srgbClr val="586C68"/>
                 </a:solidFill>
@@ -4694,7 +4994,7 @@
               </a:defRPr>
             </a:pPr>
             <a:r>
-              <a:rPr sz="1725" b="0">
+              <a:rPr sz="1800" b="0">
                 <a:solidFill>
                   <a:srgbClr val="586C68"/>
                 </a:solidFill>
@@ -4702,17 +5002,17 @@
                 <a:ea typeface="Segoe UI"/>
                 <a:cs typeface="Segoe UI"/>
               </a:rPr>
-              <a:t>lower latency · 120 → 54 ms</a:t>
-            </a:r>
-          </a:p>
-        </p:txBody>
-      </p:sp>
-      <p:sp>
-        <p:nvSpPr>
-          <p:cNvPr id="9" name="S04-size">
+              <a:t>Baseline to INT8</a:t>
+            </a:r>
+          </a:p>
+        </p:txBody>
+      </p:sp>
+      <p:sp>
+        <p:nvSpPr>
+          <p:cNvPr id="8" name="S04-latency">
             <a:extLst xmlns:a="http://schemas.openxmlformats.org/drawingml/2006/main">
               <a:ext uri="{FF2B5EF4-FFF2-40B4-BE49-F238E27FC236}">
-                <a16:creationId xmlns:a16="http://schemas.microsoft.com/office/drawing/2014/main" id="{E86F22F7-99DC-49C0-8EA3-1C600B671779}"/>
+                <a16:creationId xmlns:a16="http://schemas.microsoft.com/office/drawing/2014/main" id="{9E9EFD97-D574-47D8-BA46-B9C4F0004432}"/>
               </a:ext>
             </a:extLst>
           </p:cNvPr>
@@ -4723,8 +5023,8 @@
         </p:nvSpPr>
         <p:spPr>
           <a:xfrm xmlns:a="http://schemas.openxmlformats.org/drawingml/2006/main">
-            <a:off x="8058150" y="3352800"/>
-            <a:ext cx="1524000" cy="647700"/>
+            <a:off x="8382000" y="2247900"/>
+            <a:ext cx="3048000" cy="628650"/>
           </a:xfrm>
           <a:prstGeom xmlns:a="http://schemas.openxmlformats.org/drawingml/2006/main" prst="rect">
             <a:avLst/>
@@ -4741,7 +5041,7 @@
           <a:lstStyle xmlns:a="http://schemas.openxmlformats.org/drawingml/2006/main"/>
           <a:p xmlns:a="http://schemas.openxmlformats.org/drawingml/2006/main">
             <a:pPr>
-              <a:defRPr sz="3975" b="0">
+              <a:defRPr sz="3450" b="0">
                 <a:solidFill>
                   <a:srgbClr val="1E302F"/>
                 </a:solidFill>
@@ -4751,7 +5051,7 @@
               </a:defRPr>
             </a:pPr>
             <a:r>
-              <a:rPr sz="3975" b="0">
+              <a:rPr sz="3450" b="0">
                 <a:solidFill>
                   <a:srgbClr val="1E302F"/>
                 </a:solidFill>
@@ -4759,7 +5059,64 @@
                 <a:ea typeface="Segoe UI"/>
                 <a:cs typeface="Segoe UI"/>
               </a:rPr>
-              <a:t>75%</a:t>
+              <a:t>−55%</a:t>
+            </a:r>
+          </a:p>
+        </p:txBody>
+      </p:sp>
+      <p:sp>
+        <p:nvSpPr>
+          <p:cNvPr id="9" name="S04-latency-label">
+            <a:extLst xmlns:a="http://schemas.openxmlformats.org/drawingml/2006/main">
+              <a:ext uri="{FF2B5EF4-FFF2-40B4-BE49-F238E27FC236}">
+                <a16:creationId xmlns:a16="http://schemas.microsoft.com/office/drawing/2014/main" id="{F2A126D7-6A59-49B2-8FDE-AE6428678721}"/>
+              </a:ext>
+            </a:extLst>
+          </p:cNvPr>
+          <p:cNvSpPr>
+            <a:spLocks xmlns:a="http://schemas.openxmlformats.org/drawingml/2006/main" noGrp="1"/>
+          </p:cNvSpPr>
+          <p:nvPr/>
+        </p:nvSpPr>
+        <p:spPr>
+          <a:xfrm xmlns:a="http://schemas.openxmlformats.org/drawingml/2006/main">
+            <a:off x="8382000" y="2876550"/>
+            <a:ext cx="3124200" cy="361950"/>
+          </a:xfrm>
+          <a:prstGeom xmlns:a="http://schemas.openxmlformats.org/drawingml/2006/main" prst="rect">
+            <a:avLst/>
+          </a:prstGeom>
+          <a:noFill xmlns:a="http://schemas.openxmlformats.org/drawingml/2006/main"/>
+          <a:ln xmlns:a="http://schemas.openxmlformats.org/drawingml/2006/main" w="0">
+            <a:noFill/>
+          </a:ln>
+        </p:spPr>
+        <p:txBody>
+          <a:bodyPr xmlns:a="http://schemas.openxmlformats.org/drawingml/2006/main" wrap="none" lIns="0" tIns="0" rIns="0" bIns="0" anchor="ctr">
+            <a:noAutofit/>
+          </a:bodyPr>
+          <a:lstStyle xmlns:a="http://schemas.openxmlformats.org/drawingml/2006/main"/>
+          <a:p xmlns:a="http://schemas.openxmlformats.org/drawingml/2006/main">
+            <a:pPr>
+              <a:defRPr sz="1725" b="0">
+                <a:solidFill>
+                  <a:srgbClr val="586C68"/>
+                </a:solidFill>
+                <a:latin typeface="Segoe UI"/>
+                <a:ea typeface="Segoe UI"/>
+                <a:cs typeface="Segoe UI"/>
+              </a:defRPr>
+            </a:pPr>
+            <a:r>
+              <a:rPr sz="1725" b="0">
+                <a:solidFill>
+                  <a:srgbClr val="586C68"/>
+                </a:solidFill>
+                <a:latin typeface="Segoe UI"/>
+                <a:ea typeface="Segoe UI"/>
+                <a:cs typeface="Segoe UI"/>
+              </a:rPr>
+              <a:t>Latency · 120 → 54 ms</a:t>
             </a:r>
           </a:p>
         </p:txBody>
@@ -4769,7 +5126,7 @@
           <p:cNvPr id="10" name="S04-f1">
             <a:extLst xmlns:a="http://schemas.openxmlformats.org/drawingml/2006/main">
               <a:ext uri="{FF2B5EF4-FFF2-40B4-BE49-F238E27FC236}">
-                <a16:creationId xmlns:a16="http://schemas.microsoft.com/office/drawing/2014/main" id="{0FCD41A2-3991-4C2D-B5EF-51FDD86D8E73}"/>
+                <a16:creationId xmlns:a16="http://schemas.microsoft.com/office/drawing/2014/main" id="{A239B722-567F-4F26-A1B0-867523DD5901}"/>
               </a:ext>
             </a:extLst>
           </p:cNvPr>
@@ -4780,8 +5137,8 @@
         </p:nvSpPr>
         <p:spPr>
           <a:xfrm xmlns:a="http://schemas.openxmlformats.org/drawingml/2006/main">
-            <a:off x="9906000" y="3352800"/>
-            <a:ext cx="1657350" cy="647700"/>
+            <a:off x="8382000" y="3419475"/>
+            <a:ext cx="3048000" cy="628650"/>
           </a:xfrm>
           <a:prstGeom xmlns:a="http://schemas.openxmlformats.org/drawingml/2006/main" prst="rect">
             <a:avLst/>
@@ -4798,9 +5155,9 @@
           <a:lstStyle xmlns:a="http://schemas.openxmlformats.org/drawingml/2006/main"/>
           <a:p xmlns:a="http://schemas.openxmlformats.org/drawingml/2006/main">
             <a:pPr>
-              <a:defRPr sz="3525" b="0">
-                <a:solidFill>
-                  <a:srgbClr val="A3563E"/>
+              <a:defRPr sz="3450" b="0">
+                <a:solidFill>
+                  <a:srgbClr val="1E302F"/>
                 </a:solidFill>
                 <a:latin typeface="Segoe UI"/>
                 <a:ea typeface="Segoe UI"/>
@@ -4808,9 +5165,9 @@
               </a:defRPr>
             </a:pPr>
             <a:r>
-              <a:rPr sz="3525" b="0">
-                <a:solidFill>
-                  <a:srgbClr val="A3563E"/>
+              <a:rPr sz="3450" b="0">
+                <a:solidFill>
+                  <a:srgbClr val="1E302F"/>
                 </a:solidFill>
                 <a:latin typeface="Segoe UI"/>
                 <a:ea typeface="Segoe UI"/>
@@ -4823,10 +5180,10 @@
       </p:sp>
       <p:sp>
         <p:nvSpPr>
-          <p:cNvPr id="11" name="S04-size-label">
+          <p:cNvPr id="11" name="S04-f1-label">
             <a:extLst xmlns:a="http://schemas.openxmlformats.org/drawingml/2006/main">
               <a:ext uri="{FF2B5EF4-FFF2-40B4-BE49-F238E27FC236}">
-                <a16:creationId xmlns:a16="http://schemas.microsoft.com/office/drawing/2014/main" id="{C6FCB46E-3BC3-4326-8492-B1CF566E6F91}"/>
+                <a16:creationId xmlns:a16="http://schemas.microsoft.com/office/drawing/2014/main" id="{0C4B5FF2-4E78-480B-A1B2-DCE08F07FD46}"/>
               </a:ext>
             </a:extLst>
           </p:cNvPr>
@@ -4837,8 +5194,8 @@
         </p:nvSpPr>
         <p:spPr>
           <a:xfrm xmlns:a="http://schemas.openxmlformats.org/drawingml/2006/main">
-            <a:off x="8058150" y="4076700"/>
-            <a:ext cx="1752600" cy="314325"/>
+            <a:off x="8382000" y="4048125"/>
+            <a:ext cx="3124200" cy="361950"/>
           </a:xfrm>
           <a:prstGeom xmlns:a="http://schemas.openxmlformats.org/drawingml/2006/main" prst="rect">
             <a:avLst/>
@@ -4855,7 +5212,7 @@
           <a:lstStyle xmlns:a="http://schemas.openxmlformats.org/drawingml/2006/main"/>
           <a:p xmlns:a="http://schemas.openxmlformats.org/drawingml/2006/main">
             <a:pPr>
-              <a:defRPr sz="1575" b="0">
+              <a:defRPr sz="1725" b="0">
                 <a:solidFill>
                   <a:srgbClr val="586C68"/>
                 </a:solidFill>
@@ -4865,7 +5222,7 @@
               </a:defRPr>
             </a:pPr>
             <a:r>
-              <a:rPr sz="1575" b="0">
+              <a:rPr sz="1725" b="0">
                 <a:solidFill>
                   <a:srgbClr val="586C68"/>
                 </a:solidFill>
@@ -4873,17 +5230,17 @@
                 <a:ea typeface="Segoe UI"/>
                 <a:cs typeface="Segoe UI"/>
               </a:rPr>
-              <a:t>smaller model</a:t>
-            </a:r>
-          </a:p>
-        </p:txBody>
-      </p:sp>
-      <p:sp>
-        <p:nvSpPr>
-          <p:cNvPr id="12" name="S04-f1-label">
+              <a:t>F1 · absolute difference</a:t>
+            </a:r>
+          </a:p>
+        </p:txBody>
+      </p:sp>
+      <p:sp>
+        <p:nvSpPr>
+          <p:cNvPr id="12" name="S04-size-values">
             <a:extLst xmlns:a="http://schemas.openxmlformats.org/drawingml/2006/main">
               <a:ext uri="{FF2B5EF4-FFF2-40B4-BE49-F238E27FC236}">
-                <a16:creationId xmlns:a16="http://schemas.microsoft.com/office/drawing/2014/main" id="{DF2DAA3B-0B09-48FF-8978-997403DABA6D}"/>
+                <a16:creationId xmlns:a16="http://schemas.microsoft.com/office/drawing/2014/main" id="{74F1FCF4-FC36-4AC8-A03A-B9752510C58C}"/>
               </a:ext>
             </a:extLst>
           </p:cNvPr>
@@ -4894,8 +5251,8 @@
         </p:nvSpPr>
         <p:spPr>
           <a:xfrm xmlns:a="http://schemas.openxmlformats.org/drawingml/2006/main">
-            <a:off x="9906000" y="4076700"/>
-            <a:ext cx="1657350" cy="314325"/>
+            <a:off x="8382000" y="4772025"/>
+            <a:ext cx="3124200" cy="457200"/>
           </a:xfrm>
           <a:prstGeom xmlns:a="http://schemas.openxmlformats.org/drawingml/2006/main" prst="rect">
             <a:avLst/>
@@ -4912,7 +5269,7 @@
           <a:lstStyle xmlns:a="http://schemas.openxmlformats.org/drawingml/2006/main"/>
           <a:p xmlns:a="http://schemas.openxmlformats.org/drawingml/2006/main">
             <a:pPr>
-              <a:defRPr sz="1575" b="0">
+              <a:defRPr sz="1650" b="0">
                 <a:solidFill>
                   <a:srgbClr val="586C68"/>
                 </a:solidFill>
@@ -4922,7 +5279,7 @@
               </a:defRPr>
             </a:pPr>
             <a:r>
-              <a:rPr sz="1575" b="0">
+              <a:rPr sz="1650" b="0">
                 <a:solidFill>
                   <a:srgbClr val="586C68"/>
                 </a:solidFill>
@@ -4930,131 +5287,17 @@
                 <a:ea typeface="Segoe UI"/>
                 <a:cs typeface="Segoe UI"/>
               </a:rPr>
-              <a:t>F1 difference</a:t>
-            </a:r>
-          </a:p>
-        </p:txBody>
-      </p:sp>
-      <p:sp>
-        <p:nvSpPr>
-          <p:cNvPr id="13" name="S04-size-values">
+              <a:t>Size: 48 → 12 MB (−75%)</a:t>
+            </a:r>
+          </a:p>
+        </p:txBody>
+      </p:sp>
+      <p:sp>
+        <p:nvSpPr>
+          <p:cNvPr id="13" name="S04-stage1">
             <a:extLst xmlns:a="http://schemas.openxmlformats.org/drawingml/2006/main">
               <a:ext uri="{FF2B5EF4-FFF2-40B4-BE49-F238E27FC236}">
-                <a16:creationId xmlns:a16="http://schemas.microsoft.com/office/drawing/2014/main" id="{DEB4987F-D5F1-4E13-9ECD-BF1E86019B54}"/>
-              </a:ext>
-            </a:extLst>
-          </p:cNvPr>
-          <p:cNvSpPr>
-            <a:spLocks xmlns:a="http://schemas.openxmlformats.org/drawingml/2006/main" noGrp="1"/>
-          </p:cNvSpPr>
-          <p:nvPr/>
-        </p:nvSpPr>
-        <p:spPr>
-          <a:xfrm xmlns:a="http://schemas.openxmlformats.org/drawingml/2006/main">
-            <a:off x="8058150" y="4524375"/>
-            <a:ext cx="1762125" cy="323850"/>
-          </a:xfrm>
-          <a:prstGeom xmlns:a="http://schemas.openxmlformats.org/drawingml/2006/main" prst="rect">
-            <a:avLst/>
-          </a:prstGeom>
-          <a:noFill xmlns:a="http://schemas.openxmlformats.org/drawingml/2006/main"/>
-          <a:ln xmlns:a="http://schemas.openxmlformats.org/drawingml/2006/main" w="0">
-            <a:noFill/>
-          </a:ln>
-        </p:spPr>
-        <p:txBody>
-          <a:bodyPr xmlns:a="http://schemas.openxmlformats.org/drawingml/2006/main" wrap="none" lIns="0" tIns="0" rIns="0" bIns="0" anchor="ctr">
-            <a:noAutofit/>
-          </a:bodyPr>
-          <a:lstStyle xmlns:a="http://schemas.openxmlformats.org/drawingml/2006/main"/>
-          <a:p xmlns:a="http://schemas.openxmlformats.org/drawingml/2006/main">
-            <a:pPr>
-              <a:defRPr sz="1650" b="0">
-                <a:solidFill>
-                  <a:srgbClr val="1E302F"/>
-                </a:solidFill>
-                <a:latin typeface="Segoe UI"/>
-                <a:ea typeface="Segoe UI"/>
-                <a:cs typeface="Segoe UI"/>
-              </a:defRPr>
-            </a:pPr>
-            <a:r>
-              <a:rPr sz="1650" b="0">
-                <a:solidFill>
-                  <a:srgbClr val="1E302F"/>
-                </a:solidFill>
-                <a:latin typeface="Segoe UI"/>
-                <a:ea typeface="Segoe UI"/>
-                <a:cs typeface="Segoe UI"/>
-              </a:rPr>
-              <a:t>48 → 12 MB</a:t>
-            </a:r>
-          </a:p>
-        </p:txBody>
-      </p:sp>
-      <p:sp>
-        <p:nvSpPr>
-          <p:cNvPr id="14" name="S04-f1-values">
-            <a:extLst xmlns:a="http://schemas.openxmlformats.org/drawingml/2006/main">
-              <a:ext uri="{FF2B5EF4-FFF2-40B4-BE49-F238E27FC236}">
-                <a16:creationId xmlns:a16="http://schemas.microsoft.com/office/drawing/2014/main" id="{E5AFD2F2-0A46-4796-985A-BB72239C16CC}"/>
-              </a:ext>
-            </a:extLst>
-          </p:cNvPr>
-          <p:cNvSpPr>
-            <a:spLocks xmlns:a="http://schemas.openxmlformats.org/drawingml/2006/main" noGrp="1"/>
-          </p:cNvSpPr>
-          <p:nvPr/>
-        </p:nvSpPr>
-        <p:spPr>
-          <a:xfrm xmlns:a="http://schemas.openxmlformats.org/drawingml/2006/main">
-            <a:off x="9906000" y="4524375"/>
-            <a:ext cx="1657350" cy="323850"/>
-          </a:xfrm>
-          <a:prstGeom xmlns:a="http://schemas.openxmlformats.org/drawingml/2006/main" prst="rect">
-            <a:avLst/>
-          </a:prstGeom>
-          <a:noFill xmlns:a="http://schemas.openxmlformats.org/drawingml/2006/main"/>
-          <a:ln xmlns:a="http://schemas.openxmlformats.org/drawingml/2006/main" w="0">
-            <a:noFill/>
-          </a:ln>
-        </p:spPr>
-        <p:txBody>
-          <a:bodyPr xmlns:a="http://schemas.openxmlformats.org/drawingml/2006/main" wrap="none" lIns="0" tIns="0" rIns="0" bIns="0" anchor="ctr">
-            <a:noAutofit/>
-          </a:bodyPr>
-          <a:lstStyle xmlns:a="http://schemas.openxmlformats.org/drawingml/2006/main"/>
-          <a:p xmlns:a="http://schemas.openxmlformats.org/drawingml/2006/main">
-            <a:pPr>
-              <a:defRPr sz="1575" b="0">
-                <a:solidFill>
-                  <a:srgbClr val="1E302F"/>
-                </a:solidFill>
-                <a:latin typeface="Segoe UI"/>
-                <a:ea typeface="Segoe UI"/>
-                <a:cs typeface="Segoe UI"/>
-              </a:defRPr>
-            </a:pPr>
-            <a:r>
-              <a:rPr sz="1575" b="0">
-                <a:solidFill>
-                  <a:srgbClr val="1E302F"/>
-                </a:solidFill>
-                <a:latin typeface="Segoe UI"/>
-                <a:ea typeface="Segoe UI"/>
-                <a:cs typeface="Segoe UI"/>
-              </a:rPr>
-              <a:t>0.910 → 0.896</a:t>
-            </a:r>
-          </a:p>
-        </p:txBody>
-      </p:sp>
-      <p:sp>
-        <p:nvSpPr>
-          <p:cNvPr id="15" name="S04-stage1">
-            <a:extLst xmlns:a="http://schemas.openxmlformats.org/drawingml/2006/main">
-              <a:ext uri="{FF2B5EF4-FFF2-40B4-BE49-F238E27FC236}">
-                <a16:creationId xmlns:a16="http://schemas.microsoft.com/office/drawing/2014/main" id="{6A9C1FD7-A266-4FB7-8965-BC9BE4EC65F6}"/>
+                <a16:creationId xmlns:a16="http://schemas.microsoft.com/office/drawing/2014/main" id="{D7E5A57D-54CB-40FF-B95C-46E49A441E55}"/>
               </a:ext>
             </a:extLst>
           </p:cNvPr>
@@ -5108,10 +5351,10 @@
       </p:sp>
       <p:sp>
         <p:nvSpPr>
-          <p:cNvPr id="16" name="S04-stage2">
+          <p:cNvPr id="14" name="S04-stage2">
             <a:extLst xmlns:a="http://schemas.openxmlformats.org/drawingml/2006/main">
               <a:ext uri="{FF2B5EF4-FFF2-40B4-BE49-F238E27FC236}">
-                <a16:creationId xmlns:a16="http://schemas.microsoft.com/office/drawing/2014/main" id="{C8BF7D9E-B914-41F4-9848-53C09B8400B1}"/>
+                <a16:creationId xmlns:a16="http://schemas.microsoft.com/office/drawing/2014/main" id="{EA8991D9-3BB2-48EA-9E6A-59478E9AA55D}"/>
               </a:ext>
             </a:extLst>
           </p:cNvPr>
@@ -5166,7 +5409,7 @@
     </p:spTree>
     <p:extLst>
       <p:ext uri="{BB962C8B-B14F-4D97-AF65-F5344CB8AC3E}">
-        <p14:creationId xmlns:p14="http://schemas.microsoft.com/office/powerpoint/2010/main" val="1633204563"/>
+        <p14:creationId xmlns:p14="http://schemas.microsoft.com/office/powerpoint/2010/main" val="1568015087"/>
       </p:ext>
     </p:extLst>
   </p:cSld>
@@ -5194,67 +5437,10 @@
       </p:grpSpPr>
       <p:sp>
         <p:nvSpPr>
-          <p:cNvPr id="15" name="S05-section">
+          <p:cNvPr id="14" name="S05-title">
             <a:extLst xmlns:a="http://schemas.openxmlformats.org/drawingml/2006/main">
               <a:ext uri="{FF2B5EF4-FFF2-40B4-BE49-F238E27FC236}">
-                <a16:creationId xmlns:a16="http://schemas.microsoft.com/office/drawing/2014/main" id="{4C19C853-E6B9-461C-9EC7-7EE3FA1203C8}"/>
-              </a:ext>
-            </a:extLst>
-          </p:cNvPr>
-          <p:cNvSpPr>
-            <a:spLocks xmlns:a="http://schemas.openxmlformats.org/drawingml/2006/main" noGrp="1"/>
-          </p:cNvSpPr>
-          <p:nvPr/>
-        </p:nvSpPr>
-        <p:spPr>
-          <a:xfrm xmlns:a="http://schemas.openxmlformats.org/drawingml/2006/main">
-            <a:off x="685800" y="400050"/>
-            <a:ext cx="10744200" cy="257175"/>
-          </a:xfrm>
-          <a:prstGeom xmlns:a="http://schemas.openxmlformats.org/drawingml/2006/main" prst="rect">
-            <a:avLst/>
-          </a:prstGeom>
-          <a:noFill xmlns:a="http://schemas.openxmlformats.org/drawingml/2006/main"/>
-          <a:ln xmlns:a="http://schemas.openxmlformats.org/drawingml/2006/main" w="0">
-            <a:noFill/>
-          </a:ln>
-        </p:spPr>
-        <p:txBody>
-          <a:bodyPr xmlns:a="http://schemas.openxmlformats.org/drawingml/2006/main" wrap="none" lIns="0" tIns="0" rIns="0" bIns="0" anchor="ctr">
-            <a:noAutofit/>
-          </a:bodyPr>
-          <a:lstStyle xmlns:a="http://schemas.openxmlformats.org/drawingml/2006/main"/>
-          <a:p xmlns:a="http://schemas.openxmlformats.org/drawingml/2006/main">
-            <a:pPr>
-              <a:defRPr sz="1425" b="0">
-                <a:solidFill>
-                  <a:srgbClr val="287D78"/>
-                </a:solidFill>
-                <a:latin typeface="Segoe UI"/>
-                <a:ea typeface="Segoe UI"/>
-                <a:cs typeface="Segoe UI"/>
-              </a:defRPr>
-            </a:pPr>
-            <a:r>
-              <a:rPr sz="1425" b="0">
-                <a:solidFill>
-                  <a:srgbClr val="287D78"/>
-                </a:solidFill>
-                <a:latin typeface="Segoe UI"/>
-                <a:ea typeface="Segoe UI"/>
-                <a:cs typeface="Segoe UI"/>
-              </a:rPr>
-              <a:t>NEXT / DEFINE THE ACCEPTABLE TRADE-OFF</a:t>
-            </a:r>
-          </a:p>
-        </p:txBody>
-      </p:sp>
-      <p:sp>
-        <p:nvSpPr>
-          <p:cNvPr id="2" name="S05-title">
-            <a:extLst xmlns:a="http://schemas.openxmlformats.org/drawingml/2006/main">
-              <a:ext uri="{FF2B5EF4-FFF2-40B4-BE49-F238E27FC236}">
-                <a16:creationId xmlns:a16="http://schemas.microsoft.com/office/drawing/2014/main" id="{F2634974-6713-4142-9EA7-CE889EB9FAE3}"/>
+                <a16:creationId xmlns:a16="http://schemas.microsoft.com/office/drawing/2014/main" id="{305BBB2B-B82D-481D-9367-26198045A45B}"/>
               </a:ext>
             </a:extLst>
           </p:cNvPr>
@@ -5301,17 +5487,17 @@
                 <a:ea typeface="Segoe UI"/>
                 <a:cs typeface="Segoe UI"/>
               </a:rPr>
-              <a:t>Decide what the trade-off is worth</a:t>
-            </a:r>
-          </a:p>
-        </p:txBody>
-      </p:sp>
-      <p:sp>
-        <p:nvSpPr>
-          <p:cNvPr id="3" name="S05-disclosure">
+              <a:t>Deployment criteria remain open</a:t>
+            </a:r>
+          </a:p>
+        </p:txBody>
+      </p:sp>
+      <p:sp>
+        <p:nvSpPr>
+          <p:cNvPr id="2" name="S05-disclosure">
             <a:extLst xmlns:a="http://schemas.openxmlformats.org/drawingml/2006/main">
               <a:ext uri="{FF2B5EF4-FFF2-40B4-BE49-F238E27FC236}">
-                <a16:creationId xmlns:a16="http://schemas.microsoft.com/office/drawing/2014/main" id="{BFC2A32B-D2F4-4DD0-AD21-BD9C3F67C5DE}"/>
+                <a16:creationId xmlns:a16="http://schemas.microsoft.com/office/drawing/2014/main" id="{B0D8AE88-FFF3-4B76-959C-9EDFD88C5C6F}"/>
               </a:ext>
             </a:extLst>
           </p:cNvPr>
@@ -5365,10 +5551,10 @@
       </p:sp>
       <p:sp>
         <p:nvSpPr>
-          <p:cNvPr id="4" name="S05-number">
+          <p:cNvPr id="3" name="S05-number">
             <a:extLst xmlns:a="http://schemas.openxmlformats.org/drawingml/2006/main">
               <a:ext uri="{FF2B5EF4-FFF2-40B4-BE49-F238E27FC236}">
-                <a16:creationId xmlns:a16="http://schemas.microsoft.com/office/drawing/2014/main" id="{E378D239-3D97-45CC-8321-8823A487088C}"/>
+                <a16:creationId xmlns:a16="http://schemas.microsoft.com/office/drawing/2014/main" id="{BEA8FA2B-D07E-4036-8236-7B6B6F8529FF}"/>
               </a:ext>
             </a:extLst>
           </p:cNvPr>
@@ -5422,10 +5608,10 @@
       </p:sp>
       <p:sp>
         <p:nvSpPr>
-          <p:cNvPr id="5" name="S05-main">
+          <p:cNvPr id="4" name="S05-main">
             <a:extLst xmlns:a="http://schemas.openxmlformats.org/drawingml/2006/main">
               <a:ext uri="{FF2B5EF4-FFF2-40B4-BE49-F238E27FC236}">
-                <a16:creationId xmlns:a16="http://schemas.microsoft.com/office/drawing/2014/main" id="{27DA5E0A-96B5-4B69-874C-DD0381FCFD63}"/>
+                <a16:creationId xmlns:a16="http://schemas.microsoft.com/office/drawing/2014/main" id="{F3844DB1-120B-449A-990B-47862B560B28}"/>
               </a:ext>
             </a:extLst>
           </p:cNvPr>
@@ -5479,10 +5665,10 @@
       </p:sp>
       <p:sp>
         <p:nvSpPr>
-          <p:cNvPr id="6" name="S05-rule-1">
+          <p:cNvPr id="5" name="S05-rule-1">
             <a:extLst xmlns:a="http://schemas.openxmlformats.org/drawingml/2006/main">
               <a:ext uri="{FF2B5EF4-FFF2-40B4-BE49-F238E27FC236}">
-                <a16:creationId xmlns:a16="http://schemas.microsoft.com/office/drawing/2014/main" id="{9CB55CD0-84B1-438B-8667-050BCC257CC1}"/>
+                <a16:creationId xmlns:a16="http://schemas.microsoft.com/office/drawing/2014/main" id="{6A36D0D8-6C39-41CC-87C7-2D53318D70A2}"/>
               </a:ext>
             </a:extLst>
           </p:cNvPr>
@@ -5508,10 +5694,10 @@
       </p:sp>
       <p:sp>
         <p:nvSpPr>
-          <p:cNvPr id="7" name="S05-label1">
+          <p:cNvPr id="6" name="S05-label1">
             <a:extLst xmlns:a="http://schemas.openxmlformats.org/drawingml/2006/main">
               <a:ext uri="{FF2B5EF4-FFF2-40B4-BE49-F238E27FC236}">
-                <a16:creationId xmlns:a16="http://schemas.microsoft.com/office/drawing/2014/main" id="{19CB2F7F-7D59-40B3-A705-65074EECCE48}"/>
+                <a16:creationId xmlns:a16="http://schemas.microsoft.com/office/drawing/2014/main" id="{BD92DF92-0C21-42CF-B3D6-616F43AFD118}"/>
               </a:ext>
             </a:extLst>
           </p:cNvPr>
@@ -5565,10 +5751,10 @@
       </p:sp>
       <p:sp>
         <p:nvSpPr>
-          <p:cNvPr id="8" name="S05-body1">
+          <p:cNvPr id="7" name="S05-body1">
             <a:extLst xmlns:a="http://schemas.openxmlformats.org/drawingml/2006/main">
               <a:ext uri="{FF2B5EF4-FFF2-40B4-BE49-F238E27FC236}">
-                <a16:creationId xmlns:a16="http://schemas.microsoft.com/office/drawing/2014/main" id="{F8D4A716-829E-445A-8D85-F1F389B2925B}"/>
+                <a16:creationId xmlns:a16="http://schemas.microsoft.com/office/drawing/2014/main" id="{47516BCC-3FD6-4DBC-BE59-3A8CAA7C06B5}"/>
               </a:ext>
             </a:extLst>
           </p:cNvPr>
@@ -5622,10 +5808,10 @@
       </p:sp>
       <p:sp>
         <p:nvSpPr>
-          <p:cNvPr id="9" name="S05-rule-2">
+          <p:cNvPr id="8" name="S05-rule-2">
             <a:extLst xmlns:a="http://schemas.openxmlformats.org/drawingml/2006/main">
               <a:ext uri="{FF2B5EF4-FFF2-40B4-BE49-F238E27FC236}">
-                <a16:creationId xmlns:a16="http://schemas.microsoft.com/office/drawing/2014/main" id="{4E24EA9A-26E7-41E2-B062-7FEBDD63D46C}"/>
+                <a16:creationId xmlns:a16="http://schemas.microsoft.com/office/drawing/2014/main" id="{B0CFAE70-80A6-4E01-B636-6E245BCBC22C}"/>
               </a:ext>
             </a:extLst>
           </p:cNvPr>
@@ -5651,10 +5837,10 @@
       </p:sp>
       <p:sp>
         <p:nvSpPr>
-          <p:cNvPr id="10" name="S05-label2">
+          <p:cNvPr id="9" name="S05-label2">
             <a:extLst xmlns:a="http://schemas.openxmlformats.org/drawingml/2006/main">
               <a:ext uri="{FF2B5EF4-FFF2-40B4-BE49-F238E27FC236}">
-                <a16:creationId xmlns:a16="http://schemas.microsoft.com/office/drawing/2014/main" id="{BF8C2591-9A1E-4116-AF1A-A960257A7944}"/>
+                <a16:creationId xmlns:a16="http://schemas.microsoft.com/office/drawing/2014/main" id="{89801CBE-3DCE-4518-A0E3-9DECD1C8AB7C}"/>
               </a:ext>
             </a:extLst>
           </p:cNvPr>
@@ -5708,10 +5894,10 @@
       </p:sp>
       <p:sp>
         <p:nvSpPr>
-          <p:cNvPr id="11" name="S05-body2">
+          <p:cNvPr id="10" name="S05-body2">
             <a:extLst xmlns:a="http://schemas.openxmlformats.org/drawingml/2006/main">
               <a:ext uri="{FF2B5EF4-FFF2-40B4-BE49-F238E27FC236}">
-                <a16:creationId xmlns:a16="http://schemas.microsoft.com/office/drawing/2014/main" id="{9C0232FA-8F00-40F2-8497-E1B643158554}"/>
+                <a16:creationId xmlns:a16="http://schemas.microsoft.com/office/drawing/2014/main" id="{B0E9ABF8-C5E1-4EEC-B9D8-E5B8825C501B}"/>
               </a:ext>
             </a:extLst>
           </p:cNvPr>
@@ -5765,10 +5951,10 @@
       </p:sp>
       <p:sp>
         <p:nvSpPr>
-          <p:cNvPr id="12" name="S05-rule-3">
+          <p:cNvPr id="11" name="S05-rule-3">
             <a:extLst xmlns:a="http://schemas.openxmlformats.org/drawingml/2006/main">
               <a:ext uri="{FF2B5EF4-FFF2-40B4-BE49-F238E27FC236}">
-                <a16:creationId xmlns:a16="http://schemas.microsoft.com/office/drawing/2014/main" id="{13263353-6662-4892-8755-BB00AE96FC9F}"/>
+                <a16:creationId xmlns:a16="http://schemas.microsoft.com/office/drawing/2014/main" id="{EDAA87F0-4471-407F-A632-D41D6CF07E39}"/>
               </a:ext>
             </a:extLst>
           </p:cNvPr>
@@ -5794,10 +5980,10 @@
       </p:sp>
       <p:sp>
         <p:nvSpPr>
-          <p:cNvPr id="13" name="S05-label3">
+          <p:cNvPr id="12" name="S05-label3">
             <a:extLst xmlns:a="http://schemas.openxmlformats.org/drawingml/2006/main">
               <a:ext uri="{FF2B5EF4-FFF2-40B4-BE49-F238E27FC236}">
-                <a16:creationId xmlns:a16="http://schemas.microsoft.com/office/drawing/2014/main" id="{48C5EE6A-6070-41C2-A5A8-A34B86D65264}"/>
+                <a16:creationId xmlns:a16="http://schemas.microsoft.com/office/drawing/2014/main" id="{6F62400D-1B37-4AFF-AB13-938352504CBE}"/>
               </a:ext>
             </a:extLst>
           </p:cNvPr>
@@ -5851,10 +6037,10 @@
       </p:sp>
       <p:sp>
         <p:nvSpPr>
-          <p:cNvPr id="14" name="S05-body3">
+          <p:cNvPr id="13" name="S05-body3">
             <a:extLst xmlns:a="http://schemas.openxmlformats.org/drawingml/2006/main">
               <a:ext uri="{FF2B5EF4-FFF2-40B4-BE49-F238E27FC236}">
-                <a16:creationId xmlns:a16="http://schemas.microsoft.com/office/drawing/2014/main" id="{CFB01367-3082-43F8-8DD6-04D660FEE560}"/>
+                <a16:creationId xmlns:a16="http://schemas.microsoft.com/office/drawing/2014/main" id="{2853FCD3-4227-4C19-9D60-26170121401D}"/>
               </a:ext>
             </a:extLst>
           </p:cNvPr>
@@ -5909,7 +6095,7 @@
     </p:spTree>
     <p:extLst>
       <p:ext uri="{BB962C8B-B14F-4D97-AF65-F5344CB8AC3E}">
-        <p14:creationId xmlns:p14="http://schemas.microsoft.com/office/powerpoint/2010/main" val="1359324439"/>
+        <p14:creationId xmlns:p14="http://schemas.microsoft.com/office/powerpoint/2010/main" val="156585181"/>
       </p:ext>
     </p:extLst>
   </p:cSld>

--- a/examples/research-seminar/static.pptx
+++ b/examples/research-seminar/static.pptx
@@ -2,17 +2,17 @@
 <file path=ppt/presentation.xml><?xml version="1.0" encoding="utf-8"?>
 <p:presentation xmlns:p="http://schemas.openxmlformats.org/presentationml/2006/main">
   <p:sldMasterIdLst>
-    <p:sldMasterId xmlns:r="http://schemas.openxmlformats.org/officeDocument/2006/relationships" id="2147483648" r:id="R38038fa453f54fbe"/>
+    <p:sldMasterId xmlns:r="http://schemas.openxmlformats.org/officeDocument/2006/relationships" id="2147483648" r:id="R736c0fcb0cc049a6"/>
   </p:sldMasterIdLst>
   <p:notesMasterIdLst>
-    <p:notesMasterId xmlns:r="http://schemas.openxmlformats.org/officeDocument/2006/relationships" r:id="R137bb51b62144812"/>
+    <p:notesMasterId xmlns:r="http://schemas.openxmlformats.org/officeDocument/2006/relationships" r:id="R6965ec197ab74d6d"/>
   </p:notesMasterIdLst>
   <p:sldIdLst>
-    <p:sldId xmlns:r="http://schemas.openxmlformats.org/officeDocument/2006/relationships" id="256" r:id="R0f28616ac9674696"/>
-    <p:sldId xmlns:r="http://schemas.openxmlformats.org/officeDocument/2006/relationships" id="257" r:id="R8ac286362dbf4719"/>
-    <p:sldId xmlns:r="http://schemas.openxmlformats.org/officeDocument/2006/relationships" id="258" r:id="R2d61b8ad2e3e48e5"/>
-    <p:sldId xmlns:r="http://schemas.openxmlformats.org/officeDocument/2006/relationships" id="259" r:id="Rdd5d4d5e501847d7"/>
-    <p:sldId xmlns:r="http://schemas.openxmlformats.org/officeDocument/2006/relationships" id="260" r:id="Ra2b9b5b4f82a41ab"/>
+    <p:sldId xmlns:r="http://schemas.openxmlformats.org/officeDocument/2006/relationships" id="256" r:id="R234e294416714b73"/>
+    <p:sldId xmlns:r="http://schemas.openxmlformats.org/officeDocument/2006/relationships" id="257" r:id="R519b25595680473c"/>
+    <p:sldId xmlns:r="http://schemas.openxmlformats.org/officeDocument/2006/relationships" id="258" r:id="Re03a05b388a842fe"/>
+    <p:sldId xmlns:r="http://schemas.openxmlformats.org/officeDocument/2006/relationships" id="259" r:id="R9ba5a81473874967"/>
+    <p:sldId xmlns:r="http://schemas.openxmlformats.org/officeDocument/2006/relationships" id="260" r:id="R6b2f8a729489432f"/>
   </p:sldIdLst>
   <p:sldSz cx="12192000" cy="6858000"/>
   <p:notesSz cx="6858000" cy="9144000"/>
@@ -446,7 +446,7 @@
           <a:lstStyle xmlns:a="http://schemas.openxmlformats.org/drawingml/2006/main"/>
           <a:p xmlns:a="http://schemas.openxmlformats.org/drawingml/2006/main">
             <a:r>
-              <a:t>30 seconds. This seminar examines model compression for sensor anomaly detection. The overview compares baseline with INT8 using equally prominent latency, F1 and size values. All values are fictional user-supplied examples, not empirical findings. A common device and dataset are assumed but unspecified. No acceptable accuracy-loss threshold is supplied.</a:t>
+              <a:t>We examine model compression for sensor anomaly detection and compare baseline with INT8 latency, F1 and model size. All values are fictional user-supplied examples, not empirical findings. A common device and dataset are assumed but unspecified. No acceptable accuracy-loss threshold is supplied.</a:t>
             </a:r>
           </a:p>
         </p:txBody>
@@ -516,7 +516,7 @@
           <a:lstStyle xmlns:a="http://schemas.openxmlformats.org/drawingml/2006/main"/>
           <a:p xmlns:a="http://schemas.openxmlformats.org/drawingml/2006/main">
             <a:r>
-              <a:t>90 seconds. The teacher provides prediction knowledge for learning a smaller student; INT8 represents student numbers using 8-bit integers. Architecture, loss, quantization scope, and PTQ versus QAT are unspecified. Do not assume preservation of all teacher knowledge or claim a particular implementation. In the animated edition, reveal distillation on click 1 and INT8 on click 2. Concept sources: Hinton et al. (2015), https://arxiv.org/abs/1503.02531 ; Jacob et al. (2017), https://arxiv.org/abs/1712.05877 . No empirical results were taken from those papers.</a:t>
+              <a:t>The teacher provides prediction knowledge for learning a smaller student; INT8 represents student numbers using 8-bit integers. Architecture, loss, quantization scope, and PTQ versus QAT are unspecified. Do not assume preservation of all teacher knowledge or claim a particular implementation. Concept sources: Hinton et al. (2015), https://arxiv.org/abs/1503.02531 ; Jacob et al. (2017), https://arxiv.org/abs/1712.05877 . No empirical results were taken from those papers.</a:t>
             </a:r>
           </a:p>
         </p:txBody>
@@ -586,7 +586,7 @@
           <a:lstStyle xmlns:a="http://schemas.openxmlformats.org/drawingml/2006/main"/>
           <a:p xmlns:a="http://schemas.openxmlformats.org/drawingml/2006/main">
             <a:r>
-              <a:t>60 seconds. Fictional values: baseline 120 ms / F1 0.910 / 48 MB; distilled 72 ms / 0.902 / 18 MB; int8 54 ms / 0.896 / 12 MB. The same device and data are assumed. Sample count, variance, dataset, split, device specifications, latency statistic, and F1 aggregation are unspecified. These are arithmetic comparisons, not evidence of statistical significance or generalization.</a:t>
+              <a:t>Fictional values: baseline 120 ms / F1 0.910 / 48 MB; distilled 72 ms / 0.902 / 18 MB; int8 54 ms / 0.896 / 12 MB. The same device and data are assumed. Sample count, variance, dataset, split, device specifications, latency statistic, and F1 aggregation are unspecified. These are arithmetic comparisons, not evidence of statistical significance or generalization.</a:t>
             </a:r>
           </a:p>
         </p:txBody>
@@ -656,7 +656,7 @@
           <a:lstStyle xmlns:a="http://schemas.openxmlformats.org/drawingml/2006/main"/>
           <a:p xmlns:a="http://schemas.openxmlformats.org/drawingml/2006/main">
             <a:r>
-              <a:t>65 seconds. Overall latency reduction (120−54)/120 = 55%; size reduction (48−12)/48 = 75%; F1 absolute difference 0.896−0.910 = −0.014. Distillation latency reduction (120−72)/120 = 40%, F1 difference −0.008. Additional INT8 latency reduction (72−54)/72 = 25%, F1 difference −0.006. Do not add 40% and 25% because their denominators differ. No statistical inference is possible from the fictional summaries.</a:t>
+              <a:t>Overall latency reduction (120−54)/120 = 55%; size reduction (48−12)/48 = 75%; F1 absolute difference 0.896−0.910 = −0.014. Distillation latency reduction (120−72)/120 = 40%, F1 difference −0.008. Additional INT8 latency reduction (72−54)/72 = 25%, F1 difference −0.006. Do not add 40% and 25% because their denominators differ. No statistical inference is possible from the fictional summaries.</a:t>
             </a:r>
           </a:p>
         </p:txBody>
@@ -726,7 +726,7 @@
           <a:lstStyle xmlns:a="http://schemas.openxmlformats.org/drawingml/2006/main"/>
           <a:p xmlns:a="http://schemas.openxmlformats.org/drawingml/2006/main">
             <a:r>
-              <a:t>55 seconds. These fictional values illustrate an efficiency–F1 trade-off. They do not select a universally best model. Define the acceptable loss in F1 and the latency budget for the intended environment. Repeat measurements on actual data, estimate variation, and inspect failures by anomaly type. No real dataset or sample count was supplied, so no generalization claim is justified. Total presentation time: 300 seconds.</a:t>
+              <a:t>These fictional values illustrate an efficiency–F1 trade-off. They do not select a universally best model. Define the acceptable loss in F1 and the latency budget for the intended environment. Repeat measurements on actual data, estimate variation, and inspect failures by anomaly type. No real dataset or sample count was supplied, so no generalization claim is justified.</a:t>
             </a:r>
           </a:p>
         </p:txBody>
@@ -794,7 +794,7 @@
   </p:cSld>
   <p:clrMap bg1="lt1" tx1="dk1" bg2="lt2" tx2="dk2" accent1="accent1" accent2="accent2" accent3="accent3" accent4="accent4" accent5="accent5" accent6="accent6" hlink="hlink" folHlink="folHlink"/>
   <p:sldLayoutIdLst>
-    <p:sldLayoutId xmlns:r="http://schemas.openxmlformats.org/officeDocument/2006/relationships" id="2147483649" r:id="Rf4a3965482194350"/>
+    <p:sldLayoutId xmlns:r="http://schemas.openxmlformats.org/officeDocument/2006/relationships" id="2147483649" r:id="Rb82930f73c22487c"/>
   </p:sldLayoutIdLst>
   <p:txStyles>
     <p:titleStyle>
@@ -1678,22 +1678,52 @@
       </p:grpSpPr>
       <p:sp>
         <p:nvSpPr>
-          <p:cNvPr id="13" name="S01-section">
-            <a:extLst xmlns:a="http://schemas.openxmlformats.org/drawingml/2006/main">
-              <a:ext uri="{FF2B5EF4-FFF2-40B4-BE49-F238E27FC236}">
-                <a16:creationId xmlns:a16="http://schemas.microsoft.com/office/drawing/2014/main" id="{23FDFD73-9A5B-4C0A-B98C-31B94BE5255E}"/>
-              </a:ext>
-            </a:extLst>
-          </p:cNvPr>
-          <p:cNvSpPr>
-            <a:spLocks xmlns:a="http://schemas.openxmlformats.org/drawingml/2006/main" noGrp="1"/>
-          </p:cNvSpPr>
-          <p:nvPr/>
-        </p:nvSpPr>
-        <p:spPr>
-          <a:xfrm xmlns:a="http://schemas.openxmlformats.org/drawingml/2006/main">
-            <a:off x="685800" y="609600"/>
-            <a:ext cx="10820400" cy="333375"/>
+          <p:cNvPr id="20" name="S01-subject-field">
+            <a:extLst xmlns:a="http://schemas.openxmlformats.org/drawingml/2006/main">
+              <a:ext uri="{FF2B5EF4-FFF2-40B4-BE49-F238E27FC236}">
+                <a16:creationId xmlns:a16="http://schemas.microsoft.com/office/drawing/2014/main" id="{6737AA12-7A0A-4B3F-B56B-AF331F72F84B}"/>
+              </a:ext>
+            </a:extLst>
+          </p:cNvPr>
+          <p:cNvSpPr>
+            <a:spLocks xmlns:a="http://schemas.openxmlformats.org/drawingml/2006/main" noGrp="1"/>
+          </p:cNvSpPr>
+          <p:nvPr/>
+        </p:nvSpPr>
+        <p:spPr>
+          <a:xfrm xmlns:a="http://schemas.openxmlformats.org/drawingml/2006/main">
+            <a:off x="0" y="0"/>
+            <a:ext cx="5638800" cy="6858000"/>
+          </a:xfrm>
+          <a:prstGeom xmlns:a="http://schemas.openxmlformats.org/drawingml/2006/main" prst="rect">
+            <a:avLst/>
+          </a:prstGeom>
+          <a:solidFill xmlns:a="http://schemas.openxmlformats.org/drawingml/2006/main">
+            <a:srgbClr val="1E302F"/>
+          </a:solidFill>
+          <a:ln xmlns:a="http://schemas.openxmlformats.org/drawingml/2006/main" w="0">
+            <a:noFill/>
+          </a:ln>
+        </p:spPr>
+      </p:sp>
+      <p:sp>
+        <p:nvSpPr>
+          <p:cNvPr id="2" name="S01-title">
+            <a:extLst xmlns:a="http://schemas.openxmlformats.org/drawingml/2006/main">
+              <a:ext uri="{FF2B5EF4-FFF2-40B4-BE49-F238E27FC236}">
+                <a16:creationId xmlns:a16="http://schemas.microsoft.com/office/drawing/2014/main" id="{0C9F25F4-DAAA-4730-875E-904C613FE82F}"/>
+              </a:ext>
+            </a:extLst>
+          </p:cNvPr>
+          <p:cNvSpPr>
+            <a:spLocks xmlns:a="http://schemas.openxmlformats.org/drawingml/2006/main" noGrp="1"/>
+          </p:cNvSpPr>
+          <p:nvPr/>
+        </p:nvSpPr>
+        <p:spPr>
+          <a:xfrm xmlns:a="http://schemas.openxmlformats.org/drawingml/2006/main">
+            <a:off x="609600" y="1266825"/>
+            <a:ext cx="4552950" cy="2209800"/>
           </a:xfrm>
           <a:prstGeom xmlns:a="http://schemas.openxmlformats.org/drawingml/2006/main" prst="rect">
             <a:avLst/>
@@ -1710,47 +1740,93 @@
           <a:lstStyle xmlns:a="http://schemas.openxmlformats.org/drawingml/2006/main"/>
           <a:p xmlns:a="http://schemas.openxmlformats.org/drawingml/2006/main">
             <a:pPr>
-              <a:defRPr sz="1650" b="0">
-                <a:solidFill>
-                  <a:srgbClr val="586C68"/>
-                </a:solidFill>
-                <a:latin typeface="Segoe UI"/>
-                <a:ea typeface="Segoe UI"/>
-                <a:cs typeface="Segoe UI"/>
-              </a:defRPr>
-            </a:pPr>
-            <a:r>
-              <a:rPr sz="1650" b="0">
-                <a:solidFill>
-                  <a:srgbClr val="586C68"/>
-                </a:solidFill>
-                <a:latin typeface="Segoe UI"/>
-                <a:ea typeface="Segoe UI"/>
-                <a:cs typeface="Segoe UI"/>
-              </a:rPr>
-              <a:t>Lab seminar · 5 minutes</a:t>
-            </a:r>
-          </a:p>
-        </p:txBody>
-      </p:sp>
-      <p:sp>
-        <p:nvSpPr>
-          <p:cNvPr id="2" name="S01-title">
-            <a:extLst xmlns:a="http://schemas.openxmlformats.org/drawingml/2006/main">
-              <a:ext uri="{FF2B5EF4-FFF2-40B4-BE49-F238E27FC236}">
-                <a16:creationId xmlns:a16="http://schemas.microsoft.com/office/drawing/2014/main" id="{34A5D45D-6C44-4AE8-9AC4-0C1512BB90E8}"/>
-              </a:ext>
-            </a:extLst>
-          </p:cNvPr>
-          <p:cNvSpPr>
-            <a:spLocks xmlns:a="http://schemas.openxmlformats.org/drawingml/2006/main" noGrp="1"/>
-          </p:cNvSpPr>
-          <p:nvPr/>
-        </p:nvSpPr>
-        <p:spPr>
-          <a:xfrm xmlns:a="http://schemas.openxmlformats.org/drawingml/2006/main">
-            <a:off x="685800" y="1438275"/>
-            <a:ext cx="10820400" cy="1476375"/>
+              <a:defRPr sz="3900" b="0">
+                <a:solidFill>
+                  <a:srgbClr val="FFFFFF"/>
+                </a:solidFill>
+                <a:latin typeface="Segoe UI"/>
+                <a:ea typeface="Segoe UI"/>
+                <a:cs typeface="Segoe UI"/>
+              </a:defRPr>
+            </a:pPr>
+            <a:r>
+              <a:rPr sz="3900" b="0">
+                <a:solidFill>
+                  <a:srgbClr val="FFFFFF"/>
+                </a:solidFill>
+                <a:latin typeface="Segoe UI"/>
+                <a:ea typeface="Segoe UI"/>
+                <a:cs typeface="Segoe UI"/>
+              </a:rPr>
+              <a:t>Sensor anomaly</a:t>
+            </a:r>
+          </a:p>
+          <a:p xmlns:a="http://schemas.openxmlformats.org/drawingml/2006/main">
+            <a:pPr>
+              <a:defRPr sz="3900" b="0">
+                <a:solidFill>
+                  <a:srgbClr val="FFFFFF"/>
+                </a:solidFill>
+                <a:latin typeface="Segoe UI"/>
+                <a:ea typeface="Segoe UI"/>
+                <a:cs typeface="Segoe UI"/>
+              </a:defRPr>
+            </a:pPr>
+            <a:r>
+              <a:rPr sz="3900" b="0">
+                <a:solidFill>
+                  <a:srgbClr val="FFFFFF"/>
+                </a:solidFill>
+                <a:latin typeface="Segoe UI"/>
+                <a:ea typeface="Segoe UI"/>
+                <a:cs typeface="Segoe UI"/>
+              </a:rPr>
+              <a:t>detection with</a:t>
+            </a:r>
+          </a:p>
+          <a:p xmlns:a="http://schemas.openxmlformats.org/drawingml/2006/main">
+            <a:pPr>
+              <a:defRPr sz="3900" b="0">
+                <a:solidFill>
+                  <a:srgbClr val="FFFFFF"/>
+                </a:solidFill>
+                <a:latin typeface="Segoe UI"/>
+                <a:ea typeface="Segoe UI"/>
+                <a:cs typeface="Segoe UI"/>
+              </a:defRPr>
+            </a:pPr>
+            <a:r>
+              <a:rPr sz="3900" b="0">
+                <a:solidFill>
+                  <a:srgbClr val="FFFFFF"/>
+                </a:solidFill>
+                <a:latin typeface="Segoe UI"/>
+                <a:ea typeface="Segoe UI"/>
+                <a:cs typeface="Segoe UI"/>
+              </a:rPr>
+              <a:t>smaller models</a:t>
+            </a:r>
+          </a:p>
+        </p:txBody>
+      </p:sp>
+      <p:sp>
+        <p:nvSpPr>
+          <p:cNvPr id="3" name="S01-subtitle">
+            <a:extLst xmlns:a="http://schemas.openxmlformats.org/drawingml/2006/main">
+              <a:ext uri="{FF2B5EF4-FFF2-40B4-BE49-F238E27FC236}">
+                <a16:creationId xmlns:a16="http://schemas.microsoft.com/office/drawing/2014/main" id="{6103CC81-40F6-43C7-885B-572D7F7578F1}"/>
+              </a:ext>
+            </a:extLst>
+          </p:cNvPr>
+          <p:cNvSpPr>
+            <a:spLocks xmlns:a="http://schemas.openxmlformats.org/drawingml/2006/main" noGrp="1"/>
+          </p:cNvSpPr>
+          <p:nvPr/>
+        </p:nvSpPr>
+        <p:spPr>
+          <a:xfrm xmlns:a="http://schemas.openxmlformats.org/drawingml/2006/main">
+            <a:off x="609600" y="3933825"/>
+            <a:ext cx="4381500" cy="990600"/>
           </a:xfrm>
           <a:prstGeom xmlns:a="http://schemas.openxmlformats.org/drawingml/2006/main" prst="rect">
             <a:avLst/>
@@ -1767,70 +1843,70 @@
           <a:lstStyle xmlns:a="http://schemas.openxmlformats.org/drawingml/2006/main"/>
           <a:p xmlns:a="http://schemas.openxmlformats.org/drawingml/2006/main">
             <a:pPr>
-              <a:defRPr sz="4275" b="0">
-                <a:solidFill>
-                  <a:srgbClr val="1E302F"/>
-                </a:solidFill>
-                <a:latin typeface="Segoe UI"/>
-                <a:ea typeface="Segoe UI"/>
-                <a:cs typeface="Segoe UI"/>
-              </a:defRPr>
-            </a:pPr>
-            <a:r>
-              <a:rPr sz="4275" b="0">
-                <a:solidFill>
-                  <a:srgbClr val="1E302F"/>
-                </a:solidFill>
-                <a:latin typeface="Segoe UI"/>
-                <a:ea typeface="Segoe UI"/>
-                <a:cs typeface="Segoe UI"/>
-              </a:rPr>
-              <a:t>Sensor anomaly detection</a:t>
+              <a:defRPr sz="2175" b="0">
+                <a:solidFill>
+                  <a:srgbClr val="B9DDD0"/>
+                </a:solidFill>
+                <a:latin typeface="Segoe UI"/>
+                <a:ea typeface="Segoe UI"/>
+                <a:cs typeface="Segoe UI"/>
+              </a:defRPr>
+            </a:pPr>
+            <a:r>
+              <a:rPr sz="2175" b="0">
+                <a:solidFill>
+                  <a:srgbClr val="B9DDD0"/>
+                </a:solidFill>
+                <a:latin typeface="Segoe UI"/>
+                <a:ea typeface="Segoe UI"/>
+                <a:cs typeface="Segoe UI"/>
+              </a:rPr>
+              <a:t>Knowledge distillation</a:t>
             </a:r>
           </a:p>
           <a:p xmlns:a="http://schemas.openxmlformats.org/drawingml/2006/main">
             <a:pPr>
-              <a:defRPr sz="4275" b="0">
-                <a:solidFill>
-                  <a:srgbClr val="1E302F"/>
-                </a:solidFill>
-                <a:latin typeface="Segoe UI"/>
-                <a:ea typeface="Segoe UI"/>
-                <a:cs typeface="Segoe UI"/>
-              </a:defRPr>
-            </a:pPr>
-            <a:r>
-              <a:rPr sz="4275" b="0">
-                <a:solidFill>
-                  <a:srgbClr val="1E302F"/>
-                </a:solidFill>
-                <a:latin typeface="Segoe UI"/>
-                <a:ea typeface="Segoe UI"/>
-                <a:cs typeface="Segoe UI"/>
-              </a:rPr>
-              <a:t>with smaller models</a:t>
-            </a:r>
-          </a:p>
-        </p:txBody>
-      </p:sp>
-      <p:sp>
-        <p:nvSpPr>
-          <p:cNvPr id="3" name="S01-subtitle">
-            <a:extLst xmlns:a="http://schemas.openxmlformats.org/drawingml/2006/main">
-              <a:ext uri="{FF2B5EF4-FFF2-40B4-BE49-F238E27FC236}">
-                <a16:creationId xmlns:a16="http://schemas.microsoft.com/office/drawing/2014/main" id="{7A4B8756-23EB-40E8-91F0-371575F490E6}"/>
-              </a:ext>
-            </a:extLst>
-          </p:cNvPr>
-          <p:cNvSpPr>
-            <a:spLocks xmlns:a="http://schemas.openxmlformats.org/drawingml/2006/main" noGrp="1"/>
-          </p:cNvSpPr>
-          <p:nvPr/>
-        </p:nvSpPr>
-        <p:spPr>
-          <a:xfrm xmlns:a="http://schemas.openxmlformats.org/drawingml/2006/main">
-            <a:off x="685800" y="3133725"/>
-            <a:ext cx="10820400" cy="495300"/>
+              <a:defRPr sz="2175" b="0">
+                <a:solidFill>
+                  <a:srgbClr val="B9DDD0"/>
+                </a:solidFill>
+                <a:latin typeface="Segoe UI"/>
+                <a:ea typeface="Segoe UI"/>
+                <a:cs typeface="Segoe UI"/>
+              </a:defRPr>
+            </a:pPr>
+            <a:r>
+              <a:rPr sz="2175" b="0">
+                <a:solidFill>
+                  <a:srgbClr val="B9DDD0"/>
+                </a:solidFill>
+                <a:latin typeface="Segoe UI"/>
+                <a:ea typeface="Segoe UI"/>
+                <a:cs typeface="Segoe UI"/>
+              </a:rPr>
+              <a:t>and INT8 quantization</a:t>
+            </a:r>
+          </a:p>
+        </p:txBody>
+      </p:sp>
+      <p:sp>
+        <p:nvSpPr>
+          <p:cNvPr id="4" name="S01-comparison">
+            <a:extLst xmlns:a="http://schemas.openxmlformats.org/drawingml/2006/main">
+              <a:ext uri="{FF2B5EF4-FFF2-40B4-BE49-F238E27FC236}">
+                <a16:creationId xmlns:a16="http://schemas.microsoft.com/office/drawing/2014/main" id="{D0FD71D8-BFD1-4ACF-A99B-6FD94B12D908}"/>
+              </a:ext>
+            </a:extLst>
+          </p:cNvPr>
+          <p:cNvSpPr>
+            <a:spLocks xmlns:a="http://schemas.openxmlformats.org/drawingml/2006/main" noGrp="1"/>
+          </p:cNvSpPr>
+          <p:nvPr/>
+        </p:nvSpPr>
+        <p:spPr>
+          <a:xfrm xmlns:a="http://schemas.openxmlformats.org/drawingml/2006/main">
+            <a:off x="6210300" y="1009650"/>
+            <a:ext cx="5353050" cy="723900"/>
           </a:xfrm>
           <a:prstGeom xmlns:a="http://schemas.openxmlformats.org/drawingml/2006/main" prst="rect">
             <a:avLst/>
@@ -1847,47 +1923,47 @@
           <a:lstStyle xmlns:a="http://schemas.openxmlformats.org/drawingml/2006/main"/>
           <a:p xmlns:a="http://schemas.openxmlformats.org/drawingml/2006/main">
             <a:pPr>
-              <a:defRPr sz="2175" b="0">
-                <a:solidFill>
-                  <a:srgbClr val="586C68"/>
-                </a:solidFill>
-                <a:latin typeface="Segoe UI"/>
-                <a:ea typeface="Segoe UI"/>
-                <a:cs typeface="Segoe UI"/>
-              </a:defRPr>
-            </a:pPr>
-            <a:r>
-              <a:rPr sz="2175" b="0">
-                <a:solidFill>
-                  <a:srgbClr val="586C68"/>
-                </a:solidFill>
-                <a:latin typeface="Segoe UI"/>
-                <a:ea typeface="Segoe UI"/>
-                <a:cs typeface="Segoe UI"/>
-              </a:rPr>
-              <a:t>Knowledge distillation and INT8 quantization</a:t>
-            </a:r>
-          </a:p>
-        </p:txBody>
-      </p:sp>
-      <p:sp>
-        <p:nvSpPr>
-          <p:cNvPr id="4" name="S01-basis">
-            <a:extLst xmlns:a="http://schemas.openxmlformats.org/drawingml/2006/main">
-              <a:ext uri="{FF2B5EF4-FFF2-40B4-BE49-F238E27FC236}">
-                <a16:creationId xmlns:a16="http://schemas.microsoft.com/office/drawing/2014/main" id="{2873CBBE-1F0F-4820-96BC-7E6C00C02996}"/>
-              </a:ext>
-            </a:extLst>
-          </p:cNvPr>
-          <p:cNvSpPr>
-            <a:spLocks xmlns:a="http://schemas.openxmlformats.org/drawingml/2006/main" noGrp="1"/>
-          </p:cNvSpPr>
-          <p:nvPr/>
-        </p:nvSpPr>
-        <p:spPr>
-          <a:xfrm xmlns:a="http://schemas.openxmlformats.org/drawingml/2006/main">
-            <a:off x="685800" y="4105275"/>
-            <a:ext cx="10820400" cy="342900"/>
+              <a:defRPr sz="3000" b="0">
+                <a:solidFill>
+                  <a:srgbClr val="1E302F"/>
+                </a:solidFill>
+                <a:latin typeface="Segoe UI"/>
+                <a:ea typeface="Segoe UI"/>
+                <a:cs typeface="Segoe UI"/>
+              </a:defRPr>
+            </a:pPr>
+            <a:r>
+              <a:rPr sz="3000" b="0">
+                <a:solidFill>
+                  <a:srgbClr val="1E302F"/>
+                </a:solidFill>
+                <a:latin typeface="Segoe UI"/>
+                <a:ea typeface="Segoe UI"/>
+                <a:cs typeface="Segoe UI"/>
+              </a:rPr>
+              <a:t>The compression trade-off</a:t>
+            </a:r>
+          </a:p>
+        </p:txBody>
+      </p:sp>
+      <p:sp>
+        <p:nvSpPr>
+          <p:cNvPr id="5" name="S01-baseline">
+            <a:extLst xmlns:a="http://schemas.openxmlformats.org/drawingml/2006/main">
+              <a:ext uri="{FF2B5EF4-FFF2-40B4-BE49-F238E27FC236}">
+                <a16:creationId xmlns:a16="http://schemas.microsoft.com/office/drawing/2014/main" id="{8B099AB0-BAEF-4D02-9388-32A0C80324A1}"/>
+              </a:ext>
+            </a:extLst>
+          </p:cNvPr>
+          <p:cNvSpPr>
+            <a:spLocks xmlns:a="http://schemas.openxmlformats.org/drawingml/2006/main" noGrp="1"/>
+          </p:cNvSpPr>
+          <p:nvPr/>
+        </p:nvSpPr>
+        <p:spPr>
+          <a:xfrm xmlns:a="http://schemas.openxmlformats.org/drawingml/2006/main">
+            <a:off x="8258175" y="2076450"/>
+            <a:ext cx="1428750" cy="304800"/>
           </a:xfrm>
           <a:prstGeom xmlns:a="http://schemas.openxmlformats.org/drawingml/2006/main" prst="rect">
             <a:avLst/>
@@ -1922,29 +1998,29 @@
                 <a:ea typeface="Segoe UI"/>
                 <a:cs typeface="Segoe UI"/>
               </a:rPr>
-              <a:t>Baseline compared with INT8</a:t>
-            </a:r>
-          </a:p>
-        </p:txBody>
-      </p:sp>
-      <p:sp>
-        <p:nvSpPr>
-          <p:cNvPr id="5" name="S01-value-1">
-            <a:extLst xmlns:a="http://schemas.openxmlformats.org/drawingml/2006/main">
-              <a:ext uri="{FF2B5EF4-FFF2-40B4-BE49-F238E27FC236}">
-                <a16:creationId xmlns:a16="http://schemas.microsoft.com/office/drawing/2014/main" id="{295A3C64-3346-4FA6-A502-45C5C3C59CC8}"/>
-              </a:ext>
-            </a:extLst>
-          </p:cNvPr>
-          <p:cNvSpPr>
-            <a:spLocks xmlns:a="http://schemas.openxmlformats.org/drawingml/2006/main" noGrp="1"/>
-          </p:cNvSpPr>
-          <p:nvPr/>
-        </p:nvSpPr>
-        <p:spPr>
-          <a:xfrm xmlns:a="http://schemas.openxmlformats.org/drawingml/2006/main">
-            <a:off x="685800" y="4619625"/>
-            <a:ext cx="2952750" cy="628650"/>
+              <a:t>baseline</a:t>
+            </a:r>
+          </a:p>
+        </p:txBody>
+      </p:sp>
+      <p:sp>
+        <p:nvSpPr>
+          <p:cNvPr id="6" name="S01-int8">
+            <a:extLst xmlns:a="http://schemas.openxmlformats.org/drawingml/2006/main">
+              <a:ext uri="{FF2B5EF4-FFF2-40B4-BE49-F238E27FC236}">
+                <a16:creationId xmlns:a16="http://schemas.microsoft.com/office/drawing/2014/main" id="{CFC95C89-72B9-41C9-B83A-5F837747245D}"/>
+              </a:ext>
+            </a:extLst>
+          </p:cNvPr>
+          <p:cNvSpPr>
+            <a:spLocks xmlns:a="http://schemas.openxmlformats.org/drawingml/2006/main" noGrp="1"/>
+          </p:cNvSpPr>
+          <p:nvPr/>
+        </p:nvSpPr>
+        <p:spPr>
+          <a:xfrm xmlns:a="http://schemas.openxmlformats.org/drawingml/2006/main">
+            <a:off x="10382250" y="2076450"/>
+            <a:ext cx="1190625" cy="304800"/>
           </a:xfrm>
           <a:prstGeom xmlns:a="http://schemas.openxmlformats.org/drawingml/2006/main" prst="rect">
             <a:avLst/>
@@ -1961,47 +2037,76 @@
           <a:lstStyle xmlns:a="http://schemas.openxmlformats.org/drawingml/2006/main"/>
           <a:p xmlns:a="http://schemas.openxmlformats.org/drawingml/2006/main">
             <a:pPr>
-              <a:defRPr sz="3225" b="0">
-                <a:solidFill>
-                  <a:srgbClr val="1E302F"/>
-                </a:solidFill>
-                <a:latin typeface="Segoe UI"/>
-                <a:ea typeface="Segoe UI"/>
-                <a:cs typeface="Segoe UI"/>
-              </a:defRPr>
-            </a:pPr>
-            <a:r>
-              <a:rPr sz="3225" b="0">
-                <a:solidFill>
-                  <a:srgbClr val="1E302F"/>
-                </a:solidFill>
-                <a:latin typeface="Segoe UI"/>
-                <a:ea typeface="Segoe UI"/>
-                <a:cs typeface="Segoe UI"/>
-              </a:rPr>
-              <a:t>120 → 54</a:t>
-            </a:r>
-          </a:p>
-        </p:txBody>
-      </p:sp>
-      <p:sp>
-        <p:nvSpPr>
-          <p:cNvPr id="6" name="S01-label-1">
-            <a:extLst xmlns:a="http://schemas.openxmlformats.org/drawingml/2006/main">
-              <a:ext uri="{FF2B5EF4-FFF2-40B4-BE49-F238E27FC236}">
-                <a16:creationId xmlns:a16="http://schemas.microsoft.com/office/drawing/2014/main" id="{EBFBEFFB-C1D3-4DEE-B7B8-7EC8A0FC27BD}"/>
-              </a:ext>
-            </a:extLst>
-          </p:cNvPr>
-          <p:cNvSpPr>
-            <a:spLocks xmlns:a="http://schemas.openxmlformats.org/drawingml/2006/main" noGrp="1"/>
-          </p:cNvSpPr>
-          <p:nvPr/>
-        </p:nvSpPr>
-        <p:spPr>
-          <a:xfrm xmlns:a="http://schemas.openxmlformats.org/drawingml/2006/main">
-            <a:off x="685800" y="5314950"/>
-            <a:ext cx="3143250" cy="361950"/>
+              <a:defRPr sz="1725" b="0">
+                <a:solidFill>
+                  <a:srgbClr val="586C68"/>
+                </a:solidFill>
+                <a:latin typeface="Segoe UI"/>
+                <a:ea typeface="Segoe UI"/>
+                <a:cs typeface="Segoe UI"/>
+              </a:defRPr>
+            </a:pPr>
+            <a:r>
+              <a:rPr sz="1725" b="0">
+                <a:solidFill>
+                  <a:srgbClr val="586C68"/>
+                </a:solidFill>
+                <a:latin typeface="Segoe UI"/>
+                <a:ea typeface="Segoe UI"/>
+                <a:cs typeface="Segoe UI"/>
+              </a:rPr>
+              <a:t>int8</a:t>
+            </a:r>
+          </a:p>
+        </p:txBody>
+      </p:sp>
+      <p:sp>
+        <p:nvSpPr>
+          <p:cNvPr id="7" name="S01-rule-0">
+            <a:extLst xmlns:a="http://schemas.openxmlformats.org/drawingml/2006/main">
+              <a:ext uri="{FF2B5EF4-FFF2-40B4-BE49-F238E27FC236}">
+                <a16:creationId xmlns:a16="http://schemas.microsoft.com/office/drawing/2014/main" id="{FBDA2CE0-DCA7-453E-9DDA-C3735D83D305}"/>
+              </a:ext>
+            </a:extLst>
+          </p:cNvPr>
+          <p:cNvSpPr>
+            <a:spLocks xmlns:a="http://schemas.openxmlformats.org/drawingml/2006/main" noGrp="1"/>
+          </p:cNvSpPr>
+          <p:nvPr/>
+        </p:nvSpPr>
+        <p:spPr>
+          <a:xfrm xmlns:a="http://schemas.openxmlformats.org/drawingml/2006/main">
+            <a:off x="6210300" y="2581275"/>
+            <a:ext cx="5372100" cy="0"/>
+          </a:xfrm>
+          <a:prstGeom xmlns:a="http://schemas.openxmlformats.org/drawingml/2006/main" prst="line">
+            <a:avLst/>
+          </a:prstGeom>
+          <a:ln xmlns:a="http://schemas.openxmlformats.org/drawingml/2006/main" w="9525">
+            <a:solidFill>
+              <a:srgbClr val="CFD8D1"/>
+            </a:solidFill>
+          </a:ln>
+        </p:spPr>
+      </p:sp>
+      <p:sp>
+        <p:nvSpPr>
+          <p:cNvPr id="8" name="S01-label-1">
+            <a:extLst xmlns:a="http://schemas.openxmlformats.org/drawingml/2006/main">
+              <a:ext uri="{FF2B5EF4-FFF2-40B4-BE49-F238E27FC236}">
+                <a16:creationId xmlns:a16="http://schemas.microsoft.com/office/drawing/2014/main" id="{F74AA925-F749-4AE2-8037-43C53E85D467}"/>
+              </a:ext>
+            </a:extLst>
+          </p:cNvPr>
+          <p:cNvSpPr>
+            <a:spLocks xmlns:a="http://schemas.openxmlformats.org/drawingml/2006/main" noGrp="1"/>
+          </p:cNvSpPr>
+          <p:nvPr/>
+        </p:nvSpPr>
+        <p:spPr>
+          <a:xfrm xmlns:a="http://schemas.openxmlformats.org/drawingml/2006/main">
+            <a:off x="6210300" y="2762250"/>
+            <a:ext cx="2000250" cy="523875"/>
           </a:xfrm>
           <a:prstGeom xmlns:a="http://schemas.openxmlformats.org/drawingml/2006/main" prst="rect">
             <a:avLst/>
@@ -2018,7 +2123,7 @@
           <a:lstStyle xmlns:a="http://schemas.openxmlformats.org/drawingml/2006/main"/>
           <a:p xmlns:a="http://schemas.openxmlformats.org/drawingml/2006/main">
             <a:pPr>
-              <a:defRPr sz="1800" b="0">
+              <a:defRPr sz="1725" b="0">
                 <a:solidFill>
                   <a:srgbClr val="586C68"/>
                 </a:solidFill>
@@ -2028,7 +2133,7 @@
               </a:defRPr>
             </a:pPr>
             <a:r>
-              <a:rPr sz="1800" b="0">
+              <a:rPr sz="1725" b="0">
                 <a:solidFill>
                   <a:srgbClr val="586C68"/>
                 </a:solidFill>
@@ -2043,22 +2148,22 @@
       </p:sp>
       <p:sp>
         <p:nvSpPr>
-          <p:cNvPr id="7" name="S01-value-2">
-            <a:extLst xmlns:a="http://schemas.openxmlformats.org/drawingml/2006/main">
-              <a:ext uri="{FF2B5EF4-FFF2-40B4-BE49-F238E27FC236}">
-                <a16:creationId xmlns:a16="http://schemas.microsoft.com/office/drawing/2014/main" id="{16A73283-4CC7-4F48-87F3-803DBD5C4C7F}"/>
-              </a:ext>
-            </a:extLst>
-          </p:cNvPr>
-          <p:cNvSpPr>
-            <a:spLocks xmlns:a="http://schemas.openxmlformats.org/drawingml/2006/main" noGrp="1"/>
-          </p:cNvSpPr>
-          <p:nvPr/>
-        </p:nvSpPr>
-        <p:spPr>
-          <a:xfrm xmlns:a="http://schemas.openxmlformats.org/drawingml/2006/main">
-            <a:off x="4419600" y="4619625"/>
-            <a:ext cx="3810000" cy="628650"/>
+          <p:cNvPr id="9" name="S01-value-base-1">
+            <a:extLst xmlns:a="http://schemas.openxmlformats.org/drawingml/2006/main">
+              <a:ext uri="{FF2B5EF4-FFF2-40B4-BE49-F238E27FC236}">
+                <a16:creationId xmlns:a16="http://schemas.microsoft.com/office/drawing/2014/main" id="{71BE3480-8830-40B7-9EC6-707068393FFE}"/>
+              </a:ext>
+            </a:extLst>
+          </p:cNvPr>
+          <p:cNvSpPr>
+            <a:spLocks xmlns:a="http://schemas.openxmlformats.org/drawingml/2006/main" noGrp="1"/>
+          </p:cNvSpPr>
+          <p:nvPr/>
+        </p:nvSpPr>
+        <p:spPr>
+          <a:xfrm xmlns:a="http://schemas.openxmlformats.org/drawingml/2006/main">
+            <a:off x="8258175" y="2762250"/>
+            <a:ext cx="1524000" cy="523875"/>
           </a:xfrm>
           <a:prstGeom xmlns:a="http://schemas.openxmlformats.org/drawingml/2006/main" prst="rect">
             <a:avLst/>
@@ -2075,7 +2180,7 @@
           <a:lstStyle xmlns:a="http://schemas.openxmlformats.org/drawingml/2006/main"/>
           <a:p xmlns:a="http://schemas.openxmlformats.org/drawingml/2006/main">
             <a:pPr>
-              <a:defRPr sz="3225" b="0">
+              <a:defRPr sz="2850" b="0">
                 <a:solidFill>
                   <a:srgbClr val="1E302F"/>
                 </a:solidFill>
@@ -2085,7 +2190,7 @@
               </a:defRPr>
             </a:pPr>
             <a:r>
-              <a:rPr sz="3225" b="0">
+              <a:rPr sz="2850" b="0">
                 <a:solidFill>
                   <a:srgbClr val="1E302F"/>
                 </a:solidFill>
@@ -2093,29 +2198,29 @@
                 <a:ea typeface="Segoe UI"/>
                 <a:cs typeface="Segoe UI"/>
               </a:rPr>
-              <a:t>0.910 → 0.896</a:t>
-            </a:r>
-          </a:p>
-        </p:txBody>
-      </p:sp>
-      <p:sp>
-        <p:nvSpPr>
-          <p:cNvPr id="8" name="S01-label-2">
-            <a:extLst xmlns:a="http://schemas.openxmlformats.org/drawingml/2006/main">
-              <a:ext uri="{FF2B5EF4-FFF2-40B4-BE49-F238E27FC236}">
-                <a16:creationId xmlns:a16="http://schemas.microsoft.com/office/drawing/2014/main" id="{729CC653-091B-44A5-A028-48A585C0C178}"/>
-              </a:ext>
-            </a:extLst>
-          </p:cNvPr>
-          <p:cNvSpPr>
-            <a:spLocks xmlns:a="http://schemas.openxmlformats.org/drawingml/2006/main" noGrp="1"/>
-          </p:cNvSpPr>
-          <p:nvPr/>
-        </p:nvSpPr>
-        <p:spPr>
-          <a:xfrm xmlns:a="http://schemas.openxmlformats.org/drawingml/2006/main">
-            <a:off x="4419600" y="5314950"/>
-            <a:ext cx="3143250" cy="361950"/>
+              <a:t>120</a:t>
+            </a:r>
+          </a:p>
+        </p:txBody>
+      </p:sp>
+      <p:sp>
+        <p:nvSpPr>
+          <p:cNvPr id="10" name="S01-value-int8-1">
+            <a:extLst xmlns:a="http://schemas.openxmlformats.org/drawingml/2006/main">
+              <a:ext uri="{FF2B5EF4-FFF2-40B4-BE49-F238E27FC236}">
+                <a16:creationId xmlns:a16="http://schemas.microsoft.com/office/drawing/2014/main" id="{C8258488-1E02-4433-BEE3-01F2976A324B}"/>
+              </a:ext>
+            </a:extLst>
+          </p:cNvPr>
+          <p:cNvSpPr>
+            <a:spLocks xmlns:a="http://schemas.openxmlformats.org/drawingml/2006/main" noGrp="1"/>
+          </p:cNvSpPr>
+          <p:nvPr/>
+        </p:nvSpPr>
+        <p:spPr>
+          <a:xfrm xmlns:a="http://schemas.openxmlformats.org/drawingml/2006/main">
+            <a:off x="10382250" y="2762250"/>
+            <a:ext cx="1428750" cy="523875"/>
           </a:xfrm>
           <a:prstGeom xmlns:a="http://schemas.openxmlformats.org/drawingml/2006/main" prst="rect">
             <a:avLst/>
@@ -2132,47 +2237,76 @@
           <a:lstStyle xmlns:a="http://schemas.openxmlformats.org/drawingml/2006/main"/>
           <a:p xmlns:a="http://schemas.openxmlformats.org/drawingml/2006/main">
             <a:pPr>
-              <a:defRPr sz="1800" b="0">
-                <a:solidFill>
-                  <a:srgbClr val="586C68"/>
-                </a:solidFill>
-                <a:latin typeface="Segoe UI"/>
-                <a:ea typeface="Segoe UI"/>
-                <a:cs typeface="Segoe UI"/>
-              </a:defRPr>
-            </a:pPr>
-            <a:r>
-              <a:rPr sz="1800" b="0">
-                <a:solidFill>
-                  <a:srgbClr val="586C68"/>
-                </a:solidFill>
-                <a:latin typeface="Segoe UI"/>
-                <a:ea typeface="Segoe UI"/>
-                <a:cs typeface="Segoe UI"/>
-              </a:rPr>
-              <a:t>F1</a:t>
-            </a:r>
-          </a:p>
-        </p:txBody>
-      </p:sp>
-      <p:sp>
-        <p:nvSpPr>
-          <p:cNvPr id="9" name="S01-value-3">
-            <a:extLst xmlns:a="http://schemas.openxmlformats.org/drawingml/2006/main">
-              <a:ext uri="{FF2B5EF4-FFF2-40B4-BE49-F238E27FC236}">
-                <a16:creationId xmlns:a16="http://schemas.microsoft.com/office/drawing/2014/main" id="{F592BA26-D889-4153-99C9-91B55DF1C412}"/>
-              </a:ext>
-            </a:extLst>
-          </p:cNvPr>
-          <p:cNvSpPr>
-            <a:spLocks xmlns:a="http://schemas.openxmlformats.org/drawingml/2006/main" noGrp="1"/>
-          </p:cNvSpPr>
-          <p:nvPr/>
-        </p:nvSpPr>
-        <p:spPr>
-          <a:xfrm xmlns:a="http://schemas.openxmlformats.org/drawingml/2006/main">
-            <a:off x="8572500" y="4619625"/>
-            <a:ext cx="2952750" cy="628650"/>
+              <a:defRPr sz="2850" b="0">
+                <a:solidFill>
+                  <a:srgbClr val="1E302F"/>
+                </a:solidFill>
+                <a:latin typeface="Segoe UI"/>
+                <a:ea typeface="Segoe UI"/>
+                <a:cs typeface="Segoe UI"/>
+              </a:defRPr>
+            </a:pPr>
+            <a:r>
+              <a:rPr sz="2850" b="0">
+                <a:solidFill>
+                  <a:srgbClr val="1E302F"/>
+                </a:solidFill>
+                <a:latin typeface="Segoe UI"/>
+                <a:ea typeface="Segoe UI"/>
+                <a:cs typeface="Segoe UI"/>
+              </a:rPr>
+              <a:t>54</a:t>
+            </a:r>
+          </a:p>
+        </p:txBody>
+      </p:sp>
+      <p:sp>
+        <p:nvSpPr>
+          <p:cNvPr id="11" name="S01-rule-1">
+            <a:extLst xmlns:a="http://schemas.openxmlformats.org/drawingml/2006/main">
+              <a:ext uri="{FF2B5EF4-FFF2-40B4-BE49-F238E27FC236}">
+                <a16:creationId xmlns:a16="http://schemas.microsoft.com/office/drawing/2014/main" id="{D4719AA7-D28B-4245-9FCE-1B4B8ECC3357}"/>
+              </a:ext>
+            </a:extLst>
+          </p:cNvPr>
+          <p:cNvSpPr>
+            <a:spLocks xmlns:a="http://schemas.openxmlformats.org/drawingml/2006/main" noGrp="1"/>
+          </p:cNvSpPr>
+          <p:nvPr/>
+        </p:nvSpPr>
+        <p:spPr>
+          <a:xfrm xmlns:a="http://schemas.openxmlformats.org/drawingml/2006/main">
+            <a:off x="6210300" y="3648075"/>
+            <a:ext cx="5372100" cy="0"/>
+          </a:xfrm>
+          <a:prstGeom xmlns:a="http://schemas.openxmlformats.org/drawingml/2006/main" prst="line">
+            <a:avLst/>
+          </a:prstGeom>
+          <a:ln xmlns:a="http://schemas.openxmlformats.org/drawingml/2006/main" w="9525">
+            <a:solidFill>
+              <a:srgbClr val="CFD8D1"/>
+            </a:solidFill>
+          </a:ln>
+        </p:spPr>
+      </p:sp>
+      <p:sp>
+        <p:nvSpPr>
+          <p:cNvPr id="12" name="S01-label-2">
+            <a:extLst xmlns:a="http://schemas.openxmlformats.org/drawingml/2006/main">
+              <a:ext uri="{FF2B5EF4-FFF2-40B4-BE49-F238E27FC236}">
+                <a16:creationId xmlns:a16="http://schemas.microsoft.com/office/drawing/2014/main" id="{698A14C0-4335-41D7-9A72-396DB57F4DDA}"/>
+              </a:ext>
+            </a:extLst>
+          </p:cNvPr>
+          <p:cNvSpPr>
+            <a:spLocks xmlns:a="http://schemas.openxmlformats.org/drawingml/2006/main" noGrp="1"/>
+          </p:cNvSpPr>
+          <p:nvPr/>
+        </p:nvSpPr>
+        <p:spPr>
+          <a:xfrm xmlns:a="http://schemas.openxmlformats.org/drawingml/2006/main">
+            <a:off x="6210300" y="3829050"/>
+            <a:ext cx="2000250" cy="523875"/>
           </a:xfrm>
           <a:prstGeom xmlns:a="http://schemas.openxmlformats.org/drawingml/2006/main" prst="rect">
             <a:avLst/>
@@ -2189,47 +2323,47 @@
           <a:lstStyle xmlns:a="http://schemas.openxmlformats.org/drawingml/2006/main"/>
           <a:p xmlns:a="http://schemas.openxmlformats.org/drawingml/2006/main">
             <a:pPr>
-              <a:defRPr sz="3225" b="0">
-                <a:solidFill>
-                  <a:srgbClr val="1E302F"/>
-                </a:solidFill>
-                <a:latin typeface="Segoe UI"/>
-                <a:ea typeface="Segoe UI"/>
-                <a:cs typeface="Segoe UI"/>
-              </a:defRPr>
-            </a:pPr>
-            <a:r>
-              <a:rPr sz="3225" b="0">
-                <a:solidFill>
-                  <a:srgbClr val="1E302F"/>
-                </a:solidFill>
-                <a:latin typeface="Segoe UI"/>
-                <a:ea typeface="Segoe UI"/>
-                <a:cs typeface="Segoe UI"/>
-              </a:rPr>
-              <a:t>48 → 12</a:t>
-            </a:r>
-          </a:p>
-        </p:txBody>
-      </p:sp>
-      <p:sp>
-        <p:nvSpPr>
-          <p:cNvPr id="10" name="S01-label-3">
-            <a:extLst xmlns:a="http://schemas.openxmlformats.org/drawingml/2006/main">
-              <a:ext uri="{FF2B5EF4-FFF2-40B4-BE49-F238E27FC236}">
-                <a16:creationId xmlns:a16="http://schemas.microsoft.com/office/drawing/2014/main" id="{95A599DF-353D-42E0-9D56-5245DC7B8391}"/>
-              </a:ext>
-            </a:extLst>
-          </p:cNvPr>
-          <p:cNvSpPr>
-            <a:spLocks xmlns:a="http://schemas.openxmlformats.org/drawingml/2006/main" noGrp="1"/>
-          </p:cNvSpPr>
-          <p:nvPr/>
-        </p:nvSpPr>
-        <p:spPr>
-          <a:xfrm xmlns:a="http://schemas.openxmlformats.org/drawingml/2006/main">
-            <a:off x="8572500" y="5314950"/>
-            <a:ext cx="3143250" cy="361950"/>
+              <a:defRPr sz="1725" b="0">
+                <a:solidFill>
+                  <a:srgbClr val="586C68"/>
+                </a:solidFill>
+                <a:latin typeface="Segoe UI"/>
+                <a:ea typeface="Segoe UI"/>
+                <a:cs typeface="Segoe UI"/>
+              </a:defRPr>
+            </a:pPr>
+            <a:r>
+              <a:rPr sz="1725" b="0">
+                <a:solidFill>
+                  <a:srgbClr val="586C68"/>
+                </a:solidFill>
+                <a:latin typeface="Segoe UI"/>
+                <a:ea typeface="Segoe UI"/>
+                <a:cs typeface="Segoe UI"/>
+              </a:rPr>
+              <a:t>F1</a:t>
+            </a:r>
+          </a:p>
+        </p:txBody>
+      </p:sp>
+      <p:sp>
+        <p:nvSpPr>
+          <p:cNvPr id="13" name="S01-value-base-2">
+            <a:extLst xmlns:a="http://schemas.openxmlformats.org/drawingml/2006/main">
+              <a:ext uri="{FF2B5EF4-FFF2-40B4-BE49-F238E27FC236}">
+                <a16:creationId xmlns:a16="http://schemas.microsoft.com/office/drawing/2014/main" id="{871DF7F4-C161-4301-ADFC-F2BE27DA6535}"/>
+              </a:ext>
+            </a:extLst>
+          </p:cNvPr>
+          <p:cNvSpPr>
+            <a:spLocks xmlns:a="http://schemas.openxmlformats.org/drawingml/2006/main" noGrp="1"/>
+          </p:cNvSpPr>
+          <p:nvPr/>
+        </p:nvSpPr>
+        <p:spPr>
+          <a:xfrm xmlns:a="http://schemas.openxmlformats.org/drawingml/2006/main">
+            <a:off x="8258175" y="3829050"/>
+            <a:ext cx="1524000" cy="523875"/>
           </a:xfrm>
           <a:prstGeom xmlns:a="http://schemas.openxmlformats.org/drawingml/2006/main" prst="rect">
             <a:avLst/>
@@ -2246,47 +2380,47 @@
           <a:lstStyle xmlns:a="http://schemas.openxmlformats.org/drawingml/2006/main"/>
           <a:p xmlns:a="http://schemas.openxmlformats.org/drawingml/2006/main">
             <a:pPr>
-              <a:defRPr sz="1800" b="0">
-                <a:solidFill>
-                  <a:srgbClr val="586C68"/>
-                </a:solidFill>
-                <a:latin typeface="Segoe UI"/>
-                <a:ea typeface="Segoe UI"/>
-                <a:cs typeface="Segoe UI"/>
-              </a:defRPr>
-            </a:pPr>
-            <a:r>
-              <a:rPr sz="1800" b="0">
-                <a:solidFill>
-                  <a:srgbClr val="586C68"/>
-                </a:solidFill>
-                <a:latin typeface="Segoe UI"/>
-                <a:ea typeface="Segoe UI"/>
-                <a:cs typeface="Segoe UI"/>
-              </a:rPr>
-              <a:t>Model size (MB)</a:t>
-            </a:r>
-          </a:p>
-        </p:txBody>
-      </p:sp>
-      <p:sp>
-        <p:nvSpPr>
-          <p:cNvPr id="11" name="S01-disclosure">
-            <a:extLst xmlns:a="http://schemas.openxmlformats.org/drawingml/2006/main">
-              <a:ext uri="{FF2B5EF4-FFF2-40B4-BE49-F238E27FC236}">
-                <a16:creationId xmlns:a16="http://schemas.microsoft.com/office/drawing/2014/main" id="{DFF9007E-EFA7-42DB-BE04-E78D98B57CC9}"/>
-              </a:ext>
-            </a:extLst>
-          </p:cNvPr>
-          <p:cNvSpPr>
-            <a:spLocks xmlns:a="http://schemas.openxmlformats.org/drawingml/2006/main" noGrp="1"/>
-          </p:cNvSpPr>
-          <p:nvPr/>
-        </p:nvSpPr>
-        <p:spPr>
-          <a:xfrm xmlns:a="http://schemas.openxmlformats.org/drawingml/2006/main">
-            <a:off x="685800" y="6372225"/>
-            <a:ext cx="9525000" cy="219075"/>
+              <a:defRPr sz="2850" b="0">
+                <a:solidFill>
+                  <a:srgbClr val="1E302F"/>
+                </a:solidFill>
+                <a:latin typeface="Segoe UI"/>
+                <a:ea typeface="Segoe UI"/>
+                <a:cs typeface="Segoe UI"/>
+              </a:defRPr>
+            </a:pPr>
+            <a:r>
+              <a:rPr sz="2850" b="0">
+                <a:solidFill>
+                  <a:srgbClr val="1E302F"/>
+                </a:solidFill>
+                <a:latin typeface="Segoe UI"/>
+                <a:ea typeface="Segoe UI"/>
+                <a:cs typeface="Segoe UI"/>
+              </a:rPr>
+              <a:t>0.910</a:t>
+            </a:r>
+          </a:p>
+        </p:txBody>
+      </p:sp>
+      <p:sp>
+        <p:nvSpPr>
+          <p:cNvPr id="14" name="S01-value-int8-2">
+            <a:extLst xmlns:a="http://schemas.openxmlformats.org/drawingml/2006/main">
+              <a:ext uri="{FF2B5EF4-FFF2-40B4-BE49-F238E27FC236}">
+                <a16:creationId xmlns:a16="http://schemas.microsoft.com/office/drawing/2014/main" id="{1AF6085E-9466-4602-A8DE-DA0E1AD6E712}"/>
+              </a:ext>
+            </a:extLst>
+          </p:cNvPr>
+          <p:cNvSpPr>
+            <a:spLocks xmlns:a="http://schemas.openxmlformats.org/drawingml/2006/main" noGrp="1"/>
+          </p:cNvSpPr>
+          <p:nvPr/>
+        </p:nvSpPr>
+        <p:spPr>
+          <a:xfrm xmlns:a="http://schemas.openxmlformats.org/drawingml/2006/main">
+            <a:off x="10382250" y="3829050"/>
+            <a:ext cx="1428750" cy="523875"/>
           </a:xfrm>
           <a:prstGeom xmlns:a="http://schemas.openxmlformats.org/drawingml/2006/main" prst="rect">
             <a:avLst/>
@@ -2303,47 +2437,76 @@
           <a:lstStyle xmlns:a="http://schemas.openxmlformats.org/drawingml/2006/main"/>
           <a:p xmlns:a="http://schemas.openxmlformats.org/drawingml/2006/main">
             <a:pPr>
-              <a:defRPr sz="1275" b="0">
-                <a:solidFill>
-                  <a:srgbClr val="586C68"/>
-                </a:solidFill>
-                <a:latin typeface="Segoe UI"/>
-                <a:ea typeface="Segoe UI"/>
-                <a:cs typeface="Segoe UI"/>
-              </a:defRPr>
-            </a:pPr>
-            <a:r>
-              <a:rPr sz="1275" b="0">
-                <a:solidFill>
-                  <a:srgbClr val="586C68"/>
-                </a:solidFill>
-                <a:latin typeface="Segoe UI"/>
-                <a:ea typeface="Segoe UI"/>
-                <a:cs typeface="Segoe UI"/>
-              </a:rPr>
-              <a:t>Illustrative data · not experimental results</a:t>
-            </a:r>
-          </a:p>
-        </p:txBody>
-      </p:sp>
-      <p:sp>
-        <p:nvSpPr>
-          <p:cNvPr id="12" name="S01-number">
-            <a:extLst xmlns:a="http://schemas.openxmlformats.org/drawingml/2006/main">
-              <a:ext uri="{FF2B5EF4-FFF2-40B4-BE49-F238E27FC236}">
-                <a16:creationId xmlns:a16="http://schemas.microsoft.com/office/drawing/2014/main" id="{EEC9B55A-5E3F-4C8F-BEF1-115C002FB54B}"/>
-              </a:ext>
-            </a:extLst>
-          </p:cNvPr>
-          <p:cNvSpPr>
-            <a:spLocks xmlns:a="http://schemas.openxmlformats.org/drawingml/2006/main" noGrp="1"/>
-          </p:cNvSpPr>
-          <p:nvPr/>
-        </p:nvSpPr>
-        <p:spPr>
-          <a:xfrm xmlns:a="http://schemas.openxmlformats.org/drawingml/2006/main">
-            <a:off x="11144250" y="6372225"/>
-            <a:ext cx="361950" cy="219075"/>
+              <a:defRPr sz="2850" b="0">
+                <a:solidFill>
+                  <a:srgbClr val="1E302F"/>
+                </a:solidFill>
+                <a:latin typeface="Segoe UI"/>
+                <a:ea typeface="Segoe UI"/>
+                <a:cs typeface="Segoe UI"/>
+              </a:defRPr>
+            </a:pPr>
+            <a:r>
+              <a:rPr sz="2850" b="0">
+                <a:solidFill>
+                  <a:srgbClr val="1E302F"/>
+                </a:solidFill>
+                <a:latin typeface="Segoe UI"/>
+                <a:ea typeface="Segoe UI"/>
+                <a:cs typeface="Segoe UI"/>
+              </a:rPr>
+              <a:t>0.896</a:t>
+            </a:r>
+          </a:p>
+        </p:txBody>
+      </p:sp>
+      <p:sp>
+        <p:nvSpPr>
+          <p:cNvPr id="15" name="S01-rule-2">
+            <a:extLst xmlns:a="http://schemas.openxmlformats.org/drawingml/2006/main">
+              <a:ext uri="{FF2B5EF4-FFF2-40B4-BE49-F238E27FC236}">
+                <a16:creationId xmlns:a16="http://schemas.microsoft.com/office/drawing/2014/main" id="{923FF4B1-8A7F-4A93-8097-6056F0F34B86}"/>
+              </a:ext>
+            </a:extLst>
+          </p:cNvPr>
+          <p:cNvSpPr>
+            <a:spLocks xmlns:a="http://schemas.openxmlformats.org/drawingml/2006/main" noGrp="1"/>
+          </p:cNvSpPr>
+          <p:nvPr/>
+        </p:nvSpPr>
+        <p:spPr>
+          <a:xfrm xmlns:a="http://schemas.openxmlformats.org/drawingml/2006/main">
+            <a:off x="6210300" y="4714875"/>
+            <a:ext cx="5372100" cy="0"/>
+          </a:xfrm>
+          <a:prstGeom xmlns:a="http://schemas.openxmlformats.org/drawingml/2006/main" prst="line">
+            <a:avLst/>
+          </a:prstGeom>
+          <a:ln xmlns:a="http://schemas.openxmlformats.org/drawingml/2006/main" w="9525">
+            <a:solidFill>
+              <a:srgbClr val="CFD8D1"/>
+            </a:solidFill>
+          </a:ln>
+        </p:spPr>
+      </p:sp>
+      <p:sp>
+        <p:nvSpPr>
+          <p:cNvPr id="16" name="S01-label-3">
+            <a:extLst xmlns:a="http://schemas.openxmlformats.org/drawingml/2006/main">
+              <a:ext uri="{FF2B5EF4-FFF2-40B4-BE49-F238E27FC236}">
+                <a16:creationId xmlns:a16="http://schemas.microsoft.com/office/drawing/2014/main" id="{216EFDEA-BA8F-4716-8C62-E90476D666C2}"/>
+              </a:ext>
+            </a:extLst>
+          </p:cNvPr>
+          <p:cNvSpPr>
+            <a:spLocks xmlns:a="http://schemas.openxmlformats.org/drawingml/2006/main" noGrp="1"/>
+          </p:cNvSpPr>
+          <p:nvPr/>
+        </p:nvSpPr>
+        <p:spPr>
+          <a:xfrm xmlns:a="http://schemas.openxmlformats.org/drawingml/2006/main">
+            <a:off x="6210300" y="4895850"/>
+            <a:ext cx="2000250" cy="523875"/>
           </a:xfrm>
           <a:prstGeom xmlns:a="http://schemas.openxmlformats.org/drawingml/2006/main" prst="rect">
             <a:avLst/>
@@ -2360,9 +2523,180 @@
           <a:lstStyle xmlns:a="http://schemas.openxmlformats.org/drawingml/2006/main"/>
           <a:p xmlns:a="http://schemas.openxmlformats.org/drawingml/2006/main">
             <a:pPr>
+              <a:defRPr sz="1725" b="0">
+                <a:solidFill>
+                  <a:srgbClr val="586C68"/>
+                </a:solidFill>
+                <a:latin typeface="Segoe UI"/>
+                <a:ea typeface="Segoe UI"/>
+                <a:cs typeface="Segoe UI"/>
+              </a:defRPr>
+            </a:pPr>
+            <a:r>
+              <a:rPr sz="1725" b="0">
+                <a:solidFill>
+                  <a:srgbClr val="586C68"/>
+                </a:solidFill>
+                <a:latin typeface="Segoe UI"/>
+                <a:ea typeface="Segoe UI"/>
+                <a:cs typeface="Segoe UI"/>
+              </a:rPr>
+              <a:t>Model size (MB)</a:t>
+            </a:r>
+          </a:p>
+        </p:txBody>
+      </p:sp>
+      <p:sp>
+        <p:nvSpPr>
+          <p:cNvPr id="17" name="S01-value-base-3">
+            <a:extLst xmlns:a="http://schemas.openxmlformats.org/drawingml/2006/main">
+              <a:ext uri="{FF2B5EF4-FFF2-40B4-BE49-F238E27FC236}">
+                <a16:creationId xmlns:a16="http://schemas.microsoft.com/office/drawing/2014/main" id="{E2B01AB0-E115-4415-A0F1-D3D567D267BF}"/>
+              </a:ext>
+            </a:extLst>
+          </p:cNvPr>
+          <p:cNvSpPr>
+            <a:spLocks xmlns:a="http://schemas.openxmlformats.org/drawingml/2006/main" noGrp="1"/>
+          </p:cNvSpPr>
+          <p:nvPr/>
+        </p:nvSpPr>
+        <p:spPr>
+          <a:xfrm xmlns:a="http://schemas.openxmlformats.org/drawingml/2006/main">
+            <a:off x="8258175" y="4895850"/>
+            <a:ext cx="1524000" cy="523875"/>
+          </a:xfrm>
+          <a:prstGeom xmlns:a="http://schemas.openxmlformats.org/drawingml/2006/main" prst="rect">
+            <a:avLst/>
+          </a:prstGeom>
+          <a:noFill xmlns:a="http://schemas.openxmlformats.org/drawingml/2006/main"/>
+          <a:ln xmlns:a="http://schemas.openxmlformats.org/drawingml/2006/main" w="0">
+            <a:noFill/>
+          </a:ln>
+        </p:spPr>
+        <p:txBody>
+          <a:bodyPr xmlns:a="http://schemas.openxmlformats.org/drawingml/2006/main" wrap="none" lIns="0" tIns="0" rIns="0" bIns="0" anchor="ctr">
+            <a:noAutofit/>
+          </a:bodyPr>
+          <a:lstStyle xmlns:a="http://schemas.openxmlformats.org/drawingml/2006/main"/>
+          <a:p xmlns:a="http://schemas.openxmlformats.org/drawingml/2006/main">
+            <a:pPr>
+              <a:defRPr sz="2850" b="0">
+                <a:solidFill>
+                  <a:srgbClr val="1E302F"/>
+                </a:solidFill>
+                <a:latin typeface="Segoe UI"/>
+                <a:ea typeface="Segoe UI"/>
+                <a:cs typeface="Segoe UI"/>
+              </a:defRPr>
+            </a:pPr>
+            <a:r>
+              <a:rPr sz="2850" b="0">
+                <a:solidFill>
+                  <a:srgbClr val="1E302F"/>
+                </a:solidFill>
+                <a:latin typeface="Segoe UI"/>
+                <a:ea typeface="Segoe UI"/>
+                <a:cs typeface="Segoe UI"/>
+              </a:rPr>
+              <a:t>48</a:t>
+            </a:r>
+          </a:p>
+        </p:txBody>
+      </p:sp>
+      <p:sp>
+        <p:nvSpPr>
+          <p:cNvPr id="18" name="S01-value-int8-3">
+            <a:extLst xmlns:a="http://schemas.openxmlformats.org/drawingml/2006/main">
+              <a:ext uri="{FF2B5EF4-FFF2-40B4-BE49-F238E27FC236}">
+                <a16:creationId xmlns:a16="http://schemas.microsoft.com/office/drawing/2014/main" id="{DABC8681-4239-4D44-819C-41121B9AFB20}"/>
+              </a:ext>
+            </a:extLst>
+          </p:cNvPr>
+          <p:cNvSpPr>
+            <a:spLocks xmlns:a="http://schemas.openxmlformats.org/drawingml/2006/main" noGrp="1"/>
+          </p:cNvSpPr>
+          <p:nvPr/>
+        </p:nvSpPr>
+        <p:spPr>
+          <a:xfrm xmlns:a="http://schemas.openxmlformats.org/drawingml/2006/main">
+            <a:off x="10382250" y="4895850"/>
+            <a:ext cx="1428750" cy="523875"/>
+          </a:xfrm>
+          <a:prstGeom xmlns:a="http://schemas.openxmlformats.org/drawingml/2006/main" prst="rect">
+            <a:avLst/>
+          </a:prstGeom>
+          <a:noFill xmlns:a="http://schemas.openxmlformats.org/drawingml/2006/main"/>
+          <a:ln xmlns:a="http://schemas.openxmlformats.org/drawingml/2006/main" w="0">
+            <a:noFill/>
+          </a:ln>
+        </p:spPr>
+        <p:txBody>
+          <a:bodyPr xmlns:a="http://schemas.openxmlformats.org/drawingml/2006/main" wrap="none" lIns="0" tIns="0" rIns="0" bIns="0" anchor="ctr">
+            <a:noAutofit/>
+          </a:bodyPr>
+          <a:lstStyle xmlns:a="http://schemas.openxmlformats.org/drawingml/2006/main"/>
+          <a:p xmlns:a="http://schemas.openxmlformats.org/drawingml/2006/main">
+            <a:pPr>
+              <a:defRPr sz="2850" b="0">
+                <a:solidFill>
+                  <a:srgbClr val="1E302F"/>
+                </a:solidFill>
+                <a:latin typeface="Segoe UI"/>
+                <a:ea typeface="Segoe UI"/>
+                <a:cs typeface="Segoe UI"/>
+              </a:defRPr>
+            </a:pPr>
+            <a:r>
+              <a:rPr sz="2850" b="0">
+                <a:solidFill>
+                  <a:srgbClr val="1E302F"/>
+                </a:solidFill>
+                <a:latin typeface="Segoe UI"/>
+                <a:ea typeface="Segoe UI"/>
+                <a:cs typeface="Segoe UI"/>
+              </a:rPr>
+              <a:t>12</a:t>
+            </a:r>
+          </a:p>
+        </p:txBody>
+      </p:sp>
+      <p:sp>
+        <p:nvSpPr>
+          <p:cNvPr id="19" name="S01-disclosure">
+            <a:extLst xmlns:a="http://schemas.openxmlformats.org/drawingml/2006/main">
+              <a:ext uri="{FF2B5EF4-FFF2-40B4-BE49-F238E27FC236}">
+                <a16:creationId xmlns:a16="http://schemas.microsoft.com/office/drawing/2014/main" id="{61E693DC-5581-48FC-9C6A-2ADE68F47411}"/>
+              </a:ext>
+            </a:extLst>
+          </p:cNvPr>
+          <p:cNvSpPr>
+            <a:spLocks xmlns:a="http://schemas.openxmlformats.org/drawingml/2006/main" noGrp="1"/>
+          </p:cNvSpPr>
+          <p:nvPr/>
+        </p:nvSpPr>
+        <p:spPr>
+          <a:xfrm xmlns:a="http://schemas.openxmlformats.org/drawingml/2006/main">
+            <a:off x="609600" y="6372225"/>
+            <a:ext cx="4572000" cy="219075"/>
+          </a:xfrm>
+          <a:prstGeom xmlns:a="http://schemas.openxmlformats.org/drawingml/2006/main" prst="rect">
+            <a:avLst/>
+          </a:prstGeom>
+          <a:noFill xmlns:a="http://schemas.openxmlformats.org/drawingml/2006/main"/>
+          <a:ln xmlns:a="http://schemas.openxmlformats.org/drawingml/2006/main" w="0">
+            <a:noFill/>
+          </a:ln>
+        </p:spPr>
+        <p:txBody>
+          <a:bodyPr xmlns:a="http://schemas.openxmlformats.org/drawingml/2006/main" wrap="none" lIns="0" tIns="0" rIns="0" bIns="0" anchor="ctr">
+            <a:noAutofit/>
+          </a:bodyPr>
+          <a:lstStyle xmlns:a="http://schemas.openxmlformats.org/drawingml/2006/main"/>
+          <a:p xmlns:a="http://schemas.openxmlformats.org/drawingml/2006/main">
+            <a:pPr>
               <a:defRPr sz="1275" b="0">
                 <a:solidFill>
-                  <a:srgbClr val="586C68"/>
+                  <a:srgbClr val="B9DDD0"/>
                 </a:solidFill>
                 <a:latin typeface="Segoe UI"/>
                 <a:ea typeface="Segoe UI"/>
@@ -2372,13 +2706,13 @@
             <a:r>
               <a:rPr sz="1275" b="0">
                 <a:solidFill>
-                  <a:srgbClr val="586C68"/>
-                </a:solidFill>
-                <a:latin typeface="Segoe UI"/>
-                <a:ea typeface="Segoe UI"/>
-                <a:cs typeface="Segoe UI"/>
-              </a:rPr>
-              <a:t>01</a:t>
+                  <a:srgbClr val="B9DDD0"/>
+                </a:solidFill>
+                <a:latin typeface="Segoe UI"/>
+                <a:ea typeface="Segoe UI"/>
+                <a:cs typeface="Segoe UI"/>
+              </a:rPr>
+              <a:t>Illustrative data</a:t>
             </a:r>
           </a:p>
         </p:txBody>
@@ -2386,7 +2720,7 @@
     </p:spTree>
     <p:extLst>
       <p:ext uri="{BB962C8B-B14F-4D97-AF65-F5344CB8AC3E}">
-        <p14:creationId xmlns:p14="http://schemas.microsoft.com/office/powerpoint/2010/main" val="612005508"/>
+        <p14:creationId xmlns:p14="http://schemas.microsoft.com/office/powerpoint/2010/main" val="313146245"/>
       </p:ext>
     </p:extLst>
   </p:cSld>
@@ -2414,10 +2748,10 @@
       </p:grpSpPr>
       <p:sp>
         <p:nvSpPr>
-          <p:cNvPr id="21" name="S02-title">
-            <a:extLst xmlns:a="http://schemas.openxmlformats.org/drawingml/2006/main">
-              <a:ext uri="{FF2B5EF4-FFF2-40B4-BE49-F238E27FC236}">
-                <a16:creationId xmlns:a16="http://schemas.microsoft.com/office/drawing/2014/main" id="{CF9B9C6A-E02D-4CA3-AEF1-A426334290F4}"/>
+          <p:cNvPr id="22" name="S02-title">
+            <a:extLst xmlns:a="http://schemas.openxmlformats.org/drawingml/2006/main">
+              <a:ext uri="{FF2B5EF4-FFF2-40B4-BE49-F238E27FC236}">
+                <a16:creationId xmlns:a16="http://schemas.microsoft.com/office/drawing/2014/main" id="{3DD8C10D-6A5B-4ACA-964E-876524F06AEA}"/>
               </a:ext>
             </a:extLst>
           </p:cNvPr>
@@ -2474,7 +2808,7 @@
           <p:cNvPr id="2" name="S02-disclosure">
             <a:extLst xmlns:a="http://schemas.openxmlformats.org/drawingml/2006/main">
               <a:ext uri="{FF2B5EF4-FFF2-40B4-BE49-F238E27FC236}">
-                <a16:creationId xmlns:a16="http://schemas.microsoft.com/office/drawing/2014/main" id="{8044D044-51B9-422C-ADC4-E290AFFF6F6B}"/>
+                <a16:creationId xmlns:a16="http://schemas.microsoft.com/office/drawing/2014/main" id="{4BE03733-CA5E-4306-8FFB-2AE6DE88CBBC}"/>
               </a:ext>
             </a:extLst>
           </p:cNvPr>
@@ -2521,7 +2855,7 @@
                 <a:ea typeface="Segoe UI"/>
                 <a:cs typeface="Segoe UI"/>
               </a:rPr>
-              <a:t>Illustrative data · not experimental results</a:t>
+              <a:t>Illustrative data</a:t>
             </a:r>
           </a:p>
         </p:txBody>
@@ -2531,7 +2865,7 @@
           <p:cNvPr id="3" name="S02-number">
             <a:extLst xmlns:a="http://schemas.openxmlformats.org/drawingml/2006/main">
               <a:ext uri="{FF2B5EF4-FFF2-40B4-BE49-F238E27FC236}">
-                <a16:creationId xmlns:a16="http://schemas.microsoft.com/office/drawing/2014/main" id="{A928C312-CE69-49D3-9B5A-B53A5B76A4E4}"/>
+                <a16:creationId xmlns:a16="http://schemas.microsoft.com/office/drawing/2014/main" id="{98DE5F46-113A-4A6A-B73E-766BB4007C4D}"/>
               </a:ext>
             </a:extLst>
           </p:cNvPr>
@@ -2585,24 +2919,24 @@
       </p:sp>
       <p:sp>
         <p:nvSpPr>
-          <p:cNvPr id="4" name="S02-marker-1">
-            <a:extLst xmlns:a="http://schemas.openxmlformats.org/drawingml/2006/main">
-              <a:ext uri="{FF2B5EF4-FFF2-40B4-BE49-F238E27FC236}">
-                <a16:creationId xmlns:a16="http://schemas.microsoft.com/office/drawing/2014/main" id="{10E9B863-F42B-43DC-84F3-52620772A672}"/>
-              </a:ext>
-            </a:extLst>
-          </p:cNvPr>
-          <p:cNvSpPr>
-            <a:spLocks xmlns:a="http://schemas.openxmlformats.org/drawingml/2006/main" noGrp="1"/>
-          </p:cNvSpPr>
-          <p:nvPr/>
-        </p:nvSpPr>
-        <p:spPr>
-          <a:xfrm xmlns:a="http://schemas.openxmlformats.org/drawingml/2006/main">
-            <a:off x="685800" y="2333625"/>
-            <a:ext cx="533400" cy="533400"/>
-          </a:xfrm>
-          <a:prstGeom xmlns:a="http://schemas.openxmlformats.org/drawingml/2006/main" prst="ellipse">
+          <p:cNvPr id="4" name="S02-method-field">
+            <a:extLst xmlns:a="http://schemas.openxmlformats.org/drawingml/2006/main">
+              <a:ext uri="{FF2B5EF4-FFF2-40B4-BE49-F238E27FC236}">
+                <a16:creationId xmlns:a16="http://schemas.microsoft.com/office/drawing/2014/main" id="{C598A134-0903-497E-BE81-94253078B982}"/>
+              </a:ext>
+            </a:extLst>
+          </p:cNvPr>
+          <p:cNvSpPr>
+            <a:spLocks xmlns:a="http://schemas.openxmlformats.org/drawingml/2006/main" noGrp="1"/>
+          </p:cNvSpPr>
+          <p:nvPr/>
+        </p:nvSpPr>
+        <p:spPr>
+          <a:xfrm xmlns:a="http://schemas.openxmlformats.org/drawingml/2006/main">
+            <a:off x="457200" y="1866900"/>
+            <a:ext cx="11277600" cy="3467100"/>
+          </a:xfrm>
+          <a:prstGeom xmlns:a="http://schemas.openxmlformats.org/drawingml/2006/main" prst="rect">
             <a:avLst/>
           </a:prstGeom>
           <a:solidFill xmlns:a="http://schemas.openxmlformats.org/drawingml/2006/main">
@@ -2612,109 +2946,25 @@
             <a:noFill/>
           </a:ln>
         </p:spPr>
-        <p:txBody>
-          <a:bodyPr xmlns:a="http://schemas.openxmlformats.org/drawingml/2006/main" lIns="0" tIns="0" rIns="0" bIns="0" anchor="ctr"/>
-          <a:lstStyle xmlns:a="http://schemas.openxmlformats.org/drawingml/2006/main"/>
-          <a:p xmlns:a="http://schemas.openxmlformats.org/drawingml/2006/main">
-            <a:pPr algn="ctr">
-              <a:defRPr sz="1650">
-                <a:solidFill>
-                  <a:srgbClr val="287D78"/>
-                </a:solidFill>
-                <a:latin typeface="Segoe UI"/>
-                <a:ea typeface="Segoe UI"/>
-                <a:cs typeface="Segoe UI"/>
-              </a:defRPr>
-            </a:pPr>
-            <a:r>
-              <a:rPr sz="1650">
-                <a:solidFill>
-                  <a:srgbClr val="287D78"/>
-                </a:solidFill>
-                <a:latin typeface="Segoe UI"/>
-                <a:ea typeface="Segoe UI"/>
-                <a:cs typeface="Segoe UI"/>
-              </a:rPr>
-              <a:t>01</a:t>
-            </a:r>
-          </a:p>
-        </p:txBody>
-      </p:sp>
-      <p:sp>
-        <p:nvSpPr>
-          <p:cNvPr id="5" name="S02-marker-2">
-            <a:extLst xmlns:a="http://schemas.openxmlformats.org/drawingml/2006/main">
-              <a:ext uri="{FF2B5EF4-FFF2-40B4-BE49-F238E27FC236}">
-                <a16:creationId xmlns:a16="http://schemas.microsoft.com/office/drawing/2014/main" id="{8AD87FB6-4FB9-439B-9564-F455B4A48EAB}"/>
-              </a:ext>
-            </a:extLst>
-          </p:cNvPr>
-          <p:cNvSpPr>
-            <a:spLocks xmlns:a="http://schemas.openxmlformats.org/drawingml/2006/main" noGrp="1"/>
-          </p:cNvSpPr>
-          <p:nvPr/>
-        </p:nvSpPr>
-        <p:spPr>
-          <a:xfrm xmlns:a="http://schemas.openxmlformats.org/drawingml/2006/main">
-            <a:off x="4648200" y="2333625"/>
-            <a:ext cx="533400" cy="533400"/>
-          </a:xfrm>
-          <a:prstGeom xmlns:a="http://schemas.openxmlformats.org/drawingml/2006/main" prst="ellipse">
-            <a:avLst/>
-          </a:prstGeom>
-          <a:solidFill xmlns:a="http://schemas.openxmlformats.org/drawingml/2006/main">
-            <a:srgbClr val="E8EDE5"/>
-          </a:solidFill>
-          <a:ln xmlns:a="http://schemas.openxmlformats.org/drawingml/2006/main" w="0">
-            <a:noFill/>
-          </a:ln>
-        </p:spPr>
-        <p:txBody>
-          <a:bodyPr xmlns:a="http://schemas.openxmlformats.org/drawingml/2006/main" lIns="0" tIns="0" rIns="0" bIns="0" anchor="ctr"/>
-          <a:lstStyle xmlns:a="http://schemas.openxmlformats.org/drawingml/2006/main"/>
-          <a:p xmlns:a="http://schemas.openxmlformats.org/drawingml/2006/main">
-            <a:pPr algn="ctr">
-              <a:defRPr sz="1650">
-                <a:solidFill>
-                  <a:srgbClr val="287D78"/>
-                </a:solidFill>
-                <a:latin typeface="Segoe UI"/>
-                <a:ea typeface="Segoe UI"/>
-                <a:cs typeface="Segoe UI"/>
-              </a:defRPr>
-            </a:pPr>
-            <a:r>
-              <a:rPr sz="1650">
-                <a:solidFill>
-                  <a:srgbClr val="287D78"/>
-                </a:solidFill>
-                <a:latin typeface="Segoe UI"/>
-                <a:ea typeface="Segoe UI"/>
-                <a:cs typeface="Segoe UI"/>
-              </a:rPr>
-              <a:t>02</a:t>
-            </a:r>
-          </a:p>
-        </p:txBody>
-      </p:sp>
-      <p:sp>
-        <p:nvSpPr>
-          <p:cNvPr id="6" name="S02-marker-3">
-            <a:extLst xmlns:a="http://schemas.openxmlformats.org/drawingml/2006/main">
-              <a:ext uri="{FF2B5EF4-FFF2-40B4-BE49-F238E27FC236}">
-                <a16:creationId xmlns:a16="http://schemas.microsoft.com/office/drawing/2014/main" id="{C001C507-8BD2-49F8-8146-F4911000A5A0}"/>
-              </a:ext>
-            </a:extLst>
-          </p:cNvPr>
-          <p:cNvSpPr>
-            <a:spLocks xmlns:a="http://schemas.openxmlformats.org/drawingml/2006/main" noGrp="1"/>
-          </p:cNvSpPr>
-          <p:nvPr/>
-        </p:nvSpPr>
-        <p:spPr>
-          <a:xfrm xmlns:a="http://schemas.openxmlformats.org/drawingml/2006/main">
-            <a:off x="8610600" y="2333625"/>
-            <a:ext cx="533400" cy="533400"/>
+      </p:sp>
+      <p:sp>
+        <p:nvSpPr>
+          <p:cNvPr id="5" name="S02-marker-1">
+            <a:extLst xmlns:a="http://schemas.openxmlformats.org/drawingml/2006/main">
+              <a:ext uri="{FF2B5EF4-FFF2-40B4-BE49-F238E27FC236}">
+                <a16:creationId xmlns:a16="http://schemas.microsoft.com/office/drawing/2014/main" id="{F492FFEC-A673-4448-A76C-1A7BC4CA4ECF}"/>
+              </a:ext>
+            </a:extLst>
+          </p:cNvPr>
+          <p:cNvSpPr>
+            <a:spLocks xmlns:a="http://schemas.openxmlformats.org/drawingml/2006/main" noGrp="1"/>
+          </p:cNvSpPr>
+          <p:nvPr/>
+        </p:nvSpPr>
+        <p:spPr>
+          <a:xfrm xmlns:a="http://schemas.openxmlformats.org/drawingml/2006/main">
+            <a:off x="685800" y="2524125"/>
+            <a:ext cx="609600" cy="609600"/>
           </a:xfrm>
           <a:prstGeom xmlns:a="http://schemas.openxmlformats.org/drawingml/2006/main" prst="ellipse">
             <a:avLst/>
@@ -2749,6 +2999,120 @@
                 <a:ea typeface="Segoe UI"/>
                 <a:cs typeface="Segoe UI"/>
               </a:rPr>
+              <a:t>01</a:t>
+            </a:r>
+          </a:p>
+        </p:txBody>
+      </p:sp>
+      <p:sp>
+        <p:nvSpPr>
+          <p:cNvPr id="6" name="S02-marker-2">
+            <a:extLst xmlns:a="http://schemas.openxmlformats.org/drawingml/2006/main">
+              <a:ext uri="{FF2B5EF4-FFF2-40B4-BE49-F238E27FC236}">
+                <a16:creationId xmlns:a16="http://schemas.microsoft.com/office/drawing/2014/main" id="{B94A5622-9213-4617-B319-0ECA3689005B}"/>
+              </a:ext>
+            </a:extLst>
+          </p:cNvPr>
+          <p:cNvSpPr>
+            <a:spLocks xmlns:a="http://schemas.openxmlformats.org/drawingml/2006/main" noGrp="1"/>
+          </p:cNvSpPr>
+          <p:nvPr/>
+        </p:nvSpPr>
+        <p:spPr>
+          <a:xfrm xmlns:a="http://schemas.openxmlformats.org/drawingml/2006/main">
+            <a:off x="4648200" y="2524125"/>
+            <a:ext cx="609600" cy="609600"/>
+          </a:xfrm>
+          <a:prstGeom xmlns:a="http://schemas.openxmlformats.org/drawingml/2006/main" prst="ellipse">
+            <a:avLst/>
+          </a:prstGeom>
+          <a:solidFill xmlns:a="http://schemas.openxmlformats.org/drawingml/2006/main">
+            <a:srgbClr val="287D78"/>
+          </a:solidFill>
+          <a:ln xmlns:a="http://schemas.openxmlformats.org/drawingml/2006/main" w="0">
+            <a:noFill/>
+          </a:ln>
+        </p:spPr>
+        <p:txBody>
+          <a:bodyPr xmlns:a="http://schemas.openxmlformats.org/drawingml/2006/main" lIns="0" tIns="0" rIns="0" bIns="0" anchor="ctr"/>
+          <a:lstStyle xmlns:a="http://schemas.openxmlformats.org/drawingml/2006/main"/>
+          <a:p xmlns:a="http://schemas.openxmlformats.org/drawingml/2006/main">
+            <a:pPr algn="ctr">
+              <a:defRPr sz="1650">
+                <a:solidFill>
+                  <a:srgbClr val="FFFFFF"/>
+                </a:solidFill>
+                <a:latin typeface="Segoe UI"/>
+                <a:ea typeface="Segoe UI"/>
+                <a:cs typeface="Segoe UI"/>
+              </a:defRPr>
+            </a:pPr>
+            <a:r>
+              <a:rPr sz="1650">
+                <a:solidFill>
+                  <a:srgbClr val="FFFFFF"/>
+                </a:solidFill>
+                <a:latin typeface="Segoe UI"/>
+                <a:ea typeface="Segoe UI"/>
+                <a:cs typeface="Segoe UI"/>
+              </a:rPr>
+              <a:t>02</a:t>
+            </a:r>
+          </a:p>
+        </p:txBody>
+      </p:sp>
+      <p:sp>
+        <p:nvSpPr>
+          <p:cNvPr id="7" name="S02-marker-3">
+            <a:extLst xmlns:a="http://schemas.openxmlformats.org/drawingml/2006/main">
+              <a:ext uri="{FF2B5EF4-FFF2-40B4-BE49-F238E27FC236}">
+                <a16:creationId xmlns:a16="http://schemas.microsoft.com/office/drawing/2014/main" id="{84E50D7F-F685-4483-AC1D-FA4238F014E0}"/>
+              </a:ext>
+            </a:extLst>
+          </p:cNvPr>
+          <p:cNvSpPr>
+            <a:spLocks xmlns:a="http://schemas.openxmlformats.org/drawingml/2006/main" noGrp="1"/>
+          </p:cNvSpPr>
+          <p:nvPr/>
+        </p:nvSpPr>
+        <p:spPr>
+          <a:xfrm xmlns:a="http://schemas.openxmlformats.org/drawingml/2006/main">
+            <a:off x="8610600" y="2524125"/>
+            <a:ext cx="609600" cy="609600"/>
+          </a:xfrm>
+          <a:prstGeom xmlns:a="http://schemas.openxmlformats.org/drawingml/2006/main" prst="ellipse">
+            <a:avLst/>
+          </a:prstGeom>
+          <a:solidFill xmlns:a="http://schemas.openxmlformats.org/drawingml/2006/main">
+            <a:srgbClr val="287D78"/>
+          </a:solidFill>
+          <a:ln xmlns:a="http://schemas.openxmlformats.org/drawingml/2006/main" w="0">
+            <a:noFill/>
+          </a:ln>
+        </p:spPr>
+        <p:txBody>
+          <a:bodyPr xmlns:a="http://schemas.openxmlformats.org/drawingml/2006/main" lIns="0" tIns="0" rIns="0" bIns="0" anchor="ctr"/>
+          <a:lstStyle xmlns:a="http://schemas.openxmlformats.org/drawingml/2006/main"/>
+          <a:p xmlns:a="http://schemas.openxmlformats.org/drawingml/2006/main">
+            <a:pPr algn="ctr">
+              <a:defRPr sz="1650">
+                <a:solidFill>
+                  <a:srgbClr val="FFFFFF"/>
+                </a:solidFill>
+                <a:latin typeface="Segoe UI"/>
+                <a:ea typeface="Segoe UI"/>
+                <a:cs typeface="Segoe UI"/>
+              </a:defRPr>
+            </a:pPr>
+            <a:r>
+              <a:rPr sz="1650">
+                <a:solidFill>
+                  <a:srgbClr val="FFFFFF"/>
+                </a:solidFill>
+                <a:latin typeface="Segoe UI"/>
+                <a:ea typeface="Segoe UI"/>
+                <a:cs typeface="Segoe UI"/>
+              </a:rPr>
               <a:t>03</a:t>
             </a:r>
           </a:p>
@@ -2756,17 +3120,17 @@
       </p:sp>
       <p:cxnSp>
         <p:nvCxnSpPr>
-          <p:cNvPr id="27" name="S02-link-2"/>
+          <p:cNvPr id="29" name="S02-link-2"/>
           <p:cNvCxnSpPr>
-            <a:stCxn xmlns:a="http://schemas.openxmlformats.org/drawingml/2006/main" id="4" idx="6"/>
-            <a:endCxn xmlns:a="http://schemas.openxmlformats.org/drawingml/2006/main" id="5" idx="2"/>
+            <a:stCxn xmlns:a="http://schemas.openxmlformats.org/drawingml/2006/main" id="5" idx="6"/>
+            <a:endCxn xmlns:a="http://schemas.openxmlformats.org/drawingml/2006/main" id="6" idx="2"/>
           </p:cNvCxnSpPr>
           <p:nvPr/>
         </p:nvCxnSpPr>
         <p:spPr>
           <a:xfrm xmlns:a="http://schemas.openxmlformats.org/drawingml/2006/main">
-            <a:off x="1219200" y="2600325"/>
-            <a:ext cx="3429000" cy="0"/>
+            <a:off x="1295400" y="2828925"/>
+            <a:ext cx="3352800" cy="0"/>
           </a:xfrm>
           <a:prstGeom xmlns:a="http://schemas.openxmlformats.org/drawingml/2006/main" prst="straightConnector1">
             <a:avLst/>
@@ -2781,17 +3145,17 @@
       </p:cxnSp>
       <p:cxnSp>
         <p:nvCxnSpPr>
-          <p:cNvPr id="28" name="S02-link-3"/>
+          <p:cNvPr id="30" name="S02-link-3"/>
           <p:cNvCxnSpPr>
-            <a:stCxn xmlns:a="http://schemas.openxmlformats.org/drawingml/2006/main" id="5" idx="6"/>
-            <a:endCxn xmlns:a="http://schemas.openxmlformats.org/drawingml/2006/main" id="6" idx="2"/>
+            <a:stCxn xmlns:a="http://schemas.openxmlformats.org/drawingml/2006/main" id="6" idx="6"/>
+            <a:endCxn xmlns:a="http://schemas.openxmlformats.org/drawingml/2006/main" id="7" idx="2"/>
           </p:cNvCxnSpPr>
           <p:nvPr/>
         </p:nvCxnSpPr>
         <p:spPr>
           <a:xfrm xmlns:a="http://schemas.openxmlformats.org/drawingml/2006/main">
-            <a:off x="5181600" y="2600325"/>
-            <a:ext cx="3429000" cy="0"/>
+            <a:off x="5257800" y="2828925"/>
+            <a:ext cx="3352800" cy="0"/>
           </a:xfrm>
           <a:prstGeom xmlns:a="http://schemas.openxmlformats.org/drawingml/2006/main" prst="straightConnector1">
             <a:avLst/>
@@ -2806,22 +3170,22 @@
       </p:cxnSp>
       <p:sp>
         <p:nvSpPr>
-          <p:cNvPr id="9" name="S02-flow-2">
-            <a:extLst xmlns:a="http://schemas.openxmlformats.org/drawingml/2006/main">
-              <a:ext uri="{FF2B5EF4-FFF2-40B4-BE49-F238E27FC236}">
-                <a16:creationId xmlns:a16="http://schemas.microsoft.com/office/drawing/2014/main" id="{3704B231-8F02-49A2-8FE9-040F3058EF8C}"/>
-              </a:ext>
-            </a:extLst>
-          </p:cNvPr>
-          <p:cNvSpPr>
-            <a:spLocks xmlns:a="http://schemas.openxmlformats.org/drawingml/2006/main" noGrp="1"/>
-          </p:cNvSpPr>
-          <p:nvPr/>
-        </p:nvSpPr>
-        <p:spPr>
-          <a:xfrm xmlns:a="http://schemas.openxmlformats.org/drawingml/2006/main">
-            <a:off x="1466850" y="2076450"/>
-            <a:ext cx="2971800" cy="352425"/>
+          <p:cNvPr id="10" name="S02-flow-2">
+            <a:extLst xmlns:a="http://schemas.openxmlformats.org/drawingml/2006/main">
+              <a:ext uri="{FF2B5EF4-FFF2-40B4-BE49-F238E27FC236}">
+                <a16:creationId xmlns:a16="http://schemas.microsoft.com/office/drawing/2014/main" id="{12458779-99FE-4426-BD29-124B119DD2C0}"/>
+              </a:ext>
+            </a:extLst>
+          </p:cNvPr>
+          <p:cNvSpPr>
+            <a:spLocks xmlns:a="http://schemas.openxmlformats.org/drawingml/2006/main" noGrp="1"/>
+          </p:cNvSpPr>
+          <p:nvPr/>
+        </p:nvSpPr>
+        <p:spPr>
+          <a:xfrm xmlns:a="http://schemas.openxmlformats.org/drawingml/2006/main">
+            <a:off x="1524000" y="2057400"/>
+            <a:ext cx="3048000" cy="381000"/>
           </a:xfrm>
           <a:prstGeom xmlns:a="http://schemas.openxmlformats.org/drawingml/2006/main" prst="rect">
             <a:avLst/>
@@ -2863,22 +3227,22 @@
       </p:sp>
       <p:sp>
         <p:nvSpPr>
-          <p:cNvPr id="10" name="S02-flow-3">
-            <a:extLst xmlns:a="http://schemas.openxmlformats.org/drawingml/2006/main">
-              <a:ext uri="{FF2B5EF4-FFF2-40B4-BE49-F238E27FC236}">
-                <a16:creationId xmlns:a16="http://schemas.microsoft.com/office/drawing/2014/main" id="{CF9684AC-1473-4EA1-B9F5-3627FA976239}"/>
-              </a:ext>
-            </a:extLst>
-          </p:cNvPr>
-          <p:cNvSpPr>
-            <a:spLocks xmlns:a="http://schemas.openxmlformats.org/drawingml/2006/main" noGrp="1"/>
-          </p:cNvSpPr>
-          <p:nvPr/>
-        </p:nvSpPr>
-        <p:spPr>
-          <a:xfrm xmlns:a="http://schemas.openxmlformats.org/drawingml/2006/main">
-            <a:off x="5429250" y="2076450"/>
-            <a:ext cx="2971800" cy="352425"/>
+          <p:cNvPr id="11" name="S02-flow-3">
+            <a:extLst xmlns:a="http://schemas.openxmlformats.org/drawingml/2006/main">
+              <a:ext uri="{FF2B5EF4-FFF2-40B4-BE49-F238E27FC236}">
+                <a16:creationId xmlns:a16="http://schemas.microsoft.com/office/drawing/2014/main" id="{8B4E7345-704C-4861-8DE4-747978B30CE0}"/>
+              </a:ext>
+            </a:extLst>
+          </p:cNvPr>
+          <p:cNvSpPr>
+            <a:spLocks xmlns:a="http://schemas.openxmlformats.org/drawingml/2006/main" noGrp="1"/>
+          </p:cNvSpPr>
+          <p:nvPr/>
+        </p:nvSpPr>
+        <p:spPr>
+          <a:xfrm xmlns:a="http://schemas.openxmlformats.org/drawingml/2006/main">
+            <a:off x="5486400" y="2057400"/>
+            <a:ext cx="3048000" cy="381000"/>
           </a:xfrm>
           <a:prstGeom xmlns:a="http://schemas.openxmlformats.org/drawingml/2006/main" prst="rect">
             <a:avLst/>
@@ -2920,21 +3284,21 @@
       </p:sp>
       <p:sp>
         <p:nvSpPr>
-          <p:cNvPr id="11" name="S02-stage-1">
-            <a:extLst xmlns:a="http://schemas.openxmlformats.org/drawingml/2006/main">
-              <a:ext uri="{FF2B5EF4-FFF2-40B4-BE49-F238E27FC236}">
-                <a16:creationId xmlns:a16="http://schemas.microsoft.com/office/drawing/2014/main" id="{574D80A0-4E2E-413A-B157-8A93FDA0FB3D}"/>
-              </a:ext>
-            </a:extLst>
-          </p:cNvPr>
-          <p:cNvSpPr>
-            <a:spLocks xmlns:a="http://schemas.openxmlformats.org/drawingml/2006/main" noGrp="1"/>
-          </p:cNvSpPr>
-          <p:nvPr/>
-        </p:nvSpPr>
-        <p:spPr>
-          <a:xfrm xmlns:a="http://schemas.openxmlformats.org/drawingml/2006/main">
-            <a:off x="685800" y="3152775"/>
+          <p:cNvPr id="12" name="S02-stage-1">
+            <a:extLst xmlns:a="http://schemas.openxmlformats.org/drawingml/2006/main">
+              <a:ext uri="{FF2B5EF4-FFF2-40B4-BE49-F238E27FC236}">
+                <a16:creationId xmlns:a16="http://schemas.microsoft.com/office/drawing/2014/main" id="{D5E0E983-CBC4-415C-B85E-976FDDAC5187}"/>
+              </a:ext>
+            </a:extLst>
+          </p:cNvPr>
+          <p:cNvSpPr>
+            <a:spLocks xmlns:a="http://schemas.openxmlformats.org/drawingml/2006/main" noGrp="1"/>
+          </p:cNvSpPr>
+          <p:nvPr/>
+        </p:nvSpPr>
+        <p:spPr>
+          <a:xfrm xmlns:a="http://schemas.openxmlformats.org/drawingml/2006/main">
+            <a:off x="685800" y="3343275"/>
             <a:ext cx="3181350" cy="457200"/>
           </a:xfrm>
           <a:prstGeom xmlns:a="http://schemas.openxmlformats.org/drawingml/2006/main" prst="rect">
@@ -2977,21 +3341,21 @@
       </p:sp>
       <p:sp>
         <p:nvSpPr>
-          <p:cNvPr id="12" name="S02-name-1">
-            <a:extLst xmlns:a="http://schemas.openxmlformats.org/drawingml/2006/main">
-              <a:ext uri="{FF2B5EF4-FFF2-40B4-BE49-F238E27FC236}">
-                <a16:creationId xmlns:a16="http://schemas.microsoft.com/office/drawing/2014/main" id="{57A2D65F-AFD6-4FE7-9345-862BCC2D3B35}"/>
-              </a:ext>
-            </a:extLst>
-          </p:cNvPr>
-          <p:cNvSpPr>
-            <a:spLocks xmlns:a="http://schemas.openxmlformats.org/drawingml/2006/main" noGrp="1"/>
-          </p:cNvSpPr>
-          <p:nvPr/>
-        </p:nvSpPr>
-        <p:spPr>
-          <a:xfrm xmlns:a="http://schemas.openxmlformats.org/drawingml/2006/main">
-            <a:off x="685800" y="3724275"/>
+          <p:cNvPr id="13" name="S02-name-1">
+            <a:extLst xmlns:a="http://schemas.openxmlformats.org/drawingml/2006/main">
+              <a:ext uri="{FF2B5EF4-FFF2-40B4-BE49-F238E27FC236}">
+                <a16:creationId xmlns:a16="http://schemas.microsoft.com/office/drawing/2014/main" id="{6A96B8EC-AC73-4009-B569-7C8C8F461D94}"/>
+              </a:ext>
+            </a:extLst>
+          </p:cNvPr>
+          <p:cNvSpPr>
+            <a:spLocks xmlns:a="http://schemas.openxmlformats.org/drawingml/2006/main" noGrp="1"/>
+          </p:cNvSpPr>
+          <p:nvPr/>
+        </p:nvSpPr>
+        <p:spPr>
+          <a:xfrm xmlns:a="http://schemas.openxmlformats.org/drawingml/2006/main">
+            <a:off x="685800" y="3876675"/>
             <a:ext cx="3095625" cy="304800"/>
           </a:xfrm>
           <a:prstGeom xmlns:a="http://schemas.openxmlformats.org/drawingml/2006/main" prst="rect">
@@ -3011,7 +3375,7 @@
             <a:pPr>
               <a:defRPr sz="1575" b="0">
                 <a:solidFill>
-                  <a:srgbClr val="287D78"/>
+                  <a:srgbClr val="246E69"/>
                 </a:solidFill>
                 <a:latin typeface="Segoe UI"/>
                 <a:ea typeface="Segoe UI"/>
@@ -3021,7 +3385,7 @@
             <a:r>
               <a:rPr sz="1575" b="0">
                 <a:solidFill>
-                  <a:srgbClr val="287D78"/>
+                  <a:srgbClr val="246E69"/>
                 </a:solidFill>
                 <a:latin typeface="Segoe UI"/>
                 <a:ea typeface="Segoe UI"/>
@@ -3034,22 +3398,22 @@
       </p:sp>
       <p:sp>
         <p:nvSpPr>
-          <p:cNvPr id="13" name="S02-detail-1">
-            <a:extLst xmlns:a="http://schemas.openxmlformats.org/drawingml/2006/main">
-              <a:ext uri="{FF2B5EF4-FFF2-40B4-BE49-F238E27FC236}">
-                <a16:creationId xmlns:a16="http://schemas.microsoft.com/office/drawing/2014/main" id="{0FA1038E-FF2B-4C5E-A76C-80AE52B2910A}"/>
-              </a:ext>
-            </a:extLst>
-          </p:cNvPr>
-          <p:cNvSpPr>
-            <a:spLocks xmlns:a="http://schemas.openxmlformats.org/drawingml/2006/main" noGrp="1"/>
-          </p:cNvSpPr>
-          <p:nvPr/>
-        </p:nvSpPr>
-        <p:spPr>
-          <a:xfrm xmlns:a="http://schemas.openxmlformats.org/drawingml/2006/main">
-            <a:off x="685800" y="4295775"/>
-            <a:ext cx="3181350" cy="771525"/>
+          <p:cNvPr id="14" name="S02-detail-1">
+            <a:extLst xmlns:a="http://schemas.openxmlformats.org/drawingml/2006/main">
+              <a:ext uri="{FF2B5EF4-FFF2-40B4-BE49-F238E27FC236}">
+                <a16:creationId xmlns:a16="http://schemas.microsoft.com/office/drawing/2014/main" id="{681D071D-F7D4-4C04-8E43-EA6E38DD69AB}"/>
+              </a:ext>
+            </a:extLst>
+          </p:cNvPr>
+          <p:cNvSpPr>
+            <a:spLocks xmlns:a="http://schemas.openxmlformats.org/drawingml/2006/main" noGrp="1"/>
+          </p:cNvSpPr>
+          <p:nvPr/>
+        </p:nvSpPr>
+        <p:spPr>
+          <a:xfrm xmlns:a="http://schemas.openxmlformats.org/drawingml/2006/main">
+            <a:off x="685800" y="4438650"/>
+            <a:ext cx="3181350" cy="704850"/>
           </a:xfrm>
           <a:prstGeom xmlns:a="http://schemas.openxmlformats.org/drawingml/2006/main" prst="rect">
             <a:avLst/>
@@ -3114,21 +3478,21 @@
       </p:sp>
       <p:sp>
         <p:nvSpPr>
-          <p:cNvPr id="14" name="S02-stage-2">
-            <a:extLst xmlns:a="http://schemas.openxmlformats.org/drawingml/2006/main">
-              <a:ext uri="{FF2B5EF4-FFF2-40B4-BE49-F238E27FC236}">
-                <a16:creationId xmlns:a16="http://schemas.microsoft.com/office/drawing/2014/main" id="{83B69A53-8C5F-4DF5-8FBC-D802B0AE4A0F}"/>
-              </a:ext>
-            </a:extLst>
-          </p:cNvPr>
-          <p:cNvSpPr>
-            <a:spLocks xmlns:a="http://schemas.openxmlformats.org/drawingml/2006/main" noGrp="1"/>
-          </p:cNvSpPr>
-          <p:nvPr/>
-        </p:nvSpPr>
-        <p:spPr>
-          <a:xfrm xmlns:a="http://schemas.openxmlformats.org/drawingml/2006/main">
-            <a:off x="4648200" y="3152775"/>
+          <p:cNvPr id="15" name="S02-stage-2">
+            <a:extLst xmlns:a="http://schemas.openxmlformats.org/drawingml/2006/main">
+              <a:ext uri="{FF2B5EF4-FFF2-40B4-BE49-F238E27FC236}">
+                <a16:creationId xmlns:a16="http://schemas.microsoft.com/office/drawing/2014/main" id="{A8DC9666-EF9F-4E92-BCF7-16FFF72ABD37}"/>
+              </a:ext>
+            </a:extLst>
+          </p:cNvPr>
+          <p:cNvSpPr>
+            <a:spLocks xmlns:a="http://schemas.openxmlformats.org/drawingml/2006/main" noGrp="1"/>
+          </p:cNvSpPr>
+          <p:nvPr/>
+        </p:nvSpPr>
+        <p:spPr>
+          <a:xfrm xmlns:a="http://schemas.openxmlformats.org/drawingml/2006/main">
+            <a:off x="4648200" y="3343275"/>
             <a:ext cx="3181350" cy="457200"/>
           </a:xfrm>
           <a:prstGeom xmlns:a="http://schemas.openxmlformats.org/drawingml/2006/main" prst="rect">
@@ -3171,21 +3535,21 @@
       </p:sp>
       <p:sp>
         <p:nvSpPr>
-          <p:cNvPr id="15" name="S02-name-2">
-            <a:extLst xmlns:a="http://schemas.openxmlformats.org/drawingml/2006/main">
-              <a:ext uri="{FF2B5EF4-FFF2-40B4-BE49-F238E27FC236}">
-                <a16:creationId xmlns:a16="http://schemas.microsoft.com/office/drawing/2014/main" id="{633B045A-B0D5-418B-B662-03C4B84871B7}"/>
-              </a:ext>
-            </a:extLst>
-          </p:cNvPr>
-          <p:cNvSpPr>
-            <a:spLocks xmlns:a="http://schemas.openxmlformats.org/drawingml/2006/main" noGrp="1"/>
-          </p:cNvSpPr>
-          <p:nvPr/>
-        </p:nvSpPr>
-        <p:spPr>
-          <a:xfrm xmlns:a="http://schemas.openxmlformats.org/drawingml/2006/main">
-            <a:off x="4648200" y="3724275"/>
+          <p:cNvPr id="16" name="S02-name-2">
+            <a:extLst xmlns:a="http://schemas.openxmlformats.org/drawingml/2006/main">
+              <a:ext uri="{FF2B5EF4-FFF2-40B4-BE49-F238E27FC236}">
+                <a16:creationId xmlns:a16="http://schemas.microsoft.com/office/drawing/2014/main" id="{EA89E638-CC04-4898-B7F7-1402242026FE}"/>
+              </a:ext>
+            </a:extLst>
+          </p:cNvPr>
+          <p:cNvSpPr>
+            <a:spLocks xmlns:a="http://schemas.openxmlformats.org/drawingml/2006/main" noGrp="1"/>
+          </p:cNvSpPr>
+          <p:nvPr/>
+        </p:nvSpPr>
+        <p:spPr>
+          <a:xfrm xmlns:a="http://schemas.openxmlformats.org/drawingml/2006/main">
+            <a:off x="4648200" y="3876675"/>
             <a:ext cx="3095625" cy="304800"/>
           </a:xfrm>
           <a:prstGeom xmlns:a="http://schemas.openxmlformats.org/drawingml/2006/main" prst="rect">
@@ -3205,7 +3569,7 @@
             <a:pPr>
               <a:defRPr sz="1575" b="0">
                 <a:solidFill>
-                  <a:srgbClr val="287D78"/>
+                  <a:srgbClr val="246E69"/>
                 </a:solidFill>
                 <a:latin typeface="Segoe UI"/>
                 <a:ea typeface="Segoe UI"/>
@@ -3215,7 +3579,7 @@
             <a:r>
               <a:rPr sz="1575" b="0">
                 <a:solidFill>
-                  <a:srgbClr val="287D78"/>
+                  <a:srgbClr val="246E69"/>
                 </a:solidFill>
                 <a:latin typeface="Segoe UI"/>
                 <a:ea typeface="Segoe UI"/>
@@ -3228,22 +3592,22 @@
       </p:sp>
       <p:sp>
         <p:nvSpPr>
-          <p:cNvPr id="16" name="S02-detail-2">
-            <a:extLst xmlns:a="http://schemas.openxmlformats.org/drawingml/2006/main">
-              <a:ext uri="{FF2B5EF4-FFF2-40B4-BE49-F238E27FC236}">
-                <a16:creationId xmlns:a16="http://schemas.microsoft.com/office/drawing/2014/main" id="{45E8AC73-47E3-48FE-B12E-A99216CA0A79}"/>
-              </a:ext>
-            </a:extLst>
-          </p:cNvPr>
-          <p:cNvSpPr>
-            <a:spLocks xmlns:a="http://schemas.openxmlformats.org/drawingml/2006/main" noGrp="1"/>
-          </p:cNvSpPr>
-          <p:nvPr/>
-        </p:nvSpPr>
-        <p:spPr>
-          <a:xfrm xmlns:a="http://schemas.openxmlformats.org/drawingml/2006/main">
-            <a:off x="4648200" y="4295775"/>
-            <a:ext cx="3181350" cy="771525"/>
+          <p:cNvPr id="17" name="S02-detail-2">
+            <a:extLst xmlns:a="http://schemas.openxmlformats.org/drawingml/2006/main">
+              <a:ext uri="{FF2B5EF4-FFF2-40B4-BE49-F238E27FC236}">
+                <a16:creationId xmlns:a16="http://schemas.microsoft.com/office/drawing/2014/main" id="{809E60DE-62D3-4BB8-BEA7-4CF053BE6809}"/>
+              </a:ext>
+            </a:extLst>
+          </p:cNvPr>
+          <p:cNvSpPr>
+            <a:spLocks xmlns:a="http://schemas.openxmlformats.org/drawingml/2006/main" noGrp="1"/>
+          </p:cNvSpPr>
+          <p:nvPr/>
+        </p:nvSpPr>
+        <p:spPr>
+          <a:xfrm xmlns:a="http://schemas.openxmlformats.org/drawingml/2006/main">
+            <a:off x="4648200" y="4438650"/>
+            <a:ext cx="3181350" cy="704850"/>
           </a:xfrm>
           <a:prstGeom xmlns:a="http://schemas.openxmlformats.org/drawingml/2006/main" prst="rect">
             <a:avLst/>
@@ -3308,21 +3672,21 @@
       </p:sp>
       <p:sp>
         <p:nvSpPr>
-          <p:cNvPr id="17" name="S02-stage-3">
-            <a:extLst xmlns:a="http://schemas.openxmlformats.org/drawingml/2006/main">
-              <a:ext uri="{FF2B5EF4-FFF2-40B4-BE49-F238E27FC236}">
-                <a16:creationId xmlns:a16="http://schemas.microsoft.com/office/drawing/2014/main" id="{85311D4C-D613-4589-BE43-CB1DF321C346}"/>
-              </a:ext>
-            </a:extLst>
-          </p:cNvPr>
-          <p:cNvSpPr>
-            <a:spLocks xmlns:a="http://schemas.openxmlformats.org/drawingml/2006/main" noGrp="1"/>
-          </p:cNvSpPr>
-          <p:nvPr/>
-        </p:nvSpPr>
-        <p:spPr>
-          <a:xfrm xmlns:a="http://schemas.openxmlformats.org/drawingml/2006/main">
-            <a:off x="8610600" y="3152775"/>
+          <p:cNvPr id="18" name="S02-stage-3">
+            <a:extLst xmlns:a="http://schemas.openxmlformats.org/drawingml/2006/main">
+              <a:ext uri="{FF2B5EF4-FFF2-40B4-BE49-F238E27FC236}">
+                <a16:creationId xmlns:a16="http://schemas.microsoft.com/office/drawing/2014/main" id="{E0471A0B-1A8A-4FC2-8A0A-F7045C700463}"/>
+              </a:ext>
+            </a:extLst>
+          </p:cNvPr>
+          <p:cNvSpPr>
+            <a:spLocks xmlns:a="http://schemas.openxmlformats.org/drawingml/2006/main" noGrp="1"/>
+          </p:cNvSpPr>
+          <p:nvPr/>
+        </p:nvSpPr>
+        <p:spPr>
+          <a:xfrm xmlns:a="http://schemas.openxmlformats.org/drawingml/2006/main">
+            <a:off x="8610600" y="3343275"/>
             <a:ext cx="3181350" cy="457200"/>
           </a:xfrm>
           <a:prstGeom xmlns:a="http://schemas.openxmlformats.org/drawingml/2006/main" prst="rect">
@@ -3365,21 +3729,21 @@
       </p:sp>
       <p:sp>
         <p:nvSpPr>
-          <p:cNvPr id="18" name="S02-name-3">
-            <a:extLst xmlns:a="http://schemas.openxmlformats.org/drawingml/2006/main">
-              <a:ext uri="{FF2B5EF4-FFF2-40B4-BE49-F238E27FC236}">
-                <a16:creationId xmlns:a16="http://schemas.microsoft.com/office/drawing/2014/main" id="{93C3164F-A989-44D9-8207-95A53AED8BB2}"/>
-              </a:ext>
-            </a:extLst>
-          </p:cNvPr>
-          <p:cNvSpPr>
-            <a:spLocks xmlns:a="http://schemas.openxmlformats.org/drawingml/2006/main" noGrp="1"/>
-          </p:cNvSpPr>
-          <p:nvPr/>
-        </p:nvSpPr>
-        <p:spPr>
-          <a:xfrm xmlns:a="http://schemas.openxmlformats.org/drawingml/2006/main">
-            <a:off x="8610600" y="3724275"/>
+          <p:cNvPr id="19" name="S02-name-3">
+            <a:extLst xmlns:a="http://schemas.openxmlformats.org/drawingml/2006/main">
+              <a:ext uri="{FF2B5EF4-FFF2-40B4-BE49-F238E27FC236}">
+                <a16:creationId xmlns:a16="http://schemas.microsoft.com/office/drawing/2014/main" id="{BB42FAD0-8B31-4C79-9D1A-39D8101F07AA}"/>
+              </a:ext>
+            </a:extLst>
+          </p:cNvPr>
+          <p:cNvSpPr>
+            <a:spLocks xmlns:a="http://schemas.openxmlformats.org/drawingml/2006/main" noGrp="1"/>
+          </p:cNvSpPr>
+          <p:nvPr/>
+        </p:nvSpPr>
+        <p:spPr>
+          <a:xfrm xmlns:a="http://schemas.openxmlformats.org/drawingml/2006/main">
+            <a:off x="8610600" y="3876675"/>
             <a:ext cx="3095625" cy="304800"/>
           </a:xfrm>
           <a:prstGeom xmlns:a="http://schemas.openxmlformats.org/drawingml/2006/main" prst="rect">
@@ -3399,7 +3763,7 @@
             <a:pPr>
               <a:defRPr sz="1575" b="0">
                 <a:solidFill>
-                  <a:srgbClr val="287D78"/>
+                  <a:srgbClr val="246E69"/>
                 </a:solidFill>
                 <a:latin typeface="Segoe UI"/>
                 <a:ea typeface="Segoe UI"/>
@@ -3409,7 +3773,7 @@
             <a:r>
               <a:rPr sz="1575" b="0">
                 <a:solidFill>
-                  <a:srgbClr val="287D78"/>
+                  <a:srgbClr val="246E69"/>
                 </a:solidFill>
                 <a:latin typeface="Segoe UI"/>
                 <a:ea typeface="Segoe UI"/>
@@ -3422,22 +3786,22 @@
       </p:sp>
       <p:sp>
         <p:nvSpPr>
-          <p:cNvPr id="19" name="S02-detail-3">
-            <a:extLst xmlns:a="http://schemas.openxmlformats.org/drawingml/2006/main">
-              <a:ext uri="{FF2B5EF4-FFF2-40B4-BE49-F238E27FC236}">
-                <a16:creationId xmlns:a16="http://schemas.microsoft.com/office/drawing/2014/main" id="{6B8938CF-FBFD-433E-AE3D-984C8CFA21CB}"/>
-              </a:ext>
-            </a:extLst>
-          </p:cNvPr>
-          <p:cNvSpPr>
-            <a:spLocks xmlns:a="http://schemas.openxmlformats.org/drawingml/2006/main" noGrp="1"/>
-          </p:cNvSpPr>
-          <p:nvPr/>
-        </p:nvSpPr>
-        <p:spPr>
-          <a:xfrm xmlns:a="http://schemas.openxmlformats.org/drawingml/2006/main">
-            <a:off x="8610600" y="4295775"/>
-            <a:ext cx="3181350" cy="771525"/>
+          <p:cNvPr id="20" name="S02-detail-3">
+            <a:extLst xmlns:a="http://schemas.openxmlformats.org/drawingml/2006/main">
+              <a:ext uri="{FF2B5EF4-FFF2-40B4-BE49-F238E27FC236}">
+                <a16:creationId xmlns:a16="http://schemas.microsoft.com/office/drawing/2014/main" id="{6113C402-54DF-4065-A864-EA53B95919E7}"/>
+              </a:ext>
+            </a:extLst>
+          </p:cNvPr>
+          <p:cNvSpPr>
+            <a:spLocks xmlns:a="http://schemas.openxmlformats.org/drawingml/2006/main" noGrp="1"/>
+          </p:cNvSpPr>
+          <p:nvPr/>
+        </p:nvSpPr>
+        <p:spPr>
+          <a:xfrm xmlns:a="http://schemas.openxmlformats.org/drawingml/2006/main">
+            <a:off x="8610600" y="4438650"/>
+            <a:ext cx="3181350" cy="704850"/>
           </a:xfrm>
           <a:prstGeom xmlns:a="http://schemas.openxmlformats.org/drawingml/2006/main" prst="rect">
             <a:avLst/>
@@ -3502,10 +3866,10 @@
       </p:sp>
       <p:sp>
         <p:nvSpPr>
-          <p:cNvPr id="20" name="S02-caveat">
-            <a:extLst xmlns:a="http://schemas.openxmlformats.org/drawingml/2006/main">
-              <a:ext uri="{FF2B5EF4-FFF2-40B4-BE49-F238E27FC236}">
-                <a16:creationId xmlns:a16="http://schemas.microsoft.com/office/drawing/2014/main" id="{51464756-4A43-4402-BF13-D16988103052}"/>
+          <p:cNvPr id="21" name="S02-caveat">
+            <a:extLst xmlns:a="http://schemas.openxmlformats.org/drawingml/2006/main">
+              <a:ext uri="{FF2B5EF4-FFF2-40B4-BE49-F238E27FC236}">
+                <a16:creationId xmlns:a16="http://schemas.microsoft.com/office/drawing/2014/main" id="{4DA499D8-7F71-4A53-8ACE-3FF710E76AAE}"/>
               </a:ext>
             </a:extLst>
           </p:cNvPr>
@@ -3552,7 +3916,7 @@
                 <a:ea typeface="Segoe UI"/>
                 <a:cs typeface="Segoe UI"/>
               </a:rPr>
-              <a:t>Conceptual workflow. Architecture and quantization scope are unspecified.</a:t>
+              <a:t>Conceptual overview; implementation details vary.</a:t>
             </a:r>
           </a:p>
         </p:txBody>
@@ -3560,7 +3924,7 @@
     </p:spTree>
     <p:extLst>
       <p:ext uri="{BB962C8B-B14F-4D97-AF65-F5344CB8AC3E}">
-        <p14:creationId xmlns:p14="http://schemas.microsoft.com/office/powerpoint/2010/main" val="275575726"/>
+        <p14:creationId xmlns:p14="http://schemas.microsoft.com/office/powerpoint/2010/main" val="625778496"/>
       </p:ext>
     </p:extLst>
   </p:cSld>
@@ -3588,10 +3952,10 @@
       </p:grpSpPr>
       <p:sp>
         <p:nvSpPr>
-          <p:cNvPr id="8" name="S03-title">
-            <a:extLst xmlns:a="http://schemas.openxmlformats.org/drawingml/2006/main">
-              <a:ext uri="{FF2B5EF4-FFF2-40B4-BE49-F238E27FC236}">
-                <a16:creationId xmlns:a16="http://schemas.microsoft.com/office/drawing/2014/main" id="{CA0C6520-1051-4AA0-8098-A9EBEC2A03E8}"/>
+          <p:cNvPr id="7" name="S03-title">
+            <a:extLst xmlns:a="http://schemas.openxmlformats.org/drawingml/2006/main">
+              <a:ext uri="{FF2B5EF4-FFF2-40B4-BE49-F238E27FC236}">
+                <a16:creationId xmlns:a16="http://schemas.microsoft.com/office/drawing/2014/main" id="{CFBCA220-0E6C-4C93-9C1B-7779A7157872}"/>
               </a:ext>
             </a:extLst>
           </p:cNvPr>
@@ -3648,7 +4012,7 @@
           <p:cNvPr id="2" name="S03-disclosure">
             <a:extLst xmlns:a="http://schemas.openxmlformats.org/drawingml/2006/main">
               <a:ext uri="{FF2B5EF4-FFF2-40B4-BE49-F238E27FC236}">
-                <a16:creationId xmlns:a16="http://schemas.microsoft.com/office/drawing/2014/main" id="{409FF452-2A3F-4AFF-9C01-23A352274B0A}"/>
+                <a16:creationId xmlns:a16="http://schemas.microsoft.com/office/drawing/2014/main" id="{D85B70CD-81C6-4447-9008-248C23ECB855}"/>
               </a:ext>
             </a:extLst>
           </p:cNvPr>
@@ -3695,7 +4059,7 @@
                 <a:ea typeface="Segoe UI"/>
                 <a:cs typeface="Segoe UI"/>
               </a:rPr>
-              <a:t>Illustrative data · not experimental results</a:t>
+              <a:t>Illustrative data</a:t>
             </a:r>
           </a:p>
         </p:txBody>
@@ -3705,7 +4069,7 @@
           <p:cNvPr id="3" name="S03-number">
             <a:extLst xmlns:a="http://schemas.openxmlformats.org/drawingml/2006/main">
               <a:ext uri="{FF2B5EF4-FFF2-40B4-BE49-F238E27FC236}">
-                <a16:creationId xmlns:a16="http://schemas.microsoft.com/office/drawing/2014/main" id="{F8B9AE3B-FFAC-470A-A925-2F6D2168D6BC}"/>
+                <a16:creationId xmlns:a16="http://schemas.microsoft.com/office/drawing/2014/main" id="{388F65F0-FA2D-4B75-8512-2E79BD999864}"/>
               </a:ext>
             </a:extLst>
           </p:cNvPr>
@@ -3762,7 +4126,7 @@
           <p:cNvPr id="4" name="S03-direction">
             <a:extLst xmlns:a="http://schemas.openxmlformats.org/drawingml/2006/main">
               <a:ext uri="{FF2B5EF4-FFF2-40B4-BE49-F238E27FC236}">
-                <a16:creationId xmlns:a16="http://schemas.microsoft.com/office/drawing/2014/main" id="{28228544-2890-45EB-B8D8-226835515F16}"/>
+                <a16:creationId xmlns:a16="http://schemas.microsoft.com/office/drawing/2014/main" id="{6226551B-CCC9-4228-8EE2-96ED49F67B75}"/>
               </a:ext>
             </a:extLst>
           </p:cNvPr>
@@ -3816,13 +4180,13 @@
       </p:sp>
       <p:graphicFrame>
         <p:nvGraphicFramePr>
-          <p:cNvPr id="12" name=""/>
+          <p:cNvPr id="11" name=""/>
           <p:cNvGraphicFramePr/>
           <p:nvPr/>
         </p:nvGraphicFramePr>
         <p:xfrm>
-          <a:off xmlns:a="http://schemas.openxmlformats.org/drawingml/2006/main" x="609600" y="2314575"/>
-          <a:ext xmlns:a="http://schemas.openxmlformats.org/drawingml/2006/main" cx="10972800" cy="2857500"/>
+          <a:off xmlns:a="http://schemas.openxmlformats.org/drawingml/2006/main" x="609600" y="2343150"/>
+          <a:ext xmlns:a="http://schemas.openxmlformats.org/drawingml/2006/main" cx="10972800" cy="2933700"/>
         </p:xfrm>
         <a:graphic xmlns:a="http://schemas.openxmlformats.org/drawingml/2006/main">
           <a:graphicData uri="http://schemas.openxmlformats.org/drawingml/2006/table">
@@ -3834,7 +4198,7 @@
                 <a:gridCol w="2209800"/>
                 <a:gridCol w="2667000"/>
               </a:tblGrid>
-              <a:tr h="714375">
+              <a:tr h="733425">
                 <a:tc>
                   <a:txBody>
                     <a:bodyPr/>
@@ -3844,7 +4208,7 @@
                       <a:r>
                         <a:rPr sz="1800" b="0">
                           <a:solidFill>
-                            <a:srgbClr val="586C68"/>
+                            <a:srgbClr val="FFFFFF"/>
                           </a:solidFill>
                           <a:latin typeface="Segoe UI"/>
                           <a:ea typeface="Segoe UI"/>
@@ -3874,7 +4238,7 @@
                       <a:noFill/>
                     </a:lnBlToTr>
                     <a:solidFill>
-                      <a:srgbClr val="F6F4EE"/>
+                      <a:srgbClr val="1E302F"/>
                     </a:solidFill>
                   </a:tcPr>
                 </a:tc>
@@ -3887,7 +4251,7 @@
                       <a:r>
                         <a:rPr sz="1800" b="0">
                           <a:solidFill>
-                            <a:srgbClr val="586C68"/>
+                            <a:srgbClr val="FFFFFF"/>
                           </a:solidFill>
                           <a:latin typeface="Segoe UI"/>
                           <a:ea typeface="Segoe UI"/>
@@ -3917,7 +4281,7 @@
                       <a:noFill/>
                     </a:lnBlToTr>
                     <a:solidFill>
-                      <a:srgbClr val="F6F4EE"/>
+                      <a:srgbClr val="1E302F"/>
                     </a:solidFill>
                   </a:tcPr>
                 </a:tc>
@@ -3930,7 +4294,7 @@
                       <a:r>
                         <a:rPr sz="1800" b="0">
                           <a:solidFill>
-                            <a:srgbClr val="586C68"/>
+                            <a:srgbClr val="FFFFFF"/>
                           </a:solidFill>
                           <a:latin typeface="Segoe UI"/>
                           <a:ea typeface="Segoe UI"/>
@@ -3960,7 +4324,7 @@
                       <a:noFill/>
                     </a:lnBlToTr>
                     <a:solidFill>
-                      <a:srgbClr val="F6F4EE"/>
+                      <a:srgbClr val="1E302F"/>
                     </a:solidFill>
                   </a:tcPr>
                 </a:tc>
@@ -3973,7 +4337,7 @@
                       <a:r>
                         <a:rPr sz="1800" b="0">
                           <a:solidFill>
-                            <a:srgbClr val="586C68"/>
+                            <a:srgbClr val="FFFFFF"/>
                           </a:solidFill>
                           <a:latin typeface="Segoe UI"/>
                           <a:ea typeface="Segoe UI"/>
@@ -4003,12 +4367,12 @@
                       <a:noFill/>
                     </a:lnBlToTr>
                     <a:solidFill>
-                      <a:srgbClr val="F6F4EE"/>
+                      <a:srgbClr val="1E302F"/>
                     </a:solidFill>
                   </a:tcPr>
                 </a:tc>
               </a:tr>
-              <a:tr h="714375">
+              <a:tr h="733425">
                 <a:tc>
                   <a:txBody>
                     <a:bodyPr/>
@@ -4048,7 +4412,7 @@
                       <a:noFill/>
                     </a:lnBlToTr>
                     <a:solidFill>
-                      <a:srgbClr val="F6F4EE"/>
+                      <a:srgbClr val="E8EDE5"/>
                     </a:solidFill>
                   </a:tcPr>
                 </a:tc>
@@ -4091,7 +4455,7 @@
                       <a:noFill/>
                     </a:lnBlToTr>
                     <a:solidFill>
-                      <a:srgbClr val="F6F4EE"/>
+                      <a:srgbClr val="E8EDE5"/>
                     </a:solidFill>
                   </a:tcPr>
                 </a:tc>
@@ -4134,7 +4498,7 @@
                       <a:noFill/>
                     </a:lnBlToTr>
                     <a:solidFill>
-                      <a:srgbClr val="F6F4EE"/>
+                      <a:srgbClr val="E8EDE5"/>
                     </a:solidFill>
                   </a:tcPr>
                 </a:tc>
@@ -4177,12 +4541,12 @@
                       <a:noFill/>
                     </a:lnBlToTr>
                     <a:solidFill>
-                      <a:srgbClr val="F6F4EE"/>
+                      <a:srgbClr val="E8EDE5"/>
                     </a:solidFill>
                   </a:tcPr>
                 </a:tc>
               </a:tr>
-              <a:tr h="714375">
+              <a:tr h="733425">
                 <a:tc>
                   <a:txBody>
                     <a:bodyPr/>
@@ -4356,7 +4720,7 @@
                   </a:tcPr>
                 </a:tc>
               </a:tr>
-              <a:tr h="714375">
+              <a:tr h="733425">
                 <a:tc>
                   <a:txBody>
                     <a:bodyPr/>
@@ -4396,7 +4760,7 @@
                       <a:noFill/>
                     </a:lnBlToTr>
                     <a:solidFill>
-                      <a:srgbClr val="F6F4EE"/>
+                      <a:srgbClr val="E8EDE5"/>
                     </a:solidFill>
                   </a:tcPr>
                 </a:tc>
@@ -4439,7 +4803,7 @@
                       <a:noFill/>
                     </a:lnBlToTr>
                     <a:solidFill>
-                      <a:srgbClr val="F6F4EE"/>
+                      <a:srgbClr val="E8EDE5"/>
                     </a:solidFill>
                   </a:tcPr>
                 </a:tc>
@@ -4482,7 +4846,7 @@
                       <a:noFill/>
                     </a:lnBlToTr>
                     <a:solidFill>
-                      <a:srgbClr val="F6F4EE"/>
+                      <a:srgbClr val="E8EDE5"/>
                     </a:solidFill>
                   </a:tcPr>
                 </a:tc>
@@ -4525,7 +4889,7 @@
                       <a:noFill/>
                     </a:lnBlToTr>
                     <a:solidFill>
-                      <a:srgbClr val="F6F4EE"/>
+                      <a:srgbClr val="E8EDE5"/>
                     </a:solidFill>
                   </a:tcPr>
                 </a:tc>
@@ -4536,39 +4900,10 @@
       </p:graphicFrame>
       <p:sp>
         <p:nvSpPr>
-          <p:cNvPr id="6" name="S03-header-rule">
-            <a:extLst xmlns:a="http://schemas.openxmlformats.org/drawingml/2006/main">
-              <a:ext uri="{FF2B5EF4-FFF2-40B4-BE49-F238E27FC236}">
-                <a16:creationId xmlns:a16="http://schemas.microsoft.com/office/drawing/2014/main" id="{2A2AAF51-46A5-463E-A7F5-84E1C43F04C6}"/>
-              </a:ext>
-            </a:extLst>
-          </p:cNvPr>
-          <p:cNvSpPr>
-            <a:spLocks xmlns:a="http://schemas.openxmlformats.org/drawingml/2006/main" noGrp="1"/>
-          </p:cNvSpPr>
-          <p:nvPr/>
-        </p:nvSpPr>
-        <p:spPr>
-          <a:xfrm xmlns:a="http://schemas.openxmlformats.org/drawingml/2006/main">
-            <a:off x="685800" y="3028950"/>
-            <a:ext cx="10820400" cy="0"/>
-          </a:xfrm>
-          <a:prstGeom xmlns:a="http://schemas.openxmlformats.org/drawingml/2006/main" prst="line">
-            <a:avLst/>
-          </a:prstGeom>
-          <a:ln xmlns:a="http://schemas.openxmlformats.org/drawingml/2006/main" w="9525">
-            <a:solidFill>
-              <a:srgbClr val="CFD8D1"/>
-            </a:solidFill>
-          </a:ln>
-        </p:spPr>
-      </p:sp>
-      <p:sp>
-        <p:nvSpPr>
-          <p:cNvPr id="7" name="S03-limit">
-            <a:extLst xmlns:a="http://schemas.openxmlformats.org/drawingml/2006/main">
-              <a:ext uri="{FF2B5EF4-FFF2-40B4-BE49-F238E27FC236}">
-                <a16:creationId xmlns:a16="http://schemas.microsoft.com/office/drawing/2014/main" id="{C76E3D28-D525-484C-A6B4-EAEAC9D4C8F1}"/>
+          <p:cNvPr id="6" name="S03-limit">
+            <a:extLst xmlns:a="http://schemas.openxmlformats.org/drawingml/2006/main">
+              <a:ext uri="{FF2B5EF4-FFF2-40B4-BE49-F238E27FC236}">
+                <a16:creationId xmlns:a16="http://schemas.microsoft.com/office/drawing/2014/main" id="{54765F4F-A0A9-4517-B1B8-EC35DADE98E3}"/>
               </a:ext>
             </a:extLst>
           </p:cNvPr>
@@ -4615,7 +4950,7 @@
                 <a:ea typeface="Segoe UI"/>
                 <a:cs typeface="Segoe UI"/>
               </a:rPr>
-              <a:t>Same device and data assumed. Sample count, variance and dataset are unspecified.</a:t>
+              <a:t>Illustrative comparison on assumed matching device and data; variability is not evaluated.</a:t>
             </a:r>
           </a:p>
         </p:txBody>
@@ -4623,7 +4958,7 @@
     </p:spTree>
     <p:extLst>
       <p:ext uri="{BB962C8B-B14F-4D97-AF65-F5344CB8AC3E}">
-        <p14:creationId xmlns:p14="http://schemas.microsoft.com/office/powerpoint/2010/main" val="988851997"/>
+        <p14:creationId xmlns:p14="http://schemas.microsoft.com/office/powerpoint/2010/main" val="966320156"/>
       </p:ext>
     </p:extLst>
   </p:cSld>
@@ -4651,10 +4986,10 @@
       </p:grpSpPr>
       <p:sp>
         <p:nvSpPr>
-          <p:cNvPr id="15" name="S04-title">
-            <a:extLst xmlns:a="http://schemas.openxmlformats.org/drawingml/2006/main">
-              <a:ext uri="{FF2B5EF4-FFF2-40B4-BE49-F238E27FC236}">
-                <a16:creationId xmlns:a16="http://schemas.microsoft.com/office/drawing/2014/main" id="{F9D51027-223B-41BC-AC17-197B3DBF7543}"/>
+          <p:cNvPr id="17" name="S04-title">
+            <a:extLst xmlns:a="http://schemas.openxmlformats.org/drawingml/2006/main">
+              <a:ext uri="{FF2B5EF4-FFF2-40B4-BE49-F238E27FC236}">
+                <a16:creationId xmlns:a16="http://schemas.microsoft.com/office/drawing/2014/main" id="{724713AD-E8AF-42B6-87A4-A152929A65B7}"/>
               </a:ext>
             </a:extLst>
           </p:cNvPr>
@@ -4711,7 +5046,7 @@
           <p:cNvPr id="2" name="S04-disclosure">
             <a:extLst xmlns:a="http://schemas.openxmlformats.org/drawingml/2006/main">
               <a:ext uri="{FF2B5EF4-FFF2-40B4-BE49-F238E27FC236}">
-                <a16:creationId xmlns:a16="http://schemas.microsoft.com/office/drawing/2014/main" id="{1EB260BA-4F27-4BA6-8D38-37B44F32EEC2}"/>
+                <a16:creationId xmlns:a16="http://schemas.microsoft.com/office/drawing/2014/main" id="{29602194-F4A2-4C9B-9097-6D5CD46C7C8C}"/>
               </a:ext>
             </a:extLst>
           </p:cNvPr>
@@ -4758,7 +5093,7 @@
                 <a:ea typeface="Segoe UI"/>
                 <a:cs typeface="Segoe UI"/>
               </a:rPr>
-              <a:t>Illustrative data · not experimental results</a:t>
+              <a:t>Illustrative data</a:t>
             </a:r>
           </a:p>
         </p:txBody>
@@ -4768,7 +5103,7 @@
           <p:cNvPr id="3" name="S04-number">
             <a:extLst xmlns:a="http://schemas.openxmlformats.org/drawingml/2006/main">
               <a:ext uri="{FF2B5EF4-FFF2-40B4-BE49-F238E27FC236}">
-                <a16:creationId xmlns:a16="http://schemas.microsoft.com/office/drawing/2014/main" id="{5DA3B840-52E2-4CFB-9E71-57EF81AC896D}"/>
+                <a16:creationId xmlns:a16="http://schemas.microsoft.com/office/drawing/2014/main" id="{54446B09-89A2-4DC2-99B4-C89A9F025FBF}"/>
               </a:ext>
             </a:extLst>
           </p:cNvPr>
@@ -4822,10 +5157,40 @@
       </p:sp>
       <p:sp>
         <p:nvSpPr>
-          <p:cNvPr id="4" name="S04-chart-unit">
-            <a:extLst xmlns:a="http://schemas.openxmlformats.org/drawingml/2006/main">
-              <a:ext uri="{FF2B5EF4-FFF2-40B4-BE49-F238E27FC236}">
-                <a16:creationId xmlns:a16="http://schemas.microsoft.com/office/drawing/2014/main" id="{7DFB2E3B-7E59-49D9-9E9F-766AAD1A3147}"/>
+          <p:cNvPr id="4" name="S04-interpretation-field">
+            <a:extLst xmlns:a="http://schemas.openxmlformats.org/drawingml/2006/main">
+              <a:ext uri="{FF2B5EF4-FFF2-40B4-BE49-F238E27FC236}">
+                <a16:creationId xmlns:a16="http://schemas.microsoft.com/office/drawing/2014/main" id="{CBE6E3D1-0467-4903-955B-ED89D99EF9C9}"/>
+              </a:ext>
+            </a:extLst>
+          </p:cNvPr>
+          <p:cNvSpPr>
+            <a:spLocks xmlns:a="http://schemas.openxmlformats.org/drawingml/2006/main" noGrp="1"/>
+          </p:cNvSpPr>
+          <p:nvPr/>
+        </p:nvSpPr>
+        <p:spPr>
+          <a:xfrm xmlns:a="http://schemas.openxmlformats.org/drawingml/2006/main">
+            <a:off x="8143875" y="1666875"/>
+            <a:ext cx="3590925" cy="4191000"/>
+          </a:xfrm>
+          <a:prstGeom xmlns:a="http://schemas.openxmlformats.org/drawingml/2006/main" prst="rect">
+            <a:avLst/>
+          </a:prstGeom>
+          <a:solidFill xmlns:a="http://schemas.openxmlformats.org/drawingml/2006/main">
+            <a:srgbClr val="1E302F"/>
+          </a:solidFill>
+          <a:ln xmlns:a="http://schemas.openxmlformats.org/drawingml/2006/main" w="0">
+            <a:noFill/>
+          </a:ln>
+        </p:spPr>
+      </p:sp>
+      <p:sp>
+        <p:nvSpPr>
+          <p:cNvPr id="5" name="S04-chart-unit">
+            <a:extLst xmlns:a="http://schemas.openxmlformats.org/drawingml/2006/main">
+              <a:ext uri="{FF2B5EF4-FFF2-40B4-BE49-F238E27FC236}">
+                <a16:creationId xmlns:a16="http://schemas.microsoft.com/office/drawing/2014/main" id="{C9F2FFE2-1CE9-48EA-810B-5DBDA236213B}"/>
               </a:ext>
             </a:extLst>
           </p:cNvPr>
@@ -4879,37 +5244,37 @@
       </p:sp>
       <p:graphicFrame>
         <p:nvGraphicFramePr>
-          <p:cNvPr id="19" name="Chart"/>
+          <p:cNvPr id="22" name="Chart"/>
           <p:cNvGraphicFramePr/>
           <p:nvPr/>
         </p:nvGraphicFramePr>
         <p:xfrm>
-          <a:off xmlns:a="http://schemas.openxmlformats.org/drawingml/2006/main" x="619125" y="2095500"/>
-          <a:ext xmlns:a="http://schemas.openxmlformats.org/drawingml/2006/main" cx="7191375" cy="3219450"/>
+          <a:off xmlns:a="http://schemas.openxmlformats.org/drawingml/2006/main" x="619125" y="2114550"/>
+          <a:ext xmlns:a="http://schemas.openxmlformats.org/drawingml/2006/main" cx="7000875" cy="2857500"/>
         </p:xfrm>
         <a:graphic xmlns:a="http://schemas.openxmlformats.org/drawingml/2006/main">
           <a:graphicData uri="http://schemas.openxmlformats.org/drawingml/2006/chart">
-            <c:chart xmlns:r="http://schemas.openxmlformats.org/officeDocument/2006/relationships" xmlns:c="http://schemas.openxmlformats.org/drawingml/2006/chart" r:id="R51787a67033b493d"/>
+            <c:chart xmlns:r="http://schemas.openxmlformats.org/officeDocument/2006/relationships" xmlns:c="http://schemas.openxmlformats.org/drawingml/2006/chart" r:id="R9fadcdf7ecae4f1c"/>
           </a:graphicData>
         </a:graphic>
       </p:graphicFrame>
       <p:sp>
         <p:nvSpPr>
-          <p:cNvPr id="6" name="S04-x-unit">
-            <a:extLst xmlns:a="http://schemas.openxmlformats.org/drawingml/2006/main">
-              <a:ext uri="{FF2B5EF4-FFF2-40B4-BE49-F238E27FC236}">
-                <a16:creationId xmlns:a16="http://schemas.microsoft.com/office/drawing/2014/main" id="{A3024077-E05A-49AE-8D99-6588D9426546}"/>
-              </a:ext>
-            </a:extLst>
-          </p:cNvPr>
-          <p:cNvSpPr>
-            <a:spLocks xmlns:a="http://schemas.openxmlformats.org/drawingml/2006/main" noGrp="1"/>
-          </p:cNvSpPr>
-          <p:nvPr/>
-        </p:nvSpPr>
-        <p:spPr>
-          <a:xfrm xmlns:a="http://schemas.openxmlformats.org/drawingml/2006/main">
-            <a:off x="1428750" y="5181600"/>
+          <p:cNvPr id="7" name="S04-x-unit">
+            <a:extLst xmlns:a="http://schemas.openxmlformats.org/drawingml/2006/main">
+              <a:ext uri="{FF2B5EF4-FFF2-40B4-BE49-F238E27FC236}">
+                <a16:creationId xmlns:a16="http://schemas.microsoft.com/office/drawing/2014/main" id="{615521AD-72B3-46A0-A99E-4554648CF5BA}"/>
+              </a:ext>
+            </a:extLst>
+          </p:cNvPr>
+          <p:cNvSpPr>
+            <a:spLocks xmlns:a="http://schemas.openxmlformats.org/drawingml/2006/main" noGrp="1"/>
+          </p:cNvSpPr>
+          <p:nvPr/>
+        </p:nvSpPr>
+        <p:spPr>
+          <a:xfrm xmlns:a="http://schemas.openxmlformats.org/drawingml/2006/main">
+            <a:off x="1428750" y="4943475"/>
             <a:ext cx="6191250" cy="333375"/>
           </a:xfrm>
           <a:prstGeom xmlns:a="http://schemas.openxmlformats.org/drawingml/2006/main" prst="rect">
@@ -4952,22 +5317,22 @@
       </p:sp>
       <p:sp>
         <p:nvSpPr>
-          <p:cNvPr id="7" name="S04-basis">
-            <a:extLst xmlns:a="http://schemas.openxmlformats.org/drawingml/2006/main">
-              <a:ext uri="{FF2B5EF4-FFF2-40B4-BE49-F238E27FC236}">
-                <a16:creationId xmlns:a16="http://schemas.microsoft.com/office/drawing/2014/main" id="{7E3D2D07-C993-4C7A-B953-E86CF8ABB4AF}"/>
-              </a:ext>
-            </a:extLst>
-          </p:cNvPr>
-          <p:cNvSpPr>
-            <a:spLocks xmlns:a="http://schemas.openxmlformats.org/drawingml/2006/main" noGrp="1"/>
-          </p:cNvSpPr>
-          <p:nvPr/>
-        </p:nvSpPr>
-        <p:spPr>
-          <a:xfrm xmlns:a="http://schemas.openxmlformats.org/drawingml/2006/main">
-            <a:off x="8382000" y="1714500"/>
-            <a:ext cx="3124200" cy="333375"/>
+          <p:cNvPr id="8" name="S04-basis">
+            <a:extLst xmlns:a="http://schemas.openxmlformats.org/drawingml/2006/main">
+              <a:ext uri="{FF2B5EF4-FFF2-40B4-BE49-F238E27FC236}">
+                <a16:creationId xmlns:a16="http://schemas.microsoft.com/office/drawing/2014/main" id="{B251EC37-233C-4C3D-B44D-96BE1E3E87D8}"/>
+              </a:ext>
+            </a:extLst>
+          </p:cNvPr>
+          <p:cNvSpPr>
+            <a:spLocks xmlns:a="http://schemas.openxmlformats.org/drawingml/2006/main" noGrp="1"/>
+          </p:cNvSpPr>
+          <p:nvPr/>
+        </p:nvSpPr>
+        <p:spPr>
+          <a:xfrm xmlns:a="http://schemas.openxmlformats.org/drawingml/2006/main">
+            <a:off x="8439150" y="1866900"/>
+            <a:ext cx="2857500" cy="333375"/>
           </a:xfrm>
           <a:prstGeom xmlns:a="http://schemas.openxmlformats.org/drawingml/2006/main" prst="rect">
             <a:avLst/>
@@ -4986,7 +5351,7 @@
             <a:pPr>
               <a:defRPr sz="1800" b="0">
                 <a:solidFill>
-                  <a:srgbClr val="586C68"/>
+                  <a:srgbClr val="B9DDD0"/>
                 </a:solidFill>
                 <a:latin typeface="Segoe UI"/>
                 <a:ea typeface="Segoe UI"/>
@@ -4996,7 +5361,7 @@
             <a:r>
               <a:rPr sz="1800" b="0">
                 <a:solidFill>
-                  <a:srgbClr val="586C68"/>
+                  <a:srgbClr val="B9DDD0"/>
                 </a:solidFill>
                 <a:latin typeface="Segoe UI"/>
                 <a:ea typeface="Segoe UI"/>
@@ -5009,22 +5374,22 @@
       </p:sp>
       <p:sp>
         <p:nvSpPr>
-          <p:cNvPr id="8" name="S04-latency">
-            <a:extLst xmlns:a="http://schemas.openxmlformats.org/drawingml/2006/main">
-              <a:ext uri="{FF2B5EF4-FFF2-40B4-BE49-F238E27FC236}">
-                <a16:creationId xmlns:a16="http://schemas.microsoft.com/office/drawing/2014/main" id="{9E9EFD97-D574-47D8-BA46-B9C4F0004432}"/>
-              </a:ext>
-            </a:extLst>
-          </p:cNvPr>
-          <p:cNvSpPr>
-            <a:spLocks xmlns:a="http://schemas.openxmlformats.org/drawingml/2006/main" noGrp="1"/>
-          </p:cNvSpPr>
-          <p:nvPr/>
-        </p:nvSpPr>
-        <p:spPr>
-          <a:xfrm xmlns:a="http://schemas.openxmlformats.org/drawingml/2006/main">
-            <a:off x="8382000" y="2247900"/>
-            <a:ext cx="3048000" cy="628650"/>
+          <p:cNvPr id="9" name="S04-latency">
+            <a:extLst xmlns:a="http://schemas.openxmlformats.org/drawingml/2006/main">
+              <a:ext uri="{FF2B5EF4-FFF2-40B4-BE49-F238E27FC236}">
+                <a16:creationId xmlns:a16="http://schemas.microsoft.com/office/drawing/2014/main" id="{7609D483-5383-41CA-8E27-7CE72A83643A}"/>
+              </a:ext>
+            </a:extLst>
+          </p:cNvPr>
+          <p:cNvSpPr>
+            <a:spLocks xmlns:a="http://schemas.openxmlformats.org/drawingml/2006/main" noGrp="1"/>
+          </p:cNvSpPr>
+          <p:nvPr/>
+        </p:nvSpPr>
+        <p:spPr>
+          <a:xfrm xmlns:a="http://schemas.openxmlformats.org/drawingml/2006/main">
+            <a:off x="8439150" y="2466975"/>
+            <a:ext cx="2857500" cy="628650"/>
           </a:xfrm>
           <a:prstGeom xmlns:a="http://schemas.openxmlformats.org/drawingml/2006/main" prst="rect">
             <a:avLst/>
@@ -5043,7 +5408,7 @@
             <a:pPr>
               <a:defRPr sz="3450" b="0">
                 <a:solidFill>
-                  <a:srgbClr val="1E302F"/>
+                  <a:srgbClr val="FFFFFF"/>
                 </a:solidFill>
                 <a:latin typeface="Segoe UI"/>
                 <a:ea typeface="Segoe UI"/>
@@ -5053,7 +5418,7 @@
             <a:r>
               <a:rPr sz="3450" b="0">
                 <a:solidFill>
-                  <a:srgbClr val="1E302F"/>
+                  <a:srgbClr val="FFFFFF"/>
                 </a:solidFill>
                 <a:latin typeface="Segoe UI"/>
                 <a:ea typeface="Segoe UI"/>
@@ -5066,22 +5431,22 @@
       </p:sp>
       <p:sp>
         <p:nvSpPr>
-          <p:cNvPr id="9" name="S04-latency-label">
-            <a:extLst xmlns:a="http://schemas.openxmlformats.org/drawingml/2006/main">
-              <a:ext uri="{FF2B5EF4-FFF2-40B4-BE49-F238E27FC236}">
-                <a16:creationId xmlns:a16="http://schemas.microsoft.com/office/drawing/2014/main" id="{F2A126D7-6A59-49B2-8FDE-AE6428678721}"/>
-              </a:ext>
-            </a:extLst>
-          </p:cNvPr>
-          <p:cNvSpPr>
-            <a:spLocks xmlns:a="http://schemas.openxmlformats.org/drawingml/2006/main" noGrp="1"/>
-          </p:cNvSpPr>
-          <p:nvPr/>
-        </p:nvSpPr>
-        <p:spPr>
-          <a:xfrm xmlns:a="http://schemas.openxmlformats.org/drawingml/2006/main">
-            <a:off x="8382000" y="2876550"/>
-            <a:ext cx="3124200" cy="361950"/>
+          <p:cNvPr id="10" name="S04-latency-label">
+            <a:extLst xmlns:a="http://schemas.openxmlformats.org/drawingml/2006/main">
+              <a:ext uri="{FF2B5EF4-FFF2-40B4-BE49-F238E27FC236}">
+                <a16:creationId xmlns:a16="http://schemas.microsoft.com/office/drawing/2014/main" id="{073B1A53-07A2-4901-A88A-D3E0BBEDC10E}"/>
+              </a:ext>
+            </a:extLst>
+          </p:cNvPr>
+          <p:cNvSpPr>
+            <a:spLocks xmlns:a="http://schemas.openxmlformats.org/drawingml/2006/main" noGrp="1"/>
+          </p:cNvSpPr>
+          <p:nvPr/>
+        </p:nvSpPr>
+        <p:spPr>
+          <a:xfrm xmlns:a="http://schemas.openxmlformats.org/drawingml/2006/main">
+            <a:off x="8439150" y="3095625"/>
+            <a:ext cx="2857500" cy="361950"/>
           </a:xfrm>
           <a:prstGeom xmlns:a="http://schemas.openxmlformats.org/drawingml/2006/main" prst="rect">
             <a:avLst/>
@@ -5098,19 +5463,19 @@
           <a:lstStyle xmlns:a="http://schemas.openxmlformats.org/drawingml/2006/main"/>
           <a:p xmlns:a="http://schemas.openxmlformats.org/drawingml/2006/main">
             <a:pPr>
-              <a:defRPr sz="1725" b="0">
-                <a:solidFill>
-                  <a:srgbClr val="586C68"/>
-                </a:solidFill>
-                <a:latin typeface="Segoe UI"/>
-                <a:ea typeface="Segoe UI"/>
-                <a:cs typeface="Segoe UI"/>
-              </a:defRPr>
-            </a:pPr>
-            <a:r>
-              <a:rPr sz="1725" b="0">
-                <a:solidFill>
-                  <a:srgbClr val="586C68"/>
+              <a:defRPr sz="1650" b="0">
+                <a:solidFill>
+                  <a:srgbClr val="D7E6DF"/>
+                </a:solidFill>
+                <a:latin typeface="Segoe UI"/>
+                <a:ea typeface="Segoe UI"/>
+                <a:cs typeface="Segoe UI"/>
+              </a:defRPr>
+            </a:pPr>
+            <a:r>
+              <a:rPr sz="1650" b="0">
+                <a:solidFill>
+                  <a:srgbClr val="D7E6DF"/>
                 </a:solidFill>
                 <a:latin typeface="Segoe UI"/>
                 <a:ea typeface="Segoe UI"/>
@@ -5123,22 +5488,22 @@
       </p:sp>
       <p:sp>
         <p:nvSpPr>
-          <p:cNvPr id="10" name="S04-f1">
-            <a:extLst xmlns:a="http://schemas.openxmlformats.org/drawingml/2006/main">
-              <a:ext uri="{FF2B5EF4-FFF2-40B4-BE49-F238E27FC236}">
-                <a16:creationId xmlns:a16="http://schemas.microsoft.com/office/drawing/2014/main" id="{A239B722-567F-4F26-A1B0-867523DD5901}"/>
-              </a:ext>
-            </a:extLst>
-          </p:cNvPr>
-          <p:cNvSpPr>
-            <a:spLocks xmlns:a="http://schemas.openxmlformats.org/drawingml/2006/main" noGrp="1"/>
-          </p:cNvSpPr>
-          <p:nvPr/>
-        </p:nvSpPr>
-        <p:spPr>
-          <a:xfrm xmlns:a="http://schemas.openxmlformats.org/drawingml/2006/main">
-            <a:off x="8382000" y="3419475"/>
-            <a:ext cx="3048000" cy="628650"/>
+          <p:cNvPr id="11" name="S04-f1">
+            <a:extLst xmlns:a="http://schemas.openxmlformats.org/drawingml/2006/main">
+              <a:ext uri="{FF2B5EF4-FFF2-40B4-BE49-F238E27FC236}">
+                <a16:creationId xmlns:a16="http://schemas.microsoft.com/office/drawing/2014/main" id="{C84066E6-68CB-482B-BC75-5A6950B5CADD}"/>
+              </a:ext>
+            </a:extLst>
+          </p:cNvPr>
+          <p:cNvSpPr>
+            <a:spLocks xmlns:a="http://schemas.openxmlformats.org/drawingml/2006/main" noGrp="1"/>
+          </p:cNvSpPr>
+          <p:nvPr/>
+        </p:nvSpPr>
+        <p:spPr>
+          <a:xfrm xmlns:a="http://schemas.openxmlformats.org/drawingml/2006/main">
+            <a:off x="8439150" y="3819525"/>
+            <a:ext cx="2857500" cy="628650"/>
           </a:xfrm>
           <a:prstGeom xmlns:a="http://schemas.openxmlformats.org/drawingml/2006/main" prst="rect">
             <a:avLst/>
@@ -5157,7 +5522,7 @@
             <a:pPr>
               <a:defRPr sz="3450" b="0">
                 <a:solidFill>
-                  <a:srgbClr val="1E302F"/>
+                  <a:srgbClr val="FFFFFF"/>
                 </a:solidFill>
                 <a:latin typeface="Segoe UI"/>
                 <a:ea typeface="Segoe UI"/>
@@ -5167,7 +5532,7 @@
             <a:r>
               <a:rPr sz="3450" b="0">
                 <a:solidFill>
-                  <a:srgbClr val="1E302F"/>
+                  <a:srgbClr val="FFFFFF"/>
                 </a:solidFill>
                 <a:latin typeface="Segoe UI"/>
                 <a:ea typeface="Segoe UI"/>
@@ -5180,22 +5545,22 @@
       </p:sp>
       <p:sp>
         <p:nvSpPr>
-          <p:cNvPr id="11" name="S04-f1-label">
-            <a:extLst xmlns:a="http://schemas.openxmlformats.org/drawingml/2006/main">
-              <a:ext uri="{FF2B5EF4-FFF2-40B4-BE49-F238E27FC236}">
-                <a16:creationId xmlns:a16="http://schemas.microsoft.com/office/drawing/2014/main" id="{0C4B5FF2-4E78-480B-A1B2-DCE08F07FD46}"/>
-              </a:ext>
-            </a:extLst>
-          </p:cNvPr>
-          <p:cNvSpPr>
-            <a:spLocks xmlns:a="http://schemas.openxmlformats.org/drawingml/2006/main" noGrp="1"/>
-          </p:cNvSpPr>
-          <p:nvPr/>
-        </p:nvSpPr>
-        <p:spPr>
-          <a:xfrm xmlns:a="http://schemas.openxmlformats.org/drawingml/2006/main">
-            <a:off x="8382000" y="4048125"/>
-            <a:ext cx="3124200" cy="361950"/>
+          <p:cNvPr id="12" name="S04-f1-label">
+            <a:extLst xmlns:a="http://schemas.openxmlformats.org/drawingml/2006/main">
+              <a:ext uri="{FF2B5EF4-FFF2-40B4-BE49-F238E27FC236}">
+                <a16:creationId xmlns:a16="http://schemas.microsoft.com/office/drawing/2014/main" id="{D5F58F03-2F17-4A82-B9D3-A486F40F5AEA}"/>
+              </a:ext>
+            </a:extLst>
+          </p:cNvPr>
+          <p:cNvSpPr>
+            <a:spLocks xmlns:a="http://schemas.openxmlformats.org/drawingml/2006/main" noGrp="1"/>
+          </p:cNvSpPr>
+          <p:nvPr/>
+        </p:nvSpPr>
+        <p:spPr>
+          <a:xfrm xmlns:a="http://schemas.openxmlformats.org/drawingml/2006/main">
+            <a:off x="8439150" y="4448175"/>
+            <a:ext cx="2857500" cy="361950"/>
           </a:xfrm>
           <a:prstGeom xmlns:a="http://schemas.openxmlformats.org/drawingml/2006/main" prst="rect">
             <a:avLst/>
@@ -5212,19 +5577,19 @@
           <a:lstStyle xmlns:a="http://schemas.openxmlformats.org/drawingml/2006/main"/>
           <a:p xmlns:a="http://schemas.openxmlformats.org/drawingml/2006/main">
             <a:pPr>
-              <a:defRPr sz="1725" b="0">
-                <a:solidFill>
-                  <a:srgbClr val="586C68"/>
-                </a:solidFill>
-                <a:latin typeface="Segoe UI"/>
-                <a:ea typeface="Segoe UI"/>
-                <a:cs typeface="Segoe UI"/>
-              </a:defRPr>
-            </a:pPr>
-            <a:r>
-              <a:rPr sz="1725" b="0">
-                <a:solidFill>
-                  <a:srgbClr val="586C68"/>
+              <a:defRPr sz="1650" b="0">
+                <a:solidFill>
+                  <a:srgbClr val="D7E6DF"/>
+                </a:solidFill>
+                <a:latin typeface="Segoe UI"/>
+                <a:ea typeface="Segoe UI"/>
+                <a:cs typeface="Segoe UI"/>
+              </a:defRPr>
+            </a:pPr>
+            <a:r>
+              <a:rPr sz="1650" b="0">
+                <a:solidFill>
+                  <a:srgbClr val="D7E6DF"/>
                 </a:solidFill>
                 <a:latin typeface="Segoe UI"/>
                 <a:ea typeface="Segoe UI"/>
@@ -5237,22 +5602,22 @@
       </p:sp>
       <p:sp>
         <p:nvSpPr>
-          <p:cNvPr id="12" name="S04-size-values">
-            <a:extLst xmlns:a="http://schemas.openxmlformats.org/drawingml/2006/main">
-              <a:ext uri="{FF2B5EF4-FFF2-40B4-BE49-F238E27FC236}">
-                <a16:creationId xmlns:a16="http://schemas.microsoft.com/office/drawing/2014/main" id="{74F1FCF4-FC36-4AC8-A03A-B9752510C58C}"/>
-              </a:ext>
-            </a:extLst>
-          </p:cNvPr>
-          <p:cNvSpPr>
-            <a:spLocks xmlns:a="http://schemas.openxmlformats.org/drawingml/2006/main" noGrp="1"/>
-          </p:cNvSpPr>
-          <p:nvPr/>
-        </p:nvSpPr>
-        <p:spPr>
-          <a:xfrm xmlns:a="http://schemas.openxmlformats.org/drawingml/2006/main">
-            <a:off x="8382000" y="4772025"/>
-            <a:ext cx="3124200" cy="457200"/>
+          <p:cNvPr id="13" name="S04-size-values">
+            <a:extLst xmlns:a="http://schemas.openxmlformats.org/drawingml/2006/main">
+              <a:ext uri="{FF2B5EF4-FFF2-40B4-BE49-F238E27FC236}">
+                <a16:creationId xmlns:a16="http://schemas.microsoft.com/office/drawing/2014/main" id="{81A9AF14-2B79-46B0-AF7C-FBF83BCE2BB5}"/>
+              </a:ext>
+            </a:extLst>
+          </p:cNvPr>
+          <p:cNvSpPr>
+            <a:spLocks xmlns:a="http://schemas.openxmlformats.org/drawingml/2006/main" noGrp="1"/>
+          </p:cNvSpPr>
+          <p:nvPr/>
+        </p:nvSpPr>
+        <p:spPr>
+          <a:xfrm xmlns:a="http://schemas.openxmlformats.org/drawingml/2006/main">
+            <a:off x="8439150" y="5210175"/>
+            <a:ext cx="2857500" cy="400050"/>
           </a:xfrm>
           <a:prstGeom xmlns:a="http://schemas.openxmlformats.org/drawingml/2006/main" prst="rect">
             <a:avLst/>
@@ -5269,19 +5634,19 @@
           <a:lstStyle xmlns:a="http://schemas.openxmlformats.org/drawingml/2006/main"/>
           <a:p xmlns:a="http://schemas.openxmlformats.org/drawingml/2006/main">
             <a:pPr>
-              <a:defRPr sz="1650" b="0">
-                <a:solidFill>
-                  <a:srgbClr val="586C68"/>
-                </a:solidFill>
-                <a:latin typeface="Segoe UI"/>
-                <a:ea typeface="Segoe UI"/>
-                <a:cs typeface="Segoe UI"/>
-              </a:defRPr>
-            </a:pPr>
-            <a:r>
-              <a:rPr sz="1650" b="0">
-                <a:solidFill>
-                  <a:srgbClr val="586C68"/>
+              <a:defRPr sz="1575" b="0">
+                <a:solidFill>
+                  <a:srgbClr val="D7E6DF"/>
+                </a:solidFill>
+                <a:latin typeface="Segoe UI"/>
+                <a:ea typeface="Segoe UI"/>
+                <a:cs typeface="Segoe UI"/>
+              </a:defRPr>
+            </a:pPr>
+            <a:r>
+              <a:rPr sz="1575" b="0">
+                <a:solidFill>
+                  <a:srgbClr val="D7E6DF"/>
                 </a:solidFill>
                 <a:latin typeface="Segoe UI"/>
                 <a:ea typeface="Segoe UI"/>
@@ -5294,22 +5659,51 @@
       </p:sp>
       <p:sp>
         <p:nvSpPr>
-          <p:cNvPr id="13" name="S04-stage1">
-            <a:extLst xmlns:a="http://schemas.openxmlformats.org/drawingml/2006/main">
-              <a:ext uri="{FF2B5EF4-FFF2-40B4-BE49-F238E27FC236}">
-                <a16:creationId xmlns:a16="http://schemas.microsoft.com/office/drawing/2014/main" id="{D7E5A57D-54CB-40FF-B95C-46E49A441E55}"/>
-              </a:ext>
-            </a:extLst>
-          </p:cNvPr>
-          <p:cNvSpPr>
-            <a:spLocks xmlns:a="http://schemas.openxmlformats.org/drawingml/2006/main" noGrp="1"/>
-          </p:cNvSpPr>
-          <p:nvPr/>
-        </p:nvSpPr>
-        <p:spPr>
-          <a:xfrm xmlns:a="http://schemas.openxmlformats.org/drawingml/2006/main">
-            <a:off x="685800" y="5467350"/>
-            <a:ext cx="10820400" cy="304800"/>
+          <p:cNvPr id="14" name="S04-decomposition-rule">
+            <a:extLst xmlns:a="http://schemas.openxmlformats.org/drawingml/2006/main">
+              <a:ext uri="{FF2B5EF4-FFF2-40B4-BE49-F238E27FC236}">
+                <a16:creationId xmlns:a16="http://schemas.microsoft.com/office/drawing/2014/main" id="{03B2B565-099F-4CDC-86C9-E62A713C9284}"/>
+              </a:ext>
+            </a:extLst>
+          </p:cNvPr>
+          <p:cNvSpPr>
+            <a:spLocks xmlns:a="http://schemas.openxmlformats.org/drawingml/2006/main" noGrp="1"/>
+          </p:cNvSpPr>
+          <p:nvPr/>
+        </p:nvSpPr>
+        <p:spPr>
+          <a:xfrm xmlns:a="http://schemas.openxmlformats.org/drawingml/2006/main">
+            <a:off x="685800" y="5400675"/>
+            <a:ext cx="6858000" cy="0"/>
+          </a:xfrm>
+          <a:prstGeom xmlns:a="http://schemas.openxmlformats.org/drawingml/2006/main" prst="line">
+            <a:avLst/>
+          </a:prstGeom>
+          <a:ln xmlns:a="http://schemas.openxmlformats.org/drawingml/2006/main" w="9525">
+            <a:solidFill>
+              <a:srgbClr val="CFD8D1"/>
+            </a:solidFill>
+          </a:ln>
+        </p:spPr>
+      </p:sp>
+      <p:sp>
+        <p:nvSpPr>
+          <p:cNvPr id="15" name="S04-stage1">
+            <a:extLst xmlns:a="http://schemas.openxmlformats.org/drawingml/2006/main">
+              <a:ext uri="{FF2B5EF4-FFF2-40B4-BE49-F238E27FC236}">
+                <a16:creationId xmlns:a16="http://schemas.microsoft.com/office/drawing/2014/main" id="{A8188A58-9481-423D-B95B-B1271AE30E9C}"/>
+              </a:ext>
+            </a:extLst>
+          </p:cNvPr>
+          <p:cNvSpPr>
+            <a:spLocks xmlns:a="http://schemas.openxmlformats.org/drawingml/2006/main" noGrp="1"/>
+          </p:cNvSpPr>
+          <p:nvPr/>
+        </p:nvSpPr>
+        <p:spPr>
+          <a:xfrm xmlns:a="http://schemas.openxmlformats.org/drawingml/2006/main">
+            <a:off x="685800" y="5505450"/>
+            <a:ext cx="6858000" cy="304800"/>
           </a:xfrm>
           <a:prstGeom xmlns:a="http://schemas.openxmlformats.org/drawingml/2006/main" prst="rect">
             <a:avLst/>
@@ -5351,22 +5745,22 @@
       </p:sp>
       <p:sp>
         <p:nvSpPr>
-          <p:cNvPr id="14" name="S04-stage2">
-            <a:extLst xmlns:a="http://schemas.openxmlformats.org/drawingml/2006/main">
-              <a:ext uri="{FF2B5EF4-FFF2-40B4-BE49-F238E27FC236}">
-                <a16:creationId xmlns:a16="http://schemas.microsoft.com/office/drawing/2014/main" id="{EA8991D9-3BB2-48EA-9E6A-59478E9AA55D}"/>
-              </a:ext>
-            </a:extLst>
-          </p:cNvPr>
-          <p:cNvSpPr>
-            <a:spLocks xmlns:a="http://schemas.openxmlformats.org/drawingml/2006/main" noGrp="1"/>
-          </p:cNvSpPr>
-          <p:nvPr/>
-        </p:nvSpPr>
-        <p:spPr>
-          <a:xfrm xmlns:a="http://schemas.openxmlformats.org/drawingml/2006/main">
-            <a:off x="685800" y="5810250"/>
-            <a:ext cx="10820400" cy="304800"/>
+          <p:cNvPr id="16" name="S04-stage2">
+            <a:extLst xmlns:a="http://schemas.openxmlformats.org/drawingml/2006/main">
+              <a:ext uri="{FF2B5EF4-FFF2-40B4-BE49-F238E27FC236}">
+                <a16:creationId xmlns:a16="http://schemas.microsoft.com/office/drawing/2014/main" id="{00FADBB8-1250-424A-82B7-5FD45AE87AE6}"/>
+              </a:ext>
+            </a:extLst>
+          </p:cNvPr>
+          <p:cNvSpPr>
+            <a:spLocks xmlns:a="http://schemas.openxmlformats.org/drawingml/2006/main" noGrp="1"/>
+          </p:cNvSpPr>
+          <p:nvPr/>
+        </p:nvSpPr>
+        <p:spPr>
+          <a:xfrm xmlns:a="http://schemas.openxmlformats.org/drawingml/2006/main">
+            <a:off x="685800" y="5857875"/>
+            <a:ext cx="6858000" cy="304800"/>
           </a:xfrm>
           <a:prstGeom xmlns:a="http://schemas.openxmlformats.org/drawingml/2006/main" prst="rect">
             <a:avLst/>
@@ -5409,7 +5803,7 @@
     </p:spTree>
     <p:extLst>
       <p:ext uri="{BB962C8B-B14F-4D97-AF65-F5344CB8AC3E}">
-        <p14:creationId xmlns:p14="http://schemas.microsoft.com/office/powerpoint/2010/main" val="1568015087"/>
+        <p14:creationId xmlns:p14="http://schemas.microsoft.com/office/powerpoint/2010/main" val="1823795935"/>
       </p:ext>
     </p:extLst>
   </p:cSld>
@@ -5437,22 +5831,52 @@
       </p:grpSpPr>
       <p:sp>
         <p:nvSpPr>
-          <p:cNvPr id="14" name="S05-title">
-            <a:extLst xmlns:a="http://schemas.openxmlformats.org/drawingml/2006/main">
-              <a:ext uri="{FF2B5EF4-FFF2-40B4-BE49-F238E27FC236}">
-                <a16:creationId xmlns:a16="http://schemas.microsoft.com/office/drawing/2014/main" id="{305BBB2B-B82D-481D-9367-26198045A45B}"/>
-              </a:ext>
-            </a:extLst>
-          </p:cNvPr>
-          <p:cNvSpPr>
-            <a:spLocks xmlns:a="http://schemas.openxmlformats.org/drawingml/2006/main" noGrp="1"/>
-          </p:cNvSpPr>
-          <p:nvPr/>
-        </p:nvSpPr>
-        <p:spPr>
-          <a:xfrm xmlns:a="http://schemas.openxmlformats.org/drawingml/2006/main">
-            <a:off x="685800" y="895350"/>
-            <a:ext cx="10820400" cy="666750"/>
+          <p:cNvPr id="14" name="S05-finding-field">
+            <a:extLst xmlns:a="http://schemas.openxmlformats.org/drawingml/2006/main">
+              <a:ext uri="{FF2B5EF4-FFF2-40B4-BE49-F238E27FC236}">
+                <a16:creationId xmlns:a16="http://schemas.microsoft.com/office/drawing/2014/main" id="{AD5ACFED-B677-48EB-8A8A-A67561A4322A}"/>
+              </a:ext>
+            </a:extLst>
+          </p:cNvPr>
+          <p:cNvSpPr>
+            <a:spLocks xmlns:a="http://schemas.openxmlformats.org/drawingml/2006/main" noGrp="1"/>
+          </p:cNvSpPr>
+          <p:nvPr/>
+        </p:nvSpPr>
+        <p:spPr>
+          <a:xfrm xmlns:a="http://schemas.openxmlformats.org/drawingml/2006/main">
+            <a:off x="0" y="0"/>
+            <a:ext cx="5905500" cy="6858000"/>
+          </a:xfrm>
+          <a:prstGeom xmlns:a="http://schemas.openxmlformats.org/drawingml/2006/main" prst="rect">
+            <a:avLst/>
+          </a:prstGeom>
+          <a:solidFill xmlns:a="http://schemas.openxmlformats.org/drawingml/2006/main">
+            <a:srgbClr val="1E302F"/>
+          </a:solidFill>
+          <a:ln xmlns:a="http://schemas.openxmlformats.org/drawingml/2006/main" w="0">
+            <a:noFill/>
+          </a:ln>
+        </p:spPr>
+      </p:sp>
+      <p:sp>
+        <p:nvSpPr>
+          <p:cNvPr id="2" name="S05-main">
+            <a:extLst xmlns:a="http://schemas.openxmlformats.org/drawingml/2006/main">
+              <a:ext uri="{FF2B5EF4-FFF2-40B4-BE49-F238E27FC236}">
+                <a16:creationId xmlns:a16="http://schemas.microsoft.com/office/drawing/2014/main" id="{94E023DB-175F-490F-8CE9-1D426FBBBAA4}"/>
+              </a:ext>
+            </a:extLst>
+          </p:cNvPr>
+          <p:cNvSpPr>
+            <a:spLocks xmlns:a="http://schemas.openxmlformats.org/drawingml/2006/main" noGrp="1"/>
+          </p:cNvSpPr>
+          <p:nvPr/>
+        </p:nvSpPr>
+        <p:spPr>
+          <a:xfrm xmlns:a="http://schemas.openxmlformats.org/drawingml/2006/main">
+            <a:off x="609600" y="1428750"/>
+            <a:ext cx="4781550" cy="1619250"/>
           </a:xfrm>
           <a:prstGeom xmlns:a="http://schemas.openxmlformats.org/drawingml/2006/main" prst="rect">
             <a:avLst/>
@@ -5469,47 +5893,70 @@
           <a:lstStyle xmlns:a="http://schemas.openxmlformats.org/drawingml/2006/main"/>
           <a:p xmlns:a="http://schemas.openxmlformats.org/drawingml/2006/main">
             <a:pPr>
-              <a:defRPr sz="3225" b="0">
-                <a:solidFill>
-                  <a:srgbClr val="1E302F"/>
-                </a:solidFill>
-                <a:latin typeface="Segoe UI"/>
-                <a:ea typeface="Segoe UI"/>
-                <a:cs typeface="Segoe UI"/>
-              </a:defRPr>
-            </a:pPr>
-            <a:r>
-              <a:rPr sz="3225" b="0">
-                <a:solidFill>
-                  <a:srgbClr val="1E302F"/>
-                </a:solidFill>
-                <a:latin typeface="Segoe UI"/>
-                <a:ea typeface="Segoe UI"/>
-                <a:cs typeface="Segoe UI"/>
-              </a:rPr>
-              <a:t>Deployment criteria remain open</a:t>
-            </a:r>
-          </a:p>
-        </p:txBody>
-      </p:sp>
-      <p:sp>
-        <p:nvSpPr>
-          <p:cNvPr id="2" name="S05-disclosure">
-            <a:extLst xmlns:a="http://schemas.openxmlformats.org/drawingml/2006/main">
-              <a:ext uri="{FF2B5EF4-FFF2-40B4-BE49-F238E27FC236}">
-                <a16:creationId xmlns:a16="http://schemas.microsoft.com/office/drawing/2014/main" id="{B0D8AE88-FFF3-4B76-959C-9EDFD88C5C6F}"/>
-              </a:ext>
-            </a:extLst>
-          </p:cNvPr>
-          <p:cNvSpPr>
-            <a:spLocks xmlns:a="http://schemas.openxmlformats.org/drawingml/2006/main" noGrp="1"/>
-          </p:cNvSpPr>
-          <p:nvPr/>
-        </p:nvSpPr>
-        <p:spPr>
-          <a:xfrm xmlns:a="http://schemas.openxmlformats.org/drawingml/2006/main">
-            <a:off x="685800" y="6372225"/>
-            <a:ext cx="9525000" cy="219075"/>
+              <a:defRPr sz="3675" b="0">
+                <a:solidFill>
+                  <a:srgbClr val="FFFFFF"/>
+                </a:solidFill>
+                <a:latin typeface="Segoe UI"/>
+                <a:ea typeface="Segoe UI"/>
+                <a:cs typeface="Segoe UI"/>
+              </a:defRPr>
+            </a:pPr>
+            <a:r>
+              <a:rPr sz="3675" b="0">
+                <a:solidFill>
+                  <a:srgbClr val="FFFFFF"/>
+                </a:solidFill>
+                <a:latin typeface="Segoe UI"/>
+                <a:ea typeface="Segoe UI"/>
+                <a:cs typeface="Segoe UI"/>
+              </a:rPr>
+              <a:t>Efficiency gains</a:t>
+            </a:r>
+          </a:p>
+          <a:p xmlns:a="http://schemas.openxmlformats.org/drawingml/2006/main">
+            <a:pPr>
+              <a:defRPr sz="3675" b="0">
+                <a:solidFill>
+                  <a:srgbClr val="FFFFFF"/>
+                </a:solidFill>
+                <a:latin typeface="Segoe UI"/>
+                <a:ea typeface="Segoe UI"/>
+                <a:cs typeface="Segoe UI"/>
+              </a:defRPr>
+            </a:pPr>
+            <a:r>
+              <a:rPr sz="3675" b="0">
+                <a:solidFill>
+                  <a:srgbClr val="FFFFFF"/>
+                </a:solidFill>
+                <a:latin typeface="Segoe UI"/>
+                <a:ea typeface="Segoe UI"/>
+                <a:cs typeface="Segoe UI"/>
+              </a:rPr>
+              <a:t>come with lower F1</a:t>
+            </a:r>
+          </a:p>
+        </p:txBody>
+      </p:sp>
+      <p:sp>
+        <p:nvSpPr>
+          <p:cNvPr id="3" name="S05-interpretation">
+            <a:extLst xmlns:a="http://schemas.openxmlformats.org/drawingml/2006/main">
+              <a:ext uri="{FF2B5EF4-FFF2-40B4-BE49-F238E27FC236}">
+                <a16:creationId xmlns:a16="http://schemas.microsoft.com/office/drawing/2014/main" id="{E81C57F6-9189-4E48-AC92-77D9FA8940F9}"/>
+              </a:ext>
+            </a:extLst>
+          </p:cNvPr>
+          <p:cNvSpPr>
+            <a:spLocks xmlns:a="http://schemas.openxmlformats.org/drawingml/2006/main" noGrp="1"/>
+          </p:cNvSpPr>
+          <p:nvPr/>
+        </p:nvSpPr>
+        <p:spPr>
+          <a:xfrm xmlns:a="http://schemas.openxmlformats.org/drawingml/2006/main">
+            <a:off x="609600" y="3695700"/>
+            <a:ext cx="4762500" cy="1104900"/>
           </a:xfrm>
           <a:prstGeom xmlns:a="http://schemas.openxmlformats.org/drawingml/2006/main" prst="rect">
             <a:avLst/>
@@ -5526,47 +5973,70 @@
           <a:lstStyle xmlns:a="http://schemas.openxmlformats.org/drawingml/2006/main"/>
           <a:p xmlns:a="http://schemas.openxmlformats.org/drawingml/2006/main">
             <a:pPr>
-              <a:defRPr sz="1275" b="0">
-                <a:solidFill>
-                  <a:srgbClr val="586C68"/>
-                </a:solidFill>
-                <a:latin typeface="Segoe UI"/>
-                <a:ea typeface="Segoe UI"/>
-                <a:cs typeface="Segoe UI"/>
-              </a:defRPr>
-            </a:pPr>
-            <a:r>
-              <a:rPr sz="1275" b="0">
-                <a:solidFill>
-                  <a:srgbClr val="586C68"/>
-                </a:solidFill>
-                <a:latin typeface="Segoe UI"/>
-                <a:ea typeface="Segoe UI"/>
-                <a:cs typeface="Segoe UI"/>
-              </a:rPr>
-              <a:t>Illustrative data · not experimental results</a:t>
-            </a:r>
-          </a:p>
-        </p:txBody>
-      </p:sp>
-      <p:sp>
-        <p:nvSpPr>
-          <p:cNvPr id="3" name="S05-number">
-            <a:extLst xmlns:a="http://schemas.openxmlformats.org/drawingml/2006/main">
-              <a:ext uri="{FF2B5EF4-FFF2-40B4-BE49-F238E27FC236}">
-                <a16:creationId xmlns:a16="http://schemas.microsoft.com/office/drawing/2014/main" id="{BEA8FA2B-D07E-4036-8236-7B6B6F8529FF}"/>
-              </a:ext>
-            </a:extLst>
-          </p:cNvPr>
-          <p:cNvSpPr>
-            <a:spLocks xmlns:a="http://schemas.openxmlformats.org/drawingml/2006/main" noGrp="1"/>
-          </p:cNvSpPr>
-          <p:nvPr/>
-        </p:nvSpPr>
-        <p:spPr>
-          <a:xfrm xmlns:a="http://schemas.openxmlformats.org/drawingml/2006/main">
-            <a:off x="11144250" y="6372225"/>
-            <a:ext cx="361950" cy="219075"/>
+              <a:defRPr sz="2025" b="0">
+                <a:solidFill>
+                  <a:srgbClr val="B9DDD0"/>
+                </a:solidFill>
+                <a:latin typeface="Segoe UI"/>
+                <a:ea typeface="Segoe UI"/>
+                <a:cs typeface="Segoe UI"/>
+              </a:defRPr>
+            </a:pPr>
+            <a:r>
+              <a:rPr sz="2025" b="0">
+                <a:solidFill>
+                  <a:srgbClr val="B9DDD0"/>
+                </a:solidFill>
+                <a:latin typeface="Segoe UI"/>
+                <a:ea typeface="Segoe UI"/>
+                <a:cs typeface="Segoe UI"/>
+              </a:rPr>
+              <a:t>A deployment decision needs</a:t>
+            </a:r>
+          </a:p>
+          <a:p xmlns:a="http://schemas.openxmlformats.org/drawingml/2006/main">
+            <a:pPr>
+              <a:defRPr sz="2025" b="0">
+                <a:solidFill>
+                  <a:srgbClr val="B9DDD0"/>
+                </a:solidFill>
+                <a:latin typeface="Segoe UI"/>
+                <a:ea typeface="Segoe UI"/>
+                <a:cs typeface="Segoe UI"/>
+              </a:defRPr>
+            </a:pPr>
+            <a:r>
+              <a:rPr sz="2025" b="0">
+                <a:solidFill>
+                  <a:srgbClr val="B9DDD0"/>
+                </a:solidFill>
+                <a:latin typeface="Segoe UI"/>
+                <a:ea typeface="Segoe UI"/>
+                <a:cs typeface="Segoe UI"/>
+              </a:rPr>
+              <a:t>acceptable latency and F1 limits.</a:t>
+            </a:r>
+          </a:p>
+        </p:txBody>
+      </p:sp>
+      <p:sp>
+        <p:nvSpPr>
+          <p:cNvPr id="4" name="S05-label1">
+            <a:extLst xmlns:a="http://schemas.openxmlformats.org/drawingml/2006/main">
+              <a:ext uri="{FF2B5EF4-FFF2-40B4-BE49-F238E27FC236}">
+                <a16:creationId xmlns:a16="http://schemas.microsoft.com/office/drawing/2014/main" id="{54490094-9E75-4368-90B3-87E9956C891C}"/>
+              </a:ext>
+            </a:extLst>
+          </p:cNvPr>
+          <p:cNvSpPr>
+            <a:spLocks xmlns:a="http://schemas.openxmlformats.org/drawingml/2006/main" noGrp="1"/>
+          </p:cNvSpPr>
+          <p:nvPr/>
+        </p:nvSpPr>
+        <p:spPr>
+          <a:xfrm xmlns:a="http://schemas.openxmlformats.org/drawingml/2006/main">
+            <a:off x="6515100" y="1152525"/>
+            <a:ext cx="4991100" cy="466725"/>
           </a:xfrm>
           <a:prstGeom xmlns:a="http://schemas.openxmlformats.org/drawingml/2006/main" prst="rect">
             <a:avLst/>
@@ -5583,47 +6053,47 @@
           <a:lstStyle xmlns:a="http://schemas.openxmlformats.org/drawingml/2006/main"/>
           <a:p xmlns:a="http://schemas.openxmlformats.org/drawingml/2006/main">
             <a:pPr>
-              <a:defRPr sz="1275" b="0">
-                <a:solidFill>
-                  <a:srgbClr val="586C68"/>
-                </a:solidFill>
-                <a:latin typeface="Segoe UI"/>
-                <a:ea typeface="Segoe UI"/>
-                <a:cs typeface="Segoe UI"/>
-              </a:defRPr>
-            </a:pPr>
-            <a:r>
-              <a:rPr sz="1275" b="0">
-                <a:solidFill>
-                  <a:srgbClr val="586C68"/>
-                </a:solidFill>
-                <a:latin typeface="Segoe UI"/>
-                <a:ea typeface="Segoe UI"/>
-                <a:cs typeface="Segoe UI"/>
-              </a:rPr>
-              <a:t>05</a:t>
-            </a:r>
-          </a:p>
-        </p:txBody>
-      </p:sp>
-      <p:sp>
-        <p:nvSpPr>
-          <p:cNvPr id="4" name="S05-main">
-            <a:extLst xmlns:a="http://schemas.openxmlformats.org/drawingml/2006/main">
-              <a:ext uri="{FF2B5EF4-FFF2-40B4-BE49-F238E27FC236}">
-                <a16:creationId xmlns:a16="http://schemas.microsoft.com/office/drawing/2014/main" id="{F3844DB1-120B-449A-990B-47862B560B28}"/>
-              </a:ext>
-            </a:extLst>
-          </p:cNvPr>
-          <p:cNvSpPr>
-            <a:spLocks xmlns:a="http://schemas.openxmlformats.org/drawingml/2006/main" noGrp="1"/>
-          </p:cNvSpPr>
-          <p:nvPr/>
-        </p:nvSpPr>
-        <p:spPr>
-          <a:xfrm xmlns:a="http://schemas.openxmlformats.org/drawingml/2006/main">
-            <a:off x="685800" y="1990725"/>
-            <a:ext cx="10820400" cy="723900"/>
+              <a:defRPr sz="2400" b="0">
+                <a:solidFill>
+                  <a:srgbClr val="1E302F"/>
+                </a:solidFill>
+                <a:latin typeface="Segoe UI"/>
+                <a:ea typeface="Segoe UI"/>
+                <a:cs typeface="Segoe UI"/>
+              </a:defRPr>
+            </a:pPr>
+            <a:r>
+              <a:rPr sz="2400" b="0">
+                <a:solidFill>
+                  <a:srgbClr val="1E302F"/>
+                </a:solidFill>
+                <a:latin typeface="Segoe UI"/>
+                <a:ea typeface="Segoe UI"/>
+                <a:cs typeface="Segoe UI"/>
+              </a:rPr>
+              <a:t>Deployment limits</a:t>
+            </a:r>
+          </a:p>
+        </p:txBody>
+      </p:sp>
+      <p:sp>
+        <p:nvSpPr>
+          <p:cNvPr id="5" name="S05-body1">
+            <a:extLst xmlns:a="http://schemas.openxmlformats.org/drawingml/2006/main">
+              <a:ext uri="{FF2B5EF4-FFF2-40B4-BE49-F238E27FC236}">
+                <a16:creationId xmlns:a16="http://schemas.microsoft.com/office/drawing/2014/main" id="{C23904A4-5799-4146-BCF8-269E1119A7A9}"/>
+              </a:ext>
+            </a:extLst>
+          </p:cNvPr>
+          <p:cNvSpPr>
+            <a:spLocks xmlns:a="http://schemas.openxmlformats.org/drawingml/2006/main" noGrp="1"/>
+          </p:cNvSpPr>
+          <p:nvPr/>
+        </p:nvSpPr>
+        <p:spPr>
+          <a:xfrm xmlns:a="http://schemas.openxmlformats.org/drawingml/2006/main">
+            <a:off x="6515100" y="1704975"/>
+            <a:ext cx="4991100" cy="457200"/>
           </a:xfrm>
           <a:prstGeom xmlns:a="http://schemas.openxmlformats.org/drawingml/2006/main" prst="rect">
             <a:avLst/>
@@ -5640,47 +6110,47 @@
           <a:lstStyle xmlns:a="http://schemas.openxmlformats.org/drawingml/2006/main"/>
           <a:p xmlns:a="http://schemas.openxmlformats.org/drawingml/2006/main">
             <a:pPr>
-              <a:defRPr sz="3675" b="0">
-                <a:solidFill>
-                  <a:srgbClr val="287D78"/>
-                </a:solidFill>
-                <a:latin typeface="Segoe UI"/>
-                <a:ea typeface="Segoe UI"/>
-                <a:cs typeface="Segoe UI"/>
-              </a:defRPr>
-            </a:pPr>
-            <a:r>
-              <a:rPr sz="3675" b="0">
-                <a:solidFill>
-                  <a:srgbClr val="287D78"/>
-                </a:solidFill>
-                <a:latin typeface="Segoe UI"/>
-                <a:ea typeface="Segoe UI"/>
-                <a:cs typeface="Segoe UI"/>
-              </a:rPr>
-              <a:t>Efficiency gains come with lower F1</a:t>
-            </a:r>
-          </a:p>
-        </p:txBody>
-      </p:sp>
-      <p:sp>
-        <p:nvSpPr>
-          <p:cNvPr id="5" name="S05-rule-1">
-            <a:extLst xmlns:a="http://schemas.openxmlformats.org/drawingml/2006/main">
-              <a:ext uri="{FF2B5EF4-FFF2-40B4-BE49-F238E27FC236}">
-                <a16:creationId xmlns:a16="http://schemas.microsoft.com/office/drawing/2014/main" id="{6A36D0D8-6C39-41CC-87C7-2D53318D70A2}"/>
-              </a:ext>
-            </a:extLst>
-          </p:cNvPr>
-          <p:cNvSpPr>
-            <a:spLocks xmlns:a="http://schemas.openxmlformats.org/drawingml/2006/main" noGrp="1"/>
-          </p:cNvSpPr>
-          <p:nvPr/>
-        </p:nvSpPr>
-        <p:spPr>
-          <a:xfrm xmlns:a="http://schemas.openxmlformats.org/drawingml/2006/main">
-            <a:off x="685800" y="3124200"/>
-            <a:ext cx="10820400" cy="0"/>
+              <a:defRPr sz="1800" b="0">
+                <a:solidFill>
+                  <a:srgbClr val="586C68"/>
+                </a:solidFill>
+                <a:latin typeface="Segoe UI"/>
+                <a:ea typeface="Segoe UI"/>
+                <a:cs typeface="Segoe UI"/>
+              </a:defRPr>
+            </a:pPr>
+            <a:r>
+              <a:rPr sz="1800" b="0">
+                <a:solidFill>
+                  <a:srgbClr val="586C68"/>
+                </a:solidFill>
+                <a:latin typeface="Segoe UI"/>
+                <a:ea typeface="Segoe UI"/>
+                <a:cs typeface="Segoe UI"/>
+              </a:rPr>
+              <a:t>Acceptable F1 loss and latency budget.</a:t>
+            </a:r>
+          </a:p>
+        </p:txBody>
+      </p:sp>
+      <p:sp>
+        <p:nvSpPr>
+          <p:cNvPr id="6" name="S05-rule-1">
+            <a:extLst xmlns:a="http://schemas.openxmlformats.org/drawingml/2006/main">
+              <a:ext uri="{FF2B5EF4-FFF2-40B4-BE49-F238E27FC236}">
+                <a16:creationId xmlns:a16="http://schemas.microsoft.com/office/drawing/2014/main" id="{EA0B1105-FDCE-4D6A-B8AB-F85035FC39FE}"/>
+              </a:ext>
+            </a:extLst>
+          </p:cNvPr>
+          <p:cNvSpPr>
+            <a:spLocks xmlns:a="http://schemas.openxmlformats.org/drawingml/2006/main" noGrp="1"/>
+          </p:cNvSpPr>
+          <p:nvPr/>
+        </p:nvSpPr>
+        <p:spPr>
+          <a:xfrm xmlns:a="http://schemas.openxmlformats.org/drawingml/2006/main">
+            <a:off x="6515100" y="2276475"/>
+            <a:ext cx="4991100" cy="0"/>
           </a:xfrm>
           <a:prstGeom xmlns:a="http://schemas.openxmlformats.org/drawingml/2006/main" prst="line">
             <a:avLst/>
@@ -5694,22 +6164,22 @@
       </p:sp>
       <p:sp>
         <p:nvSpPr>
-          <p:cNvPr id="6" name="S05-label1">
-            <a:extLst xmlns:a="http://schemas.openxmlformats.org/drawingml/2006/main">
-              <a:ext uri="{FF2B5EF4-FFF2-40B4-BE49-F238E27FC236}">
-                <a16:creationId xmlns:a16="http://schemas.microsoft.com/office/drawing/2014/main" id="{BD92DF92-0C21-42CF-B3D6-616F43AFD118}"/>
-              </a:ext>
-            </a:extLst>
-          </p:cNvPr>
-          <p:cNvSpPr>
-            <a:spLocks xmlns:a="http://schemas.openxmlformats.org/drawingml/2006/main" noGrp="1"/>
-          </p:cNvSpPr>
-          <p:nvPr/>
-        </p:nvSpPr>
-        <p:spPr>
-          <a:xfrm xmlns:a="http://schemas.openxmlformats.org/drawingml/2006/main">
-            <a:off x="685800" y="3257550"/>
-            <a:ext cx="2914650" cy="495300"/>
+          <p:cNvPr id="7" name="S05-label2">
+            <a:extLst xmlns:a="http://schemas.openxmlformats.org/drawingml/2006/main">
+              <a:ext uri="{FF2B5EF4-FFF2-40B4-BE49-F238E27FC236}">
+                <a16:creationId xmlns:a16="http://schemas.microsoft.com/office/drawing/2014/main" id="{8BA8756E-4A99-41B8-A962-B5B85C9AF37E}"/>
+              </a:ext>
+            </a:extLst>
+          </p:cNvPr>
+          <p:cNvSpPr>
+            <a:spLocks xmlns:a="http://schemas.openxmlformats.org/drawingml/2006/main" noGrp="1"/>
+          </p:cNvSpPr>
+          <p:nvPr/>
+        </p:nvSpPr>
+        <p:spPr>
+          <a:xfrm xmlns:a="http://schemas.openxmlformats.org/drawingml/2006/main">
+            <a:off x="6515100" y="2438400"/>
+            <a:ext cx="4991100" cy="466725"/>
           </a:xfrm>
           <a:prstGeom xmlns:a="http://schemas.openxmlformats.org/drawingml/2006/main" prst="rect">
             <a:avLst/>
@@ -5726,7 +6196,7 @@
           <a:lstStyle xmlns:a="http://schemas.openxmlformats.org/drawingml/2006/main"/>
           <a:p xmlns:a="http://schemas.openxmlformats.org/drawingml/2006/main">
             <a:pPr>
-              <a:defRPr sz="1875" b="0">
+              <a:defRPr sz="2400" b="0">
                 <a:solidFill>
                   <a:srgbClr val="1E302F"/>
                 </a:solidFill>
@@ -5736,7 +6206,7 @@
               </a:defRPr>
             </a:pPr>
             <a:r>
-              <a:rPr sz="1875" b="0">
+              <a:rPr sz="2400" b="0">
                 <a:solidFill>
                   <a:srgbClr val="1E302F"/>
                 </a:solidFill>
@@ -5744,29 +6214,29 @@
                 <a:ea typeface="Segoe UI"/>
                 <a:cs typeface="Segoe UI"/>
               </a:rPr>
-              <a:t>Set the threshold</a:t>
-            </a:r>
-          </a:p>
-        </p:txBody>
-      </p:sp>
-      <p:sp>
-        <p:nvSpPr>
-          <p:cNvPr id="7" name="S05-body1">
-            <a:extLst xmlns:a="http://schemas.openxmlformats.org/drawingml/2006/main">
-              <a:ext uri="{FF2B5EF4-FFF2-40B4-BE49-F238E27FC236}">
-                <a16:creationId xmlns:a16="http://schemas.microsoft.com/office/drawing/2014/main" id="{47516BCC-3FD6-4DBC-BE59-3A8CAA7C06B5}"/>
-              </a:ext>
-            </a:extLst>
-          </p:cNvPr>
-          <p:cNvSpPr>
-            <a:spLocks xmlns:a="http://schemas.openxmlformats.org/drawingml/2006/main" noGrp="1"/>
-          </p:cNvSpPr>
-          <p:nvPr/>
-        </p:nvSpPr>
-        <p:spPr>
-          <a:xfrm xmlns:a="http://schemas.openxmlformats.org/drawingml/2006/main">
-            <a:off x="3829050" y="3257550"/>
-            <a:ext cx="7677150" cy="495300"/>
+              <a:t>Repeatability</a:t>
+            </a:r>
+          </a:p>
+        </p:txBody>
+      </p:sp>
+      <p:sp>
+        <p:nvSpPr>
+          <p:cNvPr id="8" name="S05-body2">
+            <a:extLst xmlns:a="http://schemas.openxmlformats.org/drawingml/2006/main">
+              <a:ext uri="{FF2B5EF4-FFF2-40B4-BE49-F238E27FC236}">
+                <a16:creationId xmlns:a16="http://schemas.microsoft.com/office/drawing/2014/main" id="{2CB7C1D0-AFF6-44EA-AFCA-2B443E82C335}"/>
+              </a:ext>
+            </a:extLst>
+          </p:cNvPr>
+          <p:cNvSpPr>
+            <a:spLocks xmlns:a="http://schemas.openxmlformats.org/drawingml/2006/main" noGrp="1"/>
+          </p:cNvSpPr>
+          <p:nvPr/>
+        </p:nvSpPr>
+        <p:spPr>
+          <a:xfrm xmlns:a="http://schemas.openxmlformats.org/drawingml/2006/main">
+            <a:off x="6515100" y="2990850"/>
+            <a:ext cx="4991100" cy="457200"/>
           </a:xfrm>
           <a:prstGeom xmlns:a="http://schemas.openxmlformats.org/drawingml/2006/main" prst="rect">
             <a:avLst/>
@@ -5801,29 +6271,29 @@
                 <a:ea typeface="Segoe UI"/>
                 <a:cs typeface="Segoe UI"/>
               </a:rPr>
-              <a:t>Acceptable F1 loss and latency budget.</a:t>
-            </a:r>
-          </a:p>
-        </p:txBody>
-      </p:sp>
-      <p:sp>
-        <p:nvSpPr>
-          <p:cNvPr id="8" name="S05-rule-2">
-            <a:extLst xmlns:a="http://schemas.openxmlformats.org/drawingml/2006/main">
-              <a:ext uri="{FF2B5EF4-FFF2-40B4-BE49-F238E27FC236}">
-                <a16:creationId xmlns:a16="http://schemas.microsoft.com/office/drawing/2014/main" id="{B0CFAE70-80A6-4E01-B636-6E245BCBC22C}"/>
-              </a:ext>
-            </a:extLst>
-          </p:cNvPr>
-          <p:cNvSpPr>
-            <a:spLocks xmlns:a="http://schemas.openxmlformats.org/drawingml/2006/main" noGrp="1"/>
-          </p:cNvSpPr>
-          <p:nvPr/>
-        </p:nvSpPr>
-        <p:spPr>
-          <a:xfrm xmlns:a="http://schemas.openxmlformats.org/drawingml/2006/main">
-            <a:off x="685800" y="3962400"/>
-            <a:ext cx="10820400" cy="0"/>
+              <a:t>Repeat measurements on real data.</a:t>
+            </a:r>
+          </a:p>
+        </p:txBody>
+      </p:sp>
+      <p:sp>
+        <p:nvSpPr>
+          <p:cNvPr id="9" name="S05-rule-2">
+            <a:extLst xmlns:a="http://schemas.openxmlformats.org/drawingml/2006/main">
+              <a:ext uri="{FF2B5EF4-FFF2-40B4-BE49-F238E27FC236}">
+                <a16:creationId xmlns:a16="http://schemas.microsoft.com/office/drawing/2014/main" id="{44D90FDB-CA1A-48AD-8D73-903F33B8067D}"/>
+              </a:ext>
+            </a:extLst>
+          </p:cNvPr>
+          <p:cNvSpPr>
+            <a:spLocks xmlns:a="http://schemas.openxmlformats.org/drawingml/2006/main" noGrp="1"/>
+          </p:cNvSpPr>
+          <p:nvPr/>
+        </p:nvSpPr>
+        <p:spPr>
+          <a:xfrm xmlns:a="http://schemas.openxmlformats.org/drawingml/2006/main">
+            <a:off x="6515100" y="3562350"/>
+            <a:ext cx="4991100" cy="0"/>
           </a:xfrm>
           <a:prstGeom xmlns:a="http://schemas.openxmlformats.org/drawingml/2006/main" prst="line">
             <a:avLst/>
@@ -5837,22 +6307,22 @@
       </p:sp>
       <p:sp>
         <p:nvSpPr>
-          <p:cNvPr id="9" name="S05-label2">
-            <a:extLst xmlns:a="http://schemas.openxmlformats.org/drawingml/2006/main">
-              <a:ext uri="{FF2B5EF4-FFF2-40B4-BE49-F238E27FC236}">
-                <a16:creationId xmlns:a16="http://schemas.microsoft.com/office/drawing/2014/main" id="{89801CBE-3DCE-4518-A0E3-9DECD1C8AB7C}"/>
-              </a:ext>
-            </a:extLst>
-          </p:cNvPr>
-          <p:cNvSpPr>
-            <a:spLocks xmlns:a="http://schemas.openxmlformats.org/drawingml/2006/main" noGrp="1"/>
-          </p:cNvSpPr>
-          <p:nvPr/>
-        </p:nvSpPr>
-        <p:spPr>
-          <a:xfrm xmlns:a="http://schemas.openxmlformats.org/drawingml/2006/main">
-            <a:off x="685800" y="4095750"/>
-            <a:ext cx="2914650" cy="495300"/>
+          <p:cNvPr id="10" name="S05-label3">
+            <a:extLst xmlns:a="http://schemas.openxmlformats.org/drawingml/2006/main">
+              <a:ext uri="{FF2B5EF4-FFF2-40B4-BE49-F238E27FC236}">
+                <a16:creationId xmlns:a16="http://schemas.microsoft.com/office/drawing/2014/main" id="{FE8F58FE-FD2C-4DBD-9621-370F07EF827E}"/>
+              </a:ext>
+            </a:extLst>
+          </p:cNvPr>
+          <p:cNvSpPr>
+            <a:spLocks xmlns:a="http://schemas.openxmlformats.org/drawingml/2006/main" noGrp="1"/>
+          </p:cNvSpPr>
+          <p:nvPr/>
+        </p:nvSpPr>
+        <p:spPr>
+          <a:xfrm xmlns:a="http://schemas.openxmlformats.org/drawingml/2006/main">
+            <a:off x="6515100" y="3724275"/>
+            <a:ext cx="4991100" cy="466725"/>
           </a:xfrm>
           <a:prstGeom xmlns:a="http://schemas.openxmlformats.org/drawingml/2006/main" prst="rect">
             <a:avLst/>
@@ -5869,7 +6339,7 @@
           <a:lstStyle xmlns:a="http://schemas.openxmlformats.org/drawingml/2006/main"/>
           <a:p xmlns:a="http://schemas.openxmlformats.org/drawingml/2006/main">
             <a:pPr>
-              <a:defRPr sz="1875" b="0">
+              <a:defRPr sz="2400" b="0">
                 <a:solidFill>
                   <a:srgbClr val="1E302F"/>
                 </a:solidFill>
@@ -5879,7 +6349,7 @@
               </a:defRPr>
             </a:pPr>
             <a:r>
-              <a:rPr sz="1875" b="0">
+              <a:rPr sz="2400" b="0">
                 <a:solidFill>
                   <a:srgbClr val="1E302F"/>
                 </a:solidFill>
@@ -5887,29 +6357,29 @@
                 <a:ea typeface="Segoe UI"/>
                 <a:cs typeface="Segoe UI"/>
               </a:rPr>
-              <a:t>Test the behavior</a:t>
-            </a:r>
-          </a:p>
-        </p:txBody>
-      </p:sp>
-      <p:sp>
-        <p:nvSpPr>
-          <p:cNvPr id="10" name="S05-body2">
-            <a:extLst xmlns:a="http://schemas.openxmlformats.org/drawingml/2006/main">
-              <a:ext uri="{FF2B5EF4-FFF2-40B4-BE49-F238E27FC236}">
-                <a16:creationId xmlns:a16="http://schemas.microsoft.com/office/drawing/2014/main" id="{B0E9ABF8-C5E1-4EEC-B9D8-E5B8825C501B}"/>
-              </a:ext>
-            </a:extLst>
-          </p:cNvPr>
-          <p:cNvSpPr>
-            <a:spLocks xmlns:a="http://schemas.openxmlformats.org/drawingml/2006/main" noGrp="1"/>
-          </p:cNvSpPr>
-          <p:nvPr/>
-        </p:nvSpPr>
-        <p:spPr>
-          <a:xfrm xmlns:a="http://schemas.openxmlformats.org/drawingml/2006/main">
-            <a:off x="3829050" y="4095750"/>
-            <a:ext cx="7677150" cy="495300"/>
+              <a:t>Failure modes</a:t>
+            </a:r>
+          </a:p>
+        </p:txBody>
+      </p:sp>
+      <p:sp>
+        <p:nvSpPr>
+          <p:cNvPr id="11" name="S05-body3">
+            <a:extLst xmlns:a="http://schemas.openxmlformats.org/drawingml/2006/main">
+              <a:ext uri="{FF2B5EF4-FFF2-40B4-BE49-F238E27FC236}">
+                <a16:creationId xmlns:a16="http://schemas.microsoft.com/office/drawing/2014/main" id="{04278B5F-85DF-49D9-80ED-33355A580F46}"/>
+              </a:ext>
+            </a:extLst>
+          </p:cNvPr>
+          <p:cNvSpPr>
+            <a:spLocks xmlns:a="http://schemas.openxmlformats.org/drawingml/2006/main" noGrp="1"/>
+          </p:cNvSpPr>
+          <p:nvPr/>
+        </p:nvSpPr>
+        <p:spPr>
+          <a:xfrm xmlns:a="http://schemas.openxmlformats.org/drawingml/2006/main">
+            <a:off x="6515100" y="4276725"/>
+            <a:ext cx="4991100" cy="457200"/>
           </a:xfrm>
           <a:prstGeom xmlns:a="http://schemas.openxmlformats.org/drawingml/2006/main" prst="rect">
             <a:avLst/>
@@ -5944,58 +6414,29 @@
                 <a:ea typeface="Segoe UI"/>
                 <a:cs typeface="Segoe UI"/>
               </a:rPr>
-              <a:t>Repeat measurements; inspect failures by anomaly type.</a:t>
-            </a:r>
-          </a:p>
-        </p:txBody>
-      </p:sp>
-      <p:sp>
-        <p:nvSpPr>
-          <p:cNvPr id="11" name="S05-rule-3">
-            <a:extLst xmlns:a="http://schemas.openxmlformats.org/drawingml/2006/main">
-              <a:ext uri="{FF2B5EF4-FFF2-40B4-BE49-F238E27FC236}">
-                <a16:creationId xmlns:a16="http://schemas.microsoft.com/office/drawing/2014/main" id="{EDAA87F0-4471-407F-A632-D41D6CF07E39}"/>
-              </a:ext>
-            </a:extLst>
-          </p:cNvPr>
-          <p:cNvSpPr>
-            <a:spLocks xmlns:a="http://schemas.openxmlformats.org/drawingml/2006/main" noGrp="1"/>
-          </p:cNvSpPr>
-          <p:nvPr/>
-        </p:nvSpPr>
-        <p:spPr>
-          <a:xfrm xmlns:a="http://schemas.openxmlformats.org/drawingml/2006/main">
-            <a:off x="685800" y="4800600"/>
-            <a:ext cx="10820400" cy="0"/>
-          </a:xfrm>
-          <a:prstGeom xmlns:a="http://schemas.openxmlformats.org/drawingml/2006/main" prst="line">
-            <a:avLst/>
-          </a:prstGeom>
-          <a:ln xmlns:a="http://schemas.openxmlformats.org/drawingml/2006/main" w="9525">
-            <a:solidFill>
-              <a:srgbClr val="CFD8D1"/>
-            </a:solidFill>
-          </a:ln>
-        </p:spPr>
-      </p:sp>
-      <p:sp>
-        <p:nvSpPr>
-          <p:cNvPr id="12" name="S05-label3">
-            <a:extLst xmlns:a="http://schemas.openxmlformats.org/drawingml/2006/main">
-              <a:ext uri="{FF2B5EF4-FFF2-40B4-BE49-F238E27FC236}">
-                <a16:creationId xmlns:a16="http://schemas.microsoft.com/office/drawing/2014/main" id="{6F62400D-1B37-4AFF-AB13-938352504CBE}"/>
-              </a:ext>
-            </a:extLst>
-          </p:cNvPr>
-          <p:cNvSpPr>
-            <a:spLocks xmlns:a="http://schemas.openxmlformats.org/drawingml/2006/main" noGrp="1"/>
-          </p:cNvSpPr>
-          <p:nvPr/>
-        </p:nvSpPr>
-        <p:spPr>
-          <a:xfrm xmlns:a="http://schemas.openxmlformats.org/drawingml/2006/main">
-            <a:off x="685800" y="4933950"/>
-            <a:ext cx="2914650" cy="495300"/>
+              <a:t>Inspect errors by anomaly type.</a:t>
+            </a:r>
+          </a:p>
+        </p:txBody>
+      </p:sp>
+      <p:sp>
+        <p:nvSpPr>
+          <p:cNvPr id="12" name="S05-limit">
+            <a:extLst xmlns:a="http://schemas.openxmlformats.org/drawingml/2006/main">
+              <a:ext uri="{FF2B5EF4-FFF2-40B4-BE49-F238E27FC236}">
+                <a16:creationId xmlns:a16="http://schemas.microsoft.com/office/drawing/2014/main" id="{D08E42EB-BDCD-4D44-BD92-85BB19C11265}"/>
+              </a:ext>
+            </a:extLst>
+          </p:cNvPr>
+          <p:cNvSpPr>
+            <a:spLocks xmlns:a="http://schemas.openxmlformats.org/drawingml/2006/main" noGrp="1"/>
+          </p:cNvSpPr>
+          <p:nvPr/>
+        </p:nvSpPr>
+        <p:spPr>
+          <a:xfrm xmlns:a="http://schemas.openxmlformats.org/drawingml/2006/main">
+            <a:off x="6515100" y="5448300"/>
+            <a:ext cx="4991100" cy="723900"/>
           </a:xfrm>
           <a:prstGeom xmlns:a="http://schemas.openxmlformats.org/drawingml/2006/main" prst="rect">
             <a:avLst/>
@@ -6012,47 +6453,70 @@
           <a:lstStyle xmlns:a="http://schemas.openxmlformats.org/drawingml/2006/main"/>
           <a:p xmlns:a="http://schemas.openxmlformats.org/drawingml/2006/main">
             <a:pPr>
-              <a:defRPr sz="1875" b="0">
-                <a:solidFill>
-                  <a:srgbClr val="1E302F"/>
-                </a:solidFill>
-                <a:latin typeface="Segoe UI"/>
-                <a:ea typeface="Segoe UI"/>
-                <a:cs typeface="Segoe UI"/>
-              </a:defRPr>
-            </a:pPr>
-            <a:r>
-              <a:rPr sz="1875" b="0">
-                <a:solidFill>
-                  <a:srgbClr val="1E302F"/>
-                </a:solidFill>
-                <a:latin typeface="Segoe UI"/>
-                <a:ea typeface="Segoe UI"/>
-                <a:cs typeface="Segoe UI"/>
-              </a:rPr>
-              <a:t>Keep the limit visible</a:t>
-            </a:r>
-          </a:p>
-        </p:txBody>
-      </p:sp>
-      <p:sp>
-        <p:nvSpPr>
-          <p:cNvPr id="13" name="S05-body3">
-            <a:extLst xmlns:a="http://schemas.openxmlformats.org/drawingml/2006/main">
-              <a:ext uri="{FF2B5EF4-FFF2-40B4-BE49-F238E27FC236}">
-                <a16:creationId xmlns:a16="http://schemas.microsoft.com/office/drawing/2014/main" id="{2853FCD3-4227-4C19-9D60-26170121401D}"/>
-              </a:ext>
-            </a:extLst>
-          </p:cNvPr>
-          <p:cNvSpPr>
-            <a:spLocks xmlns:a="http://schemas.openxmlformats.org/drawingml/2006/main" noGrp="1"/>
-          </p:cNvSpPr>
-          <p:nvPr/>
-        </p:nvSpPr>
-        <p:spPr>
-          <a:xfrm xmlns:a="http://schemas.openxmlformats.org/drawingml/2006/main">
-            <a:off x="3829050" y="4933950"/>
-            <a:ext cx="7677150" cy="495300"/>
+              <a:defRPr sz="1650" b="0">
+                <a:solidFill>
+                  <a:srgbClr val="586C68"/>
+                </a:solidFill>
+                <a:latin typeface="Segoe UI"/>
+                <a:ea typeface="Segoe UI"/>
+                <a:cs typeface="Segoe UI"/>
+              </a:defRPr>
+            </a:pPr>
+            <a:r>
+              <a:rPr sz="1650" b="0">
+                <a:solidFill>
+                  <a:srgbClr val="586C68"/>
+                </a:solidFill>
+                <a:latin typeface="Segoe UI"/>
+                <a:ea typeface="Segoe UI"/>
+                <a:cs typeface="Segoe UI"/>
+              </a:rPr>
+              <a:t>No real dataset or sample count;</a:t>
+            </a:r>
+          </a:p>
+          <a:p xmlns:a="http://schemas.openxmlformats.org/drawingml/2006/main">
+            <a:pPr>
+              <a:defRPr sz="1650" b="0">
+                <a:solidFill>
+                  <a:srgbClr val="586C68"/>
+                </a:solidFill>
+                <a:latin typeface="Segoe UI"/>
+                <a:ea typeface="Segoe UI"/>
+                <a:cs typeface="Segoe UI"/>
+              </a:defRPr>
+            </a:pPr>
+            <a:r>
+              <a:rPr sz="1650" b="0">
+                <a:solidFill>
+                  <a:srgbClr val="586C68"/>
+                </a:solidFill>
+                <a:latin typeface="Segoe UI"/>
+                <a:ea typeface="Segoe UI"/>
+                <a:cs typeface="Segoe UI"/>
+              </a:rPr>
+              <a:t>generalization remains untested.</a:t>
+            </a:r>
+          </a:p>
+        </p:txBody>
+      </p:sp>
+      <p:sp>
+        <p:nvSpPr>
+          <p:cNvPr id="13" name="S05-disclosure">
+            <a:extLst xmlns:a="http://schemas.openxmlformats.org/drawingml/2006/main">
+              <a:ext uri="{FF2B5EF4-FFF2-40B4-BE49-F238E27FC236}">
+                <a16:creationId xmlns:a16="http://schemas.microsoft.com/office/drawing/2014/main" id="{7F6F8F34-20B1-4AFA-8F10-48FEF49A87FD}"/>
+              </a:ext>
+            </a:extLst>
+          </p:cNvPr>
+          <p:cNvSpPr>
+            <a:spLocks xmlns:a="http://schemas.openxmlformats.org/drawingml/2006/main" noGrp="1"/>
+          </p:cNvSpPr>
+          <p:nvPr/>
+        </p:nvSpPr>
+        <p:spPr>
+          <a:xfrm xmlns:a="http://schemas.openxmlformats.org/drawingml/2006/main">
+            <a:off x="609600" y="6372225"/>
+            <a:ext cx="4572000" cy="219075"/>
           </a:xfrm>
           <a:prstGeom xmlns:a="http://schemas.openxmlformats.org/drawingml/2006/main" prst="rect">
             <a:avLst/>
@@ -6069,25 +6533,25 @@
           <a:lstStyle xmlns:a="http://schemas.openxmlformats.org/drawingml/2006/main"/>
           <a:p xmlns:a="http://schemas.openxmlformats.org/drawingml/2006/main">
             <a:pPr>
-              <a:defRPr sz="1800" b="0">
-                <a:solidFill>
-                  <a:srgbClr val="586C68"/>
-                </a:solidFill>
-                <a:latin typeface="Segoe UI"/>
-                <a:ea typeface="Segoe UI"/>
-                <a:cs typeface="Segoe UI"/>
-              </a:defRPr>
-            </a:pPr>
-            <a:r>
-              <a:rPr sz="1800" b="0">
-                <a:solidFill>
-                  <a:srgbClr val="586C68"/>
-                </a:solidFill>
-                <a:latin typeface="Segoe UI"/>
-                <a:ea typeface="Segoe UI"/>
-                <a:cs typeface="Segoe UI"/>
-              </a:rPr>
-              <a:t>No real dataset or sample count: no generalization claim.</a:t>
+              <a:defRPr sz="1275" b="0">
+                <a:solidFill>
+                  <a:srgbClr val="B9DDD0"/>
+                </a:solidFill>
+                <a:latin typeface="Segoe UI"/>
+                <a:ea typeface="Segoe UI"/>
+                <a:cs typeface="Segoe UI"/>
+              </a:defRPr>
+            </a:pPr>
+            <a:r>
+              <a:rPr sz="1275" b="0">
+                <a:solidFill>
+                  <a:srgbClr val="B9DDD0"/>
+                </a:solidFill>
+                <a:latin typeface="Segoe UI"/>
+                <a:ea typeface="Segoe UI"/>
+                <a:cs typeface="Segoe UI"/>
+              </a:rPr>
+              <a:t>Illustrative data</a:t>
             </a:r>
           </a:p>
         </p:txBody>
@@ -6095,7 +6559,7 @@
     </p:spTree>
     <p:extLst>
       <p:ext uri="{BB962C8B-B14F-4D97-AF65-F5344CB8AC3E}">
-        <p14:creationId xmlns:p14="http://schemas.microsoft.com/office/powerpoint/2010/main" val="156585181"/>
+        <p14:creationId xmlns:p14="http://schemas.microsoft.com/office/powerpoint/2010/main" val="504595862"/>
       </p:ext>
     </p:extLst>
   </p:cSld>
